--- a/lectures/10/Введение в компьютерные сети.pptx
+++ b/lectures/10/Введение в компьютерные сети.pptx
@@ -5,7 +5,7 @@
     <p:sldMasterId id="2147483648" r:id="rId1"/>
   </p:sldMasterIdLst>
   <p:notesMasterIdLst>
-    <p:notesMasterId r:id="rId85"/>
+    <p:notesMasterId r:id="rId84"/>
   </p:notesMasterIdLst>
   <p:sldIdLst>
     <p:sldId id="256" r:id="rId2"/>
@@ -90,7 +90,6 @@
     <p:sldId id="376" r:id="rId81"/>
     <p:sldId id="377" r:id="rId82"/>
     <p:sldId id="378" r:id="rId83"/>
-    <p:sldId id="379" r:id="rId84"/>
   </p:sldIdLst>
   <p:sldSz cx="12192000" cy="6858000"/>
   <p:notesSz cx="6858000" cy="9144000"/>
@@ -290,7 +289,7 @@
           <a:p>
             <a:fld id="{577F4A14-A4C2-43BA-9114-30D1AD3B407E}" type="datetimeFigureOut">
               <a:rPr lang="en-US" smtClean="0"/>
-              <a:t>12/7/2025</a:t>
+              <a:t>1/31/2026</a:t>
             </a:fld>
             <a:endParaRPr lang="en-US"/>
           </a:p>
@@ -601,7 +600,7 @@
           <a:bodyPr/>
           <a:lstStyle/>
           <a:p>
-            <a:endParaRPr lang="en-US" dirty="0"/>
+            <a:endParaRPr lang="en-US"/>
           </a:p>
         </p:txBody>
       </p:sp>
@@ -622,7 +621,7 @@
           <a:p>
             <a:fld id="{CF3F5FF5-003D-49C7-8AA8-32F0386C2E23}" type="slidenum">
               <a:rPr lang="en-US" smtClean="0"/>
-              <a:t>2</a:t>
+              <a:t>1</a:t>
             </a:fld>
             <a:endParaRPr lang="en-US"/>
           </a:p>
@@ -631,7 +630,7 @@
     </p:spTree>
     <p:extLst>
       <p:ext uri="{BB962C8B-B14F-4D97-AF65-F5344CB8AC3E}">
-        <p14:creationId xmlns:p14="http://schemas.microsoft.com/office/powerpoint/2010/main" val="1542040180"/>
+        <p14:creationId xmlns:p14="http://schemas.microsoft.com/office/powerpoint/2010/main" val="4211961420"/>
       </p:ext>
     </p:extLst>
   </p:cSld>
@@ -687,7 +686,7 @@
           <a:p>
             <a:r>
               <a:rPr lang="ru-RU" dirty="0"/>
-              <a:t>Интернет вещей — это идея подключения к сети самых различных физических объектов. В основе лежит концепция повсеместных вычислений, когда вычислительная функция встроена практически в любой предмет окружающего мира.</a:t>
+              <a:t>Интернет стал основным каналом доставки развлечений. Пользователи могут мгновенно находить и воспроизводить музыку, фильмы и сериалы, не покупая физические носители. IPTV и стриминговые сервисы вытесняют традиционное телевидение.</a:t>
             </a:r>
           </a:p>
           <a:p>
@@ -696,7 +695,7 @@
             </a:br>
             <a:r>
               <a:rPr lang="ru-RU" dirty="0"/>
-              <a:t>Умные дома включают системы безопасности, датчики температуры, влажности, дыма. Интеллектуальные счётчики автоматически отправляют данные поставщикам услуг.</a:t>
+              <a:t>Технологии позволяют синхронизировать контент между разными устройствами дома — телевизорами, смартфонами, игровыми приставками.</a:t>
             </a:r>
           </a:p>
           <a:p>
@@ -705,7 +704,7 @@
             </a:br>
             <a:r>
               <a:rPr lang="ru-RU" dirty="0"/>
-              <a:t>Бытовая техника — холодильники, камеры, телевизоры — становится сетевой. Такие устройства могут обмениваться информацией между собой и с мобильными приложениями.</a:t>
+              <a:t>Интерактивные форматы становятся все популярнее: зрители могут выбирать развитие сюжета или участвовать в трансляции в реальном времени.</a:t>
             </a:r>
           </a:p>
           <a:p>
@@ -713,20 +712,8 @@
               <a:rPr lang="ru-RU" dirty="0"/>
             </a:br>
             <a:r>
-              <a:rPr lang="ru-RU" dirty="0" err="1"/>
-              <a:t>IoT</a:t>
-            </a:r>
-            <a:r>
-              <a:rPr lang="ru-RU" dirty="0"/>
-              <a:t> позволяет автоматизировать рутинные процессы, оптимизировать расход ресурсов, обеспечивать мониторинг здоровья, жилья и инфраструктуры. По мере удешевления датчиков и связи </a:t>
-            </a:r>
-            <a:r>
-              <a:rPr lang="ru-RU" dirty="0" err="1"/>
-              <a:t>IoT</a:t>
-            </a:r>
-            <a:r>
-              <a:rPr lang="ru-RU" dirty="0"/>
-              <a:t> становится всё более распространённой технологией, формирующей основу будущей цифровой среды.</a:t>
+              <a:rPr lang="ru-RU" dirty="0"/>
+              <a:t>Отдельное направление — онлайн-игры. Современные виртуальные миры объединяют тысячи игроков в едином пространстве с общей логикой, экономикой и взаимодействиями, что делает игры полноценной социальной и экономической средой.</a:t>
             </a:r>
             <a:endParaRPr lang="en-US" dirty="0"/>
           </a:p>
@@ -749,7 +736,7 @@
           <a:p>
             <a:fld id="{CF3F5FF5-003D-49C7-8AA8-32F0386C2E23}" type="slidenum">
               <a:rPr lang="en-US" smtClean="0"/>
-              <a:t>11</a:t>
+              <a:t>10</a:t>
             </a:fld>
             <a:endParaRPr lang="en-US"/>
           </a:p>
@@ -758,7 +745,7 @@
     </p:spTree>
     <p:extLst>
       <p:ext uri="{BB962C8B-B14F-4D97-AF65-F5344CB8AC3E}">
-        <p14:creationId xmlns:p14="http://schemas.microsoft.com/office/powerpoint/2010/main" val="4131524833"/>
+        <p14:creationId xmlns:p14="http://schemas.microsoft.com/office/powerpoint/2010/main" val="332844403"/>
       </p:ext>
     </p:extLst>
   </p:cSld>
@@ -813,28 +800,49 @@
           <a:lstStyle/>
           <a:p>
             <a:r>
-              <a:rPr lang="ru-RU" b="0" dirty="0"/>
-              <a:t>В этом разделе мы рассмотрим не абстрактную «компьютерную сеть вообще», а несколько типичных классов сетей, которые вместе образуют современный интернет.</a:t>
+              <a:rPr lang="ru-RU" dirty="0"/>
+              <a:t>Интернет вещей — это идея подключения к сети самых различных физических объектов. В основе лежит концепция повсеместных вычислений, когда вычислительная функция встроена практически в любой предмет окружающего мира.</a:t>
             </a:r>
           </a:p>
           <a:p>
             <a:br>
-              <a:rPr lang="ru-RU" b="0" dirty="0"/>
+              <a:rPr lang="ru-RU" dirty="0"/>
             </a:br>
             <a:r>
-              <a:rPr lang="ru-RU" b="0" dirty="0"/>
-              <a:t>Можно мысленно представить цепочку: пользователь подключается к сети через широкополосный доступ или мобильную сеть; трафик может проходить через транзитные магистральные сети; данные обрабатываются и хранятся в сетях дата-центров и доставляются с помощью сетей доставки контента.</a:t>
+              <a:rPr lang="ru-RU" dirty="0"/>
+              <a:t>Умные дома включают системы безопасности, датчики температуры, влажности, дыма. Интеллектуальные счётчики автоматически отправляют данные поставщикам услуг.</a:t>
             </a:r>
           </a:p>
           <a:p>
             <a:br>
-              <a:rPr lang="ru-RU" b="0" dirty="0"/>
+              <a:rPr lang="ru-RU" dirty="0"/>
             </a:br>
             <a:r>
-              <a:rPr lang="ru-RU" b="0" dirty="0"/>
-              <a:t>Параллельно с этим существуют корпоративные сети компаний и университетов, которые соединяют сотрудников и их ресурсы по всему миру. Дальше мы посмотрим, как каждая из этих частей устроена и какую задачу решает.</a:t>
-            </a:r>
-            <a:endParaRPr lang="en-US" b="0" dirty="0"/>
+              <a:rPr lang="ru-RU" dirty="0"/>
+              <a:t>Бытовая техника — холодильники, камеры, телевизоры — становится сетевой. Такие устройства могут обмениваться информацией между собой и с мобильными приложениями.</a:t>
+            </a:r>
+          </a:p>
+          <a:p>
+            <a:br>
+              <a:rPr lang="ru-RU" dirty="0"/>
+            </a:br>
+            <a:r>
+              <a:rPr lang="ru-RU" dirty="0" err="1"/>
+              <a:t>IoT</a:t>
+            </a:r>
+            <a:r>
+              <a:rPr lang="ru-RU" dirty="0"/>
+              <a:t> позволяет автоматизировать рутинные процессы, оптимизировать расход ресурсов, обеспечивать мониторинг здоровья, жилья и инфраструктуры. По мере удешевления датчиков и связи </a:t>
+            </a:r>
+            <a:r>
+              <a:rPr lang="ru-RU" dirty="0" err="1"/>
+              <a:t>IoT</a:t>
+            </a:r>
+            <a:r>
+              <a:rPr lang="ru-RU" dirty="0"/>
+              <a:t> становится всё более распространённой технологией, формирующей основу будущей цифровой среды.</a:t>
+            </a:r>
+            <a:endParaRPr lang="en-US" dirty="0"/>
           </a:p>
         </p:txBody>
       </p:sp>
@@ -855,7 +863,7 @@
           <a:p>
             <a:fld id="{CF3F5FF5-003D-49C7-8AA8-32F0386C2E23}" type="slidenum">
               <a:rPr lang="en-US" smtClean="0"/>
-              <a:t>13</a:t>
+              <a:t>11</a:t>
             </a:fld>
             <a:endParaRPr lang="en-US"/>
           </a:p>
@@ -864,7 +872,7 @@
     </p:spTree>
     <p:extLst>
       <p:ext uri="{BB962C8B-B14F-4D97-AF65-F5344CB8AC3E}">
-        <p14:creationId xmlns:p14="http://schemas.microsoft.com/office/powerpoint/2010/main" val="3771528708"/>
+        <p14:creationId xmlns:p14="http://schemas.microsoft.com/office/powerpoint/2010/main" val="4131524833"/>
       </p:ext>
     </p:extLst>
   </p:cSld>
@@ -918,37 +926,7 @@
           <a:bodyPr/>
           <a:lstStyle/>
           <a:p>
-            <a:r>
-              <a:rPr lang="ru-RU" dirty="0"/>
-              <a:t>Широкополосные сети доступа — это те самые «последние метры» от провайдера до дома или офиса пользователя. Изначально люди покупали компьютеры чаще ради работы с документами и игр. Сейчас основная причина — возможность постоянно быть на связи с интернетом.</a:t>
-            </a:r>
-          </a:p>
-          <a:p>
-            <a:br>
-              <a:rPr lang="ru-RU" dirty="0"/>
-            </a:br>
-            <a:r>
-              <a:rPr lang="ru-RU" dirty="0"/>
-              <a:t>К сети подключаются уже не только компьютеры: телевизоры, консоли, медиаплееры, умные замки и прочие устройства тоже хотят «в интернет». Через широкополосный доступ реализуются основные сценарии: просмотр сайтов, стриминг видео, игры, работа из дома, облачные сервисы.</a:t>
-            </a:r>
-          </a:p>
-          <a:p>
-            <a:br>
-              <a:rPr lang="ru-RU" dirty="0"/>
-            </a:br>
-            <a:r>
-              <a:rPr lang="ru-RU" dirty="0"/>
-              <a:t>Важно упомянуть </a:t>
-            </a:r>
-            <a:r>
-              <a:rPr lang="ru-RU" b="1" dirty="0"/>
-              <a:t>Закон Меткалфа</a:t>
-            </a:r>
-            <a:r>
-              <a:rPr lang="ru-RU" dirty="0"/>
-              <a:t>: полезность сети, по гипотезе, растёт примерно как квадрат числа её участников, потому что количество возможных связей между пользователями быстро увеличивается. Именно огромный масштаб интернета и количество подключённых устройств делают его настолько ценным.</a:t>
-            </a:r>
-            <a:endParaRPr lang="en-US" dirty="0"/>
+            <a:endParaRPr lang="en-US"/>
           </a:p>
         </p:txBody>
       </p:sp>
@@ -969,7 +947,7 @@
           <a:p>
             <a:fld id="{CF3F5FF5-003D-49C7-8AA8-32F0386C2E23}" type="slidenum">
               <a:rPr lang="en-US" smtClean="0"/>
-              <a:t>14</a:t>
+              <a:t>12</a:t>
             </a:fld>
             <a:endParaRPr lang="en-US"/>
           </a:p>
@@ -978,7 +956,7 @@
     </p:spTree>
     <p:extLst>
       <p:ext uri="{BB962C8B-B14F-4D97-AF65-F5344CB8AC3E}">
-        <p14:creationId xmlns:p14="http://schemas.microsoft.com/office/powerpoint/2010/main" val="1595174337"/>
+        <p14:creationId xmlns:p14="http://schemas.microsoft.com/office/powerpoint/2010/main" val="830865488"/>
       </p:ext>
     </p:extLst>
   </p:cSld>
@@ -1033,68 +1011,28 @@
           <a:lstStyle/>
           <a:p>
             <a:r>
-              <a:rPr lang="ru-RU" dirty="0"/>
-              <a:t>Широкополосный доступ не обязательно реализуется одной технологией. В разных странах и даже районах города используется разная физическая среда.</a:t>
+              <a:rPr lang="ru-RU" b="0" dirty="0"/>
+              <a:t>В этом разделе мы рассмотрим не абстрактную «компьютерную сеть вообще», а несколько типичных классов сетей, которые вместе образуют современный интернет.</a:t>
             </a:r>
           </a:p>
           <a:p>
             <a:br>
-              <a:rPr lang="ru-RU" dirty="0"/>
+              <a:rPr lang="ru-RU" b="0" dirty="0"/>
             </a:br>
             <a:r>
-              <a:rPr lang="ru-RU" b="1" dirty="0"/>
-              <a:t>Медные телефонные линии</a:t>
-            </a:r>
-            <a:r>
-              <a:rPr lang="ru-RU" dirty="0"/>
-              <a:t> долгое время были базой для xDSL-технологий, позволяющих передавать данные параллельно с телефонией.</a:t>
-            </a:r>
-          </a:p>
-          <a:p>
-            <a:endParaRPr lang="ru-RU" dirty="0"/>
-          </a:p>
-          <a:p>
-            <a:r>
-              <a:rPr lang="ru-RU" b="1" dirty="0"/>
-              <a:t>Коаксиальные кабели</a:t>
-            </a:r>
-            <a:r>
-              <a:rPr lang="ru-RU" dirty="0"/>
-              <a:t>, использовавшиеся для кабельного телевидения, стали основой кабельного интернета.</a:t>
-            </a:r>
+              <a:rPr lang="ru-RU" b="0" dirty="0"/>
+              <a:t>Можно мысленно представить цепочку: пользователь подключается к сети через широкополосный доступ или мобильную сеть; трафик может проходить через транзитные магистральные сети; данные обрабатываются и хранятся в сетях дата-центров и доставляются с помощью сетей доставки контента.</a:t>
+            </a:r>
+          </a:p>
+          <a:p>
             <a:br>
-              <a:rPr lang="ru-RU" dirty="0"/>
+              <a:rPr lang="ru-RU" b="0" dirty="0"/>
             </a:br>
             <a:r>
-              <a:rPr lang="ru-RU" dirty="0"/>
-              <a:t>Современный тренд — </a:t>
-            </a:r>
-            <a:r>
-              <a:rPr lang="ru-RU" b="1" dirty="0"/>
-              <a:t>оптоволокно</a:t>
-            </a:r>
-            <a:r>
-              <a:rPr lang="ru-RU" dirty="0"/>
-              <a:t>, которое позволяет обеспечить очень высокие скорости и хорошо масштабируется.</a:t>
-            </a:r>
-          </a:p>
-          <a:p>
-            <a:endParaRPr lang="ru-RU" dirty="0"/>
-          </a:p>
-          <a:p>
-            <a:r>
-              <a:rPr lang="ru-RU" dirty="0"/>
-              <a:t>В некоторых развивающихся регионах прокладка кабелей экономически сложна, поэтому роль фиксированного доступа частично берут на себя </a:t>
-            </a:r>
-            <a:r>
-              <a:rPr lang="ru-RU" b="1" dirty="0"/>
-              <a:t>мобильные сети</a:t>
-            </a:r>
-            <a:r>
-              <a:rPr lang="ru-RU" dirty="0"/>
-              <a:t>, когда пользователи выходят в интернет через сотовых операторов.</a:t>
-            </a:r>
-            <a:endParaRPr lang="en-US" dirty="0"/>
+              <a:rPr lang="ru-RU" b="0" dirty="0"/>
+              <a:t>Параллельно с этим существуют корпоративные сети компаний и университетов, которые соединяют сотрудников и их ресурсы по всему миру. Дальше мы посмотрим, как каждая из этих частей устроена и какую задачу решает.</a:t>
+            </a:r>
+            <a:endParaRPr lang="en-US" b="0" dirty="0"/>
           </a:p>
         </p:txBody>
       </p:sp>
@@ -1115,7 +1053,7 @@
           <a:p>
             <a:fld id="{CF3F5FF5-003D-49C7-8AA8-32F0386C2E23}" type="slidenum">
               <a:rPr lang="en-US" smtClean="0"/>
-              <a:t>15</a:t>
+              <a:t>13</a:t>
             </a:fld>
             <a:endParaRPr lang="en-US"/>
           </a:p>
@@ -1124,7 +1062,7 @@
     </p:spTree>
     <p:extLst>
       <p:ext uri="{BB962C8B-B14F-4D97-AF65-F5344CB8AC3E}">
-        <p14:creationId xmlns:p14="http://schemas.microsoft.com/office/powerpoint/2010/main" val="3088271749"/>
+        <p14:creationId xmlns:p14="http://schemas.microsoft.com/office/powerpoint/2010/main" val="3771528708"/>
       </p:ext>
     </p:extLst>
   </p:cSld>
@@ -1180,7 +1118,7 @@
           <a:p>
             <a:r>
               <a:rPr lang="ru-RU" dirty="0"/>
-              <a:t>Мобильные и беспроводные сети появились как ответ на желание пользователей быть онлайн не только дома и в офисе, но и в дороге — в машине, поезде, самолёте, кафе или аэропорту.</a:t>
+              <a:t>Широкополосные сети доступа — это те самые «последние метры» от провайдера до дома или офиса пользователя. Изначально люди покупали компьютеры чаще ради работы с документами и игр. Сейчас основная причина — возможность постоянно быть на связи с интернетом.</a:t>
             </a:r>
           </a:p>
           <a:p>
@@ -1188,33 +1126,25 @@
               <a:rPr lang="ru-RU" dirty="0"/>
             </a:br>
             <a:r>
+              <a:rPr lang="ru-RU" dirty="0"/>
+              <a:t>К сети подключаются уже не только компьютеры: телевизоры, консоли, медиаплееры, умные замки и прочие устройства тоже хотят «в интернет». Через широкополосный доступ реализуются основные сценарии: просмотр сайтов, стриминг видео, игры, работа из дома, облачные сервисы.</a:t>
+            </a:r>
+          </a:p>
+          <a:p>
+            <a:br>
+              <a:rPr lang="ru-RU" dirty="0"/>
+            </a:br>
+            <a:r>
+              <a:rPr lang="ru-RU" dirty="0"/>
+              <a:t>Важно упомянуть </a:t>
+            </a:r>
+            <a:r>
               <a:rPr lang="ru-RU" b="1" dirty="0"/>
-              <a:t>Сотовые сети</a:t>
-            </a:r>
-            <a:r>
-              <a:rPr lang="ru-RU" dirty="0"/>
-              <a:t> обеспечивают голосовую и пакетную передачу данных через операторов мобильной связи. </a:t>
-            </a:r>
-            <a:r>
-              <a:rPr lang="ru-RU" b="1" dirty="0" err="1"/>
-              <a:t>Wi</a:t>
-            </a:r>
-            <a:r>
-              <a:rPr lang="ru-RU" b="1" dirty="0"/>
-              <a:t>-Fi-сети</a:t>
-            </a:r>
-            <a:r>
-              <a:rPr lang="ru-RU" dirty="0"/>
-              <a:t>, построенные по стандарту 802.11, позволяют создать беспроводной «пузырь» покрытия в помещении, кафе, вузе, аэропорту и т. п.</a:t>
-            </a:r>
-          </a:p>
-          <a:p>
-            <a:br>
-              <a:rPr lang="ru-RU" dirty="0"/>
-            </a:br>
-            <a:r>
-              <a:rPr lang="ru-RU" dirty="0"/>
-              <a:t>Из множества таких хот-спотов получается «лоскутное одеяло» покрытия: пользователь, двигаясь по городу, может подключаться к разным точкам доступа. В результате большинство привычных действий — чтение почты, просмотр видео, общение, навигация — теперь не привязаны к конкретному месту и кабелю.</a:t>
+              <a:t>Закон Меткалфа</a:t>
+            </a:r>
+            <a:r>
+              <a:rPr lang="ru-RU" dirty="0"/>
+              <a:t>: полезность сети, по гипотезе, растёт примерно как квадрат числа её участников, потому что количество возможных связей между пользователями быстро увеличивается. Именно огромный масштаб интернета и количество подключённых устройств делают его настолько ценным.</a:t>
             </a:r>
             <a:endParaRPr lang="en-US" dirty="0"/>
           </a:p>
@@ -1237,7 +1167,7 @@
           <a:p>
             <a:fld id="{CF3F5FF5-003D-49C7-8AA8-32F0386C2E23}" type="slidenum">
               <a:rPr lang="en-US" smtClean="0"/>
-              <a:t>16</a:t>
+              <a:t>14</a:t>
             </a:fld>
             <a:endParaRPr lang="en-US"/>
           </a:p>
@@ -1246,7 +1176,7 @@
     </p:spTree>
     <p:extLst>
       <p:ext uri="{BB962C8B-B14F-4D97-AF65-F5344CB8AC3E}">
-        <p14:creationId xmlns:p14="http://schemas.microsoft.com/office/powerpoint/2010/main" val="1095473570"/>
+        <p14:creationId xmlns:p14="http://schemas.microsoft.com/office/powerpoint/2010/main" val="1595174337"/>
       </p:ext>
     </p:extLst>
   </p:cSld>
@@ -1302,49 +1232,65 @@
           <a:p>
             <a:r>
               <a:rPr lang="ru-RU" dirty="0"/>
-              <a:t>Важно различать два понятия: </a:t>
-            </a:r>
+              <a:t>Широкополосный доступ не обязательно реализуется одной технологией. В разных странах и даже районах города используется разная физическая среда.</a:t>
+            </a:r>
+          </a:p>
+          <a:p>
+            <a:br>
+              <a:rPr lang="ru-RU" dirty="0"/>
+            </a:br>
             <a:r>
               <a:rPr lang="ru-RU" b="1" dirty="0"/>
-              <a:t>мобильность</a:t>
-            </a:r>
-            <a:r>
-              <a:rPr lang="ru-RU" dirty="0"/>
-              <a:t> устройства и </a:t>
-            </a:r>
+              <a:t>Медные телефонные линии</a:t>
+            </a:r>
+            <a:r>
+              <a:rPr lang="ru-RU" dirty="0"/>
+              <a:t> долгое время были базой для xDSL-технологий, позволяющих передавать данные параллельно с телефонией.</a:t>
+            </a:r>
+          </a:p>
+          <a:p>
+            <a:endParaRPr lang="ru-RU" dirty="0"/>
+          </a:p>
+          <a:p>
             <a:r>
               <a:rPr lang="ru-RU" b="1" dirty="0"/>
-              <a:t>беспроводной</a:t>
-            </a:r>
-            <a:r>
-              <a:rPr lang="ru-RU" dirty="0"/>
-              <a:t> способ подключения. Это не всегда одно и то же.</a:t>
-            </a:r>
-          </a:p>
-          <a:p>
+              <a:t>Коаксиальные кабели</a:t>
+            </a:r>
+            <a:r>
+              <a:rPr lang="ru-RU" dirty="0"/>
+              <a:t>, использовавшиеся для кабельного телевидения, стали основой кабельного интернета.</a:t>
+            </a:r>
             <a:br>
               <a:rPr lang="ru-RU" dirty="0"/>
             </a:br>
             <a:r>
               <a:rPr lang="ru-RU" dirty="0"/>
-              <a:t>Например, стационарный компьютер в офисе — ни мобильный, ни беспроводной. Ноутбук, подключённый в отеле по кабелю, — мобильное устройство, но соединение у него проводное. Напротив, домашний стационарный ПК, подключённый через </a:t>
-            </a:r>
-            <a:r>
-              <a:rPr lang="ru-RU" dirty="0" err="1"/>
-              <a:t>Wi</a:t>
-            </a:r>
-            <a:r>
-              <a:rPr lang="ru-RU" dirty="0"/>
-              <a:t>-Fi, не является мобильным, но использует беспроводную сеть.</a:t>
-            </a:r>
-          </a:p>
-          <a:p>
-            <a:br>
-              <a:rPr lang="ru-RU" dirty="0"/>
-            </a:br>
-            <a:r>
-              <a:rPr lang="ru-RU" dirty="0"/>
-              <a:t>Полная комбинация — когда и устройство мобильное, и сеть беспроводная: например, складской терминал, с которым сотрудник ходит между стеллажами, или смартфон. Такое разделение помогает лучше понимать требования к сети: её покрытие, скорость, устойчивость к перемещениям</a:t>
+              <a:t>Современный тренд — </a:t>
+            </a:r>
+            <a:r>
+              <a:rPr lang="ru-RU" b="1" dirty="0"/>
+              <a:t>оптоволокно</a:t>
+            </a:r>
+            <a:r>
+              <a:rPr lang="ru-RU" dirty="0"/>
+              <a:t>, которое позволяет обеспечить очень высокие скорости и хорошо масштабируется.</a:t>
+            </a:r>
+          </a:p>
+          <a:p>
+            <a:endParaRPr lang="ru-RU" dirty="0"/>
+          </a:p>
+          <a:p>
+            <a:r>
+              <a:rPr lang="ru-RU" dirty="0"/>
+              <a:t>В некоторых развивающихся регионах прокладка кабелей экономически сложна, поэтому роль фиксированного доступа частично берут на себя </a:t>
+            </a:r>
+            <a:r>
+              <a:rPr lang="ru-RU" b="1" dirty="0"/>
+              <a:t>мобильные сети</a:t>
+            </a:r>
+            <a:r>
+              <a:rPr lang="ru-RU" dirty="0"/>
+              <a:t>, когда пользователи выходят в интернет через сотовых операторов.</a:t>
             </a:r>
             <a:endParaRPr lang="en-US" dirty="0"/>
           </a:p>
@@ -1367,7 +1313,7 @@
           <a:p>
             <a:fld id="{CF3F5FF5-003D-49C7-8AA8-32F0386C2E23}" type="slidenum">
               <a:rPr lang="en-US" smtClean="0"/>
-              <a:t>17</a:t>
+              <a:t>15</a:t>
             </a:fld>
             <a:endParaRPr lang="en-US"/>
           </a:p>
@@ -1376,7 +1322,7 @@
     </p:spTree>
     <p:extLst>
       <p:ext uri="{BB962C8B-B14F-4D97-AF65-F5344CB8AC3E}">
-        <p14:creationId xmlns:p14="http://schemas.microsoft.com/office/powerpoint/2010/main" val="1466245084"/>
+        <p14:creationId xmlns:p14="http://schemas.microsoft.com/office/powerpoint/2010/main" val="3088271749"/>
       </p:ext>
     </p:extLst>
   </p:cSld>
@@ -1432,7 +1378,7 @@
           <a:p>
             <a:r>
               <a:rPr lang="ru-RU" dirty="0"/>
-              <a:t>Мобильные беспроводные сети радикально изменили многие виды деятельности.</a:t>
+              <a:t>Мобильные и беспроводные сети появились как ответ на желание пользователей быть онлайн не только дома и в офисе, но и в дороге — в машине, поезде, самолёте, кафе или аэропорту.</a:t>
             </a:r>
           </a:p>
           <a:p>
@@ -1440,8 +1386,24 @@
               <a:rPr lang="ru-RU" dirty="0"/>
             </a:br>
             <a:r>
-              <a:rPr lang="ru-RU" dirty="0"/>
-              <a:t>Такси и службы доставки используют терминалы или смартфоны для получения заказов в реальном времени: диспетчер отправляет заказ, он появляется на дисплее водителя, и тот может принять его нажатием кнопки.</a:t>
+              <a:rPr lang="ru-RU" b="1" dirty="0"/>
+              <a:t>Сотовые сети</a:t>
+            </a:r>
+            <a:r>
+              <a:rPr lang="ru-RU" dirty="0"/>
+              <a:t> обеспечивают голосовую и пакетную передачу данных через операторов мобильной связи. </a:t>
+            </a:r>
+            <a:r>
+              <a:rPr lang="ru-RU" b="1" dirty="0" err="1"/>
+              <a:t>Wi</a:t>
+            </a:r>
+            <a:r>
+              <a:rPr lang="ru-RU" b="1" dirty="0"/>
+              <a:t>-Fi-сети</a:t>
+            </a:r>
+            <a:r>
+              <a:rPr lang="ru-RU" dirty="0"/>
+              <a:t>, построенные по стандарту 802.11, позволяют создать беспроводной «пузырь» покрытия в помещении, кафе, вузе, аэропорту и т. п.</a:t>
             </a:r>
           </a:p>
           <a:p>
@@ -1450,16 +1412,7 @@
             </a:br>
             <a:r>
               <a:rPr lang="ru-RU" dirty="0"/>
-              <a:t>На складах сотрудники ходят с карманными компьютерами или сканерами штрихкодов/RFID-меток, считывают информацию о товаре и сразу отправляют данные в центральную информационную систему.</a:t>
-            </a:r>
-          </a:p>
-          <a:p>
-            <a:br>
-              <a:rPr lang="ru-RU" dirty="0"/>
-            </a:br>
-            <a:r>
-              <a:rPr lang="ru-RU" dirty="0"/>
-              <a:t>При возврате арендованных машин сотрудники могут работать прямо на парковке с мобильным устройством, которое запрашивает данные аренды и печатает счёт «на месте». Всё это стало возможно благодаря сочетанию мобильных устройств и беспроводной связи.</a:t>
+              <a:t>Из множества таких хот-спотов получается «лоскутное одеяло» покрытия: пользователь, двигаясь по городу, может подключаться к разным точкам доступа. В результате большинство привычных действий — чтение почты, просмотр видео, общение, навигация — теперь не привязаны к конкретному месту и кабелю.</a:t>
             </a:r>
             <a:endParaRPr lang="en-US" dirty="0"/>
           </a:p>
@@ -1482,7 +1435,7 @@
           <a:p>
             <a:fld id="{CF3F5FF5-003D-49C7-8AA8-32F0386C2E23}" type="slidenum">
               <a:rPr lang="en-US" smtClean="0"/>
-              <a:t>18</a:t>
+              <a:t>16</a:t>
             </a:fld>
             <a:endParaRPr lang="en-US"/>
           </a:p>
@@ -1491,7 +1444,7 @@
     </p:spTree>
     <p:extLst>
       <p:ext uri="{BB962C8B-B14F-4D97-AF65-F5344CB8AC3E}">
-        <p14:creationId xmlns:p14="http://schemas.microsoft.com/office/powerpoint/2010/main" val="1278816596"/>
+        <p14:creationId xmlns:p14="http://schemas.microsoft.com/office/powerpoint/2010/main" val="1095473570"/>
       </p:ext>
     </p:extLst>
   </p:cSld>
@@ -1547,7 +1500,32 @@
           <a:p>
             <a:r>
               <a:rPr lang="ru-RU" dirty="0"/>
-              <a:t>Смартфоны — это гибрид мобильного телефона и компьютера. Они могут автоматически выбирать сеть — сотовую или </a:t>
+              <a:t>Важно различать два понятия: </a:t>
+            </a:r>
+            <a:r>
+              <a:rPr lang="ru-RU" b="1" dirty="0"/>
+              <a:t>мобильность</a:t>
+            </a:r>
+            <a:r>
+              <a:rPr lang="ru-RU" dirty="0"/>
+              <a:t> устройства и </a:t>
+            </a:r>
+            <a:r>
+              <a:rPr lang="ru-RU" b="1" dirty="0"/>
+              <a:t>беспроводной</a:t>
+            </a:r>
+            <a:r>
+              <a:rPr lang="ru-RU" dirty="0"/>
+              <a:t> способ подключения. Это не всегда одно и то же.</a:t>
+            </a:r>
+          </a:p>
+          <a:p>
+            <a:br>
+              <a:rPr lang="ru-RU" dirty="0"/>
+            </a:br>
+            <a:r>
+              <a:rPr lang="ru-RU" dirty="0"/>
+              <a:t>Например, стационарный компьютер в офисе — ни мобильный, ни беспроводной. Ноутбук, подключённый в отеле по кабелю, — мобильное устройство, но соединение у него проводное. Напротив, домашний стационарный ПК, подключённый через </a:t>
             </a:r>
             <a:r>
               <a:rPr lang="ru-RU" dirty="0" err="1"/>
@@ -1555,7 +1533,7 @@
             </a:r>
             <a:r>
               <a:rPr lang="ru-RU" dirty="0"/>
-              <a:t>-Fi — и поддерживают постоянное подключение к интернету.</a:t>
+              <a:t>-Fi, не является мобильным, но использует беспроводную сеть.</a:t>
             </a:r>
           </a:p>
           <a:p>
@@ -1564,65 +1542,7 @@
             </a:br>
             <a:r>
               <a:rPr lang="ru-RU" dirty="0"/>
-              <a:t>Исторически операторы зарабатывали огромные деньги на </a:t>
-            </a:r>
-            <a:r>
-              <a:rPr lang="ru-RU" b="1" dirty="0"/>
-              <a:t>SMS</a:t>
-            </a:r>
-            <a:r>
-              <a:rPr lang="ru-RU" dirty="0"/>
-              <a:t>, поскольку стоимость передачи одного текстового сообщения для них минимальна, а стоимость услуги для пользователя — значительно выше. Затем появились IP-мессенджеры, которые используют либо мобильный интернет, либо </a:t>
-            </a:r>
-            <a:r>
-              <a:rPr lang="ru-RU" dirty="0" err="1"/>
-              <a:t>Wi</a:t>
-            </a:r>
-            <a:r>
-              <a:rPr lang="ru-RU" dirty="0"/>
-              <a:t>-Fi и предлагают более гибкие и дешёвые коммуникации.</a:t>
-            </a:r>
-          </a:p>
-          <a:p>
-            <a:br>
-              <a:rPr lang="ru-RU" dirty="0"/>
-            </a:br>
-            <a:r>
-              <a:rPr lang="ru-RU" dirty="0"/>
-              <a:t>Благодаря </a:t>
-            </a:r>
-            <a:r>
-              <a:rPr lang="ru-RU" b="1" dirty="0"/>
-              <a:t>GPS</a:t>
-            </a:r>
-            <a:r>
-              <a:rPr lang="ru-RU" dirty="0"/>
-              <a:t> и триангуляции по </a:t>
-            </a:r>
-            <a:r>
-              <a:rPr lang="ru-RU" dirty="0" err="1"/>
-              <a:t>Wi</a:t>
-            </a:r>
-            <a:r>
-              <a:rPr lang="ru-RU" dirty="0"/>
-              <a:t>-Fi смартфон «знает», где находится. Это позволяет реализовывать карты, навигацию, поиск ближайших объектов (кафе, магазинов), локальный прогноз погоды.</a:t>
-            </a:r>
-          </a:p>
-          <a:p>
-            <a:br>
-              <a:rPr lang="ru-RU" dirty="0"/>
-            </a:br>
-            <a:r>
-              <a:rPr lang="ru-RU" dirty="0"/>
-              <a:t>Фотографии и видео часто автоматически снабжаются метками местоположения — это называется </a:t>
-            </a:r>
-            <a:r>
-              <a:rPr lang="ru-RU" b="1" dirty="0" err="1"/>
-              <a:t>геотегированием</a:t>
-            </a:r>
-            <a:r>
-              <a:rPr lang="ru-RU" dirty="0"/>
-              <a:t>, и потом их можно сортировать и искать по месту съёмки.</a:t>
+              <a:t>Полная комбинация — когда и устройство мобильное, и сеть беспроводная: например, складской терминал, с которым сотрудник ходит между стеллажами, или смартфон. Такое разделение помогает лучше понимать требования к сети: её покрытие, скорость, устойчивость к перемещениям</a:t>
             </a:r>
             <a:endParaRPr lang="en-US" dirty="0"/>
           </a:p>
@@ -1645,7 +1565,7 @@
           <a:p>
             <a:fld id="{CF3F5FF5-003D-49C7-8AA8-32F0386C2E23}" type="slidenum">
               <a:rPr lang="en-US" smtClean="0"/>
-              <a:t>19</a:t>
+              <a:t>17</a:t>
             </a:fld>
             <a:endParaRPr lang="en-US"/>
           </a:p>
@@ -1654,7 +1574,7 @@
     </p:spTree>
     <p:extLst>
       <p:ext uri="{BB962C8B-B14F-4D97-AF65-F5344CB8AC3E}">
-        <p14:creationId xmlns:p14="http://schemas.microsoft.com/office/powerpoint/2010/main" val="138866081"/>
+        <p14:creationId xmlns:p14="http://schemas.microsoft.com/office/powerpoint/2010/main" val="1466245084"/>
       </p:ext>
     </p:extLst>
   </p:cSld>
@@ -1710,7 +1630,7 @@
           <a:p>
             <a:r>
               <a:rPr lang="ru-RU" dirty="0"/>
-              <a:t>Мобильная коммерция расширяет классическую электронную коммерцию, перенося платежи прямо в мобильные устройства. Пользователь может оплатить билет, парковку или товар, отправив SMS или используя приложение. Сумма затем списывается со счёта мобильного оператора или банковского счёта.</a:t>
+              <a:t>Мобильные беспроводные сети радикально изменили многие виды деятельности.</a:t>
             </a:r>
           </a:p>
           <a:p>
@@ -1719,15 +1639,7 @@
             </a:br>
             <a:r>
               <a:rPr lang="ru-RU" dirty="0"/>
-              <a:t>Технология </a:t>
-            </a:r>
-            <a:r>
-              <a:rPr lang="ru-RU" b="1" dirty="0"/>
-              <a:t>NFC</a:t>
-            </a:r>
-            <a:r>
-              <a:rPr lang="ru-RU" dirty="0"/>
-              <a:t> позволяет телефону работать как бесконтактная карта: для оплаты достаточно поднести устройство к считывателю. Это удобно пользователю и интересно магазинам, так как даёт возможность сократить банковские комиссии.</a:t>
+              <a:t>Такси и службы доставки используют терминалы или смартфоны для получения заказов в реальном времени: диспетчер отправляет заказ, он появляется на дисплее водителя, и тот может принять его нажатием кнопки.</a:t>
             </a:r>
           </a:p>
           <a:p>
@@ -1736,7 +1648,16 @@
             </a:br>
             <a:r>
               <a:rPr lang="ru-RU" dirty="0"/>
-              <a:t>Психологически важно, что пользователи смартфонов уже привыкли платить за мобильную связь и приложения. Поэтому модель «оплатить телефоном» воспринимается естественнее, чем платный доступ к какому-то веб-сайту. Это создаёт мощный стимул для развития мобильных платёжных сервисов.</a:t>
+              <a:t>На складах сотрудники ходят с карманными компьютерами или сканерами штрихкодов/RFID-меток, считывают информацию о товаре и сразу отправляют данные в центральную информационную систему.</a:t>
+            </a:r>
+          </a:p>
+          <a:p>
+            <a:br>
+              <a:rPr lang="ru-RU" dirty="0"/>
+            </a:br>
+            <a:r>
+              <a:rPr lang="ru-RU" dirty="0"/>
+              <a:t>При возврате арендованных машин сотрудники могут работать прямо на парковке с мобильным устройством, которое запрашивает данные аренды и печатает счёт «на месте». Всё это стало возможно благодаря сочетанию мобильных устройств и беспроводной связи.</a:t>
             </a:r>
             <a:endParaRPr lang="en-US" dirty="0"/>
           </a:p>
@@ -1759,7 +1680,7 @@
           <a:p>
             <a:fld id="{CF3F5FF5-003D-49C7-8AA8-32F0386C2E23}" type="slidenum">
               <a:rPr lang="en-US" smtClean="0"/>
-              <a:t>20</a:t>
+              <a:t>18</a:t>
             </a:fld>
             <a:endParaRPr lang="en-US"/>
           </a:p>
@@ -1768,7 +1689,7 @@
     </p:spTree>
     <p:extLst>
       <p:ext uri="{BB962C8B-B14F-4D97-AF65-F5344CB8AC3E}">
-        <p14:creationId xmlns:p14="http://schemas.microsoft.com/office/powerpoint/2010/main" val="1185674670"/>
+        <p14:creationId xmlns:p14="http://schemas.microsoft.com/office/powerpoint/2010/main" val="1278816596"/>
       </p:ext>
     </p:extLst>
   </p:cSld>
@@ -1824,7 +1745,15 @@
           <a:p>
             <a:r>
               <a:rPr lang="ru-RU" dirty="0"/>
-              <a:t>Сенсорные сети — это шаг к тотальному измерению и мониторингу окружающего мира. Маленькие узлы умеют измерять параметры среды, а затем передавать данные по беспроводной связи.</a:t>
+              <a:t>Смартфоны — это гибрид мобильного телефона и компьютера. Они могут автоматически выбирать сеть — сотовую или </a:t>
+            </a:r>
+            <a:r>
+              <a:rPr lang="ru-RU" dirty="0" err="1"/>
+              <a:t>Wi</a:t>
+            </a:r>
+            <a:r>
+              <a:rPr lang="ru-RU" dirty="0"/>
+              <a:t>-Fi — и поддерживают постоянное подключение к интернету.</a:t>
             </a:r>
           </a:p>
           <a:p>
@@ -1833,7 +1762,23 @@
             </a:br>
             <a:r>
               <a:rPr lang="ru-RU" dirty="0"/>
-              <a:t>В автомобилях можно собирать информацию о состоянии дороги, расходе топлива, пробках и делиться ею с другими водителями. В научных исследованиях к животным прикрепляют маленькие датчики, чтобы отслеживать их миграцию. Миниатюризация позволяет следить даже за небольшими животными и насекомыми.</a:t>
+              <a:t>Исторически операторы зарабатывали огромные деньги на </a:t>
+            </a:r>
+            <a:r>
+              <a:rPr lang="ru-RU" b="1" dirty="0"/>
+              <a:t>SMS</a:t>
+            </a:r>
+            <a:r>
+              <a:rPr lang="ru-RU" dirty="0"/>
+              <a:t>, поскольку стоимость передачи одного текстового сообщения для них минимальна, а стоимость услуги для пользователя — значительно выше. Затем появились IP-мессенджеры, которые используют либо мобильный интернет, либо </a:t>
+            </a:r>
+            <a:r>
+              <a:rPr lang="ru-RU" dirty="0" err="1"/>
+              <a:t>Wi</a:t>
+            </a:r>
+            <a:r>
+              <a:rPr lang="ru-RU" dirty="0"/>
+              <a:t>-Fi и предлагают более гибкие и дешёвые коммуникации.</a:t>
             </a:r>
           </a:p>
           <a:p>
@@ -1842,15 +1787,40 @@
             </a:br>
             <a:r>
               <a:rPr lang="ru-RU" dirty="0"/>
-              <a:t>Интересный пример — </a:t>
+              <a:t>Благодаря </a:t>
             </a:r>
             <a:r>
               <a:rPr lang="ru-RU" b="1" dirty="0"/>
-              <a:t>беспроводные парковочные автоматы</a:t>
-            </a:r>
-            <a:r>
-              <a:rPr lang="ru-RU" dirty="0"/>
-              <a:t>: они принимают оплату по карте, сообщают о занятости места и могут автоматически уведомлять контролёра, если время истекло, а машина всё ещё стоит. Такие системы уже приносят городам существенные дополнительные доходы за счёт штрафов.</a:t>
+              <a:t>GPS</a:t>
+            </a:r>
+            <a:r>
+              <a:rPr lang="ru-RU" dirty="0"/>
+              <a:t> и триангуляции по </a:t>
+            </a:r>
+            <a:r>
+              <a:rPr lang="ru-RU" dirty="0" err="1"/>
+              <a:t>Wi</a:t>
+            </a:r>
+            <a:r>
+              <a:rPr lang="ru-RU" dirty="0"/>
+              <a:t>-Fi смартфон «знает», где находится. Это позволяет реализовывать карты, навигацию, поиск ближайших объектов (кафе, магазинов), локальный прогноз погоды.</a:t>
+            </a:r>
+          </a:p>
+          <a:p>
+            <a:br>
+              <a:rPr lang="ru-RU" dirty="0"/>
+            </a:br>
+            <a:r>
+              <a:rPr lang="ru-RU" dirty="0"/>
+              <a:t>Фотографии и видео часто автоматически снабжаются метками местоположения — это называется </a:t>
+            </a:r>
+            <a:r>
+              <a:rPr lang="ru-RU" b="1" dirty="0" err="1"/>
+              <a:t>геотегированием</a:t>
+            </a:r>
+            <a:r>
+              <a:rPr lang="ru-RU" dirty="0"/>
+              <a:t>, и потом их можно сортировать и искать по месту съёмки.</a:t>
             </a:r>
             <a:endParaRPr lang="en-US" dirty="0"/>
           </a:p>
@@ -1873,7 +1843,7 @@
           <a:p>
             <a:fld id="{CF3F5FF5-003D-49C7-8AA8-32F0386C2E23}" type="slidenum">
               <a:rPr lang="en-US" smtClean="0"/>
-              <a:t>21</a:t>
+              <a:t>19</a:t>
             </a:fld>
             <a:endParaRPr lang="en-US"/>
           </a:p>
@@ -1882,7 +1852,7 @@
     </p:spTree>
     <p:extLst>
       <p:ext uri="{BB962C8B-B14F-4D97-AF65-F5344CB8AC3E}">
-        <p14:creationId xmlns:p14="http://schemas.microsoft.com/office/powerpoint/2010/main" val="2000120028"/>
+        <p14:creationId xmlns:p14="http://schemas.microsoft.com/office/powerpoint/2010/main" val="138866081"/>
       </p:ext>
     </p:extLst>
   </p:cSld>
@@ -1936,46 +1906,6 @@
           <a:bodyPr/>
           <a:lstStyle/>
           <a:p>
-            <a:r>
-              <a:rPr lang="ru-RU" dirty="0"/>
-              <a:t>На этом слайде прослеживается, как за последние три столетия менялись ведущие технологии, определяющие развитие общества.</a:t>
-            </a:r>
-          </a:p>
-          <a:p>
-            <a:br>
-              <a:rPr lang="ru-RU" dirty="0"/>
-            </a:br>
-            <a:r>
-              <a:rPr lang="ru-RU" dirty="0"/>
-              <a:t>В XVIII веке механизация производства и промышленная революция радикально изменили способы изготовления товаров.</a:t>
-            </a:r>
-          </a:p>
-          <a:p>
-            <a:endParaRPr lang="en-US" dirty="0"/>
-          </a:p>
-          <a:p>
-            <a:r>
-              <a:rPr lang="ru-RU" dirty="0"/>
-              <a:t>XIX век стал периодом, когда паровые двигатели дали человечеству невиданный ранее уровень производительности и мобильности.</a:t>
-            </a:r>
-          </a:p>
-          <a:p>
-            <a:br>
-              <a:rPr lang="ru-RU" dirty="0"/>
-            </a:br>
-            <a:r>
-              <a:rPr lang="ru-RU" dirty="0"/>
-              <a:t>В XX веке ключевым ресурсом стала информация — её сбор, обработка и передача. Именно в этот период были созданы телефонные сети, радио, телевидение, произошёл стремительный рост вычислительной техники и появление интернета.</a:t>
-            </a:r>
-          </a:p>
-          <a:p>
-            <a:br>
-              <a:rPr lang="ru-RU" dirty="0"/>
-            </a:br>
-            <a:r>
-              <a:rPr lang="ru-RU" dirty="0"/>
-              <a:t>Сегодня же, в XXI веке, мы наблюдаем слияние всех этих технологий. Грань между вычислениями, коммуникациями и хранением данных стирается, и никто не может точно сказать, какие формы примут технологии ближайшего будущего.</a:t>
-            </a:r>
             <a:endParaRPr lang="en-US" dirty="0"/>
           </a:p>
         </p:txBody>
@@ -1997,7 +1927,7 @@
           <a:p>
             <a:fld id="{CF3F5FF5-003D-49C7-8AA8-32F0386C2E23}" type="slidenum">
               <a:rPr lang="en-US" smtClean="0"/>
-              <a:t>3</a:t>
+              <a:t>2</a:t>
             </a:fld>
             <a:endParaRPr lang="en-US"/>
           </a:p>
@@ -2006,7 +1936,7 @@
     </p:spTree>
     <p:extLst>
       <p:ext uri="{BB962C8B-B14F-4D97-AF65-F5344CB8AC3E}">
-        <p14:creationId xmlns:p14="http://schemas.microsoft.com/office/powerpoint/2010/main" val="336590847"/>
+        <p14:creationId xmlns:p14="http://schemas.microsoft.com/office/powerpoint/2010/main" val="1542040180"/>
       </p:ext>
     </p:extLst>
   </p:cSld>
@@ -2062,15 +1992,24 @@
           <a:p>
             <a:r>
               <a:rPr lang="ru-RU" dirty="0"/>
-              <a:t>Современные интернет-сервисы опираются на </a:t>
+              <a:t>Мобильная коммерция расширяет классическую электронную коммерцию, перенося платежи прямо в мобильные устройства. Пользователь может оплатить билет, парковку или товар, отправив SMS или используя приложение. Сумма затем списывается со счёта мобильного оператора или банковского счёта.</a:t>
+            </a:r>
+          </a:p>
+          <a:p>
+            <a:br>
+              <a:rPr lang="ru-RU" dirty="0"/>
+            </a:br>
+            <a:r>
+              <a:rPr lang="ru-RU" dirty="0"/>
+              <a:t>Технология </a:t>
             </a:r>
             <a:r>
               <a:rPr lang="ru-RU" b="1" dirty="0"/>
-              <a:t>дата-центры</a:t>
-            </a:r>
-            <a:r>
-              <a:rPr lang="ru-RU" dirty="0"/>
-              <a:t> — гигантские помещения с тысячами серверов. Там живут наши файлы, почта, соцсети, облачные документы, фотографии и многое другое.</a:t>
+              <a:t>NFC</a:t>
+            </a:r>
+            <a:r>
+              <a:rPr lang="ru-RU" dirty="0"/>
+              <a:t> позволяет телефону работать как бесконтактная карта: для оплаты достаточно поднести устройство к считывателю. Это удобно пользователю и интересно магазинам, так как даёт возможность сократить банковские комиссии.</a:t>
             </a:r>
           </a:p>
           <a:p>
@@ -2079,22 +2018,7 @@
             </a:br>
             <a:r>
               <a:rPr lang="ru-RU" dirty="0"/>
-              <a:t>Внутри дата-центра требуется перемещать огромные объёмы данных между серверами: сервисы масштабируются, данные реплицируются и перераспределяются. </a:t>
-            </a:r>
-          </a:p>
-          <a:p>
-            <a:r>
-              <a:rPr lang="ru-RU" dirty="0"/>
-              <a:t>Это предъявляет очень жёсткие требования к пропускной способности и отказоустойчивости сетевой инфраструктуры.</a:t>
-            </a:r>
-          </a:p>
-          <a:p>
-            <a:br>
-              <a:rPr lang="ru-RU" dirty="0"/>
-            </a:br>
-            <a:r>
-              <a:rPr lang="ru-RU" dirty="0"/>
-              <a:t>Ранние сети дата-центров часто строились по простой трёхуровневой схеме «доступ — агрегация — ядро», напоминающей дерево. Эта архитектура плохо масштабировалась и становилась узким местом по мере роста числа серверов и трафика, что стимулировало поиски новых топологий и решений.</a:t>
+              <a:t>Психологически важно, что пользователи смартфонов уже привыкли платить за мобильную связь и приложения. Поэтому модель «оплатить телефоном» воспринимается естественнее, чем платный доступ к какому-то веб-сайту. Это создаёт мощный стимул для развития мобильных платёжных сервисов.</a:t>
             </a:r>
             <a:endParaRPr lang="en-US" dirty="0"/>
           </a:p>
@@ -2117,7 +2041,7 @@
           <a:p>
             <a:fld id="{CF3F5FF5-003D-49C7-8AA8-32F0386C2E23}" type="slidenum">
               <a:rPr lang="en-US" smtClean="0"/>
-              <a:t>22</a:t>
+              <a:t>20</a:t>
             </a:fld>
             <a:endParaRPr lang="en-US"/>
           </a:p>
@@ -2126,7 +2050,7 @@
     </p:spTree>
     <p:extLst>
       <p:ext uri="{BB962C8B-B14F-4D97-AF65-F5344CB8AC3E}">
-        <p14:creationId xmlns:p14="http://schemas.microsoft.com/office/powerpoint/2010/main" val="2358905962"/>
+        <p14:creationId xmlns:p14="http://schemas.microsoft.com/office/powerpoint/2010/main" val="1185674670"/>
       </p:ext>
     </p:extLst>
   </p:cSld>
@@ -2181,28 +2105,36 @@
           <a:lstStyle/>
           <a:p>
             <a:r>
-              <a:rPr lang="ru-RU" b="0" dirty="0"/>
-              <a:t>Content Delivery Network (CDN) — это сеть серверов, расположенных в разных точках планеты и предназначенных для быстрой доставки контента пользователям.</a:t>
+              <a:rPr lang="ru-RU" dirty="0"/>
+              <a:t>Сенсорные сети — это шаг к тотальному измерению и мониторингу окружающего мира. Маленькие узлы умеют измерять параметры среды, а затем передавать данные по беспроводной связи.</a:t>
             </a:r>
           </a:p>
           <a:p>
             <a:br>
-              <a:rPr lang="ru-RU" b="0" dirty="0"/>
+              <a:rPr lang="ru-RU" dirty="0"/>
             </a:br>
             <a:r>
-              <a:rPr lang="ru-RU" b="0" dirty="0"/>
-              <a:t>Популярные сервисы — видео-платформы, крупные сайты, стриминговые сервисы — хранят копии своих данных в разных узлах CDN. Когда пользователь запрашивает ресурс, система выбирает не «оригинальный» сервер, а ближайшую и наименее загруженную реплику.</a:t>
+              <a:rPr lang="ru-RU" dirty="0"/>
+              <a:t>В автомобилях можно собирать информацию о состоянии дороги, расходе топлива, пробках и делиться ею с другими водителями. В научных исследованиях к животным прикрепляют маленькие датчики, чтобы отслеживать их миграцию. Миниатюризация позволяет следить даже за небольшими животными и насекомыми.</a:t>
             </a:r>
           </a:p>
           <a:p>
             <a:br>
-              <a:rPr lang="ru-RU" b="0" dirty="0"/>
+              <a:rPr lang="ru-RU" dirty="0"/>
             </a:br>
             <a:r>
-              <a:rPr lang="ru-RU" b="0" dirty="0"/>
-              <a:t>Такой подход уменьшает задержки, снижает нагрузку на магистральные сети и улучшает пользовательский опыт. У крупных компаний есть собственные CDN, а мелкие сервисы используют коммерческих провайдеров CDN.</a:t>
-            </a:r>
-            <a:endParaRPr lang="en-US" b="0" dirty="0"/>
+              <a:rPr lang="ru-RU" dirty="0"/>
+              <a:t>Интересный пример — </a:t>
+            </a:r>
+            <a:r>
+              <a:rPr lang="ru-RU" b="1" dirty="0"/>
+              <a:t>беспроводные парковочные автоматы</a:t>
+            </a:r>
+            <a:r>
+              <a:rPr lang="ru-RU" dirty="0"/>
+              <a:t>: они принимают оплату по карте, сообщают о занятости места и могут автоматически уведомлять контролёра, если время истекло, а машина всё ещё стоит. Такие системы уже приносят городам существенные дополнительные доходы за счёт штрафов.</a:t>
+            </a:r>
+            <a:endParaRPr lang="en-US" dirty="0"/>
           </a:p>
         </p:txBody>
       </p:sp>
@@ -2223,7 +2155,7 @@
           <a:p>
             <a:fld id="{CF3F5FF5-003D-49C7-8AA8-32F0386C2E23}" type="slidenum">
               <a:rPr lang="en-US" smtClean="0"/>
-              <a:t>23</a:t>
+              <a:t>21</a:t>
             </a:fld>
             <a:endParaRPr lang="en-US"/>
           </a:p>
@@ -2232,7 +2164,7 @@
     </p:spTree>
     <p:extLst>
       <p:ext uri="{BB962C8B-B14F-4D97-AF65-F5344CB8AC3E}">
-        <p14:creationId xmlns:p14="http://schemas.microsoft.com/office/powerpoint/2010/main" val="1902250061"/>
+        <p14:creationId xmlns:p14="http://schemas.microsoft.com/office/powerpoint/2010/main" val="2000120028"/>
       </p:ext>
     </p:extLst>
   </p:cSld>
@@ -2287,28 +2219,42 @@
           <a:lstStyle/>
           <a:p>
             <a:r>
-              <a:rPr lang="ru-RU" b="0" dirty="0"/>
-              <a:t>Когда пользователь обращается к контенту, размещённому далеко, данные проходят через несколько независимых сетей. Домашний провайдер, сеть дата-центра и сети других операторов могут принадлежать разным организациям.</a:t>
+              <a:rPr lang="ru-RU" dirty="0"/>
+              <a:t>Современные интернет-сервисы опираются на </a:t>
+            </a:r>
+            <a:r>
+              <a:rPr lang="ru-RU" b="1" dirty="0"/>
+              <a:t>дата-центры</a:t>
+            </a:r>
+            <a:r>
+              <a:rPr lang="ru-RU" dirty="0"/>
+              <a:t> — гигантские помещения с тысячами серверов. Там живут наши файлы, почта, соцсети, облачные документы, фотографии и многое другое.</a:t>
             </a:r>
           </a:p>
           <a:p>
             <a:br>
-              <a:rPr lang="ru-RU" b="0" dirty="0"/>
+              <a:rPr lang="ru-RU" dirty="0"/>
             </a:br>
             <a:r>
-              <a:rPr lang="ru-RU" b="0" dirty="0"/>
-              <a:t>Если между сетью доступа и сетью поставщика контента нет прямого соединения, трафик идёт через транзитную сеть. Такие сети обеспечивают так называемый «сквозной транзит», за который взимают плату с обеих сторон.</a:t>
+              <a:rPr lang="ru-RU" dirty="0"/>
+              <a:t>Внутри дата-центра требуется перемещать огромные объёмы данных между серверами: сервисы масштабируются, данные реплицируются и перераспределяются. </a:t>
+            </a:r>
+          </a:p>
+          <a:p>
+            <a:r>
+              <a:rPr lang="ru-RU" dirty="0"/>
+              <a:t>Это предъявляет очень жёсткие требования к пропускной способности и отказоустойчивости сетевой инфраструктуры.</a:t>
             </a:r>
           </a:p>
           <a:p>
             <a:br>
-              <a:rPr lang="ru-RU" b="0" dirty="0"/>
+              <a:rPr lang="ru-RU" dirty="0"/>
             </a:br>
             <a:r>
-              <a:rPr lang="ru-RU" b="0" dirty="0"/>
-              <a:t>Из-за своей центральной роли транзитные сети называют магистральными: именно через них исторически проходила большая часть глобального интернет-трафика.</a:t>
-            </a:r>
-            <a:endParaRPr lang="en-US" b="0" dirty="0"/>
+              <a:rPr lang="ru-RU" dirty="0"/>
+              <a:t>Ранние сети дата-центров часто строились по простой трёхуровневой схеме «доступ — агрегация — ядро», напоминающей дерево. Эта архитектура плохо масштабировалась и становилась узким местом по мере роста числа серверов и трафика, что стимулировало поиски новых топологий и решений.</a:t>
+            </a:r>
+            <a:endParaRPr lang="en-US" dirty="0"/>
           </a:p>
         </p:txBody>
       </p:sp>
@@ -2329,7 +2275,7 @@
           <a:p>
             <a:fld id="{CF3F5FF5-003D-49C7-8AA8-32F0386C2E23}" type="slidenum">
               <a:rPr lang="en-US" smtClean="0"/>
-              <a:t>24</a:t>
+              <a:t>22</a:t>
             </a:fld>
             <a:endParaRPr lang="en-US"/>
           </a:p>
@@ -2338,7 +2284,7 @@
     </p:spTree>
     <p:extLst>
       <p:ext uri="{BB962C8B-B14F-4D97-AF65-F5344CB8AC3E}">
-        <p14:creationId xmlns:p14="http://schemas.microsoft.com/office/powerpoint/2010/main" val="122403945"/>
+        <p14:creationId xmlns:p14="http://schemas.microsoft.com/office/powerpoint/2010/main" val="2358905962"/>
       </p:ext>
     </p:extLst>
   </p:cSld>
@@ -2393,48 +2339,28 @@
           <a:lstStyle/>
           <a:p>
             <a:r>
-              <a:rPr lang="ru-RU" dirty="0" err="1"/>
-              <a:t>Ппоследние</a:t>
-            </a:r>
-            <a:r>
-              <a:rPr lang="ru-RU" dirty="0"/>
-              <a:t> годы роль транзитных сетей постепенно меняется.</a:t>
+              <a:rPr lang="ru-RU" b="0" dirty="0"/>
+              <a:t>Content Delivery Network (CDN) — это сеть серверов, расположенных в разных точках планеты и предназначенных для быстрой доставки контента пользователям.</a:t>
             </a:r>
           </a:p>
           <a:p>
             <a:br>
-              <a:rPr lang="ru-RU" dirty="0"/>
+              <a:rPr lang="ru-RU" b="0" dirty="0"/>
             </a:br>
             <a:r>
-              <a:rPr lang="ru-RU" dirty="0"/>
-              <a:t>С одной стороны, значительная часть контента концентрируется у нескольких гигантов — крупных облачных и контент-провайдеров. С другой стороны, сами провайдеры растут, становятся национальными или международными игроками и могут напрямую соединяться с крупными поставщиками контента.</a:t>
+              <a:rPr lang="ru-RU" b="0" dirty="0"/>
+              <a:t>Популярные сервисы — видео-платформы, крупные сайты, стриминговые сервисы — хранят копии своих данных в разных узлах CDN. Когда пользователь запрашивает ресурс, система выбирает не «оригинальный» сервер, а ближайшую и наименее загруженную реплику.</a:t>
             </a:r>
           </a:p>
           <a:p>
             <a:br>
-              <a:rPr lang="ru-RU" dirty="0"/>
+              <a:rPr lang="ru-RU" b="0" dirty="0"/>
             </a:br>
             <a:r>
-              <a:rPr lang="ru-RU" dirty="0"/>
-              <a:t>В результате всё чаще создаются </a:t>
-            </a:r>
-            <a:r>
               <a:rPr lang="ru-RU" b="0" dirty="0"/>
-              <a:t>прямые соединения </a:t>
-            </a:r>
-            <a:r>
-              <a:rPr lang="ru-RU" dirty="0"/>
-              <a:t>между крупными сетями: так называемый </a:t>
-            </a:r>
-            <a:r>
-              <a:rPr lang="ru-RU" dirty="0" err="1"/>
-              <a:t>peering</a:t>
-            </a:r>
-            <a:r>
-              <a:rPr lang="ru-RU" dirty="0"/>
-              <a:t>. Это уменьшает расходы на транзит и повышает производительность. В таких схемах транзитные сети всё чаще используются как резерв или для маршрутизации менее критичного трафика.</a:t>
-            </a:r>
-            <a:endParaRPr lang="en-US" dirty="0"/>
+              <a:t>Такой подход уменьшает задержки, снижает нагрузку на магистральные сети и улучшает пользовательский опыт. У крупных компаний есть собственные CDN, а мелкие сервисы используют коммерческих провайдеров CDN.</a:t>
+            </a:r>
+            <a:endParaRPr lang="en-US" b="0" dirty="0"/>
           </a:p>
         </p:txBody>
       </p:sp>
@@ -2455,7 +2381,7 @@
           <a:p>
             <a:fld id="{CF3F5FF5-003D-49C7-8AA8-32F0386C2E23}" type="slidenum">
               <a:rPr lang="en-US" smtClean="0"/>
-              <a:t>25</a:t>
+              <a:t>23</a:t>
             </a:fld>
             <a:endParaRPr lang="en-US"/>
           </a:p>
@@ -2464,7 +2390,7 @@
     </p:spTree>
     <p:extLst>
       <p:ext uri="{BB962C8B-B14F-4D97-AF65-F5344CB8AC3E}">
-        <p14:creationId xmlns:p14="http://schemas.microsoft.com/office/powerpoint/2010/main" val="3967803277"/>
+        <p14:creationId xmlns:p14="http://schemas.microsoft.com/office/powerpoint/2010/main" val="1902250061"/>
       </p:ext>
     </p:extLst>
   </p:cSld>
@@ -2520,7 +2446,7 @@
           <a:p>
             <a:r>
               <a:rPr lang="ru-RU" b="0" dirty="0"/>
-              <a:t>Корпоративные сети соединяют компьютеры внутри компаний, университетов, госучреждений. Их ключевая цель — совместное использование ресурсов.</a:t>
+              <a:t>Когда пользователь обращается к контенту, размещённому далеко, данные проходят через несколько независимых сетей. Домашний провайдер, сеть дата-центра и сети других операторов могут принадлежать разным организациям.</a:t>
             </a:r>
           </a:p>
           <a:p>
@@ -2529,7 +2455,7 @@
             </a:br>
             <a:r>
               <a:rPr lang="ru-RU" b="0" dirty="0"/>
-              <a:t>Вместо множества отдельных принтеров выгоднее иметь один мощный сетевой принтер. Данные клиентов, складские остатки, финансовые отчёты хранятся в общих базах данных, к которым сотрудники могут обращаться с рабочих мест.</a:t>
+              <a:t>Если между сетью доступа и сетью поставщика контента нет прямого соединения, трафик идёт через транзитную сеть. Такие сети обеспечивают так называемый «сквозной транзит», за который взимают плату с обеих сторон.</a:t>
             </a:r>
           </a:p>
           <a:p>
@@ -2538,7 +2464,7 @@
             </a:br>
             <a:r>
               <a:rPr lang="ru-RU" b="0" dirty="0"/>
-              <a:t>Зависимость бизнеса от сетей чрезвычайно высока: банк не сможет работать без своих систем даже несколько минут. Производственная линия, управляемая компьютером, остановится за секунды. Даже маленькие компании нуждаются в сети для доступа к документам и информации</a:t>
+              <a:t>Из-за своей центральной роли транзитные сети называют магистральными: именно через них исторически проходила большая часть глобального интернет-трафика.</a:t>
             </a:r>
             <a:endParaRPr lang="en-US" b="0" dirty="0"/>
           </a:p>
@@ -2561,7 +2487,7 @@
           <a:p>
             <a:fld id="{CF3F5FF5-003D-49C7-8AA8-32F0386C2E23}" type="slidenum">
               <a:rPr lang="en-US" smtClean="0"/>
-              <a:t>26</a:t>
+              <a:t>24</a:t>
             </a:fld>
             <a:endParaRPr lang="en-US"/>
           </a:p>
@@ -2570,7 +2496,7 @@
     </p:spTree>
     <p:extLst>
       <p:ext uri="{BB962C8B-B14F-4D97-AF65-F5344CB8AC3E}">
-        <p14:creationId xmlns:p14="http://schemas.microsoft.com/office/powerpoint/2010/main" val="2556046310"/>
+        <p14:creationId xmlns:p14="http://schemas.microsoft.com/office/powerpoint/2010/main" val="122403945"/>
       </p:ext>
     </p:extLst>
   </p:cSld>
@@ -2625,8 +2551,12 @@
           <a:lstStyle/>
           <a:p>
             <a:r>
-              <a:rPr lang="ru-RU" dirty="0"/>
-              <a:t>В большой корпорации компьютеры и сотрудники физически разбросаны по миру. Тем не менее, сотруднику в одном городе может понадобиться доступ к базе данных, находящейся на другом континенте.</a:t>
+              <a:rPr lang="ru-RU" dirty="0" err="1"/>
+              <a:t>Ппоследние</a:t>
+            </a:r>
+            <a:r>
+              <a:rPr lang="ru-RU" dirty="0"/>
+              <a:t> годы роль транзитных сетей постепенно меняется.</a:t>
             </a:r>
           </a:p>
           <a:p>
@@ -2635,15 +2565,7 @@
             </a:br>
             <a:r>
               <a:rPr lang="ru-RU" dirty="0"/>
-              <a:t>Для объединения удалённых участков в единую логическую сеть используются </a:t>
-            </a:r>
-            <a:r>
-              <a:rPr lang="ru-RU" b="1" dirty="0"/>
-              <a:t>VPN</a:t>
-            </a:r>
-            <a:r>
-              <a:rPr lang="ru-RU" dirty="0"/>
-              <a:t> — виртуальные частные сети. Они позволяют сотруднику работать с ресурсами компании так, как если бы он находился в «родном» офисе.</a:t>
+              <a:t>С одной стороны, значительная часть контента концентрируется у нескольких гигантов — крупных облачных и контент-провайдеров. С другой стороны, сами провайдеры растут, становятся национальными или международными игроками и могут напрямую соединяться с крупными поставщиками контента.</a:t>
             </a:r>
           </a:p>
           <a:p>
@@ -2652,15 +2574,23 @@
             </a:br>
             <a:r>
               <a:rPr lang="ru-RU" dirty="0"/>
-              <a:t>Внутри организации чаще всего используется модель </a:t>
-            </a:r>
-            <a:r>
-              <a:rPr lang="ru-RU" b="1" dirty="0"/>
-              <a:t>клиент–сервер</a:t>
-            </a:r>
-            <a:r>
-              <a:rPr lang="ru-RU" dirty="0"/>
-              <a:t>: данные хранятся на мощных серверах в серверных комнатах, а сотрудники работают с ними через более простые рабочие станции. Это упрощает администрирование, резервное копирование и безопасность.</a:t>
+              <a:t>В результате всё чаще создаются </a:t>
+            </a:r>
+            <a:r>
+              <a:rPr lang="ru-RU" b="0" dirty="0"/>
+              <a:t>прямые соединения </a:t>
+            </a:r>
+            <a:r>
+              <a:rPr lang="ru-RU" dirty="0"/>
+              <a:t>между крупными сетями: так называемый </a:t>
+            </a:r>
+            <a:r>
+              <a:rPr lang="ru-RU" dirty="0" err="1"/>
+              <a:t>peering</a:t>
+            </a:r>
+            <a:r>
+              <a:rPr lang="ru-RU" dirty="0"/>
+              <a:t>. Это уменьшает расходы на транзит и повышает производительность. В таких схемах транзитные сети всё чаще используются как резерв или для маршрутизации менее критичного трафика.</a:t>
             </a:r>
             <a:endParaRPr lang="en-US" dirty="0"/>
           </a:p>
@@ -2683,7 +2613,7 @@
           <a:p>
             <a:fld id="{CF3F5FF5-003D-49C7-8AA8-32F0386C2E23}" type="slidenum">
               <a:rPr lang="en-US" smtClean="0"/>
-              <a:t>27</a:t>
+              <a:t>25</a:t>
             </a:fld>
             <a:endParaRPr lang="en-US"/>
           </a:p>
@@ -2692,7 +2622,7 @@
     </p:spTree>
     <p:extLst>
       <p:ext uri="{BB962C8B-B14F-4D97-AF65-F5344CB8AC3E}">
-        <p14:creationId xmlns:p14="http://schemas.microsoft.com/office/powerpoint/2010/main" val="3873681567"/>
+        <p14:creationId xmlns:p14="http://schemas.microsoft.com/office/powerpoint/2010/main" val="3967803277"/>
       </p:ext>
     </p:extLst>
   </p:cSld>
@@ -2747,53 +2677,28 @@
           <a:lstStyle/>
           <a:p>
             <a:r>
-              <a:rPr lang="ru-RU" dirty="0"/>
-              <a:t>Корпоративные сети важны не только как доступ к данным, но и как </a:t>
-            </a:r>
-            <a:r>
-              <a:rPr lang="ru-RU" b="1" dirty="0"/>
-              <a:t>среда общения</a:t>
-            </a:r>
-            <a:r>
-              <a:rPr lang="ru-RU" dirty="0"/>
-              <a:t>.</a:t>
+              <a:rPr lang="ru-RU" b="0" dirty="0"/>
+              <a:t>Корпоративные сети соединяют компьютеры внутри компаний, университетов, госучреждений. Их ключевая цель — совместное использование ресурсов.</a:t>
             </a:r>
           </a:p>
           <a:p>
             <a:br>
-              <a:rPr lang="ru-RU" dirty="0"/>
+              <a:rPr lang="ru-RU" b="0" dirty="0"/>
             </a:br>
             <a:r>
-              <a:rPr lang="ru-RU" dirty="0"/>
-              <a:t>Электронная почта стала стандартом взаимодействия в компаниях, хотя многие жалуются на её объём. Всё чаще используется </a:t>
-            </a:r>
-            <a:r>
-              <a:rPr lang="ru-RU" b="1" dirty="0"/>
-              <a:t>VoIP</a:t>
-            </a:r>
-            <a:r>
-              <a:rPr lang="ru-RU" dirty="0"/>
-              <a:t>, когда голос передаётся через IP-сети, что позволяет экономить на телефонных расходах.</a:t>
+              <a:rPr lang="ru-RU" b="0" dirty="0"/>
+              <a:t>Вместо множества отдельных принтеров выгоднее иметь один мощный сетевой принтер. Данные клиентов, складские остатки, финансовые отчёты хранятся в общих базах данных, к которым сотрудники могут обращаться с рабочих мест.</a:t>
             </a:r>
           </a:p>
           <a:p>
             <a:br>
-              <a:rPr lang="ru-RU" dirty="0"/>
+              <a:rPr lang="ru-RU" b="0" dirty="0"/>
             </a:br>
             <a:r>
-              <a:rPr lang="ru-RU" dirty="0"/>
-              <a:t>Видеоконференции и инструменты совместной работы делают возможными встречи и проекты между офисами в разных странах. Демонстрация рабочего стола, совместное редактирование документов в реальном времени — всё это снижает необходимость командировок и ускоряет процессы согласования.</a:t>
-            </a:r>
-          </a:p>
-          <a:p>
-            <a:br>
-              <a:rPr lang="ru-RU" dirty="0"/>
-            </a:br>
-            <a:r>
-              <a:rPr lang="ru-RU" dirty="0"/>
-              <a:t>Такие технологии уже выходят за рамки бизнеса — примером является телемедицина и другие формы удалённого взаимодействия.</a:t>
-            </a:r>
-            <a:endParaRPr lang="en-US" dirty="0"/>
+              <a:rPr lang="ru-RU" b="0" dirty="0"/>
+              <a:t>Зависимость бизнеса от сетей чрезвычайно высока: банк не сможет работать без своих систем даже несколько минут. Производственная линия, управляемая компьютером, остановится за секунды. Даже маленькие компании нуждаются в сети для доступа к документам и информации</a:t>
+            </a:r>
+            <a:endParaRPr lang="en-US" b="0" dirty="0"/>
           </a:p>
         </p:txBody>
       </p:sp>
@@ -2814,7 +2719,7 @@
           <a:p>
             <a:fld id="{CF3F5FF5-003D-49C7-8AA8-32F0386C2E23}" type="slidenum">
               <a:rPr lang="en-US" smtClean="0"/>
-              <a:t>28</a:t>
+              <a:t>26</a:t>
             </a:fld>
             <a:endParaRPr lang="en-US"/>
           </a:p>
@@ -2823,7 +2728,7 @@
     </p:spTree>
     <p:extLst>
       <p:ext uri="{BB962C8B-B14F-4D97-AF65-F5344CB8AC3E}">
-        <p14:creationId xmlns:p14="http://schemas.microsoft.com/office/powerpoint/2010/main" val="3355032031"/>
+        <p14:creationId xmlns:p14="http://schemas.microsoft.com/office/powerpoint/2010/main" val="2556046310"/>
       </p:ext>
     </p:extLst>
   </p:cSld>
@@ -2879,15 +2784,24 @@
           <a:p>
             <a:r>
               <a:rPr lang="ru-RU" dirty="0"/>
-              <a:t>Третье важное назначение корпоративных сетей — поддержка </a:t>
+              <a:t>В большой корпорации компьютеры и сотрудники физически разбросаны по миру. Тем не менее, сотруднику в одном городе может понадобиться доступ к базе данных, находящейся на другом континенте.</a:t>
+            </a:r>
+          </a:p>
+          <a:p>
+            <a:br>
+              <a:rPr lang="ru-RU" dirty="0"/>
+            </a:br>
+            <a:r>
+              <a:rPr lang="ru-RU" dirty="0"/>
+              <a:t>Для объединения удалённых участков в единую логическую сеть используются </a:t>
             </a:r>
             <a:r>
               <a:rPr lang="ru-RU" b="1" dirty="0"/>
-              <a:t>электронного бизнеса</a:t>
-            </a:r>
-            <a:r>
-              <a:rPr lang="ru-RU" dirty="0"/>
-              <a:t>.</a:t>
+              <a:t>VPN</a:t>
+            </a:r>
+            <a:r>
+              <a:rPr lang="ru-RU" dirty="0"/>
+              <a:t> — виртуальные частные сети. Они позволяют сотруднику работать с ресурсами компании так, как если бы он находился в «родном» офисе.</a:t>
             </a:r>
           </a:p>
           <a:p>
@@ -2896,24 +2810,15 @@
             </a:br>
             <a:r>
               <a:rPr lang="ru-RU" dirty="0"/>
-              <a:t>Компании предоставляют клиентам доступ к своим услугам через веб-сайты и приложения: покупка билетов, заказ книг, товаров, бронирование. Внутри цепочек поставок производители взаимодействуют с десятками поставщиков, посылая и получая </a:t>
+              <a:t>Внутри организации чаще всего используется модель </a:t>
             </a:r>
             <a:r>
               <a:rPr lang="ru-RU" b="1" dirty="0"/>
-              <a:t>электронные заказы</a:t>
-            </a:r>
-            <a:r>
-              <a:rPr lang="ru-RU" dirty="0"/>
-              <a:t>.</a:t>
-            </a:r>
-          </a:p>
-          <a:p>
-            <a:br>
-              <a:rPr lang="ru-RU" dirty="0"/>
-            </a:br>
-            <a:r>
-              <a:rPr lang="ru-RU" dirty="0"/>
-              <a:t>Это позволяет уменьшить запасы на складах, ускорить производство, лучше планировать поставки и снижать издержки. Фактически сеть становится «кровеносной системой» бизнеса, по которой циркулирует информация и команды.</a:t>
+              <a:t>клиент–сервер</a:t>
+            </a:r>
+            <a:r>
+              <a:rPr lang="ru-RU" dirty="0"/>
+              <a:t>: данные хранятся на мощных серверах в серверных комнатах, а сотрудники работают с ними через более простые рабочие станции. Это упрощает администрирование, резервное копирование и безопасность.</a:t>
             </a:r>
             <a:endParaRPr lang="en-US" dirty="0"/>
           </a:p>
@@ -2936,7 +2841,7 @@
           <a:p>
             <a:fld id="{CF3F5FF5-003D-49C7-8AA8-32F0386C2E23}" type="slidenum">
               <a:rPr lang="en-US" smtClean="0"/>
-              <a:t>29</a:t>
+              <a:t>27</a:t>
             </a:fld>
             <a:endParaRPr lang="en-US"/>
           </a:p>
@@ -2945,7 +2850,7 @@
     </p:spTree>
     <p:extLst>
       <p:ext uri="{BB962C8B-B14F-4D97-AF65-F5344CB8AC3E}">
-        <p14:creationId xmlns:p14="http://schemas.microsoft.com/office/powerpoint/2010/main" val="4257779369"/>
+        <p14:creationId xmlns:p14="http://schemas.microsoft.com/office/powerpoint/2010/main" val="3873681567"/>
       </p:ext>
     </p:extLst>
   </p:cSld>
@@ -3001,7 +2906,15 @@
           <a:p>
             <a:r>
               <a:rPr lang="ru-RU" dirty="0"/>
-              <a:t>Компьютерные сети очень различаются по размеру и назначению.</a:t>
+              <a:t>Корпоративные сети важны не только как доступ к данным, но и как </a:t>
+            </a:r>
+            <a:r>
+              <a:rPr lang="ru-RU" b="1" dirty="0"/>
+              <a:t>среда общения</a:t>
+            </a:r>
+            <a:r>
+              <a:rPr lang="ru-RU" dirty="0"/>
+              <a:t>.</a:t>
             </a:r>
           </a:p>
           <a:p>
@@ -3010,15 +2923,15 @@
             </a:br>
             <a:r>
               <a:rPr lang="ru-RU" dirty="0"/>
-              <a:t>С одного конца спектра — </a:t>
+              <a:t>Электронная почта стала стандартом взаимодействия в компаниях, хотя многие жалуются на её объём. Всё чаще используется </a:t>
             </a:r>
             <a:r>
               <a:rPr lang="ru-RU" b="1" dirty="0"/>
-              <a:t>персональные сети (PAN)</a:t>
-            </a:r>
-            <a:r>
-              <a:rPr lang="ru-RU" dirty="0"/>
-              <a:t>, которые соединяют устройства одного человека на расстоянии нескольких метров.</a:t>
+              <a:t>VoIP</a:t>
+            </a:r>
+            <a:r>
+              <a:rPr lang="ru-RU" dirty="0"/>
+              <a:t>, когда голос передаётся через IP-сети, что позволяет экономить на телефонных расходах.</a:t>
             </a:r>
           </a:p>
           <a:p>
@@ -3027,31 +2940,7 @@
             </a:br>
             <a:r>
               <a:rPr lang="ru-RU" dirty="0"/>
-              <a:t>Далее идут </a:t>
-            </a:r>
-            <a:r>
-              <a:rPr lang="ru-RU" b="1" dirty="0"/>
-              <a:t>локальные сети (LAN)</a:t>
-            </a:r>
-            <a:r>
-              <a:rPr lang="ru-RU" dirty="0"/>
-              <a:t>, охватывающие дом, офис или здание, и их частный случай — </a:t>
-            </a:r>
-            <a:r>
-              <a:rPr lang="ru-RU" b="1" dirty="0"/>
-              <a:t>домашние сети</a:t>
-            </a:r>
-            <a:r>
-              <a:rPr lang="ru-RU" dirty="0"/>
-              <a:t>, сейчас очень насыщенные устройствами </a:t>
-            </a:r>
-            <a:r>
-              <a:rPr lang="ru-RU" dirty="0" err="1"/>
-              <a:t>IoT</a:t>
-            </a:r>
-            <a:r>
-              <a:rPr lang="ru-RU" dirty="0"/>
-              <a:t>.</a:t>
+              <a:t>Видеоконференции и инструменты совместной работы делают возможными встречи и проекты между офисами в разных странах. Демонстрация рабочего стола, совместное редактирование документов в реальном времени — всё это снижает необходимость командировок и ускоряет процессы согласования.</a:t>
             </a:r>
           </a:p>
           <a:p>
@@ -3060,45 +2949,7 @@
             </a:br>
             <a:r>
               <a:rPr lang="ru-RU" dirty="0"/>
-              <a:t>На уровень выше — </a:t>
-            </a:r>
-            <a:r>
-              <a:rPr lang="ru-RU" b="1" dirty="0"/>
-              <a:t>городские сети (MAN)</a:t>
-            </a:r>
-            <a:r>
-              <a:rPr lang="ru-RU" dirty="0"/>
-              <a:t>, которые охватывают целый город (например, сети кабельного телевидения с доступом в интернет).</a:t>
-            </a:r>
-            <a:br>
-              <a:rPr lang="ru-RU" dirty="0"/>
-            </a:br>
-            <a:r>
-              <a:rPr lang="ru-RU" dirty="0"/>
-              <a:t>Ещё крупнее — </a:t>
-            </a:r>
-            <a:r>
-              <a:rPr lang="ru-RU" b="1" dirty="0"/>
-              <a:t>глобальные сети (WAN)</a:t>
-            </a:r>
-            <a:r>
-              <a:rPr lang="ru-RU" dirty="0"/>
-              <a:t>, соединяющие города, страны и континенты.</a:t>
-            </a:r>
-            <a:br>
-              <a:rPr lang="ru-RU" dirty="0"/>
-            </a:br>
-            <a:r>
-              <a:rPr lang="ru-RU" dirty="0"/>
-              <a:t>И, наконец, несколько разных сетей могут объединяться в </a:t>
-            </a:r>
-            <a:r>
-              <a:rPr lang="ru-RU" b="1" dirty="0"/>
-              <a:t>интерсети</a:t>
-            </a:r>
-            <a:r>
-              <a:rPr lang="ru-RU" dirty="0"/>
-              <a:t>, где взаимодействуют совершенно разные технологии и операторы. Дальше мы пройдёмся по этим уровням от «маленького» к «глобальному».</a:t>
+              <a:t>Такие технологии уже выходят за рамки бизнеса — примером является телемедицина и другие формы удалённого взаимодействия.</a:t>
             </a:r>
             <a:endParaRPr lang="en-US" dirty="0"/>
           </a:p>
@@ -3121,7 +2972,7 @@
           <a:p>
             <a:fld id="{CF3F5FF5-003D-49C7-8AA8-32F0386C2E23}" type="slidenum">
               <a:rPr lang="en-US" smtClean="0"/>
-              <a:t>31</a:t>
+              <a:t>28</a:t>
             </a:fld>
             <a:endParaRPr lang="en-US"/>
           </a:p>
@@ -3130,7 +2981,7 @@
     </p:spTree>
     <p:extLst>
       <p:ext uri="{BB962C8B-B14F-4D97-AF65-F5344CB8AC3E}">
-        <p14:creationId xmlns:p14="http://schemas.microsoft.com/office/powerpoint/2010/main" val="1609808435"/>
+        <p14:creationId xmlns:p14="http://schemas.microsoft.com/office/powerpoint/2010/main" val="3355032031"/>
       </p:ext>
     </p:extLst>
   </p:cSld>
@@ -3186,25 +3037,43 @@
           <a:p>
             <a:r>
               <a:rPr lang="ru-RU" dirty="0"/>
-              <a:t>Персональные сети — это самый малый тип сетей, предназначенный для связи нескольких устройств одного человека на небольшом расстоянии. В таких сетях чаще всего используется технология </a:t>
+              <a:t>Третье важное назначение корпоративных сетей — поддержка </a:t>
             </a:r>
             <a:r>
               <a:rPr lang="ru-RU" b="1" dirty="0"/>
-              <a:t>Bluetooth</a:t>
-            </a:r>
-            <a:r>
-              <a:rPr lang="ru-RU" dirty="0"/>
-              <a:t>, позволяющая автоматически находить устройства и устанавливать соединение без проводов.</a:t>
-            </a:r>
-          </a:p>
-          <a:p>
-            <a:endParaRPr lang="ru-RU" dirty="0"/>
-          </a:p>
-          <a:p>
-            <a:r>
-              <a:rPr lang="ru-RU" dirty="0"/>
-              <a:t>Bluetooth стал стандартом де-факто для подключения ежедневных аксессуаров — наушников, клавиатур, часов, фитнес-браслетов, автомобильных систем. Простота настройки и широкий набор поддерживаемых профилей сделали его основой современных PAN.</a:t>
-            </a:r>
+              <a:t>электронного бизнеса</a:t>
+            </a:r>
+            <a:r>
+              <a:rPr lang="ru-RU" dirty="0"/>
+              <a:t>.</a:t>
+            </a:r>
+          </a:p>
+          <a:p>
+            <a:br>
+              <a:rPr lang="ru-RU" dirty="0"/>
+            </a:br>
+            <a:r>
+              <a:rPr lang="ru-RU" dirty="0"/>
+              <a:t>Компании предоставляют клиентам доступ к своим услугам через веб-сайты и приложения: покупка билетов, заказ книг, товаров, бронирование. Внутри цепочек поставок производители взаимодействуют с десятками поставщиков, посылая и получая </a:t>
+            </a:r>
+            <a:r>
+              <a:rPr lang="ru-RU" b="1" dirty="0"/>
+              <a:t>электронные заказы</a:t>
+            </a:r>
+            <a:r>
+              <a:rPr lang="ru-RU" dirty="0"/>
+              <a:t>.</a:t>
+            </a:r>
+          </a:p>
+          <a:p>
+            <a:br>
+              <a:rPr lang="ru-RU" dirty="0"/>
+            </a:br>
+            <a:r>
+              <a:rPr lang="ru-RU" dirty="0"/>
+              <a:t>Это позволяет уменьшить запасы на складах, ускорить производство, лучше планировать поставки и снижать издержки. Фактически сеть становится «кровеносной системой» бизнеса, по которой циркулирует информация и команды.</a:t>
+            </a:r>
+            <a:endParaRPr lang="en-US" dirty="0"/>
           </a:p>
         </p:txBody>
       </p:sp>
@@ -3225,7 +3094,7 @@
           <a:p>
             <a:fld id="{CF3F5FF5-003D-49C7-8AA8-32F0386C2E23}" type="slidenum">
               <a:rPr lang="en-US" smtClean="0"/>
-              <a:t>32</a:t>
+              <a:t>29</a:t>
             </a:fld>
             <a:endParaRPr lang="en-US"/>
           </a:p>
@@ -3234,7 +3103,7 @@
     </p:spTree>
     <p:extLst>
       <p:ext uri="{BB962C8B-B14F-4D97-AF65-F5344CB8AC3E}">
-        <p14:creationId xmlns:p14="http://schemas.microsoft.com/office/powerpoint/2010/main" val="132534162"/>
+        <p14:creationId xmlns:p14="http://schemas.microsoft.com/office/powerpoint/2010/main" val="4257779369"/>
       </p:ext>
     </p:extLst>
   </p:cSld>
@@ -3290,7 +3159,7 @@
           <a:p>
             <a:r>
               <a:rPr lang="ru-RU" dirty="0"/>
-              <a:t>Первоначально компьютеры были большими, дорогими и полностью централизованными. Обычно вся организация использовала один вычислительный центр, куда пользователи приносили задачи для обработки. Такая модель была оправдана тем, что компьютеры стоили дорого, а их мощность распределить между многими пользователями было сложно.</a:t>
+              <a:t>На этом слайде прослеживается, как за последние три столетия менялись ведущие технологии, определяющие развитие общества.</a:t>
             </a:r>
           </a:p>
           <a:p>
@@ -3299,14 +3168,25 @@
             </a:br>
             <a:r>
               <a:rPr lang="ru-RU" dirty="0"/>
-              <a:t>Однако с развитием электроники стало возможным создавать небольшие, дешёвые устройства, и концепция централизованной обработки устарела.</a:t>
-            </a:r>
+              <a:t>В XVIII веке механизация производства и промышленная революция радикально изменили способы изготовления товаров.</a:t>
+            </a:r>
+          </a:p>
+          <a:p>
+            <a:endParaRPr lang="en-US" dirty="0"/>
+          </a:p>
+          <a:p>
+            <a:r>
+              <a:rPr lang="ru-RU" dirty="0"/>
+              <a:t>XIX век стал периодом, когда паровые двигатели дали человечеству невиданный ранее уровень производительности и мобильности.</a:t>
+            </a:r>
+          </a:p>
+          <a:p>
             <a:br>
               <a:rPr lang="ru-RU" dirty="0"/>
             </a:br>
             <a:r>
               <a:rPr lang="ru-RU" dirty="0"/>
-              <a:t>Организации начали использовать множество компьютеров, соединённых друг с другом для обмена данными. Это позволило распределять вычислительные задачи, хранить части данных на разных машинах и взаимодействовать в реальном времени. Так в практику вошёл термин «компьютерная сеть».</a:t>
+              <a:t>В XX веке ключевым ресурсом стала информация — её сбор, обработка и передача. Именно в этот период были созданы телефонные сети, радио, телевидение, произошёл стремительный рост вычислительной техники и появление интернета.</a:t>
             </a:r>
           </a:p>
           <a:p>
@@ -3315,7 +3195,7 @@
             </a:br>
             <a:r>
               <a:rPr lang="ru-RU" dirty="0"/>
-              <a:t>Современные центры обработки данных — это уже не один огромный компьютер, а тысячи соединённых серверов, работающих совместно.</a:t>
+              <a:t>Сегодня же, в XXI веке, мы наблюдаем слияние всех этих технологий. Грань между вычислениями, коммуникациями и хранением данных стирается, и никто не может точно сказать, какие формы примут технологии ближайшего будущего.</a:t>
             </a:r>
             <a:endParaRPr lang="en-US" dirty="0"/>
           </a:p>
@@ -3338,7 +3218,7 @@
           <a:p>
             <a:fld id="{CF3F5FF5-003D-49C7-8AA8-32F0386C2E23}" type="slidenum">
               <a:rPr lang="en-US" smtClean="0"/>
-              <a:t>4</a:t>
+              <a:t>3</a:t>
             </a:fld>
             <a:endParaRPr lang="en-US"/>
           </a:p>
@@ -3347,7 +3227,7 @@
     </p:spTree>
     <p:extLst>
       <p:ext uri="{BB962C8B-B14F-4D97-AF65-F5344CB8AC3E}">
-        <p14:creationId xmlns:p14="http://schemas.microsoft.com/office/powerpoint/2010/main" val="2392026601"/>
+        <p14:creationId xmlns:p14="http://schemas.microsoft.com/office/powerpoint/2010/main" val="336590847"/>
       </p:ext>
     </p:extLst>
   </p:cSld>
@@ -3401,20 +3281,7 @@
           <a:bodyPr/>
           <a:lstStyle/>
           <a:p>
-            <a:r>
-              <a:rPr lang="ru-RU" dirty="0"/>
-              <a:t>Локальные сети — основной тип сетей, с которым пользователи сталкиваются каждый день. Они объединяют устройства в пределах ограниченной территории — дома, офиса или лаборатории. Благодаря малым расстояниям LAN обеспечивают высокие скорости передачи, низкие задержки и надёжный обмен данными. </a:t>
-            </a:r>
-          </a:p>
-          <a:p>
-            <a:endParaRPr lang="ru-RU" dirty="0"/>
-          </a:p>
-          <a:p>
-            <a:r>
-              <a:rPr lang="ru-RU" dirty="0"/>
-              <a:t>Именно внутри LAN организуются совместная работа сотрудников, локальные сервисы и доступ к интернету через общий шлюз.</a:t>
-            </a:r>
-            <a:endParaRPr lang="en-US" dirty="0"/>
+            <a:endParaRPr lang="en-US"/>
           </a:p>
         </p:txBody>
       </p:sp>
@@ -3435,7 +3302,7 @@
           <a:p>
             <a:fld id="{CF3F5FF5-003D-49C7-8AA8-32F0386C2E23}" type="slidenum">
               <a:rPr lang="en-US" smtClean="0"/>
-              <a:t>33</a:t>
+              <a:t>30</a:t>
             </a:fld>
             <a:endParaRPr lang="en-US"/>
           </a:p>
@@ -3444,7 +3311,7 @@
     </p:spTree>
     <p:extLst>
       <p:ext uri="{BB962C8B-B14F-4D97-AF65-F5344CB8AC3E}">
-        <p14:creationId xmlns:p14="http://schemas.microsoft.com/office/powerpoint/2010/main" val="1803981176"/>
+        <p14:creationId xmlns:p14="http://schemas.microsoft.com/office/powerpoint/2010/main" val="2526752808"/>
       </p:ext>
     </p:extLst>
   </p:cSld>
@@ -3500,103 +3367,105 @@
           <a:p>
             <a:r>
               <a:rPr lang="ru-RU" dirty="0"/>
-              <a:t>Беспроводные локальные сети — это самый удобный и распространённый сегодня способ подключения устройств в доме, офисе и общественных пространствах. </a:t>
-            </a:r>
-          </a:p>
-          <a:p>
-            <a:r>
-              <a:rPr lang="ru-RU" dirty="0"/>
-              <a:t>Основная технология здесь — </a:t>
-            </a:r>
-            <a:r>
-              <a:rPr lang="ru-RU" b="1" dirty="0" err="1"/>
-              <a:t>Wi</a:t>
+              <a:t>Компьютерные сети очень различаются по размеру и назначению.</a:t>
+            </a:r>
+          </a:p>
+          <a:p>
+            <a:br>
+              <a:rPr lang="ru-RU" dirty="0"/>
+            </a:br>
+            <a:r>
+              <a:rPr lang="ru-RU" dirty="0"/>
+              <a:t>С одного конца спектра — </a:t>
             </a:r>
             <a:r>
               <a:rPr lang="ru-RU" b="1" dirty="0"/>
-              <a:t>-Fi</a:t>
-            </a:r>
-            <a:r>
-              <a:rPr lang="ru-RU" dirty="0"/>
-              <a:t>, стандартизированная как IEEE 802.11. Для беспроводных LAN разработано множество вариаций стандарта: от ранних 802.11b с десятками мегабит в секунду до современных 802.11ac/</a:t>
+              <a:t>персональные сети (PAN)</a:t>
+            </a:r>
+            <a:r>
+              <a:rPr lang="ru-RU" dirty="0"/>
+              <a:t>, которые соединяют устройства одного человека на расстоянии нескольких метров.</a:t>
+            </a:r>
+          </a:p>
+          <a:p>
+            <a:br>
+              <a:rPr lang="ru-RU" dirty="0"/>
+            </a:br>
+            <a:r>
+              <a:rPr lang="ru-RU" dirty="0"/>
+              <a:t>Далее идут </a:t>
+            </a:r>
+            <a:r>
+              <a:rPr lang="ru-RU" b="1" dirty="0"/>
+              <a:t>локальные сети (LAN)</a:t>
+            </a:r>
+            <a:r>
+              <a:rPr lang="ru-RU" dirty="0"/>
+              <a:t>, охватывающие дом, офис или здание, и их частный случай — </a:t>
+            </a:r>
+            <a:r>
+              <a:rPr lang="ru-RU" b="1" dirty="0"/>
+              <a:t>домашние сети</a:t>
+            </a:r>
+            <a:r>
+              <a:rPr lang="ru-RU" dirty="0"/>
+              <a:t>, сейчас очень насыщенные устройствами </a:t>
             </a:r>
             <a:r>
               <a:rPr lang="ru-RU" dirty="0" err="1"/>
-              <a:t>ax</a:t>
-            </a:r>
-            <a:r>
-              <a:rPr lang="ru-RU" dirty="0"/>
-              <a:t>, которые обеспечивают скорости в гигабитном диапазоне. Все они используют радиоволны, поэтому устройства могут подключаться без кабелей.</a:t>
-            </a:r>
-          </a:p>
-          <a:p>
-            <a:endParaRPr lang="ru-RU" dirty="0"/>
-          </a:p>
-          <a:p>
-            <a:r>
-              <a:rPr lang="ru-RU" dirty="0"/>
-              <a:t>Обычно беспроводная LAN имеет центральный элемент — </a:t>
+              <a:t>IoT</a:t>
+            </a:r>
+            <a:r>
+              <a:rPr lang="ru-RU" dirty="0"/>
+              <a:t>.</a:t>
+            </a:r>
+          </a:p>
+          <a:p>
+            <a:br>
+              <a:rPr lang="ru-RU" dirty="0"/>
+            </a:br>
+            <a:r>
+              <a:rPr lang="ru-RU" dirty="0"/>
+              <a:t>На уровень выше — </a:t>
             </a:r>
             <a:r>
               <a:rPr lang="ru-RU" b="1" dirty="0"/>
-              <a:t>точку доступа (Access Point)</a:t>
-            </a:r>
-            <a:r>
-              <a:rPr lang="ru-RU" dirty="0"/>
-              <a:t>. Устройства подключаются именно к ней и передают трафик через неё, в том числе в интернет или проводную часть сети. Это делает архитектуру простой и понятной: точка доступа выступает в роли «центрального узла», через который проходят все пакеты.</a:t>
-            </a:r>
-          </a:p>
-          <a:p>
-            <a:endParaRPr lang="ru-RU" dirty="0"/>
-          </a:p>
-          <a:p>
-            <a:r>
-              <a:rPr lang="ru-RU" dirty="0"/>
-              <a:t>Однако в крупных помещениях или на больших территориях часто применяют </a:t>
+              <a:t>городские сети (MAN)</a:t>
+            </a:r>
+            <a:r>
+              <a:rPr lang="ru-RU" dirty="0"/>
+              <a:t>, которые охватывают целый город (например, сети кабельного телевидения с доступом в интернет).</a:t>
+            </a:r>
+            <a:br>
+              <a:rPr lang="ru-RU" dirty="0"/>
+            </a:br>
+            <a:r>
+              <a:rPr lang="ru-RU" dirty="0"/>
+              <a:t>Ещё крупнее — </a:t>
             </a:r>
             <a:r>
               <a:rPr lang="ru-RU" b="1" dirty="0"/>
-              <a:t>ячеистые, или </a:t>
-            </a:r>
-            <a:r>
-              <a:rPr lang="ru-RU" b="1" dirty="0" err="1"/>
-              <a:t>mesh</a:t>
+              <a:t>глобальные сети (WAN)</a:t>
+            </a:r>
+            <a:r>
+              <a:rPr lang="ru-RU" dirty="0"/>
+              <a:t>, соединяющие города, страны и континенты.</a:t>
+            </a:r>
+            <a:br>
+              <a:rPr lang="ru-RU" dirty="0"/>
+            </a:br>
+            <a:r>
+              <a:rPr lang="ru-RU" dirty="0"/>
+              <a:t>И, наконец, несколько разных сетей могут объединяться в </a:t>
             </a:r>
             <a:r>
               <a:rPr lang="ru-RU" b="1" dirty="0"/>
-              <a:t>-сети</a:t>
-            </a:r>
-            <a:r>
-              <a:rPr lang="ru-RU" dirty="0"/>
-              <a:t>. В таких сетях множество узлов могут ретранслировать трафик друг другу, создавая гибкую многозвенную структуру. Это позволяет расширять покрытие без протяжки кабелей и обеспечивает более стабильное соединение в сложных условиях — например, в больших домах, на складах или в общественных пространствах.</a:t>
-            </a:r>
-          </a:p>
-          <a:p>
-            <a:endParaRPr lang="ru-RU" dirty="0"/>
-          </a:p>
-          <a:p>
-            <a:r>
-              <a:rPr lang="ru-RU" dirty="0"/>
-              <a:t>Главные преимущества </a:t>
-            </a:r>
-            <a:r>
-              <a:rPr lang="ru-RU" dirty="0" err="1"/>
-              <a:t>Wi</a:t>
-            </a:r>
-            <a:r>
-              <a:rPr lang="ru-RU" dirty="0"/>
-              <a:t>-Fi — это </a:t>
-            </a:r>
-            <a:r>
-              <a:rPr lang="ru-RU" b="1" dirty="0"/>
-              <a:t>простота развёртывания и высокая мобильность устройств</a:t>
-            </a:r>
-            <a:r>
-              <a:rPr lang="ru-RU" dirty="0"/>
-              <a:t>. Пользователи могут перемещаться, оставаясь подключёнными, а организациям не нужно прокладывать кабели к каждому рабочему месту. При этом беспроводные LAN предъявляют более высокие требования к настройке безопасности и могут быть чувствительны к помехам, поэтому грамотная установка точек доступа и выбор частот — важная часть их эксплуатации.</a:t>
-            </a:r>
-          </a:p>
-          <a:p>
+              <a:t>интерсети</a:t>
+            </a:r>
+            <a:r>
+              <a:rPr lang="ru-RU" dirty="0"/>
+              <a:t>, где взаимодействуют совершенно разные технологии и операторы. Дальше мы пройдёмся по этим уровням от «маленького» к «глобальному».</a:t>
+            </a:r>
             <a:endParaRPr lang="en-US" dirty="0"/>
           </a:p>
         </p:txBody>
@@ -3618,7 +3487,7 @@
           <a:p>
             <a:fld id="{CF3F5FF5-003D-49C7-8AA8-32F0386C2E23}" type="slidenum">
               <a:rPr lang="en-US" smtClean="0"/>
-              <a:t>34</a:t>
+              <a:t>31</a:t>
             </a:fld>
             <a:endParaRPr lang="en-US"/>
           </a:p>
@@ -3627,7 +3496,7 @@
     </p:spTree>
     <p:extLst>
       <p:ext uri="{BB962C8B-B14F-4D97-AF65-F5344CB8AC3E}">
-        <p14:creationId xmlns:p14="http://schemas.microsoft.com/office/powerpoint/2010/main" val="1237455003"/>
+        <p14:creationId xmlns:p14="http://schemas.microsoft.com/office/powerpoint/2010/main" val="1609808435"/>
       </p:ext>
     </p:extLst>
   </p:cSld>
@@ -3683,23 +3552,15 @@
           <a:p>
             <a:r>
               <a:rPr lang="ru-RU" dirty="0"/>
-              <a:t>Проводные локальные сети строятся преимущественно на основе стандарта </a:t>
+              <a:t>Персональные сети — это самый малый тип сетей, предназначенный для связи нескольких устройств одного человека на небольшом расстоянии. В таких сетях чаще всего используется технология </a:t>
             </a:r>
             <a:r>
               <a:rPr lang="ru-RU" b="1" dirty="0"/>
-              <a:t>Ethernet (IEEE 802.3)</a:t>
-            </a:r>
-            <a:r>
-              <a:rPr lang="ru-RU" dirty="0"/>
-              <a:t>, который уже много лет остаётся основой корпоративной и домашней инфраструктуры. Ethernet использует простую модель </a:t>
-            </a:r>
-            <a:r>
-              <a:rPr lang="ru-RU" b="1" dirty="0"/>
-              <a:t>точка-точка</a:t>
-            </a:r>
-            <a:r>
-              <a:rPr lang="ru-RU" dirty="0"/>
-              <a:t>: каждое устройство подключается к коммутатору по отдельному кабелю. Такой подход обеспечивает высокую стабильность, изоляцию потока данных и возможность развивать сеть, увеличивая её скорости — сегодня это от сотен мегабит до десятков гигабит в секунду.</a:t>
+              <a:t>Bluetooth</a:t>
+            </a:r>
+            <a:r>
+              <a:rPr lang="ru-RU" dirty="0"/>
+              <a:t>, позволяющая автоматически находить устройства и устанавливать соединение без проводов.</a:t>
             </a:r>
           </a:p>
           <a:p>
@@ -3708,72 +3569,8 @@
           <a:p>
             <a:r>
               <a:rPr lang="ru-RU" dirty="0"/>
-              <a:t>В центре проводной LAN всегда находится </a:t>
-            </a:r>
-            <a:r>
-              <a:rPr lang="ru-RU" b="1" dirty="0"/>
-              <a:t>коммутатор</a:t>
-            </a:r>
-            <a:r>
-              <a:rPr lang="ru-RU" dirty="0"/>
-              <a:t>. Он получает кадры и, анализируя MAC-адреса, определяет, на какой порт их переслать. Благодаря этому устройства не «мешают» друг другу, как раньше в общих кабельных средах. Коммутаторы можно объединять между собой, формируя иерархию, — это позволяет масштабировать сеть практически без ограничений.</a:t>
-            </a:r>
-          </a:p>
-          <a:p>
-            <a:endParaRPr lang="ru-RU" dirty="0"/>
-          </a:p>
-          <a:p>
-            <a:r>
-              <a:rPr lang="ru-RU" dirty="0"/>
-              <a:t>Поскольку можно случайно создать замкнутый контур между коммутаторами, Ethernet использует специальные </a:t>
-            </a:r>
-            <a:r>
-              <a:rPr lang="ru-RU" b="1" dirty="0"/>
-              <a:t>алгоритмы против зацикливания</a:t>
-            </a:r>
-            <a:r>
-              <a:rPr lang="ru-RU" dirty="0"/>
-              <a:t>, например </a:t>
-            </a:r>
-            <a:r>
-              <a:rPr lang="ru-RU" dirty="0" err="1"/>
-              <a:t>Spanning</a:t>
-            </a:r>
-            <a:r>
-              <a:rPr lang="ru-RU" dirty="0"/>
-              <a:t> </a:t>
-            </a:r>
-            <a:r>
-              <a:rPr lang="ru-RU" dirty="0" err="1"/>
-              <a:t>Tree</a:t>
-            </a:r>
-            <a:r>
-              <a:rPr lang="ru-RU" dirty="0"/>
-              <a:t>. Они гарантируют, что кадровый трафик не уйдёт в бесконечный цикл.</a:t>
-            </a:r>
-          </a:p>
-          <a:p>
-            <a:endParaRPr lang="ru-RU" dirty="0"/>
-          </a:p>
-          <a:p>
-            <a:r>
-              <a:rPr lang="ru-RU" dirty="0"/>
-              <a:t>Наконец, важной возможностью Ethernet-коммутаторов является поддержка </a:t>
-            </a:r>
-            <a:r>
-              <a:rPr lang="ru-RU" b="1" dirty="0"/>
-              <a:t>VLAN</a:t>
-            </a:r>
-            <a:r>
-              <a:rPr lang="ru-RU" dirty="0"/>
-              <a:t> — виртуальных локальных сетей. VLAN позволяют логически разделить одну физическую сеть на несколько независимых сегментов. Это удобно, когда, например, устройства разных отделов — бухгалтерии и инженерного отдела — расположены физически в одном помещении, но должны работать в разных подсетях. VLAN облегчает администрирование, улучшает безопасность и позволяет управлять трафиком более гибко.</a:t>
-            </a:r>
-          </a:p>
-          <a:p>
-            <a:endParaRPr lang="ru-RU" dirty="0"/>
-          </a:p>
-          <a:p>
-            <a:endParaRPr lang="en-US" dirty="0"/>
+              <a:t>Bluetooth стал стандартом де-факто для подключения ежедневных аксессуаров — наушников, клавиатур, часов, фитнес-браслетов, автомобильных систем. Простота настройки и широкий набор поддерживаемых профилей сделали его основой современных PAN.</a:t>
+            </a:r>
           </a:p>
         </p:txBody>
       </p:sp>
@@ -3794,7 +3591,7 @@
           <a:p>
             <a:fld id="{CF3F5FF5-003D-49C7-8AA8-32F0386C2E23}" type="slidenum">
               <a:rPr lang="en-US" smtClean="0"/>
-              <a:t>35</a:t>
+              <a:t>32</a:t>
             </a:fld>
             <a:endParaRPr lang="en-US"/>
           </a:p>
@@ -3803,7 +3600,7 @@
     </p:spTree>
     <p:extLst>
       <p:ext uri="{BB962C8B-B14F-4D97-AF65-F5344CB8AC3E}">
-        <p14:creationId xmlns:p14="http://schemas.microsoft.com/office/powerpoint/2010/main" val="2665407884"/>
+        <p14:creationId xmlns:p14="http://schemas.microsoft.com/office/powerpoint/2010/main" val="132534162"/>
       </p:ext>
     </p:extLst>
   </p:cSld>
@@ -3859,7 +3656,7 @@
           <a:p>
             <a:r>
               <a:rPr lang="ru-RU" dirty="0"/>
-              <a:t>Городские сети, или MAN, занимают промежуточное положение между локальными и глобальными сетями. Изначально они формировались на базе кабельных ТВ-сетей, где централизованная головная станция принимала сигнал и распределяла его по району. С развитием интернета операторы адаптировали эту инфраструктуру под двухсторонний широкополосный доступ, используя технологии вроде HFC и позже — WiMAX и современные LTE/5G.</a:t>
+              <a:t>Локальные сети — основной тип сетей, с которым пользователи сталкиваются каждый день. Они объединяют устройства в пределах ограниченной территории — дома, офиса или лаборатории. Благодаря малым расстояниям LAN обеспечивают высокие скорости передачи, низкие задержки и надёжный обмен данными. </a:t>
             </a:r>
           </a:p>
           <a:p>
@@ -3868,8 +3665,9 @@
           <a:p>
             <a:r>
               <a:rPr lang="ru-RU" dirty="0"/>
-              <a:t>MAN обеспечивает подключение тысяч домохозяйств и компаний в рамках одного города и служит связующим звеном между локальными сетями пользователей и магистральными линиями глобальных операторов.</a:t>
-            </a:r>
+              <a:t>Именно внутри LAN организуются совместная работа сотрудников, локальные сервисы и доступ к интернету через общий шлюз.</a:t>
+            </a:r>
+            <a:endParaRPr lang="en-US" dirty="0"/>
           </a:p>
         </p:txBody>
       </p:sp>
@@ -3890,7 +3688,7 @@
           <a:p>
             <a:fld id="{CF3F5FF5-003D-49C7-8AA8-32F0386C2E23}" type="slidenum">
               <a:rPr lang="en-US" smtClean="0"/>
-              <a:t>36</a:t>
+              <a:t>33</a:t>
             </a:fld>
             <a:endParaRPr lang="en-US"/>
           </a:p>
@@ -3899,7 +3697,7 @@
     </p:spTree>
     <p:extLst>
       <p:ext uri="{BB962C8B-B14F-4D97-AF65-F5344CB8AC3E}">
-        <p14:creationId xmlns:p14="http://schemas.microsoft.com/office/powerpoint/2010/main" val="1186703832"/>
+        <p14:creationId xmlns:p14="http://schemas.microsoft.com/office/powerpoint/2010/main" val="1803981176"/>
       </p:ext>
     </p:extLst>
   </p:cSld>
@@ -3955,7 +3753,33 @@
           <a:p>
             <a:r>
               <a:rPr lang="ru-RU" dirty="0"/>
-              <a:t>Глобальные сети, или WAN, — это фундамент инфраструктуры, которая связывает удалённые офисы компаний, города, страны и даже континенты. В отличие от LAN, где устройства расположены в пределах одного здания, WAN должна обеспечивать передачу данных на расстоянии тысяч километров.</a:t>
+              <a:t>Беспроводные локальные сети — это самый удобный и распространённый сегодня способ подключения устройств в доме, офисе и общественных пространствах. </a:t>
+            </a:r>
+          </a:p>
+          <a:p>
+            <a:r>
+              <a:rPr lang="ru-RU" dirty="0"/>
+              <a:t>Основная технология здесь — </a:t>
+            </a:r>
+            <a:r>
+              <a:rPr lang="ru-RU" b="1" dirty="0" err="1"/>
+              <a:t>Wi</a:t>
+            </a:r>
+            <a:r>
+              <a:rPr lang="ru-RU" b="1" dirty="0"/>
+              <a:t>-Fi</a:t>
+            </a:r>
+            <a:r>
+              <a:rPr lang="ru-RU" dirty="0"/>
+              <a:t>, стандартизированная как IEEE 802.11. Для беспроводных LAN разработано множество вариаций стандарта: от ранних 802.11b с десятками мегабит в секунду до современных 802.11ac/</a:t>
+            </a:r>
+            <a:r>
+              <a:rPr lang="ru-RU" dirty="0" err="1"/>
+              <a:t>ax</a:t>
+            </a:r>
+            <a:r>
+              <a:rPr lang="ru-RU" dirty="0"/>
+              <a:t>, которые обеспечивают скорости в гигабитном диапазоне. Все они используют радиоволны, поэтому устройства могут подключаться без кабелей.</a:t>
             </a:r>
           </a:p>
           <a:p>
@@ -3964,23 +3788,40 @@
           <a:p>
             <a:r>
               <a:rPr lang="ru-RU" dirty="0"/>
-              <a:t>Технически WAN состоит из двух ключевых компонентов: </a:t>
+              <a:t>Обычно беспроводная LAN имеет центральный элемент — </a:t>
             </a:r>
             <a:r>
               <a:rPr lang="ru-RU" b="1" dirty="0"/>
-              <a:t>линий передачи</a:t>
-            </a:r>
-            <a:r>
-              <a:rPr lang="ru-RU" dirty="0"/>
-              <a:t> и </a:t>
+              <a:t>точку доступа (Access Point)</a:t>
+            </a:r>
+            <a:r>
+              <a:rPr lang="ru-RU" dirty="0"/>
+              <a:t>. Устройства подключаются именно к ней и передают трафик через неё, в том числе в интернет или проводную часть сети. Это делает архитектуру простой и понятной: точка доступа выступает в роли «центрального узла», через который проходят все пакеты.</a:t>
+            </a:r>
+          </a:p>
+          <a:p>
+            <a:endParaRPr lang="ru-RU" dirty="0"/>
+          </a:p>
+          <a:p>
+            <a:r>
+              <a:rPr lang="ru-RU" dirty="0"/>
+              <a:t>Однако в крупных помещениях или на больших территориях часто применяют </a:t>
             </a:r>
             <a:r>
               <a:rPr lang="ru-RU" b="1" dirty="0"/>
-              <a:t>маршрутизаторов</a:t>
-            </a:r>
-            <a:r>
-              <a:rPr lang="ru-RU" dirty="0"/>
-              <a:t>. Линии передачи — это физические каналы, по которым движутся биты: оптоволоконные кабели, коаксиал, радиорелейные системы или спутниковые каналы. Маршрутизаторы принимают пакеты, выбирают для них маршрут и перенаправляют дальше. Благодаря им сеть может находить оптимальный путь из одной точки мира в другую, а при сбоях автоматически подбирать альтернативные маршруты.</a:t>
+              <a:t>ячеистые, или </a:t>
+            </a:r>
+            <a:r>
+              <a:rPr lang="ru-RU" b="1" dirty="0" err="1"/>
+              <a:t>mesh</a:t>
+            </a:r>
+            <a:r>
+              <a:rPr lang="ru-RU" b="1" dirty="0"/>
+              <a:t>-сети</a:t>
+            </a:r>
+            <a:r>
+              <a:rPr lang="ru-RU" dirty="0"/>
+              <a:t>. В таких сетях множество узлов могут ретранслировать трафик друг другу, создавая гибкую многозвенную структуру. Это позволяет расширять покрытие без протяжки кабелей и обеспечивает более стабильное соединение в сложных условиях — например, в больших домах, на складах или в общественных пространствах.</a:t>
             </a:r>
           </a:p>
           <a:p>
@@ -3989,15 +3830,7 @@
           <a:p>
             <a:r>
               <a:rPr lang="ru-RU" dirty="0"/>
-              <a:t>Важно, что WAN соединяет </a:t>
-            </a:r>
-            <a:r>
-              <a:rPr lang="ru-RU" b="1" dirty="0"/>
-              <a:t>не отдельные компьютеры, а целые локальные сети</a:t>
-            </a:r>
-            <a:r>
-              <a:rPr lang="ru-RU" dirty="0"/>
-              <a:t>. Для WAN не важно, какой именно внутренний протокол использует каждая LAN — Ethernet, </a:t>
+              <a:t>Главные преимущества </a:t>
             </a:r>
             <a:r>
               <a:rPr lang="ru-RU" dirty="0" err="1"/>
@@ -4005,7 +3838,15 @@
             </a:r>
             <a:r>
               <a:rPr lang="ru-RU" dirty="0"/>
-              <a:t>-Fi или что-то иное. Это делает WAN универсальным связующим слоем между разнородными технологиями. WAN можно рассматривать как «транспортный каркас», который формирует основу для корпоративных сетей, операторских магистралей и, в конечном итоге, глобального интернета.</a:t>
+              <a:t>-Fi — это </a:t>
+            </a:r>
+            <a:r>
+              <a:rPr lang="ru-RU" b="1" dirty="0"/>
+              <a:t>простота развёртывания и высокая мобильность устройств</a:t>
+            </a:r>
+            <a:r>
+              <a:rPr lang="ru-RU" dirty="0"/>
+              <a:t>. Пользователи могут перемещаться, оставаясь подключёнными, а организациям не нужно прокладывать кабели к каждому рабочему месту. При этом беспроводные LAN предъявляют более высокие требования к настройке безопасности и могут быть чувствительны к помехам, поэтому грамотная установка точек доступа и выбор частот — важная часть их эксплуатации.</a:t>
             </a:r>
           </a:p>
           <a:p>
@@ -4030,7 +3871,7 @@
           <a:p>
             <a:fld id="{CF3F5FF5-003D-49C7-8AA8-32F0386C2E23}" type="slidenum">
               <a:rPr lang="en-US" smtClean="0"/>
-              <a:t>37</a:t>
+              <a:t>34</a:t>
             </a:fld>
             <a:endParaRPr lang="en-US"/>
           </a:p>
@@ -4039,7 +3880,7 @@
     </p:spTree>
     <p:extLst>
       <p:ext uri="{BB962C8B-B14F-4D97-AF65-F5344CB8AC3E}">
-        <p14:creationId xmlns:p14="http://schemas.microsoft.com/office/powerpoint/2010/main" val="1337497090"/>
+        <p14:creationId xmlns:p14="http://schemas.microsoft.com/office/powerpoint/2010/main" val="1237455003"/>
       </p:ext>
     </p:extLst>
   </p:cSld>
@@ -4095,7 +3936,23 @@
           <a:p>
             <a:r>
               <a:rPr lang="ru-RU" dirty="0"/>
-              <a:t>VPN — это технология, которая позволяет использовать обычный интернет как канал связи между филиалами компании, но делать это безопасно. С помощью туннелирования и шифрования поверх публичной сети создаётся логически изолированная «виртуальная» приватная сеть. Это существенно дешевле, чем арендовать выделенные линии, однако качество соединения начинает зависеть от пропускной способности и задержек в интернете, которые пользователь не контролирует.</a:t>
+              <a:t>Проводные локальные сети строятся преимущественно на основе стандарта </a:t>
+            </a:r>
+            <a:r>
+              <a:rPr lang="ru-RU" b="1" dirty="0"/>
+              <a:t>Ethernet (IEEE 802.3)</a:t>
+            </a:r>
+            <a:r>
+              <a:rPr lang="ru-RU" dirty="0"/>
+              <a:t>, который уже много лет остаётся основой корпоративной и домашней инфраструктуры. Ethernet использует простую модель </a:t>
+            </a:r>
+            <a:r>
+              <a:rPr lang="ru-RU" b="1" dirty="0"/>
+              <a:t>точка-точка</a:t>
+            </a:r>
+            <a:r>
+              <a:rPr lang="ru-RU" dirty="0"/>
+              <a:t>: каждое устройство подключается к коммутатору по отдельному кабелю. Такой подход обеспечивает высокую стабильность, изоляцию потока данных и возможность развивать сеть, увеличивая её скорости — сегодня это от сотен мегабит до десятков гигабит в секунду.</a:t>
             </a:r>
           </a:p>
           <a:p>
@@ -4104,7 +3961,15 @@
           <a:p>
             <a:r>
               <a:rPr lang="ru-RU" dirty="0"/>
-              <a:t>SD-WAN — эволюция подхода к построению WAN. Здесь сеть управляется централизованно через программный контроллер, который анализирует состояние каналов связи в реальном времени. SD-WAN может одновременно использовать несколько разных каналов — например, выделенную оптоволоконную линию, резервный интернет-канал и LTE/5G. Система сама выбирает оптимальный маршрут для каждого типа трафика: критически важные данные отправляет через стабильный канал, менее чувствительные — через более дешёвый.</a:t>
+              <a:t>В центре проводной LAN всегда находится </a:t>
+            </a:r>
+            <a:r>
+              <a:rPr lang="ru-RU" b="1" dirty="0"/>
+              <a:t>коммутатор</a:t>
+            </a:r>
+            <a:r>
+              <a:rPr lang="ru-RU" dirty="0"/>
+              <a:t>. Он получает кадры и, анализируя MAC-адреса, определяет, на какой порт их переслать. Благодаря этому устройства не «мешают» друг другу, как раньше в общих кабельных средах. Коммутаторы можно объединять между собой, формируя иерархию, — это позволяет масштабировать сеть практически без ограничений.</a:t>
             </a:r>
           </a:p>
           <a:p>
@@ -4113,8 +3978,52 @@
           <a:p>
             <a:r>
               <a:rPr lang="ru-RU" dirty="0"/>
-              <a:t>Это позволяет организациям соблюдать SLA, гибко масштабировать сеть и существенно экономить средства. Фактически SD-WAN превращает географически распределённую сеть в управляемую «облачную» инфраструктуру, где маршрутизация и приоритизация трафика определяются программой, а не вручную настроенным оборудованием.</a:t>
-            </a:r>
+              <a:t>Поскольку можно случайно создать замкнутый контур между коммутаторами, Ethernet использует специальные </a:t>
+            </a:r>
+            <a:r>
+              <a:rPr lang="ru-RU" b="1" dirty="0"/>
+              <a:t>алгоритмы против зацикливания</a:t>
+            </a:r>
+            <a:r>
+              <a:rPr lang="ru-RU" dirty="0"/>
+              <a:t>, например </a:t>
+            </a:r>
+            <a:r>
+              <a:rPr lang="ru-RU" dirty="0" err="1"/>
+              <a:t>Spanning</a:t>
+            </a:r>
+            <a:r>
+              <a:rPr lang="ru-RU" dirty="0"/>
+              <a:t> </a:t>
+            </a:r>
+            <a:r>
+              <a:rPr lang="ru-RU" dirty="0" err="1"/>
+              <a:t>Tree</a:t>
+            </a:r>
+            <a:r>
+              <a:rPr lang="ru-RU" dirty="0"/>
+              <a:t>. Они гарантируют, что кадровый трафик не уйдёт в бесконечный цикл.</a:t>
+            </a:r>
+          </a:p>
+          <a:p>
+            <a:endParaRPr lang="ru-RU" dirty="0"/>
+          </a:p>
+          <a:p>
+            <a:r>
+              <a:rPr lang="ru-RU" dirty="0"/>
+              <a:t>Наконец, важной возможностью Ethernet-коммутаторов является поддержка </a:t>
+            </a:r>
+            <a:r>
+              <a:rPr lang="ru-RU" b="1" dirty="0"/>
+              <a:t>VLAN</a:t>
+            </a:r>
+            <a:r>
+              <a:rPr lang="ru-RU" dirty="0"/>
+              <a:t> — виртуальных локальных сетей. VLAN позволяют логически разделить одну физическую сеть на несколько независимых сегментов. Это удобно, когда, например, устройства разных отделов — бухгалтерии и инженерного отдела — расположены физически в одном помещении, но должны работать в разных подсетях. VLAN облегчает администрирование, улучшает безопасность и позволяет управлять трафиком более гибко.</a:t>
+            </a:r>
+          </a:p>
+          <a:p>
+            <a:endParaRPr lang="ru-RU" dirty="0"/>
           </a:p>
           <a:p>
             <a:endParaRPr lang="en-US" dirty="0"/>
@@ -4138,7 +4047,7 @@
           <a:p>
             <a:fld id="{CF3F5FF5-003D-49C7-8AA8-32F0386C2E23}" type="slidenum">
               <a:rPr lang="en-US" smtClean="0"/>
-              <a:t>38</a:t>
+              <a:t>35</a:t>
             </a:fld>
             <a:endParaRPr lang="en-US"/>
           </a:p>
@@ -4147,7 +4056,7 @@
     </p:spTree>
     <p:extLst>
       <p:ext uri="{BB962C8B-B14F-4D97-AF65-F5344CB8AC3E}">
-        <p14:creationId xmlns:p14="http://schemas.microsoft.com/office/powerpoint/2010/main" val="2643120163"/>
+        <p14:creationId xmlns:p14="http://schemas.microsoft.com/office/powerpoint/2010/main" val="2665407884"/>
       </p:ext>
     </p:extLst>
   </p:cSld>
@@ -4203,7 +4112,7 @@
           <a:p>
             <a:r>
               <a:rPr lang="ru-RU" dirty="0"/>
-              <a:t>Объединённые сети — это способ связать вместе множество независимых сетей, которые могут различаться по архитектуре, протоколам и физическим технологиям. Интернет — лучший пример такого подхода: он объединяет домашние сети, корпоративные сети, сети мобильных операторов, дата-центры, кабельных провайдеров и многие другие.</a:t>
+              <a:t>Городские сети, или MAN, занимают промежуточное положение между локальными и глобальными сетями. Изначально они формировались на базе кабельных ТВ-сетей, где централизованная головная станция принимала сигнал и распределяла его по району. С развитием интернета операторы адаптировали эту инфраструктуру под двухсторонний широкополосный доступ, используя технологии вроде HFC и позже — WiMAX и современные LTE/5G.</a:t>
             </a:r>
           </a:p>
           <a:p>
@@ -4212,28 +4121,8 @@
           <a:p>
             <a:r>
               <a:rPr lang="ru-RU" dirty="0"/>
-              <a:t>Основная задача объединённой сети — обеспечить, чтобы пакет, отправленный из одной сети, мог добраться до другой, даже если эти сети построены совершенно по-разному. Для этого используется устройство, работающее на сетевом уровне, — </a:t>
-            </a:r>
-            <a:r>
-              <a:rPr lang="ru-RU" b="1" dirty="0"/>
-              <a:t>маршрутизатор</a:t>
-            </a:r>
-            <a:r>
-              <a:rPr lang="ru-RU" dirty="0"/>
-              <a:t>. Он не просто пересылает пакеты: он преобразует их между форматами разных технологий, выбирает маршруты в соответствии с протоколами маршрутизации, изолирует трафик разных сетей и обеспечивает надёжность.</a:t>
-            </a:r>
-          </a:p>
-          <a:p>
-            <a:endParaRPr lang="ru-RU" dirty="0"/>
-          </a:p>
-          <a:p>
-            <a:r>
-              <a:rPr lang="ru-RU" dirty="0"/>
-              <a:t>Маршрутизаторы — ключевой элемент интерсети. Именно они позволяют LAN и WAN взаимодействовать, имитировать единую структуру связи и поддерживать бесшовную доставку данных. Благодаря им интернет стал возможен как глобальная система из тысяч автономных сетей, функционирующих вместе.</a:t>
-            </a:r>
-          </a:p>
-          <a:p>
-            <a:endParaRPr lang="en-US" dirty="0"/>
+              <a:t>MAN обеспечивает подключение тысяч домохозяйств и компаний в рамках одного города и служит связующим звеном между локальными сетями пользователей и магистральными линиями глобальных операторов.</a:t>
+            </a:r>
           </a:p>
         </p:txBody>
       </p:sp>
@@ -4254,7 +4143,7 @@
           <a:p>
             <a:fld id="{CF3F5FF5-003D-49C7-8AA8-32F0386C2E23}" type="slidenum">
               <a:rPr lang="en-US" smtClean="0"/>
-              <a:t>39</a:t>
+              <a:t>36</a:t>
             </a:fld>
             <a:endParaRPr lang="en-US"/>
           </a:p>
@@ -4263,7 +4152,7 @@
     </p:spTree>
     <p:extLst>
       <p:ext uri="{BB962C8B-B14F-4D97-AF65-F5344CB8AC3E}">
-        <p14:creationId xmlns:p14="http://schemas.microsoft.com/office/powerpoint/2010/main" val="147444033"/>
+        <p14:creationId xmlns:p14="http://schemas.microsoft.com/office/powerpoint/2010/main" val="1186703832"/>
       </p:ext>
     </p:extLst>
   </p:cSld>
@@ -4317,43 +4206,60 @@
           <a:bodyPr/>
           <a:lstStyle/>
           <a:p>
-            <a:pPr marL="0" marR="0" lvl="0" indent="0" algn="l" defTabSz="914400" rtl="0" eaLnBrk="1" fontAlgn="auto" latinLnBrk="0" hangingPunct="1">
-              <a:lnSpc>
-                <a:spcPct val="100000"/>
-              </a:lnSpc>
-              <a:spcBef>
-                <a:spcPts val="0"/>
-              </a:spcBef>
-              <a:spcAft>
-                <a:spcPts val="0"/>
-              </a:spcAft>
-              <a:buClrTx/>
-              <a:buSzTx/>
-              <a:buFontTx/>
-              <a:buNone/>
-              <a:tabLst/>
-              <a:defRPr/>
-            </a:pPr>
-            <a:r>
-              <a:rPr lang="ru-RU" b="0" dirty="0"/>
-              <a:t>В теории мы уже обсудили типы сетей и их масштабы, но чтобы картина стала живой, нужно посмотреть на реальные примеры.</a:t>
-            </a:r>
-            <a:br>
-              <a:rPr lang="ru-RU" b="0" dirty="0"/>
-            </a:br>
-            <a:r>
-              <a:rPr lang="ru-RU" b="0" dirty="0"/>
-              <a:t>В этом разделе мы начнём с интернета — крупнейшей и самой известной интерсети, затем перейдём к мобильным сетям и </a:t>
-            </a:r>
-            <a:r>
-              <a:rPr lang="ru-RU" b="0" dirty="0" err="1"/>
+            <a:r>
+              <a:rPr lang="ru-RU" dirty="0"/>
+              <a:t>Глобальные сети, или WAN, — это фундамент инфраструктуры, которая связывает удалённые офисы компаний, города, страны и даже континенты. В отличие от LAN, где устройства расположены в пределах одного здания, WAN должна обеспечивать передачу данных на расстоянии тысяч километров.</a:t>
+            </a:r>
+          </a:p>
+          <a:p>
+            <a:endParaRPr lang="ru-RU" dirty="0"/>
+          </a:p>
+          <a:p>
+            <a:r>
+              <a:rPr lang="ru-RU" dirty="0"/>
+              <a:t>Технически WAN состоит из двух ключевых компонентов: </a:t>
+            </a:r>
+            <a:r>
+              <a:rPr lang="ru-RU" b="1" dirty="0"/>
+              <a:t>линий передачи</a:t>
+            </a:r>
+            <a:r>
+              <a:rPr lang="ru-RU" dirty="0"/>
+              <a:t> и </a:t>
+            </a:r>
+            <a:r>
+              <a:rPr lang="ru-RU" b="1" dirty="0"/>
+              <a:t>маршрутизаторов</a:t>
+            </a:r>
+            <a:r>
+              <a:rPr lang="ru-RU" dirty="0"/>
+              <a:t>. Линии передачи — это физические каналы, по которым движутся биты: оптоволоконные кабели, коаксиал, радиорелейные системы или спутниковые каналы. Маршрутизаторы принимают пакеты, выбирают для них маршрут и перенаправляют дальше. Благодаря им сеть может находить оптимальный путь из одной точки мира в другую, а при сбоях автоматически подбирать альтернативные маршруты.</a:t>
+            </a:r>
+          </a:p>
+          <a:p>
+            <a:endParaRPr lang="ru-RU" dirty="0"/>
+          </a:p>
+          <a:p>
+            <a:r>
+              <a:rPr lang="ru-RU" dirty="0"/>
+              <a:t>Важно, что WAN соединяет </a:t>
+            </a:r>
+            <a:r>
+              <a:rPr lang="ru-RU" b="1" dirty="0"/>
+              <a:t>не отдельные компьютеры, а целые локальные сети</a:t>
+            </a:r>
+            <a:r>
+              <a:rPr lang="ru-RU" dirty="0"/>
+              <a:t>. Для WAN не важно, какой именно внутренний протокол использует каждая LAN — Ethernet, </a:t>
+            </a:r>
+            <a:r>
+              <a:rPr lang="ru-RU" dirty="0" err="1"/>
               <a:t>Wi</a:t>
             </a:r>
             <a:r>
-              <a:rPr lang="ru-RU" b="0" dirty="0"/>
-              <a:t>-Fi как к довольно отличающимся по устройству технологиям.</a:t>
-            </a:r>
-            <a:endParaRPr lang="en-US" b="0" dirty="0"/>
+              <a:rPr lang="ru-RU" dirty="0"/>
+              <a:t>-Fi или что-то иное. Это делает WAN универсальным связующим слоем между разнородными технологиями. WAN можно рассматривать как «транспортный каркас», который формирует основу для корпоративных сетей, операторских магистралей и, в конечном итоге, глобального интернета.</a:t>
+            </a:r>
           </a:p>
           <a:p>
             <a:endParaRPr lang="en-US" dirty="0"/>
@@ -4377,7 +4283,7 @@
           <a:p>
             <a:fld id="{CF3F5FF5-003D-49C7-8AA8-32F0386C2E23}" type="slidenum">
               <a:rPr lang="en-US" smtClean="0"/>
-              <a:t>40</a:t>
+              <a:t>37</a:t>
             </a:fld>
             <a:endParaRPr lang="en-US"/>
           </a:p>
@@ -4386,7 +4292,7 @@
     </p:spTree>
     <p:extLst>
       <p:ext uri="{BB962C8B-B14F-4D97-AF65-F5344CB8AC3E}">
-        <p14:creationId xmlns:p14="http://schemas.microsoft.com/office/powerpoint/2010/main" val="3742096404"/>
+        <p14:creationId xmlns:p14="http://schemas.microsoft.com/office/powerpoint/2010/main" val="1337497090"/>
       </p:ext>
     </p:extLst>
   </p:cSld>
@@ -4440,7 +4346,31 @@
           <a:bodyPr/>
           <a:lstStyle/>
           <a:p>
-            <a:endParaRPr lang="en-US" b="0" dirty="0"/>
+            <a:r>
+              <a:rPr lang="ru-RU" dirty="0"/>
+              <a:t>VPN — это технология, которая позволяет использовать обычный интернет как канал связи между филиалами компании, но делать это безопасно. С помощью туннелирования и шифрования поверх публичной сети создаётся логически изолированная «виртуальная» приватная сеть. Это существенно дешевле, чем арендовать выделенные линии, однако качество соединения начинает зависеть от пропускной способности и задержек в интернете, которые пользователь не контролирует.</a:t>
+            </a:r>
+          </a:p>
+          <a:p>
+            <a:endParaRPr lang="ru-RU" dirty="0"/>
+          </a:p>
+          <a:p>
+            <a:r>
+              <a:rPr lang="ru-RU" dirty="0"/>
+              <a:t>SD-WAN — эволюция подхода к построению WAN. Здесь сеть управляется централизованно через программный контроллер, который анализирует состояние каналов связи в реальном времени. SD-WAN может одновременно использовать несколько разных каналов — например, выделенную оптоволоконную линию, резервный интернет-канал и LTE/5G. Система сама выбирает оптимальный маршрут для каждого типа трафика: критически важные данные отправляет через стабильный канал, менее чувствительные — через более дешёвый.</a:t>
+            </a:r>
+          </a:p>
+          <a:p>
+            <a:endParaRPr lang="ru-RU" dirty="0"/>
+          </a:p>
+          <a:p>
+            <a:r>
+              <a:rPr lang="ru-RU" dirty="0"/>
+              <a:t>Это позволяет организациям соблюдать SLA, гибко масштабировать сеть и существенно экономить средства. Фактически SD-WAN превращает географически распределённую сеть в управляемую «облачную» инфраструктуру, где маршрутизация и приоритизация трафика определяются программой, а не вручную настроенным оборудованием.</a:t>
+            </a:r>
+          </a:p>
+          <a:p>
+            <a:endParaRPr lang="en-US" dirty="0"/>
           </a:p>
         </p:txBody>
       </p:sp>
@@ -4461,7 +4391,7 @@
           <a:p>
             <a:fld id="{CF3F5FF5-003D-49C7-8AA8-32F0386C2E23}" type="slidenum">
               <a:rPr lang="en-US" smtClean="0"/>
-              <a:t>41</a:t>
+              <a:t>38</a:t>
             </a:fld>
             <a:endParaRPr lang="en-US"/>
           </a:p>
@@ -4470,7 +4400,7 @@
     </p:spTree>
     <p:extLst>
       <p:ext uri="{BB962C8B-B14F-4D97-AF65-F5344CB8AC3E}">
-        <p14:creationId xmlns:p14="http://schemas.microsoft.com/office/powerpoint/2010/main" val="1476768405"/>
+        <p14:creationId xmlns:p14="http://schemas.microsoft.com/office/powerpoint/2010/main" val="2643120163"/>
       </p:ext>
     </p:extLst>
   </p:cSld>
@@ -4525,35 +4455,38 @@
           <a:lstStyle/>
           <a:p>
             <a:r>
-              <a:rPr lang="ru-RU" b="0" dirty="0"/>
-              <a:t>Важно сразу развеять популярный миф: интернет — это не «одна большая сеть» в смысле единой инфраструктуры, принадлежащей одной компании или государству.</a:t>
-            </a:r>
-          </a:p>
-          <a:p>
-            <a:br>
-              <a:rPr lang="ru-RU" b="0" dirty="0"/>
-            </a:br>
-            <a:r>
-              <a:rPr lang="ru-RU" b="0" dirty="0"/>
-              <a:t>Интернет — это совокупность огромного числа сетей разных владельцев, которые договорились использовать общий набор протоколов и процедур взаимодействия.</a:t>
-            </a:r>
-            <a:br>
-              <a:rPr lang="ru-RU" b="0" dirty="0"/>
-            </a:br>
-            <a:r>
-              <a:rPr lang="ru-RU" b="0" dirty="0"/>
-              <a:t>Главный из этих протоколов — TCP/IP, но поверх него реализованы и другие сервисы: Всемирная паутина, электронная почта, DNS, файлообмен и т. д.</a:t>
-            </a:r>
-          </a:p>
-          <a:p>
-            <a:br>
-              <a:rPr lang="ru-RU" b="0" dirty="0"/>
-            </a:br>
-            <a:r>
-              <a:rPr lang="ru-RU" b="0" dirty="0"/>
-              <a:t>Ещё одна важная особенность: архитектура интернета не была заранее спроектирована как единый проект. Она складывалась постепенно: от военного эксперимента к научной сети и далее — к глобальной коммерческой системе.</a:t>
-            </a:r>
-            <a:endParaRPr lang="en-US" b="0" dirty="0"/>
+              <a:rPr lang="ru-RU" dirty="0"/>
+              <a:t>Объединённые сети — это способ связать вместе множество независимых сетей, которые могут различаться по архитектуре, протоколам и физическим технологиям. Интернет — лучший пример такого подхода: он объединяет домашние сети, корпоративные сети, сети мобильных операторов, дата-центры, кабельных провайдеров и многие другие.</a:t>
+            </a:r>
+          </a:p>
+          <a:p>
+            <a:endParaRPr lang="ru-RU" dirty="0"/>
+          </a:p>
+          <a:p>
+            <a:r>
+              <a:rPr lang="ru-RU" dirty="0"/>
+              <a:t>Основная задача объединённой сети — обеспечить, чтобы пакет, отправленный из одной сети, мог добраться до другой, даже если эти сети построены совершенно по-разному. Для этого используется устройство, работающее на сетевом уровне, — </a:t>
+            </a:r>
+            <a:r>
+              <a:rPr lang="ru-RU" b="1" dirty="0"/>
+              <a:t>маршрутизатор</a:t>
+            </a:r>
+            <a:r>
+              <a:rPr lang="ru-RU" dirty="0"/>
+              <a:t>. Он не просто пересылает пакеты: он преобразует их между форматами разных технологий, выбирает маршруты в соответствии с протоколами маршрутизации, изолирует трафик разных сетей и обеспечивает надёжность.</a:t>
+            </a:r>
+          </a:p>
+          <a:p>
+            <a:endParaRPr lang="ru-RU" dirty="0"/>
+          </a:p>
+          <a:p>
+            <a:r>
+              <a:rPr lang="ru-RU" dirty="0"/>
+              <a:t>Маршрутизаторы — ключевой элемент интерсети. Именно они позволяют LAN и WAN взаимодействовать, имитировать единую структуру связи и поддерживать бесшовную доставку данных. Благодаря им интернет стал возможен как глобальная система из тысяч автономных сетей, функционирующих вместе.</a:t>
+            </a:r>
+          </a:p>
+          <a:p>
+            <a:endParaRPr lang="en-US" dirty="0"/>
           </a:p>
         </p:txBody>
       </p:sp>
@@ -4574,7 +4507,7 @@
           <a:p>
             <a:fld id="{CF3F5FF5-003D-49C7-8AA8-32F0386C2E23}" type="slidenum">
               <a:rPr lang="en-US" smtClean="0"/>
-              <a:t>42</a:t>
+              <a:t>39</a:t>
             </a:fld>
             <a:endParaRPr lang="en-US"/>
           </a:p>
@@ -4583,7 +4516,7 @@
     </p:spTree>
     <p:extLst>
       <p:ext uri="{BB962C8B-B14F-4D97-AF65-F5344CB8AC3E}">
-        <p14:creationId xmlns:p14="http://schemas.microsoft.com/office/powerpoint/2010/main" val="1098068948"/>
+        <p14:creationId xmlns:p14="http://schemas.microsoft.com/office/powerpoint/2010/main" val="147444033"/>
       </p:ext>
     </p:extLst>
   </p:cSld>
@@ -4639,7 +4572,7 @@
           <a:p>
             <a:r>
               <a:rPr lang="ru-RU" dirty="0"/>
-              <a:t>На данном слайде приведено базовое определение компьютерной сети — системы автономных устройств, способных обмениваться информацией. Это могут быть персональные компьютеры, серверы, датчики, смартфоны и многое другое.</a:t>
+              <a:t>Первоначально компьютеры были большими, дорогими и полностью централизованными. Обычно вся организация использовала один вычислительный центр, куда пользователи приносили задачи для обработки. Такая модель была оправдана тем, что компьютеры стоили дорого, а их мощность распределить между многими пользователями было сложно.</a:t>
             </a:r>
           </a:p>
           <a:p>
@@ -4648,14 +4581,23 @@
             </a:br>
             <a:r>
               <a:rPr lang="ru-RU" dirty="0"/>
-              <a:t>Связь между устройствами осуществляется по различным средам передачи: медным кабелям, оптоволокну или радиоволнам. Выбор среды определяется требуемой скоростью, дальностью, стоимостью и условиями.</a:t>
+              <a:t>Однако с развитием электроники стало возможным создавать небольшие, дешёвые устройства, и концепция централизованной обработки устарела.</a:t>
             </a:r>
             <a:br>
               <a:rPr lang="ru-RU" dirty="0"/>
             </a:br>
             <a:r>
               <a:rPr lang="ru-RU" dirty="0"/>
-              <a:t>Сети могут быть как локальными, охватывающими одну комнату или дом, так и глобальными. Более того, сети объединяются в более крупные структуры — так построен интернет, который является по сути сетью сетей.</a:t>
+              <a:t>Организации начали использовать множество компьютеров, соединённых друг с другом для обмена данными. Это позволило распределять вычислительные задачи, хранить части данных на разных машинах и взаимодействовать в реальном времени. Так в практику вошёл термин «компьютерная сеть».</a:t>
+            </a:r>
+          </a:p>
+          <a:p>
+            <a:br>
+              <a:rPr lang="ru-RU" dirty="0"/>
+            </a:br>
+            <a:r>
+              <a:rPr lang="ru-RU" dirty="0"/>
+              <a:t>Современные центры обработки данных — это уже не один огромный компьютер, а тысячи соединённых серверов, работающих совместно.</a:t>
             </a:r>
             <a:endParaRPr lang="en-US" dirty="0"/>
           </a:p>
@@ -4678,7 +4620,7 @@
           <a:p>
             <a:fld id="{CF3F5FF5-003D-49C7-8AA8-32F0386C2E23}" type="slidenum">
               <a:rPr lang="en-US" smtClean="0"/>
-              <a:t>5</a:t>
+              <a:t>4</a:t>
             </a:fld>
             <a:endParaRPr lang="en-US"/>
           </a:p>
@@ -4687,7 +4629,7 @@
     </p:spTree>
     <p:extLst>
       <p:ext uri="{BB962C8B-B14F-4D97-AF65-F5344CB8AC3E}">
-        <p14:creationId xmlns:p14="http://schemas.microsoft.com/office/powerpoint/2010/main" val="783284507"/>
+        <p14:creationId xmlns:p14="http://schemas.microsoft.com/office/powerpoint/2010/main" val="2392026601"/>
       </p:ext>
     </p:extLst>
   </p:cSld>
@@ -4741,71 +4683,43 @@
           <a:bodyPr/>
           <a:lstStyle/>
           <a:p>
-            <a:r>
-              <a:rPr lang="ru-RU" dirty="0"/>
-              <a:t>Начало истории интернета связано не с удобством пользователей, а с задачами обороны. В 1950–1960-е годы США опасались, что ограниченное число ударов по крупным телефонным узлам разрушит систему связи, и военное командование потеряет возможность управлять войсками.</a:t>
+            <a:pPr marL="0" marR="0" lvl="0" indent="0" algn="l" defTabSz="914400" rtl="0" eaLnBrk="1" fontAlgn="auto" latinLnBrk="0" hangingPunct="1">
+              <a:lnSpc>
+                <a:spcPct val="100000"/>
+              </a:lnSpc>
+              <a:spcBef>
+                <a:spcPts val="0"/>
+              </a:spcBef>
+              <a:spcAft>
+                <a:spcPts val="0"/>
+              </a:spcAft>
+              <a:buClrTx/>
+              <a:buSzTx/>
+              <a:buFontTx/>
+              <a:buNone/>
+              <a:tabLst/>
+              <a:defRPr/>
+            </a:pPr>
+            <a:r>
+              <a:rPr lang="ru-RU" b="0" dirty="0"/>
+              <a:t>В теории мы уже обсудили типы сетей и их масштабы, но чтобы картина стала живой, нужно посмотреть на реальные примеры.</a:t>
             </a:r>
             <a:br>
-              <a:rPr lang="ru-RU" dirty="0"/>
+              <a:rPr lang="ru-RU" b="0" dirty="0"/>
             </a:br>
             <a:r>
-              <a:rPr lang="ru-RU" dirty="0"/>
-              <a:t>Телефонная сеть была иерархической, с минимальным резервированием. Уничтожение нескольких центральных АТС превращало страну в набор изолированных «островков связи».</a:t>
-            </a:r>
-          </a:p>
-          <a:p>
-            <a:endParaRPr lang="ru-RU" dirty="0"/>
-          </a:p>
-          <a:p>
-            <a:r>
-              <a:rPr lang="ru-RU" dirty="0"/>
-              <a:t>Чтобы решить эту проблему и в целом ускорить оборонные исследования, было создано агентство </a:t>
-            </a:r>
-            <a:r>
-              <a:rPr lang="ru-RU" b="1" dirty="0"/>
-              <a:t>ARPA</a:t>
-            </a:r>
-            <a:r>
-              <a:rPr lang="ru-RU" dirty="0"/>
-              <a:t>. Оно не строило лаборатории, а раздавало гранты университетам и компаниям, поддерживая самые перспективные идеи.</a:t>
-            </a:r>
-          </a:p>
-          <a:p>
-            <a:br>
-              <a:rPr lang="ru-RU" dirty="0"/>
-            </a:br>
-            <a:r>
-              <a:rPr lang="ru-RU" dirty="0"/>
-              <a:t>Одна из них принадлежала </a:t>
-            </a:r>
-            <a:r>
-              <a:rPr lang="ru-RU" b="1" dirty="0"/>
-              <a:t>Полу </a:t>
-            </a:r>
-            <a:r>
-              <a:rPr lang="ru-RU" b="1" dirty="0" err="1"/>
-              <a:t>Бэрану</a:t>
-            </a:r>
-            <a:r>
-              <a:rPr lang="ru-RU" dirty="0"/>
-              <a:t>: он предложил </a:t>
-            </a:r>
-            <a:r>
-              <a:rPr lang="ru-RU" b="1" dirty="0"/>
-              <a:t>распределённую сеть</a:t>
-            </a:r>
-            <a:r>
-              <a:rPr lang="ru-RU" dirty="0"/>
-              <a:t>, в которой много альтернативных маршрутов, а данные передаются не непрерывным аналоговым сигналом, а </a:t>
-            </a:r>
-            <a:r>
-              <a:rPr lang="ru-RU" b="1" dirty="0"/>
-              <a:t>цифровыми пакетами</a:t>
-            </a:r>
-            <a:r>
-              <a:rPr lang="ru-RU" dirty="0"/>
-              <a:t>. Тогда идея не была реализована, но именно она стала концептуальной основой будущего ARPANET и интернета.</a:t>
-            </a:r>
+              <a:rPr lang="ru-RU" b="0" dirty="0"/>
+              <a:t>В этом разделе мы начнём с интернета — крупнейшей и самой известной интерсети, затем перейдём к мобильным сетям и </a:t>
+            </a:r>
+            <a:r>
+              <a:rPr lang="ru-RU" b="0" dirty="0" err="1"/>
+              <a:t>Wi</a:t>
+            </a:r>
+            <a:r>
+              <a:rPr lang="ru-RU" b="0" dirty="0"/>
+              <a:t>-Fi как к довольно отличающимся по устройству технологиям.</a:t>
+            </a:r>
+            <a:endParaRPr lang="en-US" b="0" dirty="0"/>
           </a:p>
           <a:p>
             <a:endParaRPr lang="en-US" dirty="0"/>
@@ -4829,7 +4743,7 @@
           <a:p>
             <a:fld id="{CF3F5FF5-003D-49C7-8AA8-32F0386C2E23}" type="slidenum">
               <a:rPr lang="en-US" smtClean="0"/>
-              <a:t>43</a:t>
+              <a:t>40</a:t>
             </a:fld>
             <a:endParaRPr lang="en-US"/>
           </a:p>
@@ -4838,7 +4752,7 @@
     </p:spTree>
     <p:extLst>
       <p:ext uri="{BB962C8B-B14F-4D97-AF65-F5344CB8AC3E}">
-        <p14:creationId xmlns:p14="http://schemas.microsoft.com/office/powerpoint/2010/main" val="777991818"/>
+        <p14:creationId xmlns:p14="http://schemas.microsoft.com/office/powerpoint/2010/main" val="3742096404"/>
       </p:ext>
     </p:extLst>
   </p:cSld>
@@ -4892,115 +4806,7 @@
           <a:bodyPr/>
           <a:lstStyle/>
           <a:p>
-            <a:r>
-              <a:rPr lang="ru-RU" dirty="0"/>
-              <a:t>ARPA финансировала проект построения экспериментальной сети, который в итоге получил название </a:t>
-            </a:r>
-            <a:r>
-              <a:rPr lang="ru-RU" b="1" dirty="0"/>
-              <a:t>ARPANET</a:t>
-            </a:r>
-            <a:r>
-              <a:rPr lang="ru-RU" dirty="0"/>
-              <a:t>.</a:t>
-            </a:r>
-            <a:br>
-              <a:rPr lang="ru-RU" dirty="0"/>
-            </a:br>
-            <a:r>
-              <a:rPr lang="ru-RU" dirty="0"/>
-              <a:t>Ключевая архитектурная идея заключалась в разделении системы на:</a:t>
-            </a:r>
-          </a:p>
-          <a:p>
-            <a:r>
-              <a:rPr lang="ru-RU" b="1" dirty="0"/>
-              <a:t>хосты</a:t>
-            </a:r>
-            <a:r>
-              <a:rPr lang="ru-RU" dirty="0"/>
-              <a:t> — большие компьютеры университетов и лабораторий, где выполняются программы;</a:t>
-            </a:r>
-          </a:p>
-          <a:p>
-            <a:r>
-              <a:rPr lang="ru-RU" b="1" dirty="0"/>
-              <a:t>подсеть</a:t>
-            </a:r>
-            <a:r>
-              <a:rPr lang="ru-RU" dirty="0"/>
-              <a:t> — набор мини-компьютеров </a:t>
-            </a:r>
-            <a:r>
-              <a:rPr lang="ru-RU" b="1" dirty="0"/>
-              <a:t>IMP</a:t>
-            </a:r>
-            <a:r>
-              <a:rPr lang="ru-RU" dirty="0"/>
-              <a:t>, соединённых линиями связи и занимающихся только пересылкой сообщений.</a:t>
-            </a:r>
-          </a:p>
-          <a:p>
-            <a:endParaRPr lang="ru-RU" dirty="0"/>
-          </a:p>
-          <a:p>
-            <a:r>
-              <a:rPr lang="ru-RU" dirty="0"/>
-              <a:t>Хост посылает сообщение своему IMP, тот </a:t>
-            </a:r>
-            <a:r>
-              <a:rPr lang="ru-RU" b="1" dirty="0"/>
-              <a:t>разбивает его на пакеты</a:t>
-            </a:r>
-            <a:r>
-              <a:rPr lang="ru-RU" dirty="0"/>
-              <a:t> и по одному отправляет по сети. На промежуточных IMP пакеты полностью принимаются и затем пересылаются дальше (</a:t>
-            </a:r>
-            <a:r>
-              <a:rPr lang="ru-RU" dirty="0" err="1"/>
-              <a:t>store-and-forward</a:t>
-            </a:r>
-            <a:r>
-              <a:rPr lang="ru-RU" dirty="0"/>
-              <a:t>).</a:t>
-            </a:r>
-          </a:p>
-          <a:p>
-            <a:br>
-              <a:rPr lang="ru-RU" dirty="0"/>
-            </a:br>
-            <a:r>
-              <a:rPr lang="ru-RU" dirty="0"/>
-              <a:t>Связи между IMP делались </a:t>
-            </a:r>
-            <a:r>
-              <a:rPr lang="ru-RU" b="1" dirty="0"/>
-              <a:t>избыточными</a:t>
-            </a:r>
-            <a:r>
-              <a:rPr lang="ru-RU" dirty="0"/>
-              <a:t>: каждый узел имел несколько соседей, а пакет содержал полный адрес назначения. Это позволяло автоматически обходить повреждённые участки сети.</a:t>
-            </a:r>
-          </a:p>
-          <a:p>
-            <a:endParaRPr lang="ru-RU" dirty="0"/>
-          </a:p>
-          <a:p>
-            <a:r>
-              <a:rPr lang="ru-RU" dirty="0"/>
-              <a:t>В 1969 году заработала первая сеть из четырёх узлов (UCLA, SRI, UCSB, </a:t>
-            </a:r>
-            <a:r>
-              <a:rPr lang="ru-RU" dirty="0" err="1"/>
-              <a:t>Utah</a:t>
-            </a:r>
-            <a:r>
-              <a:rPr lang="ru-RU" dirty="0"/>
-              <a:t>). Дальше ARPANET быстро рос, охватывая всё больше университетов и исследовательских центров и становясь основным инструментом удалённого доступа и обмена данными в научной среде.</a:t>
-            </a:r>
-          </a:p>
-          <a:p>
-            <a:endParaRPr lang="en-US" dirty="0"/>
+            <a:endParaRPr lang="en-US" b="0" dirty="0"/>
           </a:p>
         </p:txBody>
       </p:sp>
@@ -5021,7 +4827,7 @@
           <a:p>
             <a:fld id="{CF3F5FF5-003D-49C7-8AA8-32F0386C2E23}" type="slidenum">
               <a:rPr lang="en-US" smtClean="0"/>
-              <a:t>44</a:t>
+              <a:t>41</a:t>
             </a:fld>
             <a:endParaRPr lang="en-US"/>
           </a:p>
@@ -5030,7 +4836,7 @@
     </p:spTree>
     <p:extLst>
       <p:ext uri="{BB962C8B-B14F-4D97-AF65-F5344CB8AC3E}">
-        <p14:creationId xmlns:p14="http://schemas.microsoft.com/office/powerpoint/2010/main" val="1878701977"/>
+        <p14:creationId xmlns:p14="http://schemas.microsoft.com/office/powerpoint/2010/main" val="1476768405"/>
       </p:ext>
     </p:extLst>
   </p:cSld>
@@ -5085,132 +4891,35 @@
           <a:lstStyle/>
           <a:p>
             <a:r>
-              <a:rPr lang="ru-RU" dirty="0"/>
-              <a:t>Когда ARPANET начали экспериментально соединять со спутниковыми и радиосетями, стало ясно, что её исходные протоколы не подходят для работы в </a:t>
-            </a:r>
-            <a:r>
-              <a:rPr lang="ru-RU" b="1" dirty="0"/>
-              <a:t>гетерогенной среде</a:t>
-            </a:r>
-            <a:r>
-              <a:rPr lang="ru-RU" dirty="0"/>
-              <a:t>.</a:t>
+              <a:rPr lang="ru-RU" b="0" dirty="0"/>
+              <a:t>Важно сразу развеять популярный миф: интернет — это не «одна большая сеть» в смысле единой инфраструктуры, принадлежащей одной компании или государству.</a:t>
             </a:r>
           </a:p>
           <a:p>
             <a:br>
-              <a:rPr lang="ru-RU" dirty="0"/>
+              <a:rPr lang="ru-RU" b="0" dirty="0"/>
             </a:br>
             <a:r>
-              <a:rPr lang="ru-RU" dirty="0"/>
-              <a:t>Ответом стал стек </a:t>
-            </a:r>
-            <a:r>
-              <a:rPr lang="ru-RU" b="1" dirty="0"/>
-              <a:t>TCP/IP</a:t>
-            </a:r>
-            <a:r>
-              <a:rPr lang="ru-RU" dirty="0"/>
-              <a:t>, разработанный специально для </a:t>
-            </a:r>
-            <a:r>
-              <a:rPr lang="ru-RU" b="1" dirty="0"/>
-              <a:t>интерсетей</a:t>
-            </a:r>
-            <a:r>
-              <a:rPr lang="ru-RU" dirty="0"/>
-              <a:t> — объединений разных сетей. TCP/IP скрывал особенности конкретной среды передачи и давал приложениям единый способ работы с сетью.</a:t>
-            </a:r>
-          </a:p>
-          <a:p>
-            <a:endParaRPr lang="ru-RU" dirty="0"/>
-          </a:p>
-          <a:p>
-            <a:r>
-              <a:rPr lang="ru-RU" dirty="0"/>
-              <a:t>ARPA профинансировала реализацию TCP/IP на разных системах, а команда в Беркли встроила его в </a:t>
-            </a:r>
-            <a:r>
-              <a:rPr lang="ru-RU" b="1" dirty="0" err="1"/>
-              <a:t>Berkeley</a:t>
-            </a:r>
-            <a:r>
-              <a:rPr lang="ru-RU" b="1" dirty="0"/>
-              <a:t> Unix (4.2BSD)</a:t>
-            </a:r>
-            <a:r>
-              <a:rPr lang="ru-RU" dirty="0"/>
-              <a:t> и предложила удобный API — </a:t>
-            </a:r>
-            <a:r>
-              <a:rPr lang="ru-RU" b="1" dirty="0"/>
-              <a:t>сокеты</a:t>
-            </a:r>
-            <a:r>
-              <a:rPr lang="ru-RU" dirty="0"/>
-              <a:t>. Это позволило университетам практически «из коробки» получать операционную систему с готовым интернет-стеком.</a:t>
-            </a:r>
-          </a:p>
-          <a:p>
-            <a:endParaRPr lang="ru-RU" dirty="0"/>
-          </a:p>
-          <a:p>
-            <a:r>
-              <a:rPr lang="ru-RU" dirty="0"/>
-              <a:t>Параллельно </a:t>
-            </a:r>
-            <a:r>
-              <a:rPr lang="ru-RU" b="1" dirty="0"/>
-              <a:t>NSF</a:t>
-            </a:r>
-            <a:r>
-              <a:rPr lang="ru-RU" dirty="0"/>
-              <a:t> создала свою научную сеть </a:t>
-            </a:r>
-            <a:r>
-              <a:rPr lang="ru-RU" b="1" dirty="0"/>
-              <a:t>NSFNET</a:t>
-            </a:r>
-            <a:r>
-              <a:rPr lang="ru-RU" dirty="0"/>
-              <a:t> на основе TCP/IP: опорная сеть соединяла суперкомпьютерные центры, а региональные сети подключали к ним тысячи научных организаций.</a:t>
-            </a:r>
-          </a:p>
-          <a:p>
+              <a:rPr lang="ru-RU" b="0" dirty="0"/>
+              <a:t>Интернет — это совокупность огромного числа сетей разных владельцев, которые договорились использовать общий набор протоколов и процедур взаимодействия.</a:t>
+            </a:r>
             <a:br>
-              <a:rPr lang="ru-RU" dirty="0"/>
+              <a:rPr lang="ru-RU" b="0" dirty="0"/>
             </a:br>
             <a:r>
-              <a:rPr lang="ru-RU" dirty="0"/>
-              <a:t>Позже появились </a:t>
-            </a:r>
-            <a:r>
-              <a:rPr lang="ru-RU" b="1" dirty="0"/>
-              <a:t>NAP (Network Access </a:t>
-            </a:r>
-            <a:r>
-              <a:rPr lang="ru-RU" b="1" dirty="0" err="1"/>
-              <a:t>Points</a:t>
-            </a:r>
-            <a:r>
-              <a:rPr lang="ru-RU" b="1" dirty="0"/>
-              <a:t>)</a:t>
-            </a:r>
-            <a:r>
-              <a:rPr lang="ru-RU" dirty="0"/>
-              <a:t> и коммерческие операторы, взявшие на себя роль опорной инфраструктуры. Государственные сети (ARPANET и NSFNET) постепенно ушли на второй план, а их архитектурные идеи и протоколы легли в основу </a:t>
-            </a:r>
-            <a:r>
-              <a:rPr lang="ru-RU" b="1" dirty="0"/>
-              <a:t>современного коммерческого интернета</a:t>
-            </a:r>
-            <a:r>
-              <a:rPr lang="ru-RU" dirty="0"/>
-              <a:t>.</a:t>
-            </a:r>
-          </a:p>
-          <a:p>
-            <a:endParaRPr lang="en-US" dirty="0"/>
+              <a:rPr lang="ru-RU" b="0" dirty="0"/>
+              <a:t>Главный из этих протоколов — TCP/IP, но поверх него реализованы и другие сервисы: Всемирная паутина, электронная почта, DNS, файлообмен и т. д.</a:t>
+            </a:r>
+          </a:p>
+          <a:p>
+            <a:br>
+              <a:rPr lang="ru-RU" b="0" dirty="0"/>
+            </a:br>
+            <a:r>
+              <a:rPr lang="ru-RU" b="0" dirty="0"/>
+              <a:t>Ещё одна важная особенность: архитектура интернета не была заранее спроектирована как единый проект. Она складывалась постепенно: от военного эксперимента к научной сети и далее — к глобальной коммерческой системе.</a:t>
+            </a:r>
+            <a:endParaRPr lang="en-US" b="0" dirty="0"/>
           </a:p>
         </p:txBody>
       </p:sp>
@@ -5231,7 +4940,7 @@
           <a:p>
             <a:fld id="{CF3F5FF5-003D-49C7-8AA8-32F0386C2E23}" type="slidenum">
               <a:rPr lang="en-US" smtClean="0"/>
-              <a:t>46</a:t>
+              <a:t>42</a:t>
             </a:fld>
             <a:endParaRPr lang="en-US"/>
           </a:p>
@@ -5240,7 +4949,7 @@
     </p:spTree>
     <p:extLst>
       <p:ext uri="{BB962C8B-B14F-4D97-AF65-F5344CB8AC3E}">
-        <p14:creationId xmlns:p14="http://schemas.microsoft.com/office/powerpoint/2010/main" val="41620134"/>
+        <p14:creationId xmlns:p14="http://schemas.microsoft.com/office/powerpoint/2010/main" val="1098068948"/>
       </p:ext>
     </p:extLst>
   </p:cSld>
@@ -5296,24 +5005,31 @@
           <a:p>
             <a:r>
               <a:rPr lang="ru-RU" dirty="0"/>
-              <a:t>На ранних этапах интернет был фактически инструментом научного сообщества: электронная почта, </a:t>
-            </a:r>
-            <a:r>
-              <a:rPr lang="ru-RU" dirty="0" err="1"/>
-              <a:t>Usenet</a:t>
-            </a:r>
-            <a:r>
-              <a:rPr lang="ru-RU" dirty="0"/>
-              <a:t>, удалённый доступ и FTP составляли основную часть трафика.</a:t>
-            </a:r>
-          </a:p>
-          <a:p>
+              <a:t>Начало истории интернета связано не с удобством пользователей, а с задачами обороны. В 1950–1960-е годы США опасались, что ограниченное число ударов по крупным телефонным узлам разрушит систему связи, и военное командование потеряет возможность управлять войсками.</a:t>
+            </a:r>
             <a:br>
               <a:rPr lang="ru-RU" dirty="0"/>
             </a:br>
             <a:r>
               <a:rPr lang="ru-RU" dirty="0"/>
-              <a:t>С появлением Всемирной паутины ситуация изменилась радикально — браузеры и веб-сервисы сделали интернет массовым.</a:t>
+              <a:t>Телефонная сеть была иерархической, с минимальным резервированием. Уничтожение нескольких центральных АТС превращало страну в набор изолированных «островков связи».</a:t>
+            </a:r>
+          </a:p>
+          <a:p>
+            <a:endParaRPr lang="ru-RU" dirty="0"/>
+          </a:p>
+          <a:p>
+            <a:r>
+              <a:rPr lang="ru-RU" dirty="0"/>
+              <a:t>Чтобы решить эту проблему и в целом ускорить оборонные исследования, было создано агентство </a:t>
+            </a:r>
+            <a:r>
+              <a:rPr lang="ru-RU" b="1" dirty="0"/>
+              <a:t>ARPA</a:t>
+            </a:r>
+            <a:r>
+              <a:rPr lang="ru-RU" dirty="0"/>
+              <a:t>. Оно не строило лаборатории, а раздавало гранты университетам и компаниям, поддерживая самые перспективные идеи.</a:t>
             </a:r>
           </a:p>
           <a:p>
@@ -5322,16 +5038,38 @@
             </a:br>
             <a:r>
               <a:rPr lang="ru-RU" dirty="0"/>
-              <a:t>Сегодня же основной объём трафика формирует </a:t>
+              <a:t>Одна из них принадлежала </a:t>
             </a:r>
             <a:r>
               <a:rPr lang="ru-RU" b="1" dirty="0"/>
-              <a:t>видео</a:t>
-            </a:r>
-            <a:r>
-              <a:rPr lang="ru-RU" dirty="0"/>
-              <a:t>, а важнейшую роль играют социальные и облачные сервисы. То есть характер нагрузки изменился от небольших текстовых сообщений к тяжёлым мультимедийным потокам — и это повлияло на архитектуру сети.</a:t>
-            </a:r>
+              <a:t>Полу </a:t>
+            </a:r>
+            <a:r>
+              <a:rPr lang="ru-RU" b="1" dirty="0" err="1"/>
+              <a:t>Бэрану</a:t>
+            </a:r>
+            <a:r>
+              <a:rPr lang="ru-RU" dirty="0"/>
+              <a:t>: он предложил </a:t>
+            </a:r>
+            <a:r>
+              <a:rPr lang="ru-RU" b="1" dirty="0"/>
+              <a:t>распределённую сеть</a:t>
+            </a:r>
+            <a:r>
+              <a:rPr lang="ru-RU" dirty="0"/>
+              <a:t>, в которой много альтернативных маршрутов, а данные передаются не непрерывным аналоговым сигналом, а </a:t>
+            </a:r>
+            <a:r>
+              <a:rPr lang="ru-RU" b="1" dirty="0"/>
+              <a:t>цифровыми пакетами</a:t>
+            </a:r>
+            <a:r>
+              <a:rPr lang="ru-RU" dirty="0"/>
+              <a:t>. Тогда идея не была реализована, но именно она стала концептуальной основой будущего ARPANET и интернета.</a:t>
+            </a:r>
+          </a:p>
+          <a:p>
             <a:endParaRPr lang="en-US" dirty="0"/>
           </a:p>
         </p:txBody>
@@ -5353,7 +5091,7 @@
           <a:p>
             <a:fld id="{CF3F5FF5-003D-49C7-8AA8-32F0386C2E23}" type="slidenum">
               <a:rPr lang="en-US" smtClean="0"/>
-              <a:t>47</a:t>
+              <a:t>43</a:t>
             </a:fld>
             <a:endParaRPr lang="en-US"/>
           </a:p>
@@ -5362,7 +5100,7 @@
     </p:spTree>
     <p:extLst>
       <p:ext uri="{BB962C8B-B14F-4D97-AF65-F5344CB8AC3E}">
-        <p14:creationId xmlns:p14="http://schemas.microsoft.com/office/powerpoint/2010/main" val="3205627191"/>
+        <p14:creationId xmlns:p14="http://schemas.microsoft.com/office/powerpoint/2010/main" val="777991818"/>
       </p:ext>
     </p:extLst>
   </p:cSld>
@@ -5418,16 +5156,76 @@
           <a:p>
             <a:r>
               <a:rPr lang="ru-RU" dirty="0"/>
-              <a:t>Современная интернет-экосистема состоит из множества независимых участников.</a:t>
+              <a:t>ARPA финансировала проект построения экспериментальной сети, который в итоге получил название </a:t>
+            </a:r>
+            <a:r>
+              <a:rPr lang="ru-RU" b="1" dirty="0"/>
+              <a:t>ARPANET</a:t>
+            </a:r>
+            <a:r>
+              <a:rPr lang="ru-RU" dirty="0"/>
+              <a:t>.</a:t>
             </a:r>
             <a:br>
               <a:rPr lang="ru-RU" dirty="0"/>
             </a:br>
             <a:r>
               <a:rPr lang="ru-RU" dirty="0"/>
-              <a:t>Пользователь подключается через домашнюю или мобильную сеть, затем его трафик попадает в точку присутствия (POP) интернет-провайдера. Далее пакет может идти либо внутри сети провайдера, либо перенаправляться через IXP, либо — при отсутствии прямых соглашений — через транзитного оператора.</a:t>
-            </a:r>
-            <a:endParaRPr lang="en-US" dirty="0"/>
+              <a:t>Ключевая архитектурная идея заключалась в разделении системы на:</a:t>
+            </a:r>
+          </a:p>
+          <a:p>
+            <a:r>
+              <a:rPr lang="ru-RU" b="1" dirty="0"/>
+              <a:t>хосты</a:t>
+            </a:r>
+            <a:r>
+              <a:rPr lang="ru-RU" dirty="0"/>
+              <a:t> — большие компьютеры университетов и лабораторий, где выполняются программы;</a:t>
+            </a:r>
+          </a:p>
+          <a:p>
+            <a:r>
+              <a:rPr lang="ru-RU" b="1" dirty="0"/>
+              <a:t>подсеть</a:t>
+            </a:r>
+            <a:r>
+              <a:rPr lang="ru-RU" dirty="0"/>
+              <a:t> — набор мини-компьютеров </a:t>
+            </a:r>
+            <a:r>
+              <a:rPr lang="ru-RU" b="1" dirty="0"/>
+              <a:t>IMP</a:t>
+            </a:r>
+            <a:r>
+              <a:rPr lang="ru-RU" dirty="0"/>
+              <a:t>, соединённых линиями связи и занимающихся только пересылкой сообщений.</a:t>
+            </a:r>
+          </a:p>
+          <a:p>
+            <a:endParaRPr lang="ru-RU" dirty="0"/>
+          </a:p>
+          <a:p>
+            <a:r>
+              <a:rPr lang="ru-RU" dirty="0"/>
+              <a:t>Хост посылает сообщение своему IMP, тот </a:t>
+            </a:r>
+            <a:r>
+              <a:rPr lang="ru-RU" b="1" dirty="0"/>
+              <a:t>разбивает его на пакеты</a:t>
+            </a:r>
+            <a:r>
+              <a:rPr lang="ru-RU" dirty="0"/>
+              <a:t> и по одному отправляет по сети. На промежуточных IMP пакеты полностью принимаются и затем пересылаются дальше (</a:t>
+            </a:r>
+            <a:r>
+              <a:rPr lang="ru-RU" dirty="0" err="1"/>
+              <a:t>store-and-forward</a:t>
+            </a:r>
+            <a:r>
+              <a:rPr lang="ru-RU" dirty="0"/>
+              <a:t>).</a:t>
+            </a:r>
           </a:p>
           <a:p>
             <a:br>
@@ -5435,9 +5233,33 @@
             </a:br>
             <a:r>
               <a:rPr lang="ru-RU" dirty="0"/>
-              <a:t>Контент чаще всего находится в крупных дата-центрах или на узлах CDN, которые специально расположены ближе к пользователям, чтобы уменьшить задержки и снизить нагрузку на магистральную инфраструктуру.</a:t>
-            </a:r>
-            <a:endParaRPr lang="en-US" dirty="0"/>
+              <a:t>Связи между IMP делались </a:t>
+            </a:r>
+            <a:r>
+              <a:rPr lang="ru-RU" b="1" dirty="0"/>
+              <a:t>избыточными</a:t>
+            </a:r>
+            <a:r>
+              <a:rPr lang="ru-RU" dirty="0"/>
+              <a:t>: каждый узел имел несколько соседей, а пакет содержал полный адрес назначения. Это позволяло автоматически обходить повреждённые участки сети.</a:t>
+            </a:r>
+          </a:p>
+          <a:p>
+            <a:endParaRPr lang="ru-RU" dirty="0"/>
+          </a:p>
+          <a:p>
+            <a:r>
+              <a:rPr lang="ru-RU" dirty="0"/>
+              <a:t>В 1969 году заработала первая сеть из четырёх узлов (UCLA, SRI, UCSB, </a:t>
+            </a:r>
+            <a:r>
+              <a:rPr lang="ru-RU" dirty="0" err="1"/>
+              <a:t>Utah</a:t>
+            </a:r>
+            <a:r>
+              <a:rPr lang="ru-RU" dirty="0"/>
+              <a:t>). Дальше ARPANET быстро рос, охватывая всё больше университетов и исследовательских центров и становясь основным инструментом удалённого доступа и обмена данными в научной среде.</a:t>
+            </a:r>
           </a:p>
           <a:p>
             <a:endParaRPr lang="en-US" dirty="0"/>
@@ -5461,7 +5283,7 @@
           <a:p>
             <a:fld id="{CF3F5FF5-003D-49C7-8AA8-32F0386C2E23}" type="slidenum">
               <a:rPr lang="en-US" smtClean="0"/>
-              <a:t>48</a:t>
+              <a:t>44</a:t>
             </a:fld>
             <a:endParaRPr lang="en-US"/>
           </a:p>
@@ -5470,7 +5292,7 @@
     </p:spTree>
     <p:extLst>
       <p:ext uri="{BB962C8B-B14F-4D97-AF65-F5344CB8AC3E}">
-        <p14:creationId xmlns:p14="http://schemas.microsoft.com/office/powerpoint/2010/main" val="2830821532"/>
+        <p14:creationId xmlns:p14="http://schemas.microsoft.com/office/powerpoint/2010/main" val="1878701977"/>
       </p:ext>
     </p:extLst>
   </p:cSld>
@@ -5524,117 +5346,7 @@
           <a:bodyPr/>
           <a:lstStyle/>
           <a:p>
-            <a:pPr marL="0" marR="0" lvl="0" indent="0" algn="l" defTabSz="914400" rtl="0" eaLnBrk="1" fontAlgn="auto" latinLnBrk="0" hangingPunct="1">
-              <a:lnSpc>
-                <a:spcPct val="100000"/>
-              </a:lnSpc>
-              <a:spcBef>
-                <a:spcPts val="0"/>
-              </a:spcBef>
-              <a:spcAft>
-                <a:spcPts val="0"/>
-              </a:spcAft>
-              <a:buClrTx/>
-              <a:buSzTx/>
-              <a:buFontTx/>
-              <a:buNone/>
-              <a:tabLst/>
-              <a:defRPr/>
-            </a:pPr>
-            <a:r>
-              <a:rPr lang="ru-RU" dirty="0"/>
-              <a:t>Если раньше интернет действительно напоминал иерархическую «пирамиду», то сегодня эта структура стала намного более «плоской».</a:t>
-            </a:r>
-          </a:p>
-          <a:p>
-            <a:pPr marL="0" marR="0" lvl="0" indent="0" algn="l" defTabSz="914400" rtl="0" eaLnBrk="1" fontAlgn="auto" latinLnBrk="0" hangingPunct="1">
-              <a:lnSpc>
-                <a:spcPct val="100000"/>
-              </a:lnSpc>
-              <a:spcBef>
-                <a:spcPts val="0"/>
-              </a:spcBef>
-              <a:spcAft>
-                <a:spcPts val="0"/>
-              </a:spcAft>
-              <a:buClrTx/>
-              <a:buSzTx/>
-              <a:buFontTx/>
-              <a:buNone/>
-              <a:tabLst/>
-              <a:defRPr/>
-            </a:pPr>
-            <a:br>
-              <a:rPr lang="ru-RU" dirty="0"/>
-            </a:br>
-            <a:r>
-              <a:rPr lang="ru-RU" dirty="0"/>
-              <a:t>Крупные поставщики контента строят собственные глобальные сети и размещают свои серверы ближе к пользователям. ISP, в свою очередь, стремятся подключаться к этим сетям напрямую, минуя дорогостоящий транзит.</a:t>
-            </a:r>
-          </a:p>
-          <a:p>
-            <a:pPr marL="0" marR="0" lvl="0" indent="0" algn="l" defTabSz="914400" rtl="0" eaLnBrk="1" fontAlgn="auto" latinLnBrk="0" hangingPunct="1">
-              <a:lnSpc>
-                <a:spcPct val="100000"/>
-              </a:lnSpc>
-              <a:spcBef>
-                <a:spcPts val="0"/>
-              </a:spcBef>
-              <a:spcAft>
-                <a:spcPts val="0"/>
-              </a:spcAft>
-              <a:buClrTx/>
-              <a:buSzTx/>
-              <a:buFontTx/>
-              <a:buNone/>
-              <a:tabLst/>
-              <a:defRPr/>
-            </a:pPr>
-            <a:br>
-              <a:rPr lang="ru-RU" dirty="0"/>
-            </a:br>
-            <a:r>
-              <a:rPr lang="ru-RU" dirty="0"/>
-              <a:t>Так формируется современная модель доставки трафика: </a:t>
-            </a:r>
-            <a:r>
-              <a:rPr lang="ru-RU" b="1" dirty="0"/>
-              <a:t>большая часть данных идёт короткими путями — от ближайших CDN-узлов или серверов, размещённых непосредственно у провайдера</a:t>
-            </a:r>
-            <a:r>
-              <a:rPr lang="ru-RU" dirty="0"/>
-              <a:t>.</a:t>
-            </a:r>
-          </a:p>
-          <a:p>
-            <a:pPr marL="0" marR="0" lvl="0" indent="0" algn="l" defTabSz="914400" rtl="0" eaLnBrk="1" fontAlgn="auto" latinLnBrk="0" hangingPunct="1">
-              <a:lnSpc>
-                <a:spcPct val="100000"/>
-              </a:lnSpc>
-              <a:spcBef>
-                <a:spcPts val="0"/>
-              </a:spcBef>
-              <a:spcAft>
-                <a:spcPts val="0"/>
-              </a:spcAft>
-              <a:buClrTx/>
-              <a:buSzTx/>
-              <a:buFontTx/>
-              <a:buNone/>
-              <a:tabLst/>
-              <a:defRPr/>
-            </a:pPr>
-            <a:br>
-              <a:rPr lang="ru-RU" dirty="0"/>
-            </a:br>
-            <a:r>
-              <a:rPr lang="ru-RU" dirty="0"/>
-              <a:t>Это ускоряет доступ, снижает стоимость и меняет распределение ролей между участниками рынка.</a:t>
-            </a:r>
-            <a:endParaRPr lang="en-US" dirty="0"/>
-          </a:p>
-          <a:p>
-            <a:endParaRPr lang="en-US" dirty="0"/>
+            <a:endParaRPr lang="en-US"/>
           </a:p>
         </p:txBody>
       </p:sp>
@@ -5655,7 +5367,7 @@
           <a:p>
             <a:fld id="{CF3F5FF5-003D-49C7-8AA8-32F0386C2E23}" type="slidenum">
               <a:rPr lang="en-US" smtClean="0"/>
-              <a:t>49</a:t>
+              <a:t>45</a:t>
             </a:fld>
             <a:endParaRPr lang="en-US"/>
           </a:p>
@@ -5664,7 +5376,7 @@
     </p:spTree>
     <p:extLst>
       <p:ext uri="{BB962C8B-B14F-4D97-AF65-F5344CB8AC3E}">
-        <p14:creationId xmlns:p14="http://schemas.microsoft.com/office/powerpoint/2010/main" val="916029566"/>
+        <p14:creationId xmlns:p14="http://schemas.microsoft.com/office/powerpoint/2010/main" val="4177467215"/>
       </p:ext>
     </p:extLst>
   </p:cSld>
@@ -5720,7 +5432,40 @@
           <a:p>
             <a:r>
               <a:rPr lang="ru-RU" dirty="0"/>
-              <a:t>Сегодня мобильные сети — крупнейшая коммуникационная платформа на планете: более пяти миллиардов пользователей выходят в интернет именно через мобильные устройства. Это означает, что мобильная архитектура стала критически важной частью глобальной сетевой инфраструктуры.</a:t>
+              <a:t>Когда ARPANET начали экспериментально соединять со спутниковыми и радиосетями, стало ясно, что её исходные протоколы не подходят для работы в </a:t>
+            </a:r>
+            <a:r>
+              <a:rPr lang="ru-RU" b="1" dirty="0"/>
+              <a:t>гетерогенной среде</a:t>
+            </a:r>
+            <a:r>
+              <a:rPr lang="ru-RU" dirty="0"/>
+              <a:t>.</a:t>
+            </a:r>
+          </a:p>
+          <a:p>
+            <a:br>
+              <a:rPr lang="ru-RU" dirty="0"/>
+            </a:br>
+            <a:r>
+              <a:rPr lang="ru-RU" dirty="0"/>
+              <a:t>Ответом стал стек </a:t>
+            </a:r>
+            <a:r>
+              <a:rPr lang="ru-RU" b="1" dirty="0"/>
+              <a:t>TCP/IP</a:t>
+            </a:r>
+            <a:r>
+              <a:rPr lang="ru-RU" dirty="0"/>
+              <a:t>, разработанный специально для </a:t>
+            </a:r>
+            <a:r>
+              <a:rPr lang="ru-RU" b="1" dirty="0"/>
+              <a:t>интерсетей</a:t>
+            </a:r>
+            <a:r>
+              <a:rPr lang="ru-RU" dirty="0"/>
+              <a:t> — объединений разных сетей. TCP/IP скрывал особенности конкретной среды передачи и давал приложениям единый способ работы с сетью.</a:t>
             </a:r>
           </a:p>
           <a:p>
@@ -5729,23 +5474,27 @@
           <a:p>
             <a:r>
               <a:rPr lang="ru-RU" dirty="0"/>
-              <a:t>Мобильная сеть устроена иначе, чем интернет. Она делится на две большие зоны. Первая — </a:t>
+              <a:t>ARPA профинансировала реализацию TCP/IP на разных системах, а команда в Беркли встроила его в </a:t>
+            </a:r>
+            <a:r>
+              <a:rPr lang="ru-RU" b="1" dirty="0" err="1"/>
+              <a:t>Berkeley</a:t>
             </a:r>
             <a:r>
               <a:rPr lang="ru-RU" b="1" dirty="0"/>
-              <a:t>E-UTRAN</a:t>
-            </a:r>
-            <a:r>
-              <a:rPr lang="ru-RU" dirty="0"/>
-              <a:t>, радиодоступ: это связь между телефоном и базовой станцией </a:t>
-            </a:r>
-            <a:r>
-              <a:rPr lang="ru-RU" dirty="0" err="1"/>
-              <a:t>eNodeB</a:t>
-            </a:r>
-            <a:r>
-              <a:rPr lang="ru-RU" dirty="0"/>
-              <a:t>. В этой части происходят ключевые процессы — распределение частот, установление радиоканала, управление качеством сигнала. В основе — технологии семейства CDMA, обеспечивающие одновременную работу множества абонентов.</a:t>
+              <a:t> Unix (4.2BSD)</a:t>
+            </a:r>
+            <a:r>
+              <a:rPr lang="ru-RU" dirty="0"/>
+              <a:t> и предложила удобный API — </a:t>
+            </a:r>
+            <a:r>
+              <a:rPr lang="ru-RU" b="1" dirty="0"/>
+              <a:t>сокеты</a:t>
+            </a:r>
+            <a:r>
+              <a:rPr lang="ru-RU" dirty="0"/>
+              <a:t>. Это позволило университетам практически «из коробки» получать операционную систему с готовым интернет-стеком.</a:t>
             </a:r>
           </a:p>
           <a:p>
@@ -5754,15 +5503,56 @@
           <a:p>
             <a:r>
               <a:rPr lang="ru-RU" dirty="0"/>
-              <a:t>Вторая часть — </a:t>
+              <a:t>Параллельно </a:t>
             </a:r>
             <a:r>
               <a:rPr lang="ru-RU" b="1" dirty="0"/>
-              <a:t>ядро EPC</a:t>
-            </a:r>
-            <a:r>
-              <a:rPr lang="ru-RU" dirty="0"/>
-              <a:t>, которое полностью перешло на пакетную передачу данных. Здесь пакеты распределяются, маршрутизируются и передаются во внешние сети — включая интернет. Принципиально важно, что современные мобильные сети используют IP-протокол на всех уровнях — от радиоканала до серверов. Это резкий отход от старых поколений сетей и основа для 4G и 5G.</a:t>
+              <a:t>NSF</a:t>
+            </a:r>
+            <a:r>
+              <a:rPr lang="ru-RU" dirty="0"/>
+              <a:t> создала свою научную сеть </a:t>
+            </a:r>
+            <a:r>
+              <a:rPr lang="ru-RU" b="1" dirty="0"/>
+              <a:t>NSFNET</a:t>
+            </a:r>
+            <a:r>
+              <a:rPr lang="ru-RU" dirty="0"/>
+              <a:t> на основе TCP/IP: опорная сеть соединяла суперкомпьютерные центры, а региональные сети подключали к ним тысячи научных организаций.</a:t>
+            </a:r>
+          </a:p>
+          <a:p>
+            <a:br>
+              <a:rPr lang="ru-RU" dirty="0"/>
+            </a:br>
+            <a:r>
+              <a:rPr lang="ru-RU" dirty="0"/>
+              <a:t>Позже появились </a:t>
+            </a:r>
+            <a:r>
+              <a:rPr lang="ru-RU" b="1" dirty="0"/>
+              <a:t>NAP (Network Access </a:t>
+            </a:r>
+            <a:r>
+              <a:rPr lang="ru-RU" b="1" dirty="0" err="1"/>
+              <a:t>Points</a:t>
+            </a:r>
+            <a:r>
+              <a:rPr lang="ru-RU" b="1" dirty="0"/>
+              <a:t>)</a:t>
+            </a:r>
+            <a:r>
+              <a:rPr lang="ru-RU" dirty="0"/>
+              <a:t> и коммерческие операторы, взявшие на себя роль опорной инфраструктуры. Государственные сети (ARPANET и NSFNET) постепенно ушли на второй план, а их архитектурные идеи и протоколы легли в основу </a:t>
+            </a:r>
+            <a:r>
+              <a:rPr lang="ru-RU" b="1" dirty="0"/>
+              <a:t>современного коммерческого интернета</a:t>
+            </a:r>
+            <a:r>
+              <a:rPr lang="ru-RU" dirty="0"/>
+              <a:t>.</a:t>
             </a:r>
           </a:p>
           <a:p>
@@ -5787,7 +5577,7 @@
           <a:p>
             <a:fld id="{CF3F5FF5-003D-49C7-8AA8-32F0386C2E23}" type="slidenum">
               <a:rPr lang="en-US" smtClean="0"/>
-              <a:t>51</a:t>
+              <a:t>46</a:t>
             </a:fld>
             <a:endParaRPr lang="en-US"/>
           </a:p>
@@ -5796,7 +5586,7 @@
     </p:spTree>
     <p:extLst>
       <p:ext uri="{BB962C8B-B14F-4D97-AF65-F5344CB8AC3E}">
-        <p14:creationId xmlns:p14="http://schemas.microsoft.com/office/powerpoint/2010/main" val="3209966370"/>
+        <p14:creationId xmlns:p14="http://schemas.microsoft.com/office/powerpoint/2010/main" val="41620134"/>
       </p:ext>
     </p:extLst>
   </p:cSld>
@@ -5852,68 +5642,42 @@
           <a:p>
             <a:r>
               <a:rPr lang="ru-RU" dirty="0"/>
-              <a:t>Ключевое отличие мобильных сетей — постоянное перемещение абонента. Когда пользователь выходит из зоны одной базовой станции и попадает в другую, сеть должна выполнить процедуру </a:t>
-            </a:r>
-            <a:r>
-              <a:rPr lang="ru-RU" b="1" dirty="0" err="1"/>
-              <a:t>handover</a:t>
-            </a:r>
-            <a:r>
-              <a:rPr lang="ru-RU" dirty="0"/>
-              <a:t>, передав текущее соединение между станциями. В старых системах это был разрыв связи и новое подключение (жёсткий </a:t>
+              <a:t>На ранних этапах интернет был фактически инструментом научного сообщества: электронная почта, </a:t>
             </a:r>
             <a:r>
               <a:rPr lang="ru-RU" dirty="0" err="1"/>
-              <a:t>handover</a:t>
-            </a:r>
-            <a:r>
-              <a:rPr lang="ru-RU" dirty="0"/>
-              <a:t>), но современные технологии поддерживают плавный переход — мягкий </a:t>
-            </a:r>
-            <a:r>
-              <a:rPr lang="ru-RU" dirty="0" err="1"/>
-              <a:t>handover</a:t>
-            </a:r>
-            <a:r>
-              <a:rPr lang="ru-RU" dirty="0"/>
-              <a:t>, который сохраняет качество связи даже при движении на высокой скорости.</a:t>
-            </a:r>
-          </a:p>
-          <a:p>
-            <a:endParaRPr lang="ru-RU" dirty="0"/>
-          </a:p>
-          <a:p>
-            <a:r>
-              <a:rPr lang="ru-RU" dirty="0"/>
-              <a:t>Чтобы доставлять вызовы и данные, сеть должна знать, где находится телефон. Эту задачу решает </a:t>
+              <a:t>Usenet</a:t>
+            </a:r>
+            <a:r>
+              <a:rPr lang="ru-RU" dirty="0"/>
+              <a:t>, удалённый доступ и FTP составляли основную часть трафика.</a:t>
+            </a:r>
+          </a:p>
+          <a:p>
+            <a:br>
+              <a:rPr lang="ru-RU" dirty="0"/>
+            </a:br>
+            <a:r>
+              <a:rPr lang="ru-RU" dirty="0"/>
+              <a:t>С появлением Всемирной паутины ситуация изменилась радикально — браузеры и веб-сервисы сделали интернет массовым.</a:t>
+            </a:r>
+          </a:p>
+          <a:p>
+            <a:br>
+              <a:rPr lang="ru-RU" dirty="0"/>
+            </a:br>
+            <a:r>
+              <a:rPr lang="ru-RU" dirty="0"/>
+              <a:t>Сегодня же основной объём трафика формирует </a:t>
             </a:r>
             <a:r>
               <a:rPr lang="ru-RU" b="1" dirty="0"/>
-              <a:t>HSS</a:t>
-            </a:r>
-            <a:r>
-              <a:rPr lang="ru-RU" dirty="0"/>
-              <a:t> — центральная база данных абонентов. В ней хранится информация о пользователе, его правах, тарифе, а также о том, какая базовая станция обслуживает его сейчас.</a:t>
-            </a:r>
-          </a:p>
-          <a:p>
-            <a:endParaRPr lang="ru-RU" dirty="0"/>
-          </a:p>
-          <a:p>
-            <a:r>
-              <a:rPr lang="ru-RU" dirty="0"/>
-              <a:t>Безопасность также играет огромную роль. В мобильных сетях она обеспечивается с помощью </a:t>
-            </a:r>
-            <a:r>
-              <a:rPr lang="ru-RU" b="1" dirty="0"/>
-              <a:t>SIM-карты</a:t>
-            </a:r>
-            <a:r>
-              <a:rPr lang="ru-RU" dirty="0"/>
-              <a:t> — модуля, который хранит идентификатор абонента и криптографические ключи. Сигнал в эфире обязательно шифруется, чтобы предотвратить подслушивание, ведь радиоволны принимаются всеми устройствами вокруг. Эта архитектура возникла ещё в 2G и до сих пор развивается в LTE и 5G.</a:t>
-            </a:r>
-          </a:p>
-          <a:p>
+              <a:t>видео</a:t>
+            </a:r>
+            <a:r>
+              <a:rPr lang="ru-RU" dirty="0"/>
+              <a:t>, а важнейшую роль играют социальные и облачные сервисы. То есть характер нагрузки изменился от небольших текстовых сообщений к тяжёлым мультимедийным потокам — и это повлияло на архитектуру сети.</a:t>
+            </a:r>
             <a:endParaRPr lang="en-US" dirty="0"/>
           </a:p>
         </p:txBody>
@@ -5935,7 +5699,7 @@
           <a:p>
             <a:fld id="{CF3F5FF5-003D-49C7-8AA8-32F0386C2E23}" type="slidenum">
               <a:rPr lang="en-US" smtClean="0"/>
-              <a:t>52</a:t>
+              <a:t>47</a:t>
             </a:fld>
             <a:endParaRPr lang="en-US"/>
           </a:p>
@@ -5944,7 +5708,7 @@
     </p:spTree>
     <p:extLst>
       <p:ext uri="{BB962C8B-B14F-4D97-AF65-F5344CB8AC3E}">
-        <p14:creationId xmlns:p14="http://schemas.microsoft.com/office/powerpoint/2010/main" val="2285975193"/>
+        <p14:creationId xmlns:p14="http://schemas.microsoft.com/office/powerpoint/2010/main" val="3205627191"/>
       </p:ext>
     </p:extLst>
   </p:cSld>
@@ -6000,73 +5764,26 @@
           <a:p>
             <a:r>
               <a:rPr lang="ru-RU" dirty="0"/>
-              <a:t>Мобильные сети прошли несколько поколений развития. </a:t>
-            </a:r>
-            <a:r>
-              <a:rPr lang="ru-RU" b="1" dirty="0"/>
-              <a:t>1G</a:t>
-            </a:r>
-            <a:r>
-              <a:rPr lang="ru-RU" dirty="0"/>
-              <a:t> представляла собой аналоговые системы, предназначенные исключительно для голосовой связи. </a:t>
-            </a:r>
-            <a:r>
-              <a:rPr lang="ru-RU" b="1" dirty="0"/>
-              <a:t>2G</a:t>
-            </a:r>
-            <a:r>
-              <a:rPr lang="ru-RU" dirty="0"/>
-              <a:t>, в частности GSM, принесла цифровую передачу голоса, SMS и впервые — механизм SIM-карт как основы идентификации и безопасности.</a:t>
-            </a:r>
-          </a:p>
-          <a:p>
-            <a:endParaRPr lang="ru-RU" dirty="0"/>
-          </a:p>
-          <a:p>
-            <a:r>
-              <a:rPr lang="ru-RU" b="1" dirty="0"/>
-              <a:t>3G (UMTS)</a:t>
-            </a:r>
-            <a:r>
-              <a:rPr lang="ru-RU" dirty="0"/>
-              <a:t> стала революцией, впервые обеспечив широкополосный доступ в интернет. Скорости возросли в десятки раз, появились мультимедийные приложения. Но самое важное — 3G активно использовала сотовую архитектуру с повторным использованием частот, что позволило обслуживать всё больше пользователей в ограниченном спектре.</a:t>
-            </a:r>
-          </a:p>
-          <a:p>
-            <a:endParaRPr lang="ru-RU" dirty="0"/>
-          </a:p>
-          <a:p>
-            <a:r>
-              <a:rPr lang="ru-RU" b="1" dirty="0"/>
-              <a:t>4G LTE</a:t>
-            </a:r>
-            <a:r>
-              <a:rPr lang="ru-RU" dirty="0"/>
-              <a:t> стала основной технологией мобильного интернета: полностью пакетная передача, высокая скорость, низкая задержка. Это сделало возможными потоковое видео, онлайн-игры, облачные сервисы.</a:t>
-            </a:r>
-          </a:p>
-          <a:p>
-            <a:endParaRPr lang="ru-RU" dirty="0"/>
-          </a:p>
-          <a:p>
-            <a:r>
-              <a:rPr lang="ru-RU" b="1" dirty="0"/>
-              <a:t>5G</a:t>
-            </a:r>
-            <a:r>
-              <a:rPr lang="ru-RU" dirty="0"/>
-              <a:t> выводит мобильные сети на новый уровень: скорость до 10 Гбит/с, миллиметровые диапазоны, массивы антенн MIMO, новые алгоритмы снижения ошибок. Но работа на высоких частотах требует плотного размещения базовых станций и более сложных механизмов обработки сигнала — отсюда огромные инвестиции операторов.</a:t>
+              <a:t>Современная интернет-экосистема состоит из множества независимых участников.</a:t>
+            </a:r>
+            <a:br>
+              <a:rPr lang="ru-RU" dirty="0"/>
+            </a:br>
+            <a:r>
+              <a:rPr lang="ru-RU" dirty="0"/>
+              <a:t>Пользователь подключается через домашнюю или мобильную сеть, затем его трафик попадает в точку присутствия (POP) интернет-провайдера. Далее пакет может идти либо внутри сети провайдера, либо перенаправляться через IXP, либо — при отсутствии прямых соглашений — через транзитного оператора.</a:t>
             </a:r>
             <a:endParaRPr lang="en-US" dirty="0"/>
           </a:p>
           <a:p>
+            <a:br>
+              <a:rPr lang="ru-RU" dirty="0"/>
+            </a:br>
+            <a:r>
+              <a:rPr lang="ru-RU" dirty="0"/>
+              <a:t>Контент чаще всего находится в крупных дата-центрах или на узлах CDN, которые специально расположены ближе к пользователям, чтобы уменьшить задержки и снизить нагрузку на магистральную инфраструктуру.</a:t>
+            </a:r>
             <a:endParaRPr lang="en-US" dirty="0"/>
-          </a:p>
-          <a:p>
-            <a:r>
-              <a:rPr lang="ru-RU" dirty="0"/>
-              <a:t>MIMO — это технология беспроводной связи, использующая несколько антенн на передающей и принимающей стороне одновременно, чтобы увеличить скорость передачи данных и надёжность сигнала за счёт параллельной передачи нескольких потоков.</a:t>
-            </a:r>
           </a:p>
           <a:p>
             <a:endParaRPr lang="en-US" dirty="0"/>
@@ -6090,7 +5807,7 @@
           <a:p>
             <a:fld id="{CF3F5FF5-003D-49C7-8AA8-32F0386C2E23}" type="slidenum">
               <a:rPr lang="en-US" smtClean="0"/>
-              <a:t>53</a:t>
+              <a:t>48</a:t>
             </a:fld>
             <a:endParaRPr lang="en-US"/>
           </a:p>
@@ -6099,7 +5816,7 @@
     </p:spTree>
     <p:extLst>
       <p:ext uri="{BB962C8B-B14F-4D97-AF65-F5344CB8AC3E}">
-        <p14:creationId xmlns:p14="http://schemas.microsoft.com/office/powerpoint/2010/main" val="1737334036"/>
+        <p14:creationId xmlns:p14="http://schemas.microsoft.com/office/powerpoint/2010/main" val="2830821532"/>
       </p:ext>
     </p:extLst>
   </p:cSld>
@@ -6153,51 +5870,114 @@
           <a:bodyPr/>
           <a:lstStyle/>
           <a:p>
-            <a:r>
-              <a:rPr lang="ru-RU" dirty="0"/>
-              <a:t>Развитие мобильных компьютеров вызвало очевидный запрос: пользователи хотели подключаться к сети в офисе или дома без кабелей. Компании начали выпускать собственные беспроводные решения, но у всех были разные, несовместимые стандарты — устройства одной фирмы не могли работать с точками доступа другой.</a:t>
-            </a:r>
-          </a:p>
-          <a:p>
-            <a:endParaRPr lang="ru-RU" dirty="0"/>
-          </a:p>
-          <a:p>
-            <a:r>
-              <a:rPr lang="ru-RU" dirty="0"/>
-              <a:t>IEEE стандартизировал технологию, создав </a:t>
+            <a:pPr marL="0" marR="0" lvl="0" indent="0" algn="l" defTabSz="914400" rtl="0" eaLnBrk="1" fontAlgn="auto" latinLnBrk="0" hangingPunct="1">
+              <a:lnSpc>
+                <a:spcPct val="100000"/>
+              </a:lnSpc>
+              <a:spcBef>
+                <a:spcPts val="0"/>
+              </a:spcBef>
+              <a:spcAft>
+                <a:spcPts val="0"/>
+              </a:spcAft>
+              <a:buClrTx/>
+              <a:buSzTx/>
+              <a:buFontTx/>
+              <a:buNone/>
+              <a:tabLst/>
+              <a:defRPr/>
+            </a:pPr>
+            <a:r>
+              <a:rPr lang="ru-RU" dirty="0"/>
+              <a:t>Если раньше интернет действительно напоминал иерархическую «пирамиду», то сегодня эта структура стала намного более «плоской».</a:t>
+            </a:r>
+          </a:p>
+          <a:p>
+            <a:pPr marL="0" marR="0" lvl="0" indent="0" algn="l" defTabSz="914400" rtl="0" eaLnBrk="1" fontAlgn="auto" latinLnBrk="0" hangingPunct="1">
+              <a:lnSpc>
+                <a:spcPct val="100000"/>
+              </a:lnSpc>
+              <a:spcBef>
+                <a:spcPts val="0"/>
+              </a:spcBef>
+              <a:spcAft>
+                <a:spcPts val="0"/>
+              </a:spcAft>
+              <a:buClrTx/>
+              <a:buSzTx/>
+              <a:buFontTx/>
+              <a:buNone/>
+              <a:tabLst/>
+              <a:defRPr/>
+            </a:pPr>
+            <a:br>
+              <a:rPr lang="ru-RU" dirty="0"/>
+            </a:br>
+            <a:r>
+              <a:rPr lang="ru-RU" dirty="0"/>
+              <a:t>Крупные поставщики контента строят собственные глобальные сети и размещают свои серверы ближе к пользователям. ISP, в свою очередь, стремятся подключаться к этим сетям напрямую, минуя дорогостоящий транзит.</a:t>
+            </a:r>
+          </a:p>
+          <a:p>
+            <a:pPr marL="0" marR="0" lvl="0" indent="0" algn="l" defTabSz="914400" rtl="0" eaLnBrk="1" fontAlgn="auto" latinLnBrk="0" hangingPunct="1">
+              <a:lnSpc>
+                <a:spcPct val="100000"/>
+              </a:lnSpc>
+              <a:spcBef>
+                <a:spcPts val="0"/>
+              </a:spcBef>
+              <a:spcAft>
+                <a:spcPts val="0"/>
+              </a:spcAft>
+              <a:buClrTx/>
+              <a:buSzTx/>
+              <a:buFontTx/>
+              <a:buNone/>
+              <a:tabLst/>
+              <a:defRPr/>
+            </a:pPr>
+            <a:br>
+              <a:rPr lang="ru-RU" dirty="0"/>
+            </a:br>
+            <a:r>
+              <a:rPr lang="ru-RU" dirty="0"/>
+              <a:t>Так формируется современная модель доставки трафика: </a:t>
             </a:r>
             <a:r>
               <a:rPr lang="ru-RU" b="1" dirty="0"/>
-              <a:t>802.11</a:t>
-            </a:r>
-            <a:r>
-              <a:rPr lang="ru-RU" dirty="0"/>
-              <a:t>, который мы знаем как </a:t>
-            </a:r>
-            <a:r>
-              <a:rPr lang="ru-RU" dirty="0" err="1"/>
-              <a:t>Wi</a:t>
-            </a:r>
-            <a:r>
-              <a:rPr lang="ru-RU" dirty="0"/>
-              <a:t>-Fi. Важно, что стандарт использует </a:t>
-            </a:r>
-            <a:r>
-              <a:rPr lang="ru-RU" b="1" dirty="0"/>
-              <a:t>нелицензируемые частоты</a:t>
-            </a:r>
-            <a:r>
-              <a:rPr lang="ru-RU" dirty="0"/>
-              <a:t> — это сильно удешевило оборудование, но привело к конкуренции с другими устройствами вроде Bluetooth-гаджетов, микроволновок или гаражных пультов. Первое поколение </a:t>
-            </a:r>
-            <a:r>
-              <a:rPr lang="ru-RU" dirty="0" err="1"/>
-              <a:t>Wi</a:t>
-            </a:r>
-            <a:r>
-              <a:rPr lang="ru-RU" dirty="0"/>
-              <a:t>-Fi работало на низких скоростях, но стандартизация обеспечила совместимость и дала старт бурному развитию беспроводных сетей.</a:t>
-            </a:r>
+              <a:t>большая часть данных идёт короткими путями — от ближайших CDN-узлов или серверов, размещённых непосредственно у провайдера</a:t>
+            </a:r>
+            <a:r>
+              <a:rPr lang="ru-RU" dirty="0"/>
+              <a:t>.</a:t>
+            </a:r>
+          </a:p>
+          <a:p>
+            <a:pPr marL="0" marR="0" lvl="0" indent="0" algn="l" defTabSz="914400" rtl="0" eaLnBrk="1" fontAlgn="auto" latinLnBrk="0" hangingPunct="1">
+              <a:lnSpc>
+                <a:spcPct val="100000"/>
+              </a:lnSpc>
+              <a:spcBef>
+                <a:spcPts val="0"/>
+              </a:spcBef>
+              <a:spcAft>
+                <a:spcPts val="0"/>
+              </a:spcAft>
+              <a:buClrTx/>
+              <a:buSzTx/>
+              <a:buFontTx/>
+              <a:buNone/>
+              <a:tabLst/>
+              <a:defRPr/>
+            </a:pPr>
+            <a:br>
+              <a:rPr lang="ru-RU" dirty="0"/>
+            </a:br>
+            <a:r>
+              <a:rPr lang="ru-RU" dirty="0"/>
+              <a:t>Это ускоряет доступ, снижает стоимость и меняет распределение ролей между участниками рынка.</a:t>
+            </a:r>
+            <a:endParaRPr lang="en-US" dirty="0"/>
           </a:p>
           <a:p>
             <a:endParaRPr lang="en-US" dirty="0"/>
@@ -6221,7 +6001,7 @@
           <a:p>
             <a:fld id="{CF3F5FF5-003D-49C7-8AA8-32F0386C2E23}" type="slidenum">
               <a:rPr lang="en-US" smtClean="0"/>
-              <a:t>55</a:t>
+              <a:t>49</a:t>
             </a:fld>
             <a:endParaRPr lang="en-US"/>
           </a:p>
@@ -6230,7 +6010,7 @@
     </p:spTree>
     <p:extLst>
       <p:ext uri="{BB962C8B-B14F-4D97-AF65-F5344CB8AC3E}">
-        <p14:creationId xmlns:p14="http://schemas.microsoft.com/office/powerpoint/2010/main" val="2743062590"/>
+        <p14:creationId xmlns:p14="http://schemas.microsoft.com/office/powerpoint/2010/main" val="916029566"/>
       </p:ext>
     </p:extLst>
   </p:cSld>
@@ -6286,7 +6066,7 @@
           <a:p>
             <a:r>
               <a:rPr lang="ru-RU" dirty="0"/>
-              <a:t>Большая часть современных информационных сервисов работает по модели «клиент-сервер». Клиент — это программа, которая инициирует запрос, например браузер. Сервер — это удалённая система, хранящая данные или выполняющая необходимые вычисления.</a:t>
+              <a:t>На данном слайде приведено базовое определение компьютерной сети — системы автономных устройств, способных обмениваться информацией. Это могут быть персональные компьютеры, серверы, датчики, смартфоны и многое другое.</a:t>
             </a:r>
           </a:p>
           <a:p>
@@ -6295,16 +6075,14 @@
             </a:br>
             <a:r>
               <a:rPr lang="ru-RU" dirty="0"/>
-              <a:t>Процесс работы прост: клиент формирует запрос, отправляет его серверу, затем получает и отображает ответ. Сервер может обслуживать значительное количество клиентов одновременно, что позволяет масштабировать сервис.</a:t>
-            </a:r>
-          </a:p>
-          <a:p>
+              <a:t>Связь между устройствами осуществляется по различным средам передачи: медным кабелям, оптоволокну или радиоволнам. Выбор среды определяется требуемой скоростью, дальностью, стоимостью и условиями.</a:t>
+            </a:r>
             <a:br>
               <a:rPr lang="ru-RU" dirty="0"/>
             </a:br>
             <a:r>
               <a:rPr lang="ru-RU" dirty="0"/>
-              <a:t>Клиент-серверная модель лежит в основе веб-сайтов, интернет-магазинов, социальных сетей и даже отдельных мобильных приложений. Эта модель удобна тем, что клиент остаётся простым, а основная логика концентрируется на сервере.</a:t>
+              <a:t>Сети могут быть как локальными, охватывающими одну комнату или дом, так и глобальными. Более того, сети объединяются в более крупные структуры — так построен интернет, который является по сути сетью сетей.</a:t>
             </a:r>
             <a:endParaRPr lang="en-US" dirty="0"/>
           </a:p>
@@ -6327,7 +6105,7 @@
           <a:p>
             <a:fld id="{CF3F5FF5-003D-49C7-8AA8-32F0386C2E23}" type="slidenum">
               <a:rPr lang="en-US" smtClean="0"/>
-              <a:t>6</a:t>
+              <a:t>5</a:t>
             </a:fld>
             <a:endParaRPr lang="en-US"/>
           </a:p>
@@ -6336,7 +6114,7 @@
     </p:spTree>
     <p:extLst>
       <p:ext uri="{BB962C8B-B14F-4D97-AF65-F5344CB8AC3E}">
-        <p14:creationId xmlns:p14="http://schemas.microsoft.com/office/powerpoint/2010/main" val="989163818"/>
+        <p14:creationId xmlns:p14="http://schemas.microsoft.com/office/powerpoint/2010/main" val="783284507"/>
       </p:ext>
     </p:extLst>
   </p:cSld>
@@ -6390,107 +6168,7 @@
           <a:bodyPr/>
           <a:lstStyle/>
           <a:p>
-            <a:r>
-              <a:rPr lang="ru-RU" dirty="0" err="1"/>
-              <a:t>Wi</a:t>
-            </a:r>
-            <a:r>
-              <a:rPr lang="ru-RU" dirty="0"/>
-              <a:t>-Fi-сеть обычно состоит из клиентов (ноутбуков, смартфонов) и точки доступа, которая соединена с проводной инфраструктурой. Большинство трафика проходит именно через точку доступа, хотя стандарт допускает и прямое взаимодействие устройств в режиме </a:t>
-            </a:r>
-            <a:r>
-              <a:rPr lang="ru-RU" dirty="0" err="1"/>
-              <a:t>ad</a:t>
-            </a:r>
-            <a:r>
-              <a:rPr lang="ru-RU" dirty="0"/>
-              <a:t> </a:t>
-            </a:r>
-            <a:r>
-              <a:rPr lang="ru-RU" dirty="0" err="1"/>
-              <a:t>hoc</a:t>
-            </a:r>
-            <a:r>
-              <a:rPr lang="ru-RU" dirty="0"/>
-              <a:t>.</a:t>
-            </a:r>
-          </a:p>
-          <a:p>
-            <a:endParaRPr lang="ru-RU" dirty="0"/>
-          </a:p>
-          <a:p>
-            <a:r>
-              <a:rPr lang="ru-RU" dirty="0"/>
-              <a:t>Беспроводная среда создаёт сложности: сигнал отражается от стен и предметов, формируя несколько копий одного и того же пакета, которые могут усиливать или разрушать друг друга — это </a:t>
-            </a:r>
-            <a:r>
-              <a:rPr lang="ru-RU" b="1" dirty="0" err="1"/>
-              <a:t>multipath</a:t>
-            </a:r>
-            <a:r>
-              <a:rPr lang="ru-RU" b="1" dirty="0"/>
-              <a:t> </a:t>
-            </a:r>
-            <a:r>
-              <a:rPr lang="ru-RU" b="1" dirty="0" err="1"/>
-              <a:t>fading</a:t>
-            </a:r>
-            <a:r>
-              <a:rPr lang="ru-RU" dirty="0"/>
-              <a:t>. Чтобы компенсировать такие искажения, стандарты </a:t>
-            </a:r>
-            <a:r>
-              <a:rPr lang="ru-RU" dirty="0" err="1"/>
-              <a:t>Wi</a:t>
-            </a:r>
-            <a:r>
-              <a:rPr lang="ru-RU" dirty="0"/>
-              <a:t>-Fi используют </a:t>
-            </a:r>
-            <a:r>
-              <a:rPr lang="ru-RU" b="1" dirty="0"/>
-              <a:t>разнесение путей</a:t>
-            </a:r>
-            <a:r>
-              <a:rPr lang="ru-RU" dirty="0"/>
-              <a:t> — разные частоты, наборы антенн, временные смещения.</a:t>
-            </a:r>
-          </a:p>
-          <a:p>
-            <a:endParaRPr lang="ru-RU" dirty="0"/>
-          </a:p>
-          <a:p>
-            <a:r>
-              <a:rPr lang="ru-RU" dirty="0"/>
-              <a:t>Развитие </a:t>
-            </a:r>
-            <a:r>
-              <a:rPr lang="ru-RU" dirty="0" err="1"/>
-              <a:t>Wi</a:t>
-            </a:r>
-            <a:r>
-              <a:rPr lang="ru-RU" dirty="0"/>
-              <a:t>-Fi характеризуется постоянным увеличением пропускной способности: от 2 Мбит/с в 802.11 до гигабитных скоростей в 802.11ac/</a:t>
-            </a:r>
-            <a:r>
-              <a:rPr lang="ru-RU" dirty="0" err="1"/>
-              <a:t>ad</a:t>
-            </a:r>
-            <a:r>
-              <a:rPr lang="ru-RU" dirty="0"/>
-              <a:t>, что позволило </a:t>
-            </a:r>
-            <a:r>
-              <a:rPr lang="ru-RU" dirty="0" err="1"/>
-              <a:t>Wi</a:t>
-            </a:r>
-            <a:r>
-              <a:rPr lang="ru-RU" dirty="0"/>
-              <a:t>-Fi стать ключевой технологией домашнего и корпоративного доступа.</a:t>
-            </a:r>
-          </a:p>
-          <a:p>
-            <a:endParaRPr lang="en-US" dirty="0"/>
+            <a:endParaRPr lang="en-US"/>
           </a:p>
         </p:txBody>
       </p:sp>
@@ -6511,7 +6189,7 @@
           <a:p>
             <a:fld id="{CF3F5FF5-003D-49C7-8AA8-32F0386C2E23}" type="slidenum">
               <a:rPr lang="en-US" smtClean="0"/>
-              <a:t>56</a:t>
+              <a:t>50</a:t>
             </a:fld>
             <a:endParaRPr lang="en-US"/>
           </a:p>
@@ -6520,7 +6198,7 @@
     </p:spTree>
     <p:extLst>
       <p:ext uri="{BB962C8B-B14F-4D97-AF65-F5344CB8AC3E}">
-        <p14:creationId xmlns:p14="http://schemas.microsoft.com/office/powerpoint/2010/main" val="3617774546"/>
+        <p14:creationId xmlns:p14="http://schemas.microsoft.com/office/powerpoint/2010/main" val="4140853140"/>
       </p:ext>
     </p:extLst>
   </p:cSld>
@@ -6576,89 +6254,49 @@
           <a:p>
             <a:r>
               <a:rPr lang="ru-RU" dirty="0"/>
-              <a:t>Поскольку </a:t>
+              <a:t>Сегодня мобильные сети — крупнейшая коммуникационная платформа на планете: более пяти миллиардов пользователей выходят в интернет именно через мобильные устройства. Это означает, что мобильная архитектура стала критически важной частью глобальной сетевой инфраструктуры.</a:t>
+            </a:r>
+          </a:p>
+          <a:p>
+            <a:endParaRPr lang="ru-RU" dirty="0"/>
+          </a:p>
+          <a:p>
+            <a:r>
+              <a:rPr lang="ru-RU" dirty="0"/>
+              <a:t>Мобильная сеть устроена иначе, чем интернет. Она делится на две большие зоны. Первая — </a:t>
+            </a:r>
+            <a:r>
+              <a:rPr lang="ru-RU" b="1" dirty="0"/>
+              <a:t>E-UTRAN</a:t>
+            </a:r>
+            <a:r>
+              <a:rPr lang="ru-RU" dirty="0"/>
+              <a:t>, радиодоступ: это связь между телефоном и базовой станцией </a:t>
             </a:r>
             <a:r>
               <a:rPr lang="ru-RU" dirty="0" err="1"/>
-              <a:t>Wi</a:t>
-            </a:r>
-            <a:r>
-              <a:rPr lang="ru-RU" dirty="0"/>
-              <a:t>-Fi является широковещательной средой, устройства могут мешать друг другу, передавая данные одновременно. Для управления доступом используется </a:t>
+              <a:t>eNodeB</a:t>
+            </a:r>
+            <a:r>
+              <a:rPr lang="ru-RU" dirty="0"/>
+              <a:t>. В этой части происходят ключевые процессы — распределение частот, установление радиоканала, управление качеством сигнала. В основе — технологии семейства CDMA, обеспечивающие одновременную работу множества абонентов.</a:t>
+            </a:r>
+          </a:p>
+          <a:p>
+            <a:endParaRPr lang="ru-RU" dirty="0"/>
+          </a:p>
+          <a:p>
+            <a:r>
+              <a:rPr lang="ru-RU" dirty="0"/>
+              <a:t>Вторая часть — </a:t>
             </a:r>
             <a:r>
               <a:rPr lang="ru-RU" b="1" dirty="0"/>
-              <a:t>CSMA/CA</a:t>
-            </a:r>
-            <a:r>
-              <a:rPr lang="ru-RU" dirty="0"/>
-              <a:t>, механизм, похожий на Ethernet, но усложнённый особенностями эфира — например, проблемой «скрытого узла», когда устройства не слышат друг друга, но мешают общей точке доступа.</a:t>
-            </a:r>
-          </a:p>
-          <a:p>
-            <a:endParaRPr lang="ru-RU" dirty="0"/>
-          </a:p>
-          <a:p>
-            <a:r>
-              <a:rPr lang="ru-RU" dirty="0"/>
-              <a:t>Когда пользователь передвигается по зданию, его устройство выбирает более сильную точку доступа и может выполнить «переключение», но мобильность в </a:t>
-            </a:r>
-            <a:r>
-              <a:rPr lang="ru-RU" dirty="0" err="1"/>
-              <a:t>Wi</a:t>
-            </a:r>
-            <a:r>
-              <a:rPr lang="ru-RU" dirty="0"/>
-              <a:t>-Fi ограничена: стандарт рассчитан скорее на «кочевых» пользователей, чем на тех, кто перемещается на высокой скорости, как в сотовых сетях.</a:t>
-            </a:r>
-          </a:p>
-          <a:p>
-            <a:endParaRPr lang="ru-RU" dirty="0"/>
-          </a:p>
-          <a:p>
-            <a:r>
-              <a:rPr lang="ru-RU" dirty="0"/>
-              <a:t>В области безопасности </a:t>
-            </a:r>
-            <a:r>
-              <a:rPr lang="ru-RU" dirty="0" err="1"/>
-              <a:t>Wi</a:t>
-            </a:r>
-            <a:r>
-              <a:rPr lang="ru-RU" dirty="0"/>
-              <a:t>-Fi прошёл большой путь. Первая схема шифрования </a:t>
-            </a:r>
-            <a:r>
-              <a:rPr lang="ru-RU" b="1" dirty="0"/>
-              <a:t>WEP</a:t>
-            </a:r>
-            <a:r>
-              <a:rPr lang="ru-RU" dirty="0"/>
-              <a:t> оказалась взломана, что привело к появлению </a:t>
-            </a:r>
-            <a:r>
-              <a:rPr lang="ru-RU" b="1" dirty="0"/>
-              <a:t>WPA/WPA2</a:t>
-            </a:r>
-            <a:r>
-              <a:rPr lang="ru-RU" dirty="0"/>
-              <a:t>, а затем — протоколов корпоративного уровня, таких как </a:t>
-            </a:r>
-            <a:r>
-              <a:rPr lang="ru-RU" b="1" dirty="0"/>
-              <a:t>802.1X</a:t>
-            </a:r>
-            <a:r>
-              <a:rPr lang="ru-RU" dirty="0"/>
-              <a:t>, обеспечивающих аутентификацию и защиту трафика. Сегодня безопасность рассматривается как критически важная часть </a:t>
-            </a:r>
-            <a:r>
-              <a:rPr lang="ru-RU" dirty="0" err="1"/>
-              <a:t>Wi</a:t>
-            </a:r>
-            <a:r>
-              <a:rPr lang="ru-RU" dirty="0"/>
-              <a:t>-Fi, особенно из-за его широковещательной природы.</a:t>
+              <a:t>ядро EPC</a:t>
+            </a:r>
+            <a:r>
+              <a:rPr lang="ru-RU" dirty="0"/>
+              <a:t>, которое полностью перешло на пакетную передачу данных. Здесь пакеты распределяются, маршрутизируются и передаются во внешние сети — включая интернет. Принципиально важно, что современные мобильные сети используют IP-протокол на всех уровнях — от радиоканала до серверов. Это резкий отход от старых поколений сетей и основа для 4G и 5G.</a:t>
             </a:r>
           </a:p>
           <a:p>
@@ -6683,7 +6321,7 @@
           <a:p>
             <a:fld id="{CF3F5FF5-003D-49C7-8AA8-32F0386C2E23}" type="slidenum">
               <a:rPr lang="en-US" smtClean="0"/>
-              <a:t>57</a:t>
+              <a:t>51</a:t>
             </a:fld>
             <a:endParaRPr lang="en-US"/>
           </a:p>
@@ -6692,7 +6330,7 @@
     </p:spTree>
     <p:extLst>
       <p:ext uri="{BB962C8B-B14F-4D97-AF65-F5344CB8AC3E}">
-        <p14:creationId xmlns:p14="http://schemas.microsoft.com/office/powerpoint/2010/main" val="3305306520"/>
+        <p14:creationId xmlns:p14="http://schemas.microsoft.com/office/powerpoint/2010/main" val="3209966370"/>
       </p:ext>
     </p:extLst>
   </p:cSld>
@@ -6748,7 +6386,31 @@
           <a:p>
             <a:r>
               <a:rPr lang="ru-RU" dirty="0"/>
-              <a:t>Сетевые протоколы — это правила, обеспечивающие взаимодействие устройств в сети, и их проектирование преследует несколько ключевых целей. </a:t>
+              <a:t>Ключевое отличие мобильных сетей — постоянное перемещение абонента. Когда пользователь выходит из зоны одной базовой станции и попадает в другую, сеть должна выполнить процедуру </a:t>
+            </a:r>
+            <a:r>
+              <a:rPr lang="ru-RU" b="1" dirty="0" err="1"/>
+              <a:t>handover</a:t>
+            </a:r>
+            <a:r>
+              <a:rPr lang="ru-RU" dirty="0"/>
+              <a:t>, передав текущее соединение между станциями. В старых системах это был разрыв связи и новое подключение (жёсткий </a:t>
+            </a:r>
+            <a:r>
+              <a:rPr lang="ru-RU" dirty="0" err="1"/>
+              <a:t>handover</a:t>
+            </a:r>
+            <a:r>
+              <a:rPr lang="ru-RU" dirty="0"/>
+              <a:t>), но современные технологии поддерживают плавный переход — мягкий </a:t>
+            </a:r>
+            <a:r>
+              <a:rPr lang="ru-RU" dirty="0" err="1"/>
+              <a:t>handover</a:t>
+            </a:r>
+            <a:r>
+              <a:rPr lang="ru-RU" dirty="0"/>
+              <a:t>, который сохраняет качество связи даже при движении на высокой скорости.</a:t>
             </a:r>
           </a:p>
           <a:p>
@@ -6757,15 +6419,15 @@
           <a:p>
             <a:r>
               <a:rPr lang="ru-RU" dirty="0"/>
-              <a:t>Во-первых, </a:t>
+              <a:t>Чтобы доставлять вызовы и данные, сеть должна знать, где находится телефон. Эту задачу решает </a:t>
             </a:r>
             <a:r>
               <a:rPr lang="ru-RU" b="1" dirty="0"/>
-              <a:t>надёжность</a:t>
-            </a:r>
-            <a:r>
-              <a:rPr lang="ru-RU" dirty="0"/>
-              <a:t>: сеть должна работать даже при сбоях оборудования, потере пакетов или ошибках каналов. </a:t>
+              <a:t>HSS</a:t>
+            </a:r>
+            <a:r>
+              <a:rPr lang="ru-RU" dirty="0"/>
+              <a:t> — центральная база данных абонентов. В ней хранится информация о пользователе, его правах, тарифе, а также о том, какая базовая станция обслуживает его сейчас.</a:t>
             </a:r>
           </a:p>
           <a:p>
@@ -6774,46 +6436,15 @@
           <a:p>
             <a:r>
               <a:rPr lang="ru-RU" dirty="0"/>
-              <a:t>Во-вторых, </a:t>
+              <a:t>Безопасность также играет огромную роль. В мобильных сетях она обеспечивается с помощью </a:t>
             </a:r>
             <a:r>
               <a:rPr lang="ru-RU" b="1" dirty="0"/>
-              <a:t>распределение ресурсов</a:t>
-            </a:r>
-            <a:r>
-              <a:rPr lang="ru-RU" dirty="0"/>
-              <a:t>: пропускная способность и буферы ограничены, поэтому протоколы определяют, как делить их между пользователями и ограничивать скорость, чтобы избежать коллапса сети.</a:t>
-            </a:r>
-          </a:p>
-          <a:p>
-            <a:endParaRPr lang="ru-RU" dirty="0"/>
-          </a:p>
-          <a:p>
-            <a:r>
-              <a:rPr lang="ru-RU" dirty="0"/>
-              <a:t>Третья цель — </a:t>
-            </a:r>
-            <a:r>
-              <a:rPr lang="ru-RU" b="1" dirty="0"/>
-              <a:t>масштабируемость и развитие</a:t>
-            </a:r>
-            <a:r>
-              <a:rPr lang="ru-RU" dirty="0"/>
-              <a:t>. По мере роста сети нужно добавлять новые устройства и технологии без полной перестройки существующей архитектуры, что достигается, например, разбиением протоколов на уровни.</a:t>
-            </a:r>
-          </a:p>
-          <a:p>
-            <a:r>
-              <a:rPr lang="ru-RU" dirty="0"/>
-              <a:t> И, наконец, сеть должна быть </a:t>
-            </a:r>
-            <a:r>
-              <a:rPr lang="ru-RU" b="1" dirty="0"/>
-              <a:t>безопасной</a:t>
-            </a:r>
-            <a:r>
-              <a:rPr lang="ru-RU" dirty="0"/>
-              <a:t>, защищая данные от подмены, подслушивания и несанкционированного доступа.</a:t>
+              <a:t>SIM-карты</a:t>
+            </a:r>
+            <a:r>
+              <a:rPr lang="ru-RU" dirty="0"/>
+              <a:t> — модуля, который хранит идентификатор абонента и криптографические ключи. Сигнал в эфире обязательно шифруется, чтобы предотвратить подслушивание, ведь радиоволны принимаются всеми устройствами вокруг. Эта архитектура возникла ещё в 2G и до сих пор развивается в LTE и 5G.</a:t>
             </a:r>
           </a:p>
           <a:p>
@@ -6838,7 +6469,7 @@
           <a:p>
             <a:fld id="{CF3F5FF5-003D-49C7-8AA8-32F0386C2E23}" type="slidenum">
               <a:rPr lang="en-US" smtClean="0"/>
-              <a:t>59</a:t>
+              <a:t>52</a:t>
             </a:fld>
             <a:endParaRPr lang="en-US"/>
           </a:p>
@@ -6847,7 +6478,7 @@
     </p:spTree>
     <p:extLst>
       <p:ext uri="{BB962C8B-B14F-4D97-AF65-F5344CB8AC3E}">
-        <p14:creationId xmlns:p14="http://schemas.microsoft.com/office/powerpoint/2010/main" val="4185176195"/>
+        <p14:creationId xmlns:p14="http://schemas.microsoft.com/office/powerpoint/2010/main" val="2285975193"/>
       </p:ext>
     </p:extLst>
   </p:cSld>
@@ -6903,23 +6534,23 @@
           <a:p>
             <a:r>
               <a:rPr lang="ru-RU" dirty="0"/>
-              <a:t>Надёжность — фундамент сетевого протокола. В любой сети часть переданных битов может искажаться: из-за шумов, аппаратных дефектов или беспроводных помех. Поэтому протоколы используют </a:t>
+              <a:t>Мобильные сети прошли несколько поколений развития. </a:t>
             </a:r>
             <a:r>
               <a:rPr lang="ru-RU" b="1" dirty="0"/>
-              <a:t>коды обнаружения ошибок</a:t>
-            </a:r>
-            <a:r>
-              <a:rPr lang="ru-RU" dirty="0"/>
-              <a:t>: приёмник проверяет контрольную сумму и запрашивает повтор, если данные повреждены. В более продвинутых схемах применяются </a:t>
+              <a:t>1G</a:t>
+            </a:r>
+            <a:r>
+              <a:rPr lang="ru-RU" dirty="0"/>
+              <a:t> представляла собой аналоговые системы, предназначенные исключительно для голосовой связи. </a:t>
             </a:r>
             <a:r>
               <a:rPr lang="ru-RU" b="1" dirty="0"/>
-              <a:t>коды исправления ошибок</a:t>
-            </a:r>
-            <a:r>
-              <a:rPr lang="ru-RU" dirty="0"/>
-              <a:t>, позволяющие восстановить сообщение даже при наличии битовых искажений без повторной передачи.</a:t>
+              <a:t>2G</a:t>
+            </a:r>
+            <a:r>
+              <a:rPr lang="ru-RU" dirty="0"/>
+              <a:t>, в частности GSM, принесла цифровую передачу голоса, SMS и впервые — механизм SIM-карт как основы идентификации и безопасности.</a:t>
             </a:r>
           </a:p>
           <a:p>
@@ -6927,16 +6558,48 @@
           </a:p>
           <a:p>
             <a:r>
-              <a:rPr lang="ru-RU" dirty="0"/>
-              <a:t>Помимо целостности данных важна надёжность маршрутов. В крупной сети всегда есть вероятность, что один путь недоступен — например, вышел из строя узел или канал. Протоколы </a:t>
-            </a:r>
-            <a:r>
               <a:rPr lang="ru-RU" b="1" dirty="0"/>
-              <a:t>маршрутизации</a:t>
-            </a:r>
-            <a:r>
-              <a:rPr lang="ru-RU" dirty="0"/>
-              <a:t> автоматически ищут альтернативные маршруты, чтобы доставить пакеты, даже если часть сети не работает. Благодаря этому сеть остаётся функциональной несмотря на локальные сбои.</a:t>
+              <a:t>3G (UMTS)</a:t>
+            </a:r>
+            <a:r>
+              <a:rPr lang="ru-RU" dirty="0"/>
+              <a:t> стала революцией, впервые обеспечив широкополосный доступ в интернет. Скорости возросли в десятки раз, появились мультимедийные приложения. Но самое важное — 3G активно использовала сотовую архитектуру с повторным использованием частот, что позволило обслуживать всё больше пользователей в ограниченном спектре.</a:t>
+            </a:r>
+          </a:p>
+          <a:p>
+            <a:endParaRPr lang="ru-RU" dirty="0"/>
+          </a:p>
+          <a:p>
+            <a:r>
+              <a:rPr lang="ru-RU" b="1" dirty="0"/>
+              <a:t>4G LTE</a:t>
+            </a:r>
+            <a:r>
+              <a:rPr lang="ru-RU" dirty="0"/>
+              <a:t> стала основной технологией мобильного интернета: полностью пакетная передача, высокая скорость, низкая задержка. Это сделало возможными потоковое видео, онлайн-игры, облачные сервисы.</a:t>
+            </a:r>
+          </a:p>
+          <a:p>
+            <a:endParaRPr lang="ru-RU" dirty="0"/>
+          </a:p>
+          <a:p>
+            <a:r>
+              <a:rPr lang="ru-RU" b="1" dirty="0"/>
+              <a:t>5G</a:t>
+            </a:r>
+            <a:r>
+              <a:rPr lang="ru-RU" dirty="0"/>
+              <a:t> выводит мобильные сети на новый уровень: скорость до 10 Гбит/с, миллиметровые диапазоны, массивы антенн MIMO, новые алгоритмы снижения ошибок. Но работа на высоких частотах требует плотного размещения базовых станций и более сложных механизмов обработки сигнала — отсюда огромные инвестиции операторов.</a:t>
+            </a:r>
+            <a:endParaRPr lang="en-US" dirty="0"/>
+          </a:p>
+          <a:p>
+            <a:endParaRPr lang="en-US" dirty="0"/>
+          </a:p>
+          <a:p>
+            <a:r>
+              <a:rPr lang="ru-RU" dirty="0"/>
+              <a:t>MIMO — это технология беспроводной связи, использующая несколько антенн на передающей и принимающей стороне одновременно, чтобы увеличить скорость передачи данных и надёжность сигнала за счёт параллельной передачи нескольких потоков.</a:t>
             </a:r>
           </a:p>
           <a:p>
@@ -6961,7 +6624,7 @@
           <a:p>
             <a:fld id="{CF3F5FF5-003D-49C7-8AA8-32F0386C2E23}" type="slidenum">
               <a:rPr lang="en-US" smtClean="0"/>
-              <a:t>60</a:t>
+              <a:t>53</a:t>
             </a:fld>
             <a:endParaRPr lang="en-US"/>
           </a:p>
@@ -6970,7 +6633,7 @@
     </p:spTree>
     <p:extLst>
       <p:ext uri="{BB962C8B-B14F-4D97-AF65-F5344CB8AC3E}">
-        <p14:creationId xmlns:p14="http://schemas.microsoft.com/office/powerpoint/2010/main" val="739421056"/>
+        <p14:creationId xmlns:p14="http://schemas.microsoft.com/office/powerpoint/2010/main" val="1737334036"/>
       </p:ext>
     </p:extLst>
   </p:cSld>
@@ -7024,80 +6687,7 @@
           <a:bodyPr/>
           <a:lstStyle/>
           <a:p>
-            <a:r>
-              <a:rPr lang="ru-RU" dirty="0"/>
-              <a:t>Ресурсы сети — пропускная способность, буферы, вычислительная мощность — ограничены, и их нужно распределять между множеством пользователей. Вместо фиксированных квот применяется </a:t>
-            </a:r>
-            <a:r>
-              <a:rPr lang="ru-RU" b="1" dirty="0"/>
-              <a:t>статистическое мультиплексирование</a:t>
-            </a:r>
-            <a:r>
-              <a:rPr lang="ru-RU" dirty="0"/>
-              <a:t>: каждый получает ресурс по мере необходимости. Это эффективно, но требует контроля.</a:t>
-            </a:r>
-          </a:p>
-          <a:p>
-            <a:endParaRPr lang="ru-RU" dirty="0"/>
-          </a:p>
-          <a:p>
-            <a:r>
-              <a:rPr lang="ru-RU" dirty="0"/>
-              <a:t>Во-первых, протокол должен защищать медленного получателя от переполнения буфера — это задача </a:t>
-            </a:r>
-            <a:r>
-              <a:rPr lang="ru-RU" b="1" dirty="0"/>
-              <a:t>управления потоком</a:t>
-            </a:r>
-            <a:r>
-              <a:rPr lang="ru-RU" dirty="0"/>
-              <a:t>: получатель сообщает отправителю, сколько данных способен принять.</a:t>
-            </a:r>
-          </a:p>
-          <a:p>
-            <a:endParaRPr lang="ru-RU" dirty="0"/>
-          </a:p>
-          <a:p>
-            <a:r>
-              <a:rPr lang="ru-RU" dirty="0"/>
-              <a:t>Во-вторых, перегрузка может возникнуть на уровне всей сети, когда слишком много узлов отправляют данные одновременно. В этом случае нужны механизмы </a:t>
-            </a:r>
-            <a:r>
-              <a:rPr lang="ru-RU" b="1" dirty="0"/>
-              <a:t>управления перегрузкой</a:t>
-            </a:r>
-            <a:r>
-              <a:rPr lang="ru-RU" dirty="0"/>
-              <a:t>, которые регулируют скорость передачи, чтобы сеть не «захлебнулась».</a:t>
-            </a:r>
-          </a:p>
-          <a:p>
-            <a:endParaRPr lang="ru-RU" dirty="0"/>
-          </a:p>
-          <a:p>
-            <a:r>
-              <a:rPr lang="ru-RU" dirty="0"/>
-              <a:t>При этом приложения имеют разные требования к </a:t>
-            </a:r>
-            <a:r>
-              <a:rPr lang="ru-RU" b="1" dirty="0"/>
-              <a:t>качеству обслуживания (</a:t>
-            </a:r>
-            <a:r>
-              <a:rPr lang="ru-RU" b="1" dirty="0" err="1"/>
-              <a:t>QoS</a:t>
-            </a:r>
-            <a:r>
-              <a:rPr lang="ru-RU" b="1" dirty="0"/>
-              <a:t>)</a:t>
-            </a:r>
-            <a:r>
-              <a:rPr lang="ru-RU" dirty="0"/>
-              <a:t>: видео важно получать вовремя, а передаче файлов важна пропускная способность. Протоколы пытаются согласовать эти противоречивые потребности.</a:t>
-            </a:r>
-          </a:p>
-          <a:p>
-            <a:endParaRPr lang="en-US" dirty="0"/>
+            <a:endParaRPr lang="en-US"/>
           </a:p>
         </p:txBody>
       </p:sp>
@@ -7118,7 +6708,7 @@
           <a:p>
             <a:fld id="{CF3F5FF5-003D-49C7-8AA8-32F0386C2E23}" type="slidenum">
               <a:rPr lang="en-US" smtClean="0"/>
-              <a:t>61</a:t>
+              <a:t>54</a:t>
             </a:fld>
             <a:endParaRPr lang="en-US"/>
           </a:p>
@@ -7127,7 +6717,7 @@
     </p:spTree>
     <p:extLst>
       <p:ext uri="{BB962C8B-B14F-4D97-AF65-F5344CB8AC3E}">
-        <p14:creationId xmlns:p14="http://schemas.microsoft.com/office/powerpoint/2010/main" val="2291682553"/>
+        <p14:creationId xmlns:p14="http://schemas.microsoft.com/office/powerpoint/2010/main" val="30814606"/>
       </p:ext>
     </p:extLst>
   </p:cSld>
@@ -7183,87 +6773,48 @@
           <a:p>
             <a:r>
               <a:rPr lang="ru-RU" dirty="0"/>
-              <a:t>Чтобы сети могли развиваться постепенно, а новые технологии не ломали существующие, используется </a:t>
+              <a:t>Развитие мобильных компьютеров вызвало очевидный запрос: пользователи хотели подключаться к сети в офисе или дома без кабелей. Компании начали выпускать собственные беспроводные решения, но у всех были разные, несовместимые стандарты — устройства одной фирмы не могли работать с точками доступа другой.</a:t>
+            </a:r>
+          </a:p>
+          <a:p>
+            <a:endParaRPr lang="ru-RU" dirty="0"/>
+          </a:p>
+          <a:p>
+            <a:r>
+              <a:rPr lang="ru-RU" dirty="0"/>
+              <a:t>IEEE стандартизировал технологию, создав </a:t>
             </a:r>
             <a:r>
               <a:rPr lang="ru-RU" b="1" dirty="0"/>
-              <a:t>иерархия уровней</a:t>
-            </a:r>
-            <a:r>
-              <a:rPr lang="ru-RU" dirty="0"/>
-              <a:t>. Каждый уровень решает свою задачу — от физической передачи данных до взаимодействия приложений — и скрывает детали реализации от остальных. Благодаря этому можно обновлять отдельные части сети, не переписывая всё целиком.</a:t>
-            </a:r>
-          </a:p>
-          <a:p>
-            <a:endParaRPr lang="ru-RU" dirty="0"/>
-          </a:p>
-          <a:p>
-            <a:r>
-              <a:rPr lang="ru-RU" dirty="0"/>
-              <a:t>В сетях нужен механизм идентификации: </a:t>
+              <a:t>802.11</a:t>
+            </a:r>
+            <a:r>
+              <a:rPr lang="ru-RU" dirty="0"/>
+              <a:t>, который мы знаем как </a:t>
+            </a:r>
+            <a:r>
+              <a:rPr lang="ru-RU" dirty="0" err="1"/>
+              <a:t>Wi</a:t>
+            </a:r>
+            <a:r>
+              <a:rPr lang="ru-RU" dirty="0"/>
+              <a:t>-Fi. Важно, что стандарт использует </a:t>
             </a:r>
             <a:r>
               <a:rPr lang="ru-RU" b="1" dirty="0"/>
-              <a:t>адресация</a:t>
-            </a:r>
-            <a:r>
-              <a:rPr lang="ru-RU" dirty="0"/>
-              <a:t> на низких уровнях и </a:t>
-            </a:r>
-            <a:r>
-              <a:rPr lang="ru-RU" b="1" dirty="0"/>
-              <a:t>именование</a:t>
-            </a:r>
-            <a:r>
-              <a:rPr lang="ru-RU" dirty="0"/>
-              <a:t> на высоких. При объединении разных сетевых технологий возникает задача совместимости: разные сети могут нарушать порядок доставки сообщений или иметь разные максимальные размеры пакетов. Поэтому протоколы обеспечивают </a:t>
-            </a:r>
-            <a:r>
-              <a:rPr lang="ru-RU" b="1" dirty="0"/>
-              <a:t>фрагментацию и сборку</a:t>
-            </a:r>
-            <a:r>
-              <a:rPr lang="ru-RU" dirty="0"/>
-              <a:t> сообщений, а также нумерацию пакетов.</a:t>
-            </a:r>
-          </a:p>
-          <a:p>
-            <a:endParaRPr lang="ru-RU" dirty="0"/>
-          </a:p>
-          <a:p>
-            <a:r>
-              <a:rPr lang="ru-RU" dirty="0"/>
-              <a:t>Безопасность — ещё один ключевой аспект. Требуется защищать данные от подслушивания (</a:t>
-            </a:r>
-            <a:r>
-              <a:rPr lang="ru-RU" b="1" dirty="0"/>
-              <a:t>конфиденциальность</a:t>
-            </a:r>
-            <a:r>
-              <a:rPr lang="ru-RU" dirty="0"/>
-              <a:t>), проверять подлинность отправителя (</a:t>
-            </a:r>
-            <a:r>
-              <a:rPr lang="ru-RU" b="1" dirty="0"/>
-              <a:t>аутентификация</a:t>
-            </a:r>
-            <a:r>
-              <a:rPr lang="ru-RU" dirty="0"/>
-              <a:t>) и предотвращать подмену содержимого (</a:t>
-            </a:r>
-            <a:r>
-              <a:rPr lang="ru-RU" b="1" dirty="0"/>
-              <a:t>целостность</a:t>
-            </a:r>
-            <a:r>
-              <a:rPr lang="ru-RU" dirty="0"/>
-              <a:t>).</a:t>
-            </a:r>
-          </a:p>
-          <a:p>
-            <a:r>
-              <a:rPr lang="ru-RU" dirty="0"/>
-              <a:t> Все эти функции реализуются с помощью криптографических механизмов, составляющих основу современных защищённых протоколов.</a:t>
+              <a:t>нелицензируемые частоты</a:t>
+            </a:r>
+            <a:r>
+              <a:rPr lang="ru-RU" dirty="0"/>
+              <a:t> — это сильно удешевило оборудование, но привело к конкуренции с другими устройствами вроде Bluetooth-гаджетов, микроволновок или гаражных пультов. Первое поколение </a:t>
+            </a:r>
+            <a:r>
+              <a:rPr lang="ru-RU" dirty="0" err="1"/>
+              <a:t>Wi</a:t>
+            </a:r>
+            <a:r>
+              <a:rPr lang="ru-RU" dirty="0"/>
+              <a:t>-Fi работало на низких скоростях, но стандартизация обеспечила совместимость и дала старт бурному развитию беспроводных сетей.</a:t>
             </a:r>
           </a:p>
           <a:p>
@@ -7288,7 +6839,7 @@
           <a:p>
             <a:fld id="{CF3F5FF5-003D-49C7-8AA8-32F0386C2E23}" type="slidenum">
               <a:rPr lang="en-US" smtClean="0"/>
-              <a:t>62</a:t>
+              <a:t>55</a:t>
             </a:fld>
             <a:endParaRPr lang="en-US"/>
           </a:p>
@@ -7297,7 +6848,7 @@
     </p:spTree>
     <p:extLst>
       <p:ext uri="{BB962C8B-B14F-4D97-AF65-F5344CB8AC3E}">
-        <p14:creationId xmlns:p14="http://schemas.microsoft.com/office/powerpoint/2010/main" val="2731314305"/>
+        <p14:creationId xmlns:p14="http://schemas.microsoft.com/office/powerpoint/2010/main" val="2743062590"/>
       </p:ext>
     </p:extLst>
   </p:cSld>
@@ -7352,16 +6903,28 @@
           <a:lstStyle/>
           <a:p>
             <a:r>
-              <a:rPr lang="ru-RU" dirty="0"/>
-              <a:t>Чтобы упростить проектирование сложных сетей, их делят на уровни. Представим себе пирамиду: нижние уровни занимаются физической передачей битов, верхние — логикой приложений. Каждый уровень не обязан знать, </a:t>
-            </a:r>
-            <a:r>
-              <a:rPr lang="ru-RU" i="1" dirty="0"/>
-              <a:t>как именно</a:t>
-            </a:r>
-            <a:r>
-              <a:rPr lang="ru-RU" dirty="0"/>
-              <a:t> работает уровень ниже, он лишь пользуется набором предоставляемых ему служб.</a:t>
+              <a:rPr lang="ru-RU" dirty="0" err="1"/>
+              <a:t>Wi</a:t>
+            </a:r>
+            <a:r>
+              <a:rPr lang="ru-RU" dirty="0"/>
+              <a:t>-Fi-сеть обычно состоит из клиентов (ноутбуков, смартфонов) и точки доступа, которая соединена с проводной инфраструктурой. Большинство трафика проходит именно через точку доступа, хотя стандарт допускает и прямое взаимодействие устройств в режиме </a:t>
+            </a:r>
+            <a:r>
+              <a:rPr lang="ru-RU" dirty="0" err="1"/>
+              <a:t>ad</a:t>
+            </a:r>
+            <a:r>
+              <a:rPr lang="ru-RU" dirty="0"/>
+              <a:t> </a:t>
+            </a:r>
+            <a:r>
+              <a:rPr lang="ru-RU" dirty="0" err="1"/>
+              <a:t>hoc</a:t>
+            </a:r>
+            <a:r>
+              <a:rPr lang="ru-RU" dirty="0"/>
+              <a:t>.</a:t>
             </a:r>
           </a:p>
           <a:p>
@@ -7370,7 +6933,39 @@
           <a:p>
             <a:r>
               <a:rPr lang="ru-RU" dirty="0"/>
-              <a:t>Это сильно напоминает инкапсуляцию и объектно-ориентированное программирование: есть интерфейс и скрытая реализация.</a:t>
+              <a:t>Беспроводная среда создаёт сложности: сигнал отражается от стен и предметов, формируя несколько копий одного и того же пакета, которые могут усиливать или разрушать друг друга — это </a:t>
+            </a:r>
+            <a:r>
+              <a:rPr lang="ru-RU" b="1" dirty="0" err="1"/>
+              <a:t>multipath</a:t>
+            </a:r>
+            <a:r>
+              <a:rPr lang="ru-RU" b="1" dirty="0"/>
+              <a:t> </a:t>
+            </a:r>
+            <a:r>
+              <a:rPr lang="ru-RU" b="1" dirty="0" err="1"/>
+              <a:t>fading</a:t>
+            </a:r>
+            <a:r>
+              <a:rPr lang="ru-RU" dirty="0"/>
+              <a:t>. Чтобы компенсировать такие искажения, стандарты </a:t>
+            </a:r>
+            <a:r>
+              <a:rPr lang="ru-RU" dirty="0" err="1"/>
+              <a:t>Wi</a:t>
+            </a:r>
+            <a:r>
+              <a:rPr lang="ru-RU" dirty="0"/>
+              <a:t>-Fi используют </a:t>
+            </a:r>
+            <a:r>
+              <a:rPr lang="ru-RU" b="1" dirty="0"/>
+              <a:t>разнесение путей</a:t>
+            </a:r>
+            <a:r>
+              <a:rPr lang="ru-RU" dirty="0"/>
+              <a:t> — разные частоты, наборы антенн, временные смещения.</a:t>
             </a:r>
           </a:p>
           <a:p>
@@ -7379,15 +6974,31 @@
           <a:p>
             <a:r>
               <a:rPr lang="ru-RU" dirty="0"/>
-              <a:t>Для разработчика верхнего уровня сеть выглядит как </a:t>
-            </a:r>
-            <a:r>
-              <a:rPr lang="ru-RU" b="1" dirty="0"/>
-              <a:t>виртуальная машина</a:t>
-            </a:r>
-            <a:r>
-              <a:rPr lang="ru-RU" dirty="0"/>
-              <a:t>, которая умеет, например, «передать сообщение на удалённый узел», даже если под этим скрыты десятки промежуточных шагов и преобразований.</a:t>
+              <a:t>Развитие </a:t>
+            </a:r>
+            <a:r>
+              <a:rPr lang="ru-RU" dirty="0" err="1"/>
+              <a:t>Wi</a:t>
+            </a:r>
+            <a:r>
+              <a:rPr lang="ru-RU" dirty="0"/>
+              <a:t>-Fi характеризуется постоянным увеличением пропускной способности: от 2 Мбит/с в 802.11 до гигабитных скоростей в 802.11ac/</a:t>
+            </a:r>
+            <a:r>
+              <a:rPr lang="ru-RU" dirty="0" err="1"/>
+              <a:t>ad</a:t>
+            </a:r>
+            <a:r>
+              <a:rPr lang="ru-RU" dirty="0"/>
+              <a:t>, что позволило </a:t>
+            </a:r>
+            <a:r>
+              <a:rPr lang="ru-RU" dirty="0" err="1"/>
+              <a:t>Wi</a:t>
+            </a:r>
+            <a:r>
+              <a:rPr lang="ru-RU" dirty="0"/>
+              <a:t>-Fi стать ключевой технологией домашнего и корпоративного доступа.</a:t>
             </a:r>
           </a:p>
           <a:p>
@@ -7412,7 +7023,7 @@
           <a:p>
             <a:fld id="{CF3F5FF5-003D-49C7-8AA8-32F0386C2E23}" type="slidenum">
               <a:rPr lang="en-US" smtClean="0"/>
-              <a:t>64</a:t>
+              <a:t>56</a:t>
             </a:fld>
             <a:endParaRPr lang="en-US"/>
           </a:p>
@@ -7421,7 +7032,7 @@
     </p:spTree>
     <p:extLst>
       <p:ext uri="{BB962C8B-B14F-4D97-AF65-F5344CB8AC3E}">
-        <p14:creationId xmlns:p14="http://schemas.microsoft.com/office/powerpoint/2010/main" val="3241450571"/>
+        <p14:creationId xmlns:p14="http://schemas.microsoft.com/office/powerpoint/2010/main" val="3617774546"/>
       </p:ext>
     </p:extLst>
   </p:cSld>
@@ -7477,15 +7088,23 @@
           <a:p>
             <a:r>
               <a:rPr lang="ru-RU" dirty="0"/>
-              <a:t>Если на двух компьютерах есть, скажем, транспортный уровень, то их сущности этого уровня называют </a:t>
+              <a:t>Поскольку </a:t>
+            </a:r>
+            <a:r>
+              <a:rPr lang="ru-RU" dirty="0" err="1"/>
+              <a:t>Wi</a:t>
+            </a:r>
+            <a:r>
+              <a:rPr lang="ru-RU" dirty="0"/>
+              <a:t>-Fi является широковещательной средой, устройства могут мешать друг другу, передавая данные одновременно. Для управления доступом используется </a:t>
             </a:r>
             <a:r>
               <a:rPr lang="ru-RU" b="1" dirty="0"/>
-              <a:t>пирами</a:t>
-            </a:r>
-            <a:r>
-              <a:rPr lang="ru-RU" dirty="0"/>
-              <a:t>. Протокол уровня описывает, какие сообщения и в каком формате они друг другу посылают, какие реакции ожидаются, какие ошибки возможны.</a:t>
+              <a:t>CSMA/CA</a:t>
+            </a:r>
+            <a:r>
+              <a:rPr lang="ru-RU" dirty="0"/>
+              <a:t>, механизм, похожий на Ethernet, но усложнённый особенностями эфира — например, проблемой «скрытого узла», когда устройства не слышат друг друга, но мешают общей точке доступа.</a:t>
             </a:r>
           </a:p>
           <a:p>
@@ -7494,52 +7113,64 @@
           <a:p>
             <a:r>
               <a:rPr lang="ru-RU" dirty="0"/>
-              <a:t>Важно понимать, что это </a:t>
+              <a:t>Когда пользователь передвигается по зданию, его устройство выбирает более сильную точку доступа и может выполнить «переключение», но мобильность в </a:t>
+            </a:r>
+            <a:r>
+              <a:rPr lang="ru-RU" dirty="0" err="1"/>
+              <a:t>Wi</a:t>
+            </a:r>
+            <a:r>
+              <a:rPr lang="ru-RU" dirty="0"/>
+              <a:t>-Fi ограничена: стандарт рассчитан скорее на «кочевых» пользователей, чем на тех, кто перемещается на высокой скорости, как в сотовых сетях.</a:t>
+            </a:r>
+          </a:p>
+          <a:p>
+            <a:endParaRPr lang="ru-RU" dirty="0"/>
+          </a:p>
+          <a:p>
+            <a:r>
+              <a:rPr lang="ru-RU" dirty="0"/>
+              <a:t>В области безопасности </a:t>
+            </a:r>
+            <a:r>
+              <a:rPr lang="ru-RU" dirty="0" err="1"/>
+              <a:t>Wi</a:t>
+            </a:r>
+            <a:r>
+              <a:rPr lang="ru-RU" dirty="0"/>
+              <a:t>-Fi прошёл большой путь. Первая схема шифрования </a:t>
             </a:r>
             <a:r>
               <a:rPr lang="ru-RU" b="1" dirty="0"/>
-              <a:t>логическая, виртуальная картина</a:t>
-            </a:r>
-            <a:r>
-              <a:rPr lang="ru-RU" dirty="0"/>
-              <a:t>. Физически данные не пересылаются напрямую от уровня n на одном хосте к уровню n на другом. На отправителе данные всегда идут </a:t>
+              <a:t>WEP</a:t>
+            </a:r>
+            <a:r>
+              <a:rPr lang="ru-RU" dirty="0"/>
+              <a:t> оказалась взломана, что привело к появлению </a:t>
             </a:r>
             <a:r>
               <a:rPr lang="ru-RU" b="1" dirty="0"/>
-              <a:t>вниз по стеку</a:t>
-            </a:r>
-            <a:r>
-              <a:rPr lang="ru-RU" dirty="0"/>
-              <a:t> – с уровня на уровень, пока не окажутся в физической среде. На приёмнике — поднимаются вверх, очищаясь от служебной информации нижних уровней.</a:t>
-            </a:r>
-          </a:p>
-          <a:p>
-            <a:endParaRPr lang="ru-RU" dirty="0"/>
-          </a:p>
-          <a:p>
+              <a:t>WPA/WPA2</a:t>
+            </a:r>
+            <a:r>
+              <a:rPr lang="ru-RU" dirty="0"/>
+              <a:t>, а затем — протоколов корпоративного уровня, таких как </a:t>
+            </a:r>
             <a:r>
               <a:rPr lang="ru-RU" b="1" dirty="0"/>
-              <a:t>Интерфейс</a:t>
-            </a:r>
-            <a:r>
-              <a:rPr lang="ru-RU" dirty="0"/>
-              <a:t> между уровнями — это договорённость, какие функции и операции нижний уровень предоставляет верхнему: «передать пакет», «зарегистрировать соединение» и т. п. Протокол описывает общение </a:t>
-            </a:r>
-            <a:r>
-              <a:rPr lang="ru-RU" i="1" dirty="0"/>
-              <a:t>между узлами</a:t>
-            </a:r>
-            <a:r>
-              <a:rPr lang="ru-RU" dirty="0"/>
-              <a:t>, интерфейс — взаимодействие </a:t>
-            </a:r>
-            <a:r>
-              <a:rPr lang="ru-RU" i="1" dirty="0"/>
-              <a:t>внутри одного узла</a:t>
-            </a:r>
-            <a:r>
-              <a:rPr lang="ru-RU" dirty="0"/>
-              <a:t> между соседними уровнями.</a:t>
+              <a:t>802.1X</a:t>
+            </a:r>
+            <a:r>
+              <a:rPr lang="ru-RU" dirty="0"/>
+              <a:t>, обеспечивающих аутентификацию и защиту трафика. Сегодня безопасность рассматривается как критически важная часть </a:t>
+            </a:r>
+            <a:r>
+              <a:rPr lang="ru-RU" dirty="0" err="1"/>
+              <a:t>Wi</a:t>
+            </a:r>
+            <a:r>
+              <a:rPr lang="ru-RU" dirty="0"/>
+              <a:t>-Fi, особенно из-за его широковещательной природы.</a:t>
             </a:r>
           </a:p>
           <a:p>
@@ -7564,7 +7195,7 @@
           <a:p>
             <a:fld id="{CF3F5FF5-003D-49C7-8AA8-32F0386C2E23}" type="slidenum">
               <a:rPr lang="en-US" smtClean="0"/>
-              <a:t>65</a:t>
+              <a:t>57</a:t>
             </a:fld>
             <a:endParaRPr lang="en-US"/>
           </a:p>
@@ -7573,7 +7204,7 @@
     </p:spTree>
     <p:extLst>
       <p:ext uri="{BB962C8B-B14F-4D97-AF65-F5344CB8AC3E}">
-        <p14:creationId xmlns:p14="http://schemas.microsoft.com/office/powerpoint/2010/main" val="1783245929"/>
+        <p14:creationId xmlns:p14="http://schemas.microsoft.com/office/powerpoint/2010/main" val="3305306520"/>
       </p:ext>
     </p:extLst>
   </p:cSld>
@@ -7627,66 +7258,7 @@
           <a:bodyPr/>
           <a:lstStyle/>
           <a:p>
-            <a:r>
-              <a:rPr lang="ru-RU" dirty="0"/>
-              <a:t>Полезно взглянуть на уровни через человеческую аналогию. Есть два философа, которые не знают общих языков. На их уровне (условно, уровень 3) цель — обменяться смыслом фразы «Мне нравятся кролики». Они спрашивают об этом </a:t>
-            </a:r>
-            <a:r>
-              <a:rPr lang="ru-RU" b="1" dirty="0"/>
-              <a:t>переводчиков</a:t>
-            </a:r>
-            <a:r>
-              <a:rPr lang="ru-RU" dirty="0"/>
-              <a:t> (уровень 2), которые договорились использовать нейтральный язык, например голландский. Какой именно язык они выбрали — это и есть </a:t>
-            </a:r>
-            <a:r>
-              <a:rPr lang="ru-RU" b="1" dirty="0"/>
-              <a:t>протокол уровня 2</a:t>
-            </a:r>
-            <a:r>
-              <a:rPr lang="ru-RU" dirty="0"/>
-              <a:t>.</a:t>
-            </a:r>
-          </a:p>
-          <a:p>
-            <a:endParaRPr lang="ru-RU" dirty="0"/>
-          </a:p>
-          <a:p>
-            <a:r>
-              <a:rPr lang="ru-RU" dirty="0"/>
-              <a:t>Переводчики, в свою очередь, пользуются услугами </a:t>
-            </a:r>
-            <a:r>
-              <a:rPr lang="ru-RU" b="1" dirty="0"/>
-              <a:t>секретарей</a:t>
-            </a:r>
-            <a:r>
-              <a:rPr lang="ru-RU" dirty="0"/>
-              <a:t> (уровень 1), которые могут отправить текст по факсу, по почте или по телефону. Способ физической передачи — это протокол нижнего уровня.</a:t>
-            </a:r>
-          </a:p>
-          <a:p>
-            <a:endParaRPr lang="ru-RU" dirty="0"/>
-          </a:p>
-          <a:p>
-            <a:r>
-              <a:rPr lang="ru-RU" dirty="0"/>
-              <a:t>Заметьте: переводчики могут заменить голландский на финский, если оба согласны и не меняют интерфейсы с философами и секретарями. Секретари могут перейти с факса на </a:t>
-            </a:r>
-            <a:r>
-              <a:rPr lang="ru-RU" dirty="0" err="1"/>
-              <a:t>e-mail</a:t>
-            </a:r>
-            <a:r>
-              <a:rPr lang="ru-RU" dirty="0"/>
-              <a:t> — и философы ничего об этом не узнают. Ровно так же уровни в сети могут эволюционировать независимо, если сохраняются интерфейсы и соблюдаются протоколы.</a:t>
-            </a:r>
-          </a:p>
-          <a:p>
-            <a:br>
-              <a:rPr lang="ru-RU" dirty="0"/>
-            </a:br>
-            <a:endParaRPr lang="en-US" dirty="0"/>
+            <a:endParaRPr lang="en-US"/>
           </a:p>
         </p:txBody>
       </p:sp>
@@ -7707,7 +7279,7 @@
           <a:p>
             <a:fld id="{CF3F5FF5-003D-49C7-8AA8-32F0386C2E23}" type="slidenum">
               <a:rPr lang="en-US" smtClean="0"/>
-              <a:t>66</a:t>
+              <a:t>58</a:t>
             </a:fld>
             <a:endParaRPr lang="en-US"/>
           </a:p>
@@ -7716,7 +7288,7 @@
     </p:spTree>
     <p:extLst>
       <p:ext uri="{BB962C8B-B14F-4D97-AF65-F5344CB8AC3E}">
-        <p14:creationId xmlns:p14="http://schemas.microsoft.com/office/powerpoint/2010/main" val="493076330"/>
+        <p14:creationId xmlns:p14="http://schemas.microsoft.com/office/powerpoint/2010/main" val="3758567931"/>
       </p:ext>
     </p:extLst>
   </p:cSld>
@@ -7772,41 +7344,72 @@
           <a:p>
             <a:r>
               <a:rPr lang="ru-RU" dirty="0"/>
-              <a:t>Рассмотрим, как сообщение проходит по стеку.</a:t>
-            </a:r>
-          </a:p>
-          <a:p>
-            <a:r>
-              <a:rPr lang="ru-RU" dirty="0"/>
-              <a:t> Приложение на уровне 5 формирует сообщение M и отдаёт его уровню 4. Транспортный уровень добавляет свой </a:t>
+              <a:t>Сетевые протоколы — это правила, обеспечивающие взаимодействие устройств в сети, и их проектирование преследует несколько ключевых целей. </a:t>
+            </a:r>
+          </a:p>
+          <a:p>
+            <a:endParaRPr lang="ru-RU" dirty="0"/>
+          </a:p>
+          <a:p>
+            <a:r>
+              <a:rPr lang="ru-RU" dirty="0"/>
+              <a:t>Во-первых, </a:t>
             </a:r>
             <a:r>
               <a:rPr lang="ru-RU" b="1" dirty="0"/>
-              <a:t>заголовок</a:t>
-            </a:r>
-            <a:r>
-              <a:rPr lang="ru-RU" dirty="0"/>
-              <a:t>: там могут быть номера портов, информация для восстановления порядка, контрольные поля. Получившийся блок передаётся уровню 3.</a:t>
-            </a:r>
-          </a:p>
-          <a:p>
-            <a:r>
-              <a:rPr lang="ru-RU" dirty="0"/>
-              <a:t>Сетевой уровень может столкнуться с ограничением на максимальный размер пакета — и тогда выполняется </a:t>
+              <a:t>надёжность</a:t>
+            </a:r>
+            <a:r>
+              <a:rPr lang="ru-RU" dirty="0"/>
+              <a:t>: сеть должна работать даже при сбоях оборудования, потере пакетов или ошибках каналов. </a:t>
+            </a:r>
+          </a:p>
+          <a:p>
+            <a:endParaRPr lang="ru-RU" dirty="0"/>
+          </a:p>
+          <a:p>
+            <a:r>
+              <a:rPr lang="ru-RU" dirty="0"/>
+              <a:t>Во-вторых, </a:t>
             </a:r>
             <a:r>
               <a:rPr lang="ru-RU" b="1" dirty="0"/>
-              <a:t>фрагментация</a:t>
-            </a:r>
-            <a:r>
-              <a:rPr lang="ru-RU" dirty="0"/>
-              <a:t>: сообщение делится на части M1, M2, каждая получает свой заголовок уровня 3 с адресами и номерами фрагментов. Затем кадры формируются на канальном уровне, где добавляются заголовки/концевики для передачи по конкретной среде.</a:t>
-            </a:r>
-          </a:p>
-          <a:p>
-            <a:r>
-              <a:rPr lang="ru-RU" dirty="0"/>
-              <a:t>На принимающей стороне всё происходит в обратном порядке: данные поднимаются снизу вверх, заголовки поочерёдно удаляются, а фрагменты собираются в исходное сообщение M. Важно, что каждый уровень «видит» только свой заголовок и полезную нагрузку, не вмешиваясь в детали реализации других уровней.</a:t>
+              <a:t>распределение ресурсов</a:t>
+            </a:r>
+            <a:r>
+              <a:rPr lang="ru-RU" dirty="0"/>
+              <a:t>: пропускная способность и буферы ограничены, поэтому протоколы определяют, как делить их между пользователями и ограничивать скорость, чтобы избежать коллапса сети.</a:t>
+            </a:r>
+          </a:p>
+          <a:p>
+            <a:endParaRPr lang="ru-RU" dirty="0"/>
+          </a:p>
+          <a:p>
+            <a:r>
+              <a:rPr lang="ru-RU" dirty="0"/>
+              <a:t>Третья цель — </a:t>
+            </a:r>
+            <a:r>
+              <a:rPr lang="ru-RU" b="1" dirty="0"/>
+              <a:t>масштабируемость и развитие</a:t>
+            </a:r>
+            <a:r>
+              <a:rPr lang="ru-RU" dirty="0"/>
+              <a:t>. По мере роста сети нужно добавлять новые устройства и технологии без полной перестройки существующей архитектуры, что достигается, например, разбиением протоколов на уровни.</a:t>
+            </a:r>
+          </a:p>
+          <a:p>
+            <a:r>
+              <a:rPr lang="ru-RU" dirty="0"/>
+              <a:t> И, наконец, сеть должна быть </a:t>
+            </a:r>
+            <a:r>
+              <a:rPr lang="ru-RU" b="1" dirty="0"/>
+              <a:t>безопасной</a:t>
+            </a:r>
+            <a:r>
+              <a:rPr lang="ru-RU" dirty="0"/>
+              <a:t>, защищая данные от подмены, подслушивания и несанкционированного доступа.</a:t>
             </a:r>
           </a:p>
           <a:p>
@@ -7831,7 +7434,7 @@
           <a:p>
             <a:fld id="{CF3F5FF5-003D-49C7-8AA8-32F0386C2E23}" type="slidenum">
               <a:rPr lang="en-US" smtClean="0"/>
-              <a:t>67</a:t>
+              <a:t>59</a:t>
             </a:fld>
             <a:endParaRPr lang="en-US"/>
           </a:p>
@@ -7840,7 +7443,7 @@
     </p:spTree>
     <p:extLst>
       <p:ext uri="{BB962C8B-B14F-4D97-AF65-F5344CB8AC3E}">
-        <p14:creationId xmlns:p14="http://schemas.microsoft.com/office/powerpoint/2010/main" val="1206348322"/>
+        <p14:creationId xmlns:p14="http://schemas.microsoft.com/office/powerpoint/2010/main" val="4185176195"/>
       </p:ext>
     </p:extLst>
   </p:cSld>
@@ -7896,7 +7499,7 @@
           <a:p>
             <a:r>
               <a:rPr lang="ru-RU" dirty="0"/>
-              <a:t>Одноранговые сети работают по принципиально иной модели. Здесь нет разделения на «главный» сервер и клиентов. Каждый участник равноправен и может передавать файлы, информацию или ресурсы другим участникам.</a:t>
+              <a:t>Большая часть современных информационных сервисов работает по модели «клиент-сервер». Клиент — это программа, которая инициирует запрос, например браузер. Сервер — это удалённая система, хранящая данные или выполняющая необходимые вычисления.</a:t>
             </a:r>
           </a:p>
           <a:p>
@@ -7905,7 +7508,7 @@
             </a:br>
             <a:r>
               <a:rPr lang="ru-RU" dirty="0"/>
-              <a:t>Классическим примером является протокол BitTorrent, где файл делится на множество частей, которые участники обменивают между собой. Это позволяет значительно ускорить загрузку и уменьшить нагрузку на центральный сервер или вовсе обойтись без него.</a:t>
+              <a:t>Процесс работы прост: клиент формирует запрос, отправляет его серверу, затем получает и отображает ответ. Сервер может обслуживать значительное количество клиентов одновременно, что позволяет масштабировать сервис.</a:t>
             </a:r>
           </a:p>
           <a:p>
@@ -7914,7 +7517,7 @@
             </a:br>
             <a:r>
               <a:rPr lang="ru-RU" dirty="0"/>
-              <a:t>P2P-подход особенно удобен, когда необходимо распределить нагрузку, обеспечить устойчивость к отказам или избежать узкого места в виде централизованного сервера. Хотя такие сети часто ассоциировались с проблемами авторских прав, они активно применяются и в легальных областях — от распространения дистрибутивов Linux до обмена личными фотографиями между пользователями.</a:t>
+              <a:t>Клиент-серверная модель лежит в основе веб-сайтов, интернет-магазинов, социальных сетей и даже отдельных мобильных приложений. Эта модель удобна тем, что клиент остаётся простым, а основная логика концентрируется на сервере.</a:t>
             </a:r>
             <a:endParaRPr lang="en-US" dirty="0"/>
           </a:p>
@@ -7937,7 +7540,7 @@
           <a:p>
             <a:fld id="{CF3F5FF5-003D-49C7-8AA8-32F0386C2E23}" type="slidenum">
               <a:rPr lang="en-US" smtClean="0"/>
-              <a:t>7</a:t>
+              <a:t>6</a:t>
             </a:fld>
             <a:endParaRPr lang="en-US"/>
           </a:p>
@@ -7946,7 +7549,7 @@
     </p:spTree>
     <p:extLst>
       <p:ext uri="{BB962C8B-B14F-4D97-AF65-F5344CB8AC3E}">
-        <p14:creationId xmlns:p14="http://schemas.microsoft.com/office/powerpoint/2010/main" val="4058404292"/>
+        <p14:creationId xmlns:p14="http://schemas.microsoft.com/office/powerpoint/2010/main" val="989163818"/>
       </p:ext>
     </p:extLst>
   </p:cSld>
@@ -8002,23 +7605,23 @@
           <a:p>
             <a:r>
               <a:rPr lang="ru-RU" dirty="0"/>
-              <a:t>Если взять все уровни и закреплённые за ними протоколы, мы получим </a:t>
+              <a:t>Надёжность — фундамент сетевого протокола. В любой сети часть переданных битов может искажаться: из-за шумов, аппаратных дефектов или беспроводных помех. Поэтому протоколы используют </a:t>
             </a:r>
             <a:r>
               <a:rPr lang="ru-RU" b="1" dirty="0"/>
-              <a:t>архитектуру сети</a:t>
-            </a:r>
-            <a:r>
-              <a:rPr lang="ru-RU" dirty="0"/>
-              <a:t>. Например, в интернете это TCP/IP-стек: IP на сетевом уровне, TCP или UDP на транспортном и множество протоколов приложений сверху. Конкретный набор используемых протоколов на машине называется </a:t>
+              <a:t>коды обнаружения ошибок</a:t>
+            </a:r>
+            <a:r>
+              <a:rPr lang="ru-RU" dirty="0"/>
+              <a:t>: приёмник проверяет контрольную сумму и запрашивает повтор, если данные повреждены. В более продвинутых схемах применяются </a:t>
             </a:r>
             <a:r>
               <a:rPr lang="ru-RU" b="1" dirty="0"/>
-              <a:t>стеком протоколов</a:t>
-            </a:r>
-            <a:r>
-              <a:rPr lang="ru-RU" dirty="0"/>
-              <a:t>.</a:t>
+              <a:t>коды исправления ошибок</a:t>
+            </a:r>
+            <a:r>
+              <a:rPr lang="ru-RU" dirty="0"/>
+              <a:t>, позволяющие восстановить сообщение даже при наличии битовых искажений без повторной передачи.</a:t>
             </a:r>
           </a:p>
           <a:p>
@@ -8027,48 +7630,15 @@
           <a:p>
             <a:r>
               <a:rPr lang="ru-RU" dirty="0"/>
-              <a:t>Важно, что стандарт обычно описывает именно </a:t>
+              <a:t>Помимо целостности данных важна надёжность маршрутов. В крупной сети всегда есть вероятность, что один путь недоступен — например, вышел из строя узел или канал. Протоколы </a:t>
             </a:r>
             <a:r>
               <a:rPr lang="ru-RU" b="1" dirty="0"/>
-              <a:t>протокол</a:t>
-            </a:r>
-            <a:r>
-              <a:rPr lang="ru-RU" dirty="0"/>
-              <a:t> и требования к интерфейсу. Но </a:t>
-            </a:r>
-            <a:r>
-              <a:rPr lang="ru-RU" i="1" dirty="0"/>
-              <a:t>как</a:t>
-            </a:r>
-            <a:r>
-              <a:rPr lang="ru-RU" dirty="0"/>
-              <a:t> это реализовано внутри конкретной ОС, драйвера или сетевой карты — остаётся на усмотрение разработчика. Поэтому одна и та же архитектура может быть реализована по-разному на серверах, маршрутизаторах, встраиваемых устройствах.</a:t>
-            </a:r>
-          </a:p>
-          <a:p>
-            <a:endParaRPr lang="ru-RU" dirty="0"/>
-          </a:p>
-          <a:p>
-            <a:r>
-              <a:rPr lang="ru-RU" dirty="0"/>
-              <a:t>Часто низшие уровни (физический и канальный) частично или полностью вынесены в </a:t>
-            </a:r>
-            <a:r>
-              <a:rPr lang="ru-RU" b="1" dirty="0"/>
-              <a:t>аппаратное обеспечение</a:t>
-            </a:r>
-            <a:r>
-              <a:rPr lang="ru-RU" dirty="0"/>
-              <a:t> — сетевой адаптер, чип </a:t>
-            </a:r>
-            <a:r>
-              <a:rPr lang="ru-RU" dirty="0" err="1"/>
-              <a:t>Wi</a:t>
-            </a:r>
-            <a:r>
-              <a:rPr lang="ru-RU" dirty="0"/>
-              <a:t>-Fi и т.п., где работают уже «зашитые» алгоритмы. Верхние уровни чаще реализуются как программные модули. Такое разделение ускоряет работу и позволяет оптимизировать именно те части стека, которые критичны по производительности.</a:t>
+              <a:t>маршрутизации</a:t>
+            </a:r>
+            <a:r>
+              <a:rPr lang="ru-RU" dirty="0"/>
+              <a:t> автоматически ищут альтернативные маршруты, чтобы доставить пакеты, даже если часть сети не работает. Благодаря этому сеть остаётся функциональной несмотря на локальные сбои.</a:t>
             </a:r>
           </a:p>
           <a:p>
@@ -8093,7 +7663,7 @@
           <a:p>
             <a:fld id="{CF3F5FF5-003D-49C7-8AA8-32F0386C2E23}" type="slidenum">
               <a:rPr lang="en-US" smtClean="0"/>
-              <a:t>68</a:t>
+              <a:t>60</a:t>
             </a:fld>
             <a:endParaRPr lang="en-US"/>
           </a:p>
@@ -8102,7 +7672,7 @@
     </p:spTree>
     <p:extLst>
       <p:ext uri="{BB962C8B-B14F-4D97-AF65-F5344CB8AC3E}">
-        <p14:creationId xmlns:p14="http://schemas.microsoft.com/office/powerpoint/2010/main" val="3686391908"/>
+        <p14:creationId xmlns:p14="http://schemas.microsoft.com/office/powerpoint/2010/main" val="739421056"/>
       </p:ext>
     </p:extLst>
   </p:cSld>
@@ -8158,20 +7728,15 @@
           <a:p>
             <a:r>
               <a:rPr lang="ru-RU" dirty="0"/>
-              <a:t>В сетях существуют два больших класса служб.</a:t>
-            </a:r>
-          </a:p>
-          <a:p>
-            <a:br>
-              <a:rPr lang="ru-RU" dirty="0"/>
-            </a:br>
+              <a:t>Ресурсы сети — пропускная способность, буферы, вычислительная мощность — ограничены, и их нужно распределять между множеством пользователей. Вместо фиксированных квот применяется </a:t>
+            </a:r>
             <a:r>
               <a:rPr lang="ru-RU" b="1" dirty="0"/>
-              <a:t>Службы с установлением соединения</a:t>
-            </a:r>
-            <a:r>
-              <a:rPr lang="ru-RU" dirty="0"/>
-              <a:t> работают по принципу телефонного звонка: сначала стороны согласуют параметры, резервируют ресурсы, затем передают данные в строго определённом порядке и завершают соединение. Передаваемая информация идёт как бы по «трубе», и порядок доставки, как правило, гарантирован.</a:t>
+              <a:t>статистическое мультиплексирование</a:t>
+            </a:r>
+            <a:r>
+              <a:rPr lang="ru-RU" dirty="0"/>
+              <a:t>: каждый получает ресурс по мере необходимости. Это эффективно, но требует контроля.</a:t>
             </a:r>
           </a:p>
           <a:p>
@@ -8179,12 +7744,58 @@
           </a:p>
           <a:p>
             <a:r>
+              <a:rPr lang="ru-RU" dirty="0"/>
+              <a:t>Во-первых, протокол должен защищать медленного получателя от переполнения буфера — это задача </a:t>
+            </a:r>
+            <a:r>
               <a:rPr lang="ru-RU" b="1" dirty="0"/>
-              <a:t>Службы без установления соединения</a:t>
-            </a:r>
-            <a:r>
-              <a:rPr lang="ru-RU" dirty="0"/>
-              <a:t> работают как обычная почта: каждое сообщение отправляется отдельно, содержит полный адрес, проходит через сеть независимо от других сообщений. Никаких предварительных согласований или резервирования ресурсов нет. Это удобно для рассылок, быстрых уведомлений, широковещательных сообщений.</a:t>
+              <a:t>управления потоком</a:t>
+            </a:r>
+            <a:r>
+              <a:rPr lang="ru-RU" dirty="0"/>
+              <a:t>: получатель сообщает отправителю, сколько данных способен принять.</a:t>
+            </a:r>
+          </a:p>
+          <a:p>
+            <a:endParaRPr lang="ru-RU" dirty="0"/>
+          </a:p>
+          <a:p>
+            <a:r>
+              <a:rPr lang="ru-RU" dirty="0"/>
+              <a:t>Во-вторых, перегрузка может возникнуть на уровне всей сети, когда слишком много узлов отправляют данные одновременно. В этом случае нужны механизмы </a:t>
+            </a:r>
+            <a:r>
+              <a:rPr lang="ru-RU" b="1" dirty="0"/>
+              <a:t>управления перегрузкой</a:t>
+            </a:r>
+            <a:r>
+              <a:rPr lang="ru-RU" dirty="0"/>
+              <a:t>, которые регулируют скорость передачи, чтобы сеть не «захлебнулась».</a:t>
+            </a:r>
+          </a:p>
+          <a:p>
+            <a:endParaRPr lang="ru-RU" dirty="0"/>
+          </a:p>
+          <a:p>
+            <a:r>
+              <a:rPr lang="ru-RU" dirty="0"/>
+              <a:t>При этом приложения имеют разные требования к </a:t>
+            </a:r>
+            <a:r>
+              <a:rPr lang="ru-RU" b="1" dirty="0"/>
+              <a:t>качеству обслуживания (</a:t>
+            </a:r>
+            <a:r>
+              <a:rPr lang="ru-RU" b="1" dirty="0" err="1"/>
+              <a:t>QoS</a:t>
+            </a:r>
+            <a:r>
+              <a:rPr lang="ru-RU" b="1" dirty="0"/>
+              <a:t>)</a:t>
+            </a:r>
+            <a:r>
+              <a:rPr lang="ru-RU" dirty="0"/>
+              <a:t>: видео важно получать вовремя, а передаче файлов важна пропускная способность. Протоколы пытаются согласовать эти противоречивые потребности.</a:t>
             </a:r>
           </a:p>
           <a:p>
@@ -8209,7 +7820,7 @@
           <a:p>
             <a:fld id="{CF3F5FF5-003D-49C7-8AA8-32F0386C2E23}" type="slidenum">
               <a:rPr lang="en-US" smtClean="0"/>
-              <a:t>70</a:t>
+              <a:t>61</a:t>
             </a:fld>
             <a:endParaRPr lang="en-US"/>
           </a:p>
@@ -8218,7 +7829,7 @@
     </p:spTree>
     <p:extLst>
       <p:ext uri="{BB962C8B-B14F-4D97-AF65-F5344CB8AC3E}">
-        <p14:creationId xmlns:p14="http://schemas.microsoft.com/office/powerpoint/2010/main" val="699228768"/>
+        <p14:creationId xmlns:p14="http://schemas.microsoft.com/office/powerpoint/2010/main" val="2291682553"/>
       </p:ext>
     </p:extLst>
   </p:cSld>
@@ -8274,20 +7885,15 @@
           <a:p>
             <a:r>
               <a:rPr lang="ru-RU" dirty="0"/>
-              <a:t>Надёжность — отдельная характеристика, не зависящая от наличия соединения.</a:t>
-            </a:r>
-          </a:p>
-          <a:p>
-            <a:br>
-              <a:rPr lang="ru-RU" dirty="0"/>
-            </a:br>
+              <a:t>Чтобы сети могли развиваться постепенно, а новые технологии не ломали существующие, используется </a:t>
+            </a:r>
             <a:r>
               <a:rPr lang="ru-RU" b="1" dirty="0"/>
-              <a:t>Надёжные службы</a:t>
-            </a:r>
-            <a:r>
-              <a:rPr lang="ru-RU" dirty="0"/>
-              <a:t> используют подтверждения получения, обеспечивают доставку данных без потери и перестановок. Такой подход нужен, например, при передаче файлов: потеря даже одного бита недопустима.</a:t>
+              <a:t>иерархия уровней</a:t>
+            </a:r>
+            <a:r>
+              <a:rPr lang="ru-RU" dirty="0"/>
+              <a:t>. Каждый уровень решает свою задачу — от физической передачи данных до взаимодействия приложений — и скрывает детали реализации от остальных. Благодаря этому можно обновлять отдельные части сети, не переписывая всё целиком.</a:t>
             </a:r>
           </a:p>
           <a:p>
@@ -8296,23 +7902,31 @@
           <a:p>
             <a:r>
               <a:rPr lang="ru-RU" dirty="0"/>
-              <a:t>Существуют две разновидности надёжных служб: отправка </a:t>
+              <a:t>В сетях нужен механизм идентификации: </a:t>
             </a:r>
             <a:r>
               <a:rPr lang="ru-RU" b="1" dirty="0"/>
-              <a:t>отдельных сообщений с сохранением границ</a:t>
-            </a:r>
-            <a:r>
-              <a:rPr lang="ru-RU" dirty="0"/>
-              <a:t>, или отправка как </a:t>
+              <a:t>адресация</a:t>
+            </a:r>
+            <a:r>
+              <a:rPr lang="ru-RU" dirty="0"/>
+              <a:t> на низких уровнях и </a:t>
             </a:r>
             <a:r>
               <a:rPr lang="ru-RU" b="1" dirty="0"/>
-              <a:t>непрерывного байтового потока</a:t>
-            </a:r>
-            <a:r>
-              <a:rPr lang="ru-RU" dirty="0"/>
-              <a:t>, когда приложению не важно, где были исходные границы сообщений.</a:t>
+              <a:t>именование</a:t>
+            </a:r>
+            <a:r>
+              <a:rPr lang="ru-RU" dirty="0"/>
+              <a:t> на высоких. При объединении разных сетевых технологий возникает задача совместимости: разные сети могут нарушать порядок доставки сообщений или иметь разные максимальные размеры пакетов. Поэтому протоколы обеспечивают </a:t>
+            </a:r>
+            <a:r>
+              <a:rPr lang="ru-RU" b="1" dirty="0"/>
+              <a:t>фрагментацию и сборку</a:t>
+            </a:r>
+            <a:r>
+              <a:rPr lang="ru-RU" dirty="0"/>
+              <a:t> сообщений, а также нумерацию пакетов.</a:t>
             </a:r>
           </a:p>
           <a:p>
@@ -8320,29 +7934,38 @@
           </a:p>
           <a:p>
             <a:r>
+              <a:rPr lang="ru-RU" dirty="0"/>
+              <a:t>Безопасность — ещё один ключевой аспект. Требуется защищать данные от подслушивания (</a:t>
+            </a:r>
+            <a:r>
               <a:rPr lang="ru-RU" b="1" dirty="0"/>
-              <a:t>Ненадёжные службы</a:t>
-            </a:r>
-            <a:r>
-              <a:rPr lang="ru-RU" dirty="0"/>
-              <a:t>, наоборот, не дают гарантий — и именно это делает их быстрыми. Они удобны в мультимедиа, VoIP или видеосвязи: пользователю гораздо важнее низкая задержка, чем идеальное отсутствие ошибок.</a:t>
-            </a:r>
-          </a:p>
-          <a:p>
-            <a:endParaRPr lang="ru-RU" dirty="0"/>
-          </a:p>
-          <a:p>
-            <a:r>
-              <a:rPr lang="ru-RU" dirty="0"/>
-              <a:t>Есть и промежуточный тип — </a:t>
+              <a:t>конфиденциальность</a:t>
+            </a:r>
+            <a:r>
+              <a:rPr lang="ru-RU" dirty="0"/>
+              <a:t>), проверять подлинность отправителя (</a:t>
             </a:r>
             <a:r>
               <a:rPr lang="ru-RU" b="1" dirty="0"/>
-              <a:t>дейтаграммы с подтверждением</a:t>
-            </a:r>
-            <a:r>
-              <a:rPr lang="ru-RU" dirty="0"/>
-              <a:t>, напоминающие заказное письмо: одно сообщение — одно подтверждение.</a:t>
+              <a:t>аутентификация</a:t>
+            </a:r>
+            <a:r>
+              <a:rPr lang="ru-RU" dirty="0"/>
+              <a:t>) и предотвращать подмену содержимого (</a:t>
+            </a:r>
+            <a:r>
+              <a:rPr lang="ru-RU" b="1" dirty="0"/>
+              <a:t>целостность</a:t>
+            </a:r>
+            <a:r>
+              <a:rPr lang="ru-RU" dirty="0"/>
+              <a:t>).</a:t>
+            </a:r>
+          </a:p>
+          <a:p>
+            <a:r>
+              <a:rPr lang="ru-RU" dirty="0"/>
+              <a:t> Все эти функции реализуются с помощью криптографических механизмов, составляющих основу современных защищённых протоколов.</a:t>
             </a:r>
           </a:p>
           <a:p>
@@ -8367,7 +7990,7 @@
           <a:p>
             <a:fld id="{CF3F5FF5-003D-49C7-8AA8-32F0386C2E23}" type="slidenum">
               <a:rPr lang="en-US" smtClean="0"/>
-              <a:t>71</a:t>
+              <a:t>62</a:t>
             </a:fld>
             <a:endParaRPr lang="en-US"/>
           </a:p>
@@ -8376,7 +7999,7 @@
     </p:spTree>
     <p:extLst>
       <p:ext uri="{BB962C8B-B14F-4D97-AF65-F5344CB8AC3E}">
-        <p14:creationId xmlns:p14="http://schemas.microsoft.com/office/powerpoint/2010/main" val="384911891"/>
+        <p14:creationId xmlns:p14="http://schemas.microsoft.com/office/powerpoint/2010/main" val="2731314305"/>
       </p:ext>
     </p:extLst>
   </p:cSld>
@@ -8430,62 +8053,7 @@
           <a:bodyPr/>
           <a:lstStyle/>
           <a:p>
-            <a:r>
-              <a:rPr lang="ru-RU" dirty="0"/>
-              <a:t>Ключевой момент: нет «универсально лучшего» типа службы.</a:t>
-            </a:r>
-            <a:br>
-              <a:rPr lang="ru-RU" dirty="0"/>
-            </a:br>
-            <a:r>
-              <a:rPr lang="ru-RU" dirty="0"/>
-              <a:t>Например, файлы, банковские операции, документы требуют 100% точности — здесь важны соединение, порядок и подтверждения.</a:t>
-            </a:r>
-          </a:p>
-          <a:p>
-            <a:endParaRPr lang="ru-RU" dirty="0"/>
-          </a:p>
-          <a:p>
-            <a:r>
-              <a:rPr lang="ru-RU" dirty="0"/>
-              <a:t>Но если мы говорим про </a:t>
-            </a:r>
-            <a:r>
-              <a:rPr lang="ru-RU" b="1" dirty="0"/>
-              <a:t>голосовую связь, видеопотоки, онлайн-игры</a:t>
-            </a:r>
-            <a:r>
-              <a:rPr lang="ru-RU" dirty="0"/>
-              <a:t>, то избыточная надёжность вредна. Задержки, вызванные повторными отправками, ухудшат пользовательский опыт гораздо сильнее, чем небольшие искажения. Именно поэтому ненадёжные протоколы существуют и активно применяются.</a:t>
-            </a:r>
-          </a:p>
-          <a:p>
-            <a:endParaRPr lang="ru-RU" dirty="0"/>
-          </a:p>
-          <a:p>
-            <a:r>
-              <a:rPr lang="ru-RU" dirty="0"/>
-              <a:t>Кроме того, ненадёжная доставка может служить базой для надёжной — как это делает TCP поверх IP. А в простых сценариях клиент–серверного взаимодействия часто используется схема </a:t>
-            </a:r>
-            <a:r>
-              <a:rPr lang="ru-RU" b="1" dirty="0" err="1"/>
-              <a:t>request</a:t>
-            </a:r>
-            <a:r>
-              <a:rPr lang="ru-RU" b="1" dirty="0"/>
-              <a:t>–</a:t>
-            </a:r>
-            <a:r>
-              <a:rPr lang="ru-RU" b="1" dirty="0" err="1"/>
-              <a:t>reply</a:t>
-            </a:r>
-            <a:r>
-              <a:rPr lang="ru-RU" dirty="0"/>
-              <a:t>: одно сообщение — ответ, без установки длительного соединения.</a:t>
-            </a:r>
-          </a:p>
-          <a:p>
-            <a:endParaRPr lang="en-US" dirty="0"/>
+            <a:endParaRPr lang="en-US"/>
           </a:p>
         </p:txBody>
       </p:sp>
@@ -8506,7 +8074,7 @@
           <a:p>
             <a:fld id="{CF3F5FF5-003D-49C7-8AA8-32F0386C2E23}" type="slidenum">
               <a:rPr lang="en-US" smtClean="0"/>
-              <a:t>72</a:t>
+              <a:t>63</a:t>
             </a:fld>
             <a:endParaRPr lang="en-US"/>
           </a:p>
@@ -8515,7 +8083,7 @@
     </p:spTree>
     <p:extLst>
       <p:ext uri="{BB962C8B-B14F-4D97-AF65-F5344CB8AC3E}">
-        <p14:creationId xmlns:p14="http://schemas.microsoft.com/office/powerpoint/2010/main" val="258290943"/>
+        <p14:creationId xmlns:p14="http://schemas.microsoft.com/office/powerpoint/2010/main" val="619903668"/>
       </p:ext>
     </p:extLst>
   </p:cSld>
@@ -8571,65 +8139,41 @@
           <a:p>
             <a:r>
               <a:rPr lang="ru-RU" dirty="0"/>
-              <a:t>Чтобы приложение могло пользоваться сетевыми возможностями, ему нужен формальный набор операций — </a:t>
+              <a:t>Чтобы упростить проектирование сложных сетей, их делят на уровни. Представим себе пирамиду: нижние уровни занимаются физической передачей битов, верхние — логикой приложений. Каждый уровень не обязан знать, </a:t>
+            </a:r>
+            <a:r>
+              <a:rPr lang="ru-RU" i="1" dirty="0"/>
+              <a:t>как именно</a:t>
+            </a:r>
+            <a:r>
+              <a:rPr lang="ru-RU" dirty="0"/>
+              <a:t> работает уровень ниже, он лишь пользуется набором предоставляемых ему служб.</a:t>
+            </a:r>
+          </a:p>
+          <a:p>
+            <a:endParaRPr lang="ru-RU" dirty="0"/>
+          </a:p>
+          <a:p>
+            <a:r>
+              <a:rPr lang="ru-RU" dirty="0"/>
+              <a:t>Это сильно напоминает инкапсуляцию и объектно-ориентированное программирование: есть интерфейс и скрытая реализация.</a:t>
+            </a:r>
+          </a:p>
+          <a:p>
+            <a:endParaRPr lang="ru-RU" dirty="0"/>
+          </a:p>
+          <a:p>
+            <a:r>
+              <a:rPr lang="ru-RU" dirty="0"/>
+              <a:t>Для разработчика верхнего уровня сеть выглядит как </a:t>
             </a:r>
             <a:r>
               <a:rPr lang="ru-RU" b="1" dirty="0"/>
-              <a:t>примитивов</a:t>
-            </a:r>
-            <a:r>
-              <a:rPr lang="ru-RU" dirty="0"/>
-              <a:t>. Это базовые вызовы, которые позволяют запросить у сети выполнение действий: установить соединение, отправить данные, принять данные или завершить работу.</a:t>
-            </a:r>
-          </a:p>
-          <a:p>
-            <a:endParaRPr lang="ru-RU" dirty="0"/>
-          </a:p>
-          <a:p>
-            <a:r>
-              <a:rPr lang="ru-RU" dirty="0"/>
-              <a:t>В реальных ОС эти примитивы чаще всего реализованы как </a:t>
-            </a:r>
-            <a:r>
-              <a:rPr lang="ru-RU" b="1" dirty="0"/>
-              <a:t>системные вызовы</a:t>
-            </a:r>
-            <a:r>
-              <a:rPr lang="ru-RU" dirty="0"/>
-              <a:t> (например, </a:t>
-            </a:r>
-            <a:r>
-              <a:rPr lang="ru-RU" dirty="0" err="1"/>
-              <a:t>socket</a:t>
-            </a:r>
-            <a:r>
-              <a:rPr lang="ru-RU" dirty="0"/>
-              <a:t>, </a:t>
-            </a:r>
-            <a:r>
-              <a:rPr lang="ru-RU" dirty="0" err="1"/>
-              <a:t>connect</a:t>
-            </a:r>
-            <a:r>
-              <a:rPr lang="ru-RU" dirty="0"/>
-              <a:t>, </a:t>
-            </a:r>
-            <a:r>
-              <a:rPr lang="ru-RU" dirty="0" err="1"/>
-              <a:t>send</a:t>
-            </a:r>
-            <a:r>
-              <a:rPr lang="ru-RU" dirty="0"/>
-              <a:t>). Примитивы определяются типом службы: соединительной или без соединения.</a:t>
-            </a:r>
-          </a:p>
-          <a:p>
-            <a:endParaRPr lang="ru-RU" dirty="0"/>
-          </a:p>
-          <a:p>
-            <a:r>
-              <a:rPr lang="ru-RU" dirty="0"/>
-              <a:t>Именно примитивы формируют «точку входа» приложения в стек протоколов, задавая, какие функции сеть предоставляет процессу.</a:t>
+              <a:t>виртуальная машина</a:t>
+            </a:r>
+            <a:r>
+              <a:rPr lang="ru-RU" dirty="0"/>
+              <a:t>, которая умеет, например, «передать сообщение на удалённый узел», даже если под этим скрыты десятки промежуточных шагов и преобразований.</a:t>
             </a:r>
           </a:p>
           <a:p>
@@ -8654,7 +8198,7 @@
           <a:p>
             <a:fld id="{CF3F5FF5-003D-49C7-8AA8-32F0386C2E23}" type="slidenum">
               <a:rPr lang="en-US" smtClean="0"/>
-              <a:t>74</a:t>
+              <a:t>64</a:t>
             </a:fld>
             <a:endParaRPr lang="en-US"/>
           </a:p>
@@ -8663,7 +8207,7 @@
     </p:spTree>
     <p:extLst>
       <p:ext uri="{BB962C8B-B14F-4D97-AF65-F5344CB8AC3E}">
-        <p14:creationId xmlns:p14="http://schemas.microsoft.com/office/powerpoint/2010/main" val="3495547927"/>
+        <p14:creationId xmlns:p14="http://schemas.microsoft.com/office/powerpoint/2010/main" val="3241450571"/>
       </p:ext>
     </p:extLst>
   </p:cSld>
@@ -8719,23 +8263,15 @@
           <a:p>
             <a:r>
               <a:rPr lang="ru-RU" dirty="0"/>
-              <a:t>Минимальный набор примитивов для построения надёжного байтового потока очень похож на классический интерфейс </a:t>
-            </a:r>
-            <a:r>
-              <a:rPr lang="ru-RU" dirty="0" err="1"/>
-              <a:t>Berkeley</a:t>
-            </a:r>
-            <a:r>
-              <a:rPr lang="ru-RU" dirty="0"/>
-              <a:t> </a:t>
-            </a:r>
-            <a:r>
-              <a:rPr lang="ru-RU" dirty="0" err="1"/>
-              <a:t>Sockets</a:t>
-            </a:r>
-            <a:r>
-              <a:rPr lang="ru-RU" dirty="0"/>
-              <a:t>.</a:t>
+              <a:t>Если на двух компьютерах есть, скажем, транспортный уровень, то их сущности этого уровня называют </a:t>
+            </a:r>
+            <a:r>
+              <a:rPr lang="ru-RU" b="1" dirty="0"/>
+              <a:t>пирами</a:t>
+            </a:r>
+            <a:r>
+              <a:rPr lang="ru-RU" dirty="0"/>
+              <a:t>. Протокол уровня описывает, какие сообщения и в каком формате они друг другу посылают, какие реакции ожидаются, какие ошибки возможны.</a:t>
             </a:r>
           </a:p>
           <a:p>
@@ -8744,81 +8280,52 @@
           <a:p>
             <a:r>
               <a:rPr lang="ru-RU" dirty="0"/>
-              <a:t>Сервер начинает с </a:t>
+              <a:t>Важно понимать, что это </a:t>
             </a:r>
             <a:r>
               <a:rPr lang="ru-RU" b="1" dirty="0"/>
-              <a:t>LISTEN</a:t>
-            </a:r>
-            <a:r>
-              <a:rPr lang="ru-RU" dirty="0"/>
-              <a:t>, блокируясь в ожидании клиента.</a:t>
-            </a:r>
-            <a:br>
-              <a:rPr lang="ru-RU" dirty="0"/>
-            </a:br>
-            <a:r>
-              <a:rPr lang="ru-RU" dirty="0"/>
-              <a:t>Клиент вызывает </a:t>
+              <a:t>логическая, виртуальная картина</a:t>
+            </a:r>
+            <a:r>
+              <a:rPr lang="ru-RU" dirty="0"/>
+              <a:t>. Физически данные не пересылаются напрямую от уровня n на одном хосте к уровню n на другом. На отправителе данные всегда идут </a:t>
             </a:r>
             <a:r>
               <a:rPr lang="ru-RU" b="1" dirty="0"/>
-              <a:t>CONNECT</a:t>
-            </a:r>
-            <a:r>
-              <a:rPr lang="ru-RU" dirty="0"/>
-              <a:t>, при этом ОС формирует пакет-запрос.</a:t>
-            </a:r>
-            <a:br>
-              <a:rPr lang="ru-RU" dirty="0"/>
-            </a:br>
-            <a:r>
-              <a:rPr lang="ru-RU" dirty="0"/>
-              <a:t>Сервер подтверждает соединение через </a:t>
-            </a:r>
+              <a:t>вниз по стеку</a:t>
+            </a:r>
+            <a:r>
+              <a:rPr lang="ru-RU" dirty="0"/>
+              <a:t> – с уровня на уровень, пока не окажутся в физической среде. На приёмнике — поднимаются вверх, очищаясь от служебной информации нижних уровней.</a:t>
+            </a:r>
+          </a:p>
+          <a:p>
+            <a:endParaRPr lang="ru-RU" dirty="0"/>
+          </a:p>
+          <a:p>
             <a:r>
               <a:rPr lang="ru-RU" b="1" dirty="0"/>
-              <a:t>ACCEPT</a:t>
-            </a:r>
-            <a:r>
-              <a:rPr lang="ru-RU" dirty="0"/>
-              <a:t>, и с этого момента стороны могут обмениваться данными.</a:t>
-            </a:r>
-          </a:p>
-          <a:p>
-            <a:r>
-              <a:rPr lang="ru-RU" dirty="0"/>
-              <a:t>Основные операции после установления канала — </a:t>
-            </a:r>
-            <a:r>
-              <a:rPr lang="ru-RU" b="1" dirty="0"/>
-              <a:t>SEND</a:t>
-            </a:r>
-            <a:r>
-              <a:rPr lang="ru-RU" dirty="0"/>
-              <a:t> и </a:t>
-            </a:r>
-            <a:r>
-              <a:rPr lang="ru-RU" b="1" dirty="0"/>
-              <a:t>RECEIVE</a:t>
-            </a:r>
-            <a:r>
-              <a:rPr lang="ru-RU" dirty="0"/>
-              <a:t>. Они позволяют реализовать любую структуру диалога: запрос–ответ, поток данных, последовательность сообщений.</a:t>
-            </a:r>
-          </a:p>
-          <a:p>
-            <a:r>
-              <a:rPr lang="ru-RU" dirty="0"/>
-              <a:t>Завершение происходит через </a:t>
-            </a:r>
-            <a:r>
-              <a:rPr lang="ru-RU" b="1" dirty="0"/>
-              <a:t>DISCONNECT</a:t>
-            </a:r>
-            <a:r>
-              <a:rPr lang="ru-RU" dirty="0"/>
-              <a:t> — этот примитив корректно освобождает ресурсы и уведомляет вторую сторону.</a:t>
+              <a:t>Интерфейс</a:t>
+            </a:r>
+            <a:r>
+              <a:rPr lang="ru-RU" dirty="0"/>
+              <a:t> между уровнями — это договорённость, какие функции и операции нижний уровень предоставляет верхнему: «передать пакет», «зарегистрировать соединение» и т. п. Протокол описывает общение </a:t>
+            </a:r>
+            <a:r>
+              <a:rPr lang="ru-RU" i="1" dirty="0"/>
+              <a:t>между узлами</a:t>
+            </a:r>
+            <a:r>
+              <a:rPr lang="ru-RU" dirty="0"/>
+              <a:t>, интерфейс — взаимодействие </a:t>
+            </a:r>
+            <a:r>
+              <a:rPr lang="ru-RU" i="1" dirty="0"/>
+              <a:t>внутри одного узла</a:t>
+            </a:r>
+            <a:r>
+              <a:rPr lang="ru-RU" dirty="0"/>
+              <a:t> между соседними уровнями.</a:t>
             </a:r>
           </a:p>
           <a:p>
@@ -8843,7 +8350,7 @@
           <a:p>
             <a:fld id="{CF3F5FF5-003D-49C7-8AA8-32F0386C2E23}" type="slidenum">
               <a:rPr lang="en-US" smtClean="0"/>
-              <a:t>75</a:t>
+              <a:t>65</a:t>
             </a:fld>
             <a:endParaRPr lang="en-US"/>
           </a:p>
@@ -8852,7 +8359,7 @@
     </p:spTree>
     <p:extLst>
       <p:ext uri="{BB962C8B-B14F-4D97-AF65-F5344CB8AC3E}">
-        <p14:creationId xmlns:p14="http://schemas.microsoft.com/office/powerpoint/2010/main" val="3931705826"/>
+        <p14:creationId xmlns:p14="http://schemas.microsoft.com/office/powerpoint/2010/main" val="1783245929"/>
       </p:ext>
     </p:extLst>
   </p:cSld>
@@ -8908,82 +8415,63 @@
           <a:p>
             <a:r>
               <a:rPr lang="ru-RU" dirty="0"/>
-              <a:t>Взаимодействие клиента и сервера при использовании примитивов напоминает телефонный вызов.</a:t>
-            </a:r>
-          </a:p>
-          <a:p>
+              <a:t>Полезно взглянуть на уровни через человеческую аналогию. Есть два философа, которые не знают общих языков. На их уровне (условно, уровень 3) цель — обменяться смыслом фразы «Мне нравятся кролики». Они спрашивают об этом </a:t>
+            </a:r>
             <a:r>
               <a:rPr lang="ru-RU" b="1" dirty="0"/>
-              <a:t>LISTEN:</a:t>
-            </a:r>
-            <a:r>
-              <a:rPr lang="ru-RU" dirty="0"/>
-              <a:t> сервер “сидит на линии”, готовый принять соединение.</a:t>
-            </a:r>
-          </a:p>
-          <a:p>
+              <a:t>переводчиков</a:t>
+            </a:r>
+            <a:r>
+              <a:rPr lang="ru-RU" dirty="0"/>
+              <a:t> (уровень 2), которые договорились использовать нейтральный язык, например голландский. Какой именно язык они выбрали — это и есть </a:t>
+            </a:r>
             <a:r>
               <a:rPr lang="ru-RU" b="1" dirty="0"/>
-              <a:t>CONNECT:</a:t>
-            </a:r>
-            <a:r>
-              <a:rPr lang="ru-RU" dirty="0"/>
-              <a:t> клиент инициирует запрос.</a:t>
-            </a:r>
-          </a:p>
-          <a:p>
+              <a:t>протокол уровня 2</a:t>
+            </a:r>
+            <a:r>
+              <a:rPr lang="ru-RU" dirty="0"/>
+              <a:t>.</a:t>
+            </a:r>
+          </a:p>
+          <a:p>
+            <a:endParaRPr lang="ru-RU" dirty="0"/>
+          </a:p>
+          <a:p>
+            <a:r>
+              <a:rPr lang="ru-RU" dirty="0"/>
+              <a:t>Переводчики, в свою очередь, пользуются услугами </a:t>
+            </a:r>
             <a:r>
               <a:rPr lang="ru-RU" b="1" dirty="0"/>
-              <a:t>ACCEPT:</a:t>
-            </a:r>
-            <a:r>
-              <a:rPr lang="ru-RU" dirty="0"/>
-              <a:t> сервер отвечает и соединение считается установленным.</a:t>
-            </a:r>
-          </a:p>
-          <a:p>
-            <a:r>
-              <a:rPr lang="ru-RU" dirty="0"/>
-              <a:t>Далее сервер и клиент могут многократно выполнять </a:t>
-            </a:r>
-            <a:r>
-              <a:rPr lang="ru-RU" b="1" dirty="0"/>
-              <a:t>SEND</a:t>
-            </a:r>
-            <a:r>
-              <a:rPr lang="ru-RU" dirty="0"/>
-              <a:t> и </a:t>
-            </a:r>
-            <a:r>
-              <a:rPr lang="ru-RU" b="1" dirty="0"/>
-              <a:t>RECEIVE</a:t>
-            </a:r>
-            <a:r>
-              <a:rPr lang="ru-RU" dirty="0"/>
-              <a:t>, передавая сообщения в обе стороны.</a:t>
-            </a:r>
-          </a:p>
-          <a:p>
-            <a:r>
-              <a:rPr lang="ru-RU" dirty="0"/>
-              <a:t>Заканчивается всё вызовом </a:t>
-            </a:r>
-            <a:r>
-              <a:rPr lang="ru-RU" b="1" dirty="0"/>
-              <a:t>DISCONNECT</a:t>
-            </a:r>
-            <a:r>
-              <a:rPr lang="ru-RU" dirty="0"/>
-              <a:t>: одна сторона закрывает соединение, вторая подтверждает.</a:t>
-            </a:r>
-          </a:p>
-          <a:p>
-            <a:r>
-              <a:rPr lang="ru-RU" dirty="0"/>
-              <a:t>Эта схема обеспечивает устойчивость, контроль порядка и надёжность доставки — то, что необходимо большинству прикладных протоколов.</a:t>
-            </a:r>
-          </a:p>
-          <a:p>
+              <a:t>секретарей</a:t>
+            </a:r>
+            <a:r>
+              <a:rPr lang="ru-RU" dirty="0"/>
+              <a:t> (уровень 1), которые могут отправить текст по факсу, по почте или по телефону. Способ физической передачи — это протокол нижнего уровня.</a:t>
+            </a:r>
+          </a:p>
+          <a:p>
+            <a:endParaRPr lang="ru-RU" dirty="0"/>
+          </a:p>
+          <a:p>
+            <a:r>
+              <a:rPr lang="ru-RU" dirty="0"/>
+              <a:t>Заметьте: переводчики могут заменить голландский на финский, если оба согласны и не меняют интерфейсы с философами и секретарями. Секретари могут перейти с факса на </a:t>
+            </a:r>
+            <a:r>
+              <a:rPr lang="ru-RU" dirty="0" err="1"/>
+              <a:t>e-mail</a:t>
+            </a:r>
+            <a:r>
+              <a:rPr lang="ru-RU" dirty="0"/>
+              <a:t> — и философы ничего об этом не узнают. Ровно так же уровни в сети могут эволюционировать независимо, если сохраняются интерфейсы и соблюдаются протоколы.</a:t>
+            </a:r>
+          </a:p>
+          <a:p>
+            <a:br>
+              <a:rPr lang="ru-RU" dirty="0"/>
+            </a:br>
             <a:endParaRPr lang="en-US" dirty="0"/>
           </a:p>
         </p:txBody>
@@ -9005,7 +8493,7 @@
           <a:p>
             <a:fld id="{CF3F5FF5-003D-49C7-8AA8-32F0386C2E23}" type="slidenum">
               <a:rPr lang="en-US" smtClean="0"/>
-              <a:t>76</a:t>
+              <a:t>66</a:t>
             </a:fld>
             <a:endParaRPr lang="en-US"/>
           </a:p>
@@ -9014,7 +8502,7 @@
     </p:spTree>
     <p:extLst>
       <p:ext uri="{BB962C8B-B14F-4D97-AF65-F5344CB8AC3E}">
-        <p14:creationId xmlns:p14="http://schemas.microsoft.com/office/powerpoint/2010/main" val="1846160212"/>
+        <p14:creationId xmlns:p14="http://schemas.microsoft.com/office/powerpoint/2010/main" val="493076330"/>
       </p:ext>
     </p:extLst>
   </p:cSld>
@@ -9070,80 +8558,41 @@
           <a:p>
             <a:r>
               <a:rPr lang="ru-RU" dirty="0"/>
-              <a:t>На первый взгляд кажется, что достаточно всего двух сообщений:</a:t>
-            </a:r>
-            <a:br>
-              <a:rPr lang="ru-RU" dirty="0"/>
-            </a:br>
-            <a:r>
-              <a:rPr lang="ru-RU" dirty="0"/>
-              <a:t>— клиент отправляет запрос,</a:t>
-            </a:r>
-            <a:br>
-              <a:rPr lang="ru-RU" dirty="0"/>
-            </a:br>
-            <a:r>
-              <a:rPr lang="ru-RU" dirty="0"/>
-              <a:t>— сервер отвечает результатом.</a:t>
-            </a:r>
-          </a:p>
-          <a:p>
-            <a:r>
-              <a:rPr lang="ru-RU" dirty="0"/>
-              <a:t>Однако в реальной сети пакеты могут задерживаться, теряться, приходить в неправильном порядке или повторяться.</a:t>
-            </a:r>
-          </a:p>
-          <a:p>
-            <a:endParaRPr lang="ru-RU" dirty="0"/>
-          </a:p>
-          <a:p>
-            <a:r>
-              <a:rPr lang="ru-RU" dirty="0"/>
-              <a:t>Если ответ разбит на сотни пакетов, клиент должен уметь понять:</a:t>
-            </a:r>
-            <a:br>
-              <a:rPr lang="ru-RU" dirty="0"/>
-            </a:br>
-            <a:r>
-              <a:rPr lang="ru-RU" dirty="0"/>
-              <a:t>— все ли пакеты он получил;</a:t>
-            </a:r>
-            <a:br>
-              <a:rPr lang="ru-RU" dirty="0"/>
-            </a:br>
-            <a:r>
-              <a:rPr lang="ru-RU" dirty="0"/>
-              <a:t>— какой из них последний;</a:t>
-            </a:r>
-            <a:br>
-              <a:rPr lang="ru-RU" dirty="0"/>
-            </a:br>
-            <a:r>
-              <a:rPr lang="ru-RU" dirty="0"/>
-              <a:t>— не перепутаны ли пакеты от разных запросов.</a:t>
-            </a:r>
-          </a:p>
-          <a:p>
-            <a:endParaRPr lang="ru-RU" dirty="0"/>
-          </a:p>
-          <a:p>
-            <a:r>
-              <a:rPr lang="ru-RU" dirty="0"/>
-              <a:t>Поэтому простая схема «запрос–ответ» </a:t>
+              <a:t>Рассмотрим, как сообщение проходит по стеку.</a:t>
+            </a:r>
+          </a:p>
+          <a:p>
+            <a:r>
+              <a:rPr lang="ru-RU" dirty="0"/>
+              <a:t> Приложение на уровне 5 формирует сообщение M и отдаёт его уровню 4. Транспортный уровень добавляет свой </a:t>
             </a:r>
             <a:r>
               <a:rPr lang="ru-RU" b="1" dirty="0"/>
-              <a:t>не подходит</a:t>
-            </a:r>
-            <a:r>
-              <a:rPr lang="ru-RU" dirty="0"/>
-              <a:t> для ненадёжных сетей и больших сообщений.</a:t>
-            </a:r>
-          </a:p>
-          <a:p>
-            <a:r>
-              <a:rPr lang="ru-RU" dirty="0"/>
-              <a:t>Именно примитивы уровня соединения позволяют организовать стабильный упорядоченный канал и решают все эти вопросы автоматически.</a:t>
+              <a:t>заголовок</a:t>
+            </a:r>
+            <a:r>
+              <a:rPr lang="ru-RU" dirty="0"/>
+              <a:t>: там могут быть номера портов, информация для восстановления порядка, контрольные поля. Получившийся блок передаётся уровню 3.</a:t>
+            </a:r>
+          </a:p>
+          <a:p>
+            <a:r>
+              <a:rPr lang="ru-RU" dirty="0"/>
+              <a:t>Сетевой уровень может столкнуться с ограничением на максимальный размер пакета — и тогда выполняется </a:t>
+            </a:r>
+            <a:r>
+              <a:rPr lang="ru-RU" b="1" dirty="0"/>
+              <a:t>фрагментация</a:t>
+            </a:r>
+            <a:r>
+              <a:rPr lang="ru-RU" dirty="0"/>
+              <a:t>: сообщение делится на части M1, M2, каждая получает свой заголовок уровня 3 с адресами и номерами фрагментов. Затем кадры формируются на канальном уровне, где добавляются заголовки/концевики для передачи по конкретной среде.</a:t>
+            </a:r>
+          </a:p>
+          <a:p>
+            <a:r>
+              <a:rPr lang="ru-RU" dirty="0"/>
+              <a:t>На принимающей стороне всё происходит в обратном порядке: данные поднимаются снизу вверх, заголовки поочерёдно удаляются, а фрагменты собираются в исходное сообщение M. Важно, что каждый уровень «видит» только свой заголовок и полезную нагрузку, не вмешиваясь в детали реализации других уровней.</a:t>
             </a:r>
           </a:p>
           <a:p>
@@ -9168,7 +8617,7 @@
           <a:p>
             <a:fld id="{CF3F5FF5-003D-49C7-8AA8-32F0386C2E23}" type="slidenum">
               <a:rPr lang="en-US" smtClean="0"/>
-              <a:t>77</a:t>
+              <a:t>67</a:t>
             </a:fld>
             <a:endParaRPr lang="en-US"/>
           </a:p>
@@ -9177,7 +8626,7 @@
     </p:spTree>
     <p:extLst>
       <p:ext uri="{BB962C8B-B14F-4D97-AF65-F5344CB8AC3E}">
-        <p14:creationId xmlns:p14="http://schemas.microsoft.com/office/powerpoint/2010/main" val="2457851131"/>
+        <p14:creationId xmlns:p14="http://schemas.microsoft.com/office/powerpoint/2010/main" val="1206348322"/>
       </p:ext>
     </p:extLst>
   </p:cSld>
@@ -9233,7 +8682,23 @@
           <a:p>
             <a:r>
               <a:rPr lang="ru-RU" dirty="0"/>
-              <a:t>Примитивы — это фундаментальный «инструментарий», через который приложения взаимодействуют с сетевым стеком.</a:t>
+              <a:t>Если взять все уровни и закреплённые за ними протоколы, мы получим </a:t>
+            </a:r>
+            <a:r>
+              <a:rPr lang="ru-RU" b="1" dirty="0"/>
+              <a:t>архитектуру сети</a:t>
+            </a:r>
+            <a:r>
+              <a:rPr lang="ru-RU" dirty="0"/>
+              <a:t>. Например, в интернете это TCP/IP-стек: IP на сетевом уровне, TCP или UDP на транспортном и множество протоколов приложений сверху. Конкретный набор используемых протоколов на машине называется </a:t>
+            </a:r>
+            <a:r>
+              <a:rPr lang="ru-RU" b="1" dirty="0"/>
+              <a:t>стеком протоколов</a:t>
+            </a:r>
+            <a:r>
+              <a:rPr lang="ru-RU" dirty="0"/>
+              <a:t>.</a:t>
             </a:r>
           </a:p>
           <a:p>
@@ -9242,7 +8707,23 @@
           <a:p>
             <a:r>
               <a:rPr lang="ru-RU" dirty="0"/>
-              <a:t>Благодаря им можно построить как простой обмен сообщениями, так и сложные протоколы с подтверждениями, повторными отправками, большим объёмом данных и строгим порядком доставки.</a:t>
+              <a:t>Важно, что стандарт обычно описывает именно </a:t>
+            </a:r>
+            <a:r>
+              <a:rPr lang="ru-RU" b="1" dirty="0"/>
+              <a:t>протокол</a:t>
+            </a:r>
+            <a:r>
+              <a:rPr lang="ru-RU" dirty="0"/>
+              <a:t> и требования к интерфейсу. Но </a:t>
+            </a:r>
+            <a:r>
+              <a:rPr lang="ru-RU" i="1" dirty="0"/>
+              <a:t>как</a:t>
+            </a:r>
+            <a:r>
+              <a:rPr lang="ru-RU" dirty="0"/>
+              <a:t> это реализовано внутри конкретной ОС, драйвера или сетевой карты — остаётся на усмотрение разработчика. Поэтому одна и та же архитектура может быть реализована по-разному на серверах, маршрутизаторах, встраиваемых устройствах.</a:t>
             </a:r>
           </a:p>
           <a:p>
@@ -9251,7 +8732,23 @@
           <a:p>
             <a:r>
               <a:rPr lang="ru-RU" dirty="0"/>
-              <a:t>Они позволяют скрыть сложность сетевой инфраструктуры и предоставить программисту удобный, единообразный интерфейс взаимодействия с сетью — независимо от типа соединения или внутреннего устройства протоколов.</a:t>
+              <a:t>Часто низшие уровни (физический и канальный) частично или полностью вынесены в </a:t>
+            </a:r>
+            <a:r>
+              <a:rPr lang="ru-RU" b="1" dirty="0"/>
+              <a:t>аппаратное обеспечение</a:t>
+            </a:r>
+            <a:r>
+              <a:rPr lang="ru-RU" dirty="0"/>
+              <a:t> — сетевой адаптер, чип </a:t>
+            </a:r>
+            <a:r>
+              <a:rPr lang="ru-RU" dirty="0" err="1"/>
+              <a:t>Wi</a:t>
+            </a:r>
+            <a:r>
+              <a:rPr lang="ru-RU" dirty="0"/>
+              <a:t>-Fi и т.п., где работают уже «зашитые» алгоритмы. Верхние уровни чаще реализуются как программные модули. Такое разделение ускоряет работу и позволяет оптимизировать именно те части стека, которые критичны по производительности.</a:t>
             </a:r>
           </a:p>
           <a:p>
@@ -9276,7 +8773,7 @@
           <a:p>
             <a:fld id="{CF3F5FF5-003D-49C7-8AA8-32F0386C2E23}" type="slidenum">
               <a:rPr lang="en-US" smtClean="0"/>
-              <a:t>78</a:t>
+              <a:t>68</a:t>
             </a:fld>
             <a:endParaRPr lang="en-US"/>
           </a:p>
@@ -9285,7 +8782,7 @@
     </p:spTree>
     <p:extLst>
       <p:ext uri="{BB962C8B-B14F-4D97-AF65-F5344CB8AC3E}">
-        <p14:creationId xmlns:p14="http://schemas.microsoft.com/office/powerpoint/2010/main" val="2309492609"/>
+        <p14:creationId xmlns:p14="http://schemas.microsoft.com/office/powerpoint/2010/main" val="3686391908"/>
       </p:ext>
     </p:extLst>
   </p:cSld>
@@ -9339,63 +8836,7 @@
           <a:bodyPr/>
           <a:lstStyle/>
           <a:p>
-            <a:r>
-              <a:rPr lang="ru-RU" dirty="0"/>
-              <a:t>Служба определяет функциональность, которую один уровень предоставляет уровню выше. Это набор операций, таких как </a:t>
-            </a:r>
-            <a:r>
-              <a:rPr lang="ru-RU" i="1" dirty="0"/>
-              <a:t>отправить данные</a:t>
-            </a:r>
-            <a:r>
-              <a:rPr lang="ru-RU" dirty="0"/>
-              <a:t>, </a:t>
-            </a:r>
-            <a:r>
-              <a:rPr lang="ru-RU" i="1" dirty="0"/>
-              <a:t>установить соединение</a:t>
-            </a:r>
-            <a:r>
-              <a:rPr lang="ru-RU" dirty="0"/>
-              <a:t>, </a:t>
-            </a:r>
-            <a:r>
-              <a:rPr lang="ru-RU" i="1" dirty="0"/>
-              <a:t>получить сообщение</a:t>
-            </a:r>
-            <a:r>
-              <a:rPr lang="ru-RU" dirty="0"/>
-              <a:t> — то есть </a:t>
-            </a:r>
-            <a:r>
-              <a:rPr lang="ru-RU" b="1" dirty="0"/>
-              <a:t>интерфейс</a:t>
-            </a:r>
-            <a:r>
-              <a:rPr lang="ru-RU" dirty="0"/>
-              <a:t>, но не реализация.</a:t>
-            </a:r>
-          </a:p>
-          <a:p>
-            <a:endParaRPr lang="ru-RU" dirty="0"/>
-          </a:p>
-          <a:p>
-            <a:r>
-              <a:rPr lang="ru-RU" dirty="0"/>
-              <a:t>Важно, что служба скрывает внутренние механизмы работы уровня: пользователю не нужно знать, каким образом обеспечивается надёжность, маршрутизация или фрагментация данных — он просто вызывает соответствующие операции.</a:t>
-            </a:r>
-          </a:p>
-          <a:p>
-            <a:endParaRPr lang="ru-RU" dirty="0"/>
-          </a:p>
-          <a:p>
-            <a:r>
-              <a:rPr lang="ru-RU" dirty="0"/>
-              <a:t>Такое разделение делает архитектуру гибкой: уровни можно улучшать, изменять или заменять без влияния на вышележащие уровни, если интерфейс остаётся прежним.</a:t>
-            </a:r>
-          </a:p>
-          <a:p>
-            <a:endParaRPr lang="en-US" dirty="0"/>
+            <a:endParaRPr lang="en-US"/>
           </a:p>
         </p:txBody>
       </p:sp>
@@ -9416,7 +8857,7 @@
           <a:p>
             <a:fld id="{CF3F5FF5-003D-49C7-8AA8-32F0386C2E23}" type="slidenum">
               <a:rPr lang="en-US" smtClean="0"/>
-              <a:t>80</a:t>
+              <a:t>69</a:t>
             </a:fld>
             <a:endParaRPr lang="en-US"/>
           </a:p>
@@ -9425,7 +8866,7 @@
     </p:spTree>
     <p:extLst>
       <p:ext uri="{BB962C8B-B14F-4D97-AF65-F5344CB8AC3E}">
-        <p14:creationId xmlns:p14="http://schemas.microsoft.com/office/powerpoint/2010/main" val="3867156880"/>
+        <p14:creationId xmlns:p14="http://schemas.microsoft.com/office/powerpoint/2010/main" val="2400485852"/>
       </p:ext>
     </p:extLst>
   </p:cSld>
@@ -9481,7 +8922,7 @@
           <a:p>
             <a:r>
               <a:rPr lang="ru-RU" dirty="0"/>
-              <a:t>Интернет радикально изменил способы общения. Электронная почта стала универсальным инструментом для деловых и личных коммуникаций, позволяя прикладывать документы, изображения, аудио и видео.</a:t>
+              <a:t>Одноранговые сети работают по принципиально иной модели. Здесь нет разделения на «главный» сервер и клиентов. Каждый участник равноправен и может передавать файлы, информацию или ресурсы другим участникам.</a:t>
             </a:r>
           </a:p>
           <a:p>
@@ -9490,7 +8931,7 @@
             </a:br>
             <a:r>
               <a:rPr lang="ru-RU" dirty="0"/>
-              <a:t>Мгновенные сообщения — мессенджеры — предоставляют возможность общаться в реальном времени, независимо от расстояния между людьми. Социальные сети объединили в себе коммуникацию, публикацию контента и систему рекомендаций.</a:t>
+              <a:t>Классическим примером является протокол BitTorrent, где файл делится на множество частей, которые участники обменивают между собой. Это позволяет значительно ускорить загрузку и уменьшить нагрузку на центральный сервер или вовсе обойтись без него.</a:t>
             </a:r>
           </a:p>
           <a:p>
@@ -9499,16 +8940,7 @@
             </a:br>
             <a:r>
               <a:rPr lang="ru-RU" dirty="0"/>
-              <a:t>Важной частью интернета стала передача мультимедийного контента: потоковое видео, онлайн-радио, стриминговые платформы. Это открыло путь дистанционному образованию, вебинарам, видеоконференциям.</a:t>
-            </a:r>
-          </a:p>
-          <a:p>
-            <a:br>
-              <a:rPr lang="ru-RU" dirty="0"/>
-            </a:br>
-            <a:r>
-              <a:rPr lang="ru-RU" dirty="0"/>
-              <a:t>Такие средства связи не только упрощают повседневную жизнь, но и расширяют доступ жителей удалённых районов к образовательным и информационным ресурсам.</a:t>
+              <a:t>P2P-подход особенно удобен, когда необходимо распределить нагрузку, обеспечить устойчивость к отказам или избежать узкого места в виде централизованного сервера. Хотя такие сети часто ассоциировались с проблемами авторских прав, они активно применяются и в легальных областях — от распространения дистрибутивов Linux до обмена личными фотографиями между пользователями.</a:t>
             </a:r>
             <a:endParaRPr lang="en-US" dirty="0"/>
           </a:p>
@@ -9531,7 +8963,7 @@
           <a:p>
             <a:fld id="{CF3F5FF5-003D-49C7-8AA8-32F0386C2E23}" type="slidenum">
               <a:rPr lang="en-US" smtClean="0"/>
-              <a:t>8</a:t>
+              <a:t>7</a:t>
             </a:fld>
             <a:endParaRPr lang="en-US"/>
           </a:p>
@@ -9540,7 +8972,7 @@
     </p:spTree>
     <p:extLst>
       <p:ext uri="{BB962C8B-B14F-4D97-AF65-F5344CB8AC3E}">
-        <p14:creationId xmlns:p14="http://schemas.microsoft.com/office/powerpoint/2010/main" val="2534217202"/>
+        <p14:creationId xmlns:p14="http://schemas.microsoft.com/office/powerpoint/2010/main" val="4058404292"/>
       </p:ext>
     </p:extLst>
   </p:cSld>
@@ -9596,15 +9028,20 @@
           <a:p>
             <a:r>
               <a:rPr lang="ru-RU" dirty="0"/>
-              <a:t>Протокол описывает, </a:t>
-            </a:r>
+              <a:t>В сетях существуют два больших класса служб.</a:t>
+            </a:r>
+          </a:p>
+          <a:p>
+            <a:br>
+              <a:rPr lang="ru-RU" dirty="0"/>
+            </a:br>
             <a:r>
               <a:rPr lang="ru-RU" b="1" dirty="0"/>
-              <a:t>как</a:t>
-            </a:r>
-            <a:r>
-              <a:rPr lang="ru-RU" dirty="0"/>
-              <a:t> взаимодействуют одноранговые процессы на разных устройствах: формат пакетов, порядок обмена, коды ошибок, поля заголовков и т. д.</a:t>
+              <a:t>Службы с установлением соединения</a:t>
+            </a:r>
+            <a:r>
+              <a:rPr lang="ru-RU" dirty="0"/>
+              <a:t> работают по принципу телефонного звонка: сначала стороны согласуют параметры, резервируют ресурсы, затем передают данные в строго определённом порядке и завершают соединение. Передаваемая информация идёт как бы по «трубе», и порядок доставки, как правило, гарантирован.</a:t>
             </a:r>
           </a:p>
           <a:p>
@@ -9612,25 +9049,12 @@
           </a:p>
           <a:p>
             <a:r>
-              <a:rPr lang="ru-RU" dirty="0"/>
-              <a:t>Это внутренняя «кухня» уровня: протоколы могут быть сложными, меняться со временем и усложняться, но при этом </a:t>
-            </a:r>
-            <a:r>
               <a:rPr lang="ru-RU" b="1" dirty="0"/>
-              <a:t>служба</a:t>
-            </a:r>
-            <a:r>
-              <a:rPr lang="ru-RU" dirty="0"/>
-              <a:t>, предоставляемая уровнем выше, остаётся прежней.</a:t>
-            </a:r>
-          </a:p>
-          <a:p>
-            <a:endParaRPr lang="ru-RU" dirty="0"/>
-          </a:p>
-          <a:p>
-            <a:r>
-              <a:rPr lang="ru-RU" dirty="0"/>
-              <a:t>Таким образом, протокол реализует службу, но не определяет её интерфейс. Это ключевое разделение, позволяющее проектировать модульные и долговечные сетевые архитектуры.</a:t>
+              <a:t>Службы без установления соединения</a:t>
+            </a:r>
+            <a:r>
+              <a:rPr lang="ru-RU" dirty="0"/>
+              <a:t> работают как обычная почта: каждое сообщение отправляется отдельно, содержит полный адрес, проходит через сеть независимо от других сообщений. Никаких предварительных согласований или резервирования ресурсов нет. Это удобно для рассылок, быстрых уведомлений, широковещательных сообщений.</a:t>
             </a:r>
           </a:p>
           <a:p>
@@ -9655,7 +9079,7 @@
           <a:p>
             <a:fld id="{CF3F5FF5-003D-49C7-8AA8-32F0386C2E23}" type="slidenum">
               <a:rPr lang="en-US" smtClean="0"/>
-              <a:t>81</a:t>
+              <a:t>70</a:t>
             </a:fld>
             <a:endParaRPr lang="en-US"/>
           </a:p>
@@ -9664,7 +9088,7 @@
     </p:spTree>
     <p:extLst>
       <p:ext uri="{BB962C8B-B14F-4D97-AF65-F5344CB8AC3E}">
-        <p14:creationId xmlns:p14="http://schemas.microsoft.com/office/powerpoint/2010/main" val="4099143187"/>
+        <p14:creationId xmlns:p14="http://schemas.microsoft.com/office/powerpoint/2010/main" val="699228768"/>
       </p:ext>
     </p:extLst>
   </p:cSld>
@@ -9720,7 +9144,7 @@
           <a:p>
             <a:r>
               <a:rPr lang="ru-RU" dirty="0"/>
-              <a:t>Очень важно не путать службы и протоколы — это разные сущности, хоть они и связаны.</a:t>
+              <a:t>Надёжность — отдельная характеристика, не зависящая от наличия соединения.</a:t>
             </a:r>
           </a:p>
           <a:p>
@@ -9729,11 +9153,11 @@
             </a:br>
             <a:r>
               <a:rPr lang="ru-RU" b="1" dirty="0"/>
-              <a:t>Служба</a:t>
-            </a:r>
-            <a:r>
-              <a:rPr lang="ru-RU" dirty="0"/>
-              <a:t> — это контракт, набор доступных операций, подобный абстрактному типу данных или интерфейсу класса в ООП.</a:t>
+              <a:t>Надёжные службы</a:t>
+            </a:r>
+            <a:r>
+              <a:rPr lang="ru-RU" dirty="0"/>
+              <a:t> используют подтверждения получения, обеспечивают доставку данных без потери и перестановок. Такой подход нужен, например, при передаче файлов: потеря даже одного бита недопустима.</a:t>
             </a:r>
           </a:p>
           <a:p>
@@ -9741,12 +9165,24 @@
           </a:p>
           <a:p>
             <a:r>
+              <a:rPr lang="ru-RU" dirty="0"/>
+              <a:t>Существуют две разновидности надёжных служб: отправка </a:t>
+            </a:r>
+            <a:r>
               <a:rPr lang="ru-RU" b="1" dirty="0"/>
-              <a:t>Протокол</a:t>
-            </a:r>
-            <a:r>
-              <a:rPr lang="ru-RU" dirty="0"/>
-              <a:t> — это конкретная реализация: каким образом устройства формируют пакеты, как реагируют на ошибки, как интерпретируют заголовки.</a:t>
+              <a:t>отдельных сообщений с сохранением границ</a:t>
+            </a:r>
+            <a:r>
+              <a:rPr lang="ru-RU" dirty="0"/>
+              <a:t>, или отправка как </a:t>
+            </a:r>
+            <a:r>
+              <a:rPr lang="ru-RU" b="1" dirty="0"/>
+              <a:t>непрерывного байтового потока</a:t>
+            </a:r>
+            <a:r>
+              <a:rPr lang="ru-RU" dirty="0"/>
+              <a:t>, когда приложению не важно, где были исходные границы сообщений.</a:t>
             </a:r>
           </a:p>
           <a:p>
@@ -9754,8 +9190,29 @@
           </a:p>
           <a:p>
             <a:r>
-              <a:rPr lang="ru-RU" dirty="0"/>
-              <a:t>В ранних сетевых архитектурах эти два понятия смешивали: приложение напрямую формировало пакеты протокола. Это приводило к тому, что любое изменение протокола ломало работу всех программ. Современные сети сознательно разделяют интерфейс (службу) и реализацию (протокол), делая систему гибкой и устойчивой к изменениям.</a:t>
+              <a:rPr lang="ru-RU" b="1" dirty="0"/>
+              <a:t>Ненадёжные службы</a:t>
+            </a:r>
+            <a:r>
+              <a:rPr lang="ru-RU" dirty="0"/>
+              <a:t>, наоборот, не дают гарантий — и именно это делает их быстрыми. Они удобны в мультимедиа, VoIP или видеосвязи: пользователю гораздо важнее низкая задержка, чем идеальное отсутствие ошибок.</a:t>
+            </a:r>
+          </a:p>
+          <a:p>
+            <a:endParaRPr lang="ru-RU" dirty="0"/>
+          </a:p>
+          <a:p>
+            <a:r>
+              <a:rPr lang="ru-RU" dirty="0"/>
+              <a:t>Есть и промежуточный тип — </a:t>
+            </a:r>
+            <a:r>
+              <a:rPr lang="ru-RU" b="1" dirty="0"/>
+              <a:t>дейтаграммы с подтверждением</a:t>
+            </a:r>
+            <a:r>
+              <a:rPr lang="ru-RU" dirty="0"/>
+              <a:t>, напоминающие заказное письмо: одно сообщение — одно подтверждение.</a:t>
             </a:r>
           </a:p>
           <a:p>
@@ -9780,7 +9237,7 @@
           <a:p>
             <a:fld id="{CF3F5FF5-003D-49C7-8AA8-32F0386C2E23}" type="slidenum">
               <a:rPr lang="en-US" smtClean="0"/>
-              <a:t>82</a:t>
+              <a:t>71</a:t>
             </a:fld>
             <a:endParaRPr lang="en-US"/>
           </a:p>
@@ -9789,7 +9246,1084 @@
     </p:spTree>
     <p:extLst>
       <p:ext uri="{BB962C8B-B14F-4D97-AF65-F5344CB8AC3E}">
-        <p14:creationId xmlns:p14="http://schemas.microsoft.com/office/powerpoint/2010/main" val="129344834"/>
+        <p14:creationId xmlns:p14="http://schemas.microsoft.com/office/powerpoint/2010/main" val="384911891"/>
+      </p:ext>
+    </p:extLst>
+  </p:cSld>
+  <p:clrMapOvr>
+    <a:masterClrMapping/>
+  </p:clrMapOvr>
+</p:notes>
+</file>
+
+<file path=ppt/notesSlides/notesSlide72.xml><?xml version="1.0" encoding="utf-8"?>
+<p:notes xmlns:a="http://schemas.openxmlformats.org/drawingml/2006/main" xmlns:r="http://schemas.openxmlformats.org/officeDocument/2006/relationships" xmlns:p="http://schemas.openxmlformats.org/presentationml/2006/main">
+  <p:cSld>
+    <p:spTree>
+      <p:nvGrpSpPr>
+        <p:cNvPr id="1" name=""/>
+        <p:cNvGrpSpPr/>
+        <p:nvPr/>
+      </p:nvGrpSpPr>
+      <p:grpSpPr>
+        <a:xfrm>
+          <a:off x="0" y="0"/>
+          <a:ext cx="0" cy="0"/>
+          <a:chOff x="0" y="0"/>
+          <a:chExt cx="0" cy="0"/>
+        </a:xfrm>
+      </p:grpSpPr>
+      <p:sp>
+        <p:nvSpPr>
+          <p:cNvPr id="2" name="Slide Image Placeholder 1"/>
+          <p:cNvSpPr>
+            <a:spLocks noGrp="1" noRot="1" noChangeAspect="1"/>
+          </p:cNvSpPr>
+          <p:nvPr>
+            <p:ph type="sldImg"/>
+          </p:nvPr>
+        </p:nvSpPr>
+        <p:spPr/>
+      </p:sp>
+      <p:sp>
+        <p:nvSpPr>
+          <p:cNvPr id="3" name="Notes Placeholder 2"/>
+          <p:cNvSpPr>
+            <a:spLocks noGrp="1"/>
+          </p:cNvSpPr>
+          <p:nvPr>
+            <p:ph type="body" idx="1"/>
+          </p:nvPr>
+        </p:nvSpPr>
+        <p:spPr/>
+        <p:txBody>
+          <a:bodyPr/>
+          <a:lstStyle/>
+          <a:p>
+            <a:r>
+              <a:rPr lang="ru-RU" dirty="0"/>
+              <a:t>Ключевой момент: нет «универсально лучшего» типа службы.</a:t>
+            </a:r>
+            <a:br>
+              <a:rPr lang="ru-RU" dirty="0"/>
+            </a:br>
+            <a:r>
+              <a:rPr lang="ru-RU" dirty="0"/>
+              <a:t>Например, файлы, банковские операции, документы требуют 100% точности — здесь важны соединение, порядок и подтверждения.</a:t>
+            </a:r>
+          </a:p>
+          <a:p>
+            <a:endParaRPr lang="ru-RU" dirty="0"/>
+          </a:p>
+          <a:p>
+            <a:r>
+              <a:rPr lang="ru-RU" dirty="0"/>
+              <a:t>Но если мы говорим про </a:t>
+            </a:r>
+            <a:r>
+              <a:rPr lang="ru-RU" b="1" dirty="0"/>
+              <a:t>голосовую связь, видеопотоки, онлайн-игры</a:t>
+            </a:r>
+            <a:r>
+              <a:rPr lang="ru-RU" dirty="0"/>
+              <a:t>, то избыточная надёжность вредна. Задержки, вызванные повторными отправками, ухудшат пользовательский опыт гораздо сильнее, чем небольшие искажения. Именно поэтому ненадёжные протоколы существуют и активно применяются.</a:t>
+            </a:r>
+          </a:p>
+          <a:p>
+            <a:endParaRPr lang="ru-RU" dirty="0"/>
+          </a:p>
+          <a:p>
+            <a:r>
+              <a:rPr lang="ru-RU" dirty="0"/>
+              <a:t>Кроме того, ненадёжная доставка может служить базой для надёжной — как это делает TCP поверх IP. А в простых сценариях клиент–серверного взаимодействия часто используется схема </a:t>
+            </a:r>
+            <a:r>
+              <a:rPr lang="ru-RU" b="1" dirty="0" err="1"/>
+              <a:t>request</a:t>
+            </a:r>
+            <a:r>
+              <a:rPr lang="ru-RU" b="1" dirty="0"/>
+              <a:t>–</a:t>
+            </a:r>
+            <a:r>
+              <a:rPr lang="ru-RU" b="1" dirty="0" err="1"/>
+              <a:t>reply</a:t>
+            </a:r>
+            <a:r>
+              <a:rPr lang="ru-RU" dirty="0"/>
+              <a:t>: одно сообщение — ответ, без установки длительного соединения.</a:t>
+            </a:r>
+          </a:p>
+          <a:p>
+            <a:endParaRPr lang="en-US" dirty="0"/>
+          </a:p>
+        </p:txBody>
+      </p:sp>
+      <p:sp>
+        <p:nvSpPr>
+          <p:cNvPr id="4" name="Slide Number Placeholder 3"/>
+          <p:cNvSpPr>
+            <a:spLocks noGrp="1"/>
+          </p:cNvSpPr>
+          <p:nvPr>
+            <p:ph type="sldNum" sz="quarter" idx="5"/>
+          </p:nvPr>
+        </p:nvSpPr>
+        <p:spPr/>
+        <p:txBody>
+          <a:bodyPr/>
+          <a:lstStyle/>
+          <a:p>
+            <a:fld id="{CF3F5FF5-003D-49C7-8AA8-32F0386C2E23}" type="slidenum">
+              <a:rPr lang="en-US" smtClean="0"/>
+              <a:t>72</a:t>
+            </a:fld>
+            <a:endParaRPr lang="en-US"/>
+          </a:p>
+        </p:txBody>
+      </p:sp>
+    </p:spTree>
+    <p:extLst>
+      <p:ext uri="{BB962C8B-B14F-4D97-AF65-F5344CB8AC3E}">
+        <p14:creationId xmlns:p14="http://schemas.microsoft.com/office/powerpoint/2010/main" val="258290943"/>
+      </p:ext>
+    </p:extLst>
+  </p:cSld>
+  <p:clrMapOvr>
+    <a:masterClrMapping/>
+  </p:clrMapOvr>
+</p:notes>
+</file>
+
+<file path=ppt/notesSlides/notesSlide73.xml><?xml version="1.0" encoding="utf-8"?>
+<p:notes xmlns:a="http://schemas.openxmlformats.org/drawingml/2006/main" xmlns:r="http://schemas.openxmlformats.org/officeDocument/2006/relationships" xmlns:p="http://schemas.openxmlformats.org/presentationml/2006/main">
+  <p:cSld>
+    <p:spTree>
+      <p:nvGrpSpPr>
+        <p:cNvPr id="1" name=""/>
+        <p:cNvGrpSpPr/>
+        <p:nvPr/>
+      </p:nvGrpSpPr>
+      <p:grpSpPr>
+        <a:xfrm>
+          <a:off x="0" y="0"/>
+          <a:ext cx="0" cy="0"/>
+          <a:chOff x="0" y="0"/>
+          <a:chExt cx="0" cy="0"/>
+        </a:xfrm>
+      </p:grpSpPr>
+      <p:sp>
+        <p:nvSpPr>
+          <p:cNvPr id="2" name="Slide Image Placeholder 1"/>
+          <p:cNvSpPr>
+            <a:spLocks noGrp="1" noRot="1" noChangeAspect="1"/>
+          </p:cNvSpPr>
+          <p:nvPr>
+            <p:ph type="sldImg"/>
+          </p:nvPr>
+        </p:nvSpPr>
+        <p:spPr/>
+      </p:sp>
+      <p:sp>
+        <p:nvSpPr>
+          <p:cNvPr id="3" name="Notes Placeholder 2"/>
+          <p:cNvSpPr>
+            <a:spLocks noGrp="1"/>
+          </p:cNvSpPr>
+          <p:nvPr>
+            <p:ph type="body" idx="1"/>
+          </p:nvPr>
+        </p:nvSpPr>
+        <p:spPr/>
+        <p:txBody>
+          <a:bodyPr/>
+          <a:lstStyle/>
+          <a:p>
+            <a:endParaRPr lang="en-US"/>
+          </a:p>
+        </p:txBody>
+      </p:sp>
+      <p:sp>
+        <p:nvSpPr>
+          <p:cNvPr id="4" name="Slide Number Placeholder 3"/>
+          <p:cNvSpPr>
+            <a:spLocks noGrp="1"/>
+          </p:cNvSpPr>
+          <p:nvPr>
+            <p:ph type="sldNum" sz="quarter" idx="5"/>
+          </p:nvPr>
+        </p:nvSpPr>
+        <p:spPr/>
+        <p:txBody>
+          <a:bodyPr/>
+          <a:lstStyle/>
+          <a:p>
+            <a:fld id="{CF3F5FF5-003D-49C7-8AA8-32F0386C2E23}" type="slidenum">
+              <a:rPr lang="en-US" smtClean="0"/>
+              <a:t>73</a:t>
+            </a:fld>
+            <a:endParaRPr lang="en-US"/>
+          </a:p>
+        </p:txBody>
+      </p:sp>
+    </p:spTree>
+    <p:extLst>
+      <p:ext uri="{BB962C8B-B14F-4D97-AF65-F5344CB8AC3E}">
+        <p14:creationId xmlns:p14="http://schemas.microsoft.com/office/powerpoint/2010/main" val="3127375835"/>
+      </p:ext>
+    </p:extLst>
+  </p:cSld>
+  <p:clrMapOvr>
+    <a:masterClrMapping/>
+  </p:clrMapOvr>
+</p:notes>
+</file>
+
+<file path=ppt/notesSlides/notesSlide74.xml><?xml version="1.0" encoding="utf-8"?>
+<p:notes xmlns:a="http://schemas.openxmlformats.org/drawingml/2006/main" xmlns:r="http://schemas.openxmlformats.org/officeDocument/2006/relationships" xmlns:p="http://schemas.openxmlformats.org/presentationml/2006/main">
+  <p:cSld>
+    <p:spTree>
+      <p:nvGrpSpPr>
+        <p:cNvPr id="1" name=""/>
+        <p:cNvGrpSpPr/>
+        <p:nvPr/>
+      </p:nvGrpSpPr>
+      <p:grpSpPr>
+        <a:xfrm>
+          <a:off x="0" y="0"/>
+          <a:ext cx="0" cy="0"/>
+          <a:chOff x="0" y="0"/>
+          <a:chExt cx="0" cy="0"/>
+        </a:xfrm>
+      </p:grpSpPr>
+      <p:sp>
+        <p:nvSpPr>
+          <p:cNvPr id="2" name="Slide Image Placeholder 1"/>
+          <p:cNvSpPr>
+            <a:spLocks noGrp="1" noRot="1" noChangeAspect="1"/>
+          </p:cNvSpPr>
+          <p:nvPr>
+            <p:ph type="sldImg"/>
+          </p:nvPr>
+        </p:nvSpPr>
+        <p:spPr/>
+      </p:sp>
+      <p:sp>
+        <p:nvSpPr>
+          <p:cNvPr id="3" name="Notes Placeholder 2"/>
+          <p:cNvSpPr>
+            <a:spLocks noGrp="1"/>
+          </p:cNvSpPr>
+          <p:nvPr>
+            <p:ph type="body" idx="1"/>
+          </p:nvPr>
+        </p:nvSpPr>
+        <p:spPr/>
+        <p:txBody>
+          <a:bodyPr/>
+          <a:lstStyle/>
+          <a:p>
+            <a:r>
+              <a:rPr lang="ru-RU" dirty="0"/>
+              <a:t>Чтобы приложение могло пользоваться сетевыми возможностями, ему нужен формальный набор операций — </a:t>
+            </a:r>
+            <a:r>
+              <a:rPr lang="ru-RU" b="1" dirty="0"/>
+              <a:t>примитивов</a:t>
+            </a:r>
+            <a:r>
+              <a:rPr lang="ru-RU" dirty="0"/>
+              <a:t>. Это базовые вызовы, которые позволяют запросить у сети выполнение действий: установить соединение, отправить данные, принять данные или завершить работу.</a:t>
+            </a:r>
+          </a:p>
+          <a:p>
+            <a:endParaRPr lang="ru-RU" dirty="0"/>
+          </a:p>
+          <a:p>
+            <a:r>
+              <a:rPr lang="ru-RU" dirty="0"/>
+              <a:t>В реальных ОС эти примитивы чаще всего реализованы как </a:t>
+            </a:r>
+            <a:r>
+              <a:rPr lang="ru-RU" b="1" dirty="0"/>
+              <a:t>системные вызовы</a:t>
+            </a:r>
+            <a:r>
+              <a:rPr lang="ru-RU" dirty="0"/>
+              <a:t> (например, </a:t>
+            </a:r>
+            <a:r>
+              <a:rPr lang="ru-RU" dirty="0" err="1"/>
+              <a:t>socket</a:t>
+            </a:r>
+            <a:r>
+              <a:rPr lang="ru-RU" dirty="0"/>
+              <a:t>, </a:t>
+            </a:r>
+            <a:r>
+              <a:rPr lang="ru-RU" dirty="0" err="1"/>
+              <a:t>connect</a:t>
+            </a:r>
+            <a:r>
+              <a:rPr lang="ru-RU" dirty="0"/>
+              <a:t>, </a:t>
+            </a:r>
+            <a:r>
+              <a:rPr lang="ru-RU" dirty="0" err="1"/>
+              <a:t>send</a:t>
+            </a:r>
+            <a:r>
+              <a:rPr lang="ru-RU" dirty="0"/>
+              <a:t>). Примитивы определяются типом службы: соединительной или без соединения.</a:t>
+            </a:r>
+          </a:p>
+          <a:p>
+            <a:endParaRPr lang="ru-RU" dirty="0"/>
+          </a:p>
+          <a:p>
+            <a:r>
+              <a:rPr lang="ru-RU" dirty="0"/>
+              <a:t>Именно примитивы формируют «точку входа» приложения в стек протоколов, задавая, какие функции сеть предоставляет процессу.</a:t>
+            </a:r>
+          </a:p>
+          <a:p>
+            <a:endParaRPr lang="en-US" dirty="0"/>
+          </a:p>
+        </p:txBody>
+      </p:sp>
+      <p:sp>
+        <p:nvSpPr>
+          <p:cNvPr id="4" name="Slide Number Placeholder 3"/>
+          <p:cNvSpPr>
+            <a:spLocks noGrp="1"/>
+          </p:cNvSpPr>
+          <p:nvPr>
+            <p:ph type="sldNum" sz="quarter" idx="5"/>
+          </p:nvPr>
+        </p:nvSpPr>
+        <p:spPr/>
+        <p:txBody>
+          <a:bodyPr/>
+          <a:lstStyle/>
+          <a:p>
+            <a:fld id="{CF3F5FF5-003D-49C7-8AA8-32F0386C2E23}" type="slidenum">
+              <a:rPr lang="en-US" smtClean="0"/>
+              <a:t>74</a:t>
+            </a:fld>
+            <a:endParaRPr lang="en-US"/>
+          </a:p>
+        </p:txBody>
+      </p:sp>
+    </p:spTree>
+    <p:extLst>
+      <p:ext uri="{BB962C8B-B14F-4D97-AF65-F5344CB8AC3E}">
+        <p14:creationId xmlns:p14="http://schemas.microsoft.com/office/powerpoint/2010/main" val="3495547927"/>
+      </p:ext>
+    </p:extLst>
+  </p:cSld>
+  <p:clrMapOvr>
+    <a:masterClrMapping/>
+  </p:clrMapOvr>
+</p:notes>
+</file>
+
+<file path=ppt/notesSlides/notesSlide75.xml><?xml version="1.0" encoding="utf-8"?>
+<p:notes xmlns:a="http://schemas.openxmlformats.org/drawingml/2006/main" xmlns:r="http://schemas.openxmlformats.org/officeDocument/2006/relationships" xmlns:p="http://schemas.openxmlformats.org/presentationml/2006/main">
+  <p:cSld>
+    <p:spTree>
+      <p:nvGrpSpPr>
+        <p:cNvPr id="1" name=""/>
+        <p:cNvGrpSpPr/>
+        <p:nvPr/>
+      </p:nvGrpSpPr>
+      <p:grpSpPr>
+        <a:xfrm>
+          <a:off x="0" y="0"/>
+          <a:ext cx="0" cy="0"/>
+          <a:chOff x="0" y="0"/>
+          <a:chExt cx="0" cy="0"/>
+        </a:xfrm>
+      </p:grpSpPr>
+      <p:sp>
+        <p:nvSpPr>
+          <p:cNvPr id="2" name="Slide Image Placeholder 1"/>
+          <p:cNvSpPr>
+            <a:spLocks noGrp="1" noRot="1" noChangeAspect="1"/>
+          </p:cNvSpPr>
+          <p:nvPr>
+            <p:ph type="sldImg"/>
+          </p:nvPr>
+        </p:nvSpPr>
+        <p:spPr/>
+      </p:sp>
+      <p:sp>
+        <p:nvSpPr>
+          <p:cNvPr id="3" name="Notes Placeholder 2"/>
+          <p:cNvSpPr>
+            <a:spLocks noGrp="1"/>
+          </p:cNvSpPr>
+          <p:nvPr>
+            <p:ph type="body" idx="1"/>
+          </p:nvPr>
+        </p:nvSpPr>
+        <p:spPr/>
+        <p:txBody>
+          <a:bodyPr/>
+          <a:lstStyle/>
+          <a:p>
+            <a:r>
+              <a:rPr lang="ru-RU" dirty="0"/>
+              <a:t>Минимальный набор примитивов для построения надёжного байтового потока очень похож на классический интерфейс </a:t>
+            </a:r>
+            <a:r>
+              <a:rPr lang="ru-RU" dirty="0" err="1"/>
+              <a:t>Berkeley</a:t>
+            </a:r>
+            <a:r>
+              <a:rPr lang="ru-RU" dirty="0"/>
+              <a:t> </a:t>
+            </a:r>
+            <a:r>
+              <a:rPr lang="ru-RU" dirty="0" err="1"/>
+              <a:t>Sockets</a:t>
+            </a:r>
+            <a:r>
+              <a:rPr lang="ru-RU" dirty="0"/>
+              <a:t>.</a:t>
+            </a:r>
+          </a:p>
+          <a:p>
+            <a:endParaRPr lang="ru-RU" dirty="0"/>
+          </a:p>
+          <a:p>
+            <a:r>
+              <a:rPr lang="ru-RU" dirty="0"/>
+              <a:t>Сервер начинает с </a:t>
+            </a:r>
+            <a:r>
+              <a:rPr lang="ru-RU" b="1" dirty="0"/>
+              <a:t>LISTEN</a:t>
+            </a:r>
+            <a:r>
+              <a:rPr lang="ru-RU" dirty="0"/>
+              <a:t>, блокируясь в ожидании клиента.</a:t>
+            </a:r>
+            <a:br>
+              <a:rPr lang="ru-RU" dirty="0"/>
+            </a:br>
+            <a:r>
+              <a:rPr lang="ru-RU" dirty="0"/>
+              <a:t>Клиент вызывает </a:t>
+            </a:r>
+            <a:r>
+              <a:rPr lang="ru-RU" b="1" dirty="0"/>
+              <a:t>CONNECT</a:t>
+            </a:r>
+            <a:r>
+              <a:rPr lang="ru-RU" dirty="0"/>
+              <a:t>, при этом ОС формирует пакет-запрос.</a:t>
+            </a:r>
+            <a:br>
+              <a:rPr lang="ru-RU" dirty="0"/>
+            </a:br>
+            <a:r>
+              <a:rPr lang="ru-RU" dirty="0"/>
+              <a:t>Сервер подтверждает соединение через </a:t>
+            </a:r>
+            <a:r>
+              <a:rPr lang="ru-RU" b="1" dirty="0"/>
+              <a:t>ACCEPT</a:t>
+            </a:r>
+            <a:r>
+              <a:rPr lang="ru-RU" dirty="0"/>
+              <a:t>, и с этого момента стороны могут обмениваться данными.</a:t>
+            </a:r>
+          </a:p>
+          <a:p>
+            <a:r>
+              <a:rPr lang="ru-RU" dirty="0"/>
+              <a:t>Основные операции после установления канала — </a:t>
+            </a:r>
+            <a:r>
+              <a:rPr lang="ru-RU" b="1" dirty="0"/>
+              <a:t>SEND</a:t>
+            </a:r>
+            <a:r>
+              <a:rPr lang="ru-RU" dirty="0"/>
+              <a:t> и </a:t>
+            </a:r>
+            <a:r>
+              <a:rPr lang="ru-RU" b="1" dirty="0"/>
+              <a:t>RECEIVE</a:t>
+            </a:r>
+            <a:r>
+              <a:rPr lang="ru-RU" dirty="0"/>
+              <a:t>. Они позволяют реализовать любую структуру диалога: запрос–ответ, поток данных, последовательность сообщений.</a:t>
+            </a:r>
+          </a:p>
+          <a:p>
+            <a:r>
+              <a:rPr lang="ru-RU" dirty="0"/>
+              <a:t>Завершение происходит через </a:t>
+            </a:r>
+            <a:r>
+              <a:rPr lang="ru-RU" b="1" dirty="0"/>
+              <a:t>DISCONNECT</a:t>
+            </a:r>
+            <a:r>
+              <a:rPr lang="ru-RU" dirty="0"/>
+              <a:t> — этот примитив корректно освобождает ресурсы и уведомляет вторую сторону.</a:t>
+            </a:r>
+          </a:p>
+          <a:p>
+            <a:endParaRPr lang="en-US" dirty="0"/>
+          </a:p>
+        </p:txBody>
+      </p:sp>
+      <p:sp>
+        <p:nvSpPr>
+          <p:cNvPr id="4" name="Slide Number Placeholder 3"/>
+          <p:cNvSpPr>
+            <a:spLocks noGrp="1"/>
+          </p:cNvSpPr>
+          <p:nvPr>
+            <p:ph type="sldNum" sz="quarter" idx="5"/>
+          </p:nvPr>
+        </p:nvSpPr>
+        <p:spPr/>
+        <p:txBody>
+          <a:bodyPr/>
+          <a:lstStyle/>
+          <a:p>
+            <a:fld id="{CF3F5FF5-003D-49C7-8AA8-32F0386C2E23}" type="slidenum">
+              <a:rPr lang="en-US" smtClean="0"/>
+              <a:t>75</a:t>
+            </a:fld>
+            <a:endParaRPr lang="en-US"/>
+          </a:p>
+        </p:txBody>
+      </p:sp>
+    </p:spTree>
+    <p:extLst>
+      <p:ext uri="{BB962C8B-B14F-4D97-AF65-F5344CB8AC3E}">
+        <p14:creationId xmlns:p14="http://schemas.microsoft.com/office/powerpoint/2010/main" val="3931705826"/>
+      </p:ext>
+    </p:extLst>
+  </p:cSld>
+  <p:clrMapOvr>
+    <a:masterClrMapping/>
+  </p:clrMapOvr>
+</p:notes>
+</file>
+
+<file path=ppt/notesSlides/notesSlide76.xml><?xml version="1.0" encoding="utf-8"?>
+<p:notes xmlns:a="http://schemas.openxmlformats.org/drawingml/2006/main" xmlns:r="http://schemas.openxmlformats.org/officeDocument/2006/relationships" xmlns:p="http://schemas.openxmlformats.org/presentationml/2006/main">
+  <p:cSld>
+    <p:spTree>
+      <p:nvGrpSpPr>
+        <p:cNvPr id="1" name=""/>
+        <p:cNvGrpSpPr/>
+        <p:nvPr/>
+      </p:nvGrpSpPr>
+      <p:grpSpPr>
+        <a:xfrm>
+          <a:off x="0" y="0"/>
+          <a:ext cx="0" cy="0"/>
+          <a:chOff x="0" y="0"/>
+          <a:chExt cx="0" cy="0"/>
+        </a:xfrm>
+      </p:grpSpPr>
+      <p:sp>
+        <p:nvSpPr>
+          <p:cNvPr id="2" name="Slide Image Placeholder 1"/>
+          <p:cNvSpPr>
+            <a:spLocks noGrp="1" noRot="1" noChangeAspect="1"/>
+          </p:cNvSpPr>
+          <p:nvPr>
+            <p:ph type="sldImg"/>
+          </p:nvPr>
+        </p:nvSpPr>
+        <p:spPr/>
+      </p:sp>
+      <p:sp>
+        <p:nvSpPr>
+          <p:cNvPr id="3" name="Notes Placeholder 2"/>
+          <p:cNvSpPr>
+            <a:spLocks noGrp="1"/>
+          </p:cNvSpPr>
+          <p:nvPr>
+            <p:ph type="body" idx="1"/>
+          </p:nvPr>
+        </p:nvSpPr>
+        <p:spPr/>
+        <p:txBody>
+          <a:bodyPr/>
+          <a:lstStyle/>
+          <a:p>
+            <a:r>
+              <a:rPr lang="ru-RU" dirty="0"/>
+              <a:t>Взаимодействие клиента и сервера при использовании примитивов напоминает телефонный вызов.</a:t>
+            </a:r>
+          </a:p>
+          <a:p>
+            <a:r>
+              <a:rPr lang="ru-RU" b="1" dirty="0"/>
+              <a:t>LISTEN:</a:t>
+            </a:r>
+            <a:r>
+              <a:rPr lang="ru-RU" dirty="0"/>
+              <a:t> сервер “сидит на линии”, готовый принять соединение.</a:t>
+            </a:r>
+          </a:p>
+          <a:p>
+            <a:r>
+              <a:rPr lang="ru-RU" b="1" dirty="0"/>
+              <a:t>CONNECT:</a:t>
+            </a:r>
+            <a:r>
+              <a:rPr lang="ru-RU" dirty="0"/>
+              <a:t> клиент инициирует запрос.</a:t>
+            </a:r>
+          </a:p>
+          <a:p>
+            <a:r>
+              <a:rPr lang="ru-RU" b="1" dirty="0"/>
+              <a:t>ACCEPT:</a:t>
+            </a:r>
+            <a:r>
+              <a:rPr lang="ru-RU" dirty="0"/>
+              <a:t> сервер отвечает и соединение считается установленным.</a:t>
+            </a:r>
+          </a:p>
+          <a:p>
+            <a:r>
+              <a:rPr lang="ru-RU" dirty="0"/>
+              <a:t>Далее сервер и клиент могут многократно выполнять </a:t>
+            </a:r>
+            <a:r>
+              <a:rPr lang="ru-RU" b="1" dirty="0"/>
+              <a:t>SEND</a:t>
+            </a:r>
+            <a:r>
+              <a:rPr lang="ru-RU" dirty="0"/>
+              <a:t> и </a:t>
+            </a:r>
+            <a:r>
+              <a:rPr lang="ru-RU" b="1" dirty="0"/>
+              <a:t>RECEIVE</a:t>
+            </a:r>
+            <a:r>
+              <a:rPr lang="ru-RU" dirty="0"/>
+              <a:t>, передавая сообщения в обе стороны.</a:t>
+            </a:r>
+          </a:p>
+          <a:p>
+            <a:r>
+              <a:rPr lang="ru-RU" dirty="0"/>
+              <a:t>Заканчивается всё вызовом </a:t>
+            </a:r>
+            <a:r>
+              <a:rPr lang="ru-RU" b="1" dirty="0"/>
+              <a:t>DISCONNECT</a:t>
+            </a:r>
+            <a:r>
+              <a:rPr lang="ru-RU" dirty="0"/>
+              <a:t>: одна сторона закрывает соединение, вторая подтверждает.</a:t>
+            </a:r>
+          </a:p>
+          <a:p>
+            <a:r>
+              <a:rPr lang="ru-RU" dirty="0"/>
+              <a:t>Эта схема обеспечивает устойчивость, контроль порядка и надёжность доставки — то, что необходимо большинству прикладных протоколов.</a:t>
+            </a:r>
+          </a:p>
+          <a:p>
+            <a:endParaRPr lang="en-US" dirty="0"/>
+          </a:p>
+        </p:txBody>
+      </p:sp>
+      <p:sp>
+        <p:nvSpPr>
+          <p:cNvPr id="4" name="Slide Number Placeholder 3"/>
+          <p:cNvSpPr>
+            <a:spLocks noGrp="1"/>
+          </p:cNvSpPr>
+          <p:nvPr>
+            <p:ph type="sldNum" sz="quarter" idx="5"/>
+          </p:nvPr>
+        </p:nvSpPr>
+        <p:spPr/>
+        <p:txBody>
+          <a:bodyPr/>
+          <a:lstStyle/>
+          <a:p>
+            <a:fld id="{CF3F5FF5-003D-49C7-8AA8-32F0386C2E23}" type="slidenum">
+              <a:rPr lang="en-US" smtClean="0"/>
+              <a:t>76</a:t>
+            </a:fld>
+            <a:endParaRPr lang="en-US"/>
+          </a:p>
+        </p:txBody>
+      </p:sp>
+    </p:spTree>
+    <p:extLst>
+      <p:ext uri="{BB962C8B-B14F-4D97-AF65-F5344CB8AC3E}">
+        <p14:creationId xmlns:p14="http://schemas.microsoft.com/office/powerpoint/2010/main" val="1846160212"/>
+      </p:ext>
+    </p:extLst>
+  </p:cSld>
+  <p:clrMapOvr>
+    <a:masterClrMapping/>
+  </p:clrMapOvr>
+</p:notes>
+</file>
+
+<file path=ppt/notesSlides/notesSlide77.xml><?xml version="1.0" encoding="utf-8"?>
+<p:notes xmlns:a="http://schemas.openxmlformats.org/drawingml/2006/main" xmlns:r="http://schemas.openxmlformats.org/officeDocument/2006/relationships" xmlns:p="http://schemas.openxmlformats.org/presentationml/2006/main">
+  <p:cSld>
+    <p:spTree>
+      <p:nvGrpSpPr>
+        <p:cNvPr id="1" name=""/>
+        <p:cNvGrpSpPr/>
+        <p:nvPr/>
+      </p:nvGrpSpPr>
+      <p:grpSpPr>
+        <a:xfrm>
+          <a:off x="0" y="0"/>
+          <a:ext cx="0" cy="0"/>
+          <a:chOff x="0" y="0"/>
+          <a:chExt cx="0" cy="0"/>
+        </a:xfrm>
+      </p:grpSpPr>
+      <p:sp>
+        <p:nvSpPr>
+          <p:cNvPr id="2" name="Slide Image Placeholder 1"/>
+          <p:cNvSpPr>
+            <a:spLocks noGrp="1" noRot="1" noChangeAspect="1"/>
+          </p:cNvSpPr>
+          <p:nvPr>
+            <p:ph type="sldImg"/>
+          </p:nvPr>
+        </p:nvSpPr>
+        <p:spPr/>
+      </p:sp>
+      <p:sp>
+        <p:nvSpPr>
+          <p:cNvPr id="3" name="Notes Placeholder 2"/>
+          <p:cNvSpPr>
+            <a:spLocks noGrp="1"/>
+          </p:cNvSpPr>
+          <p:nvPr>
+            <p:ph type="body" idx="1"/>
+          </p:nvPr>
+        </p:nvSpPr>
+        <p:spPr/>
+        <p:txBody>
+          <a:bodyPr/>
+          <a:lstStyle/>
+          <a:p>
+            <a:r>
+              <a:rPr lang="ru-RU" dirty="0"/>
+              <a:t>На первый взгляд кажется, что достаточно всего двух сообщений:</a:t>
+            </a:r>
+            <a:br>
+              <a:rPr lang="ru-RU" dirty="0"/>
+            </a:br>
+            <a:r>
+              <a:rPr lang="ru-RU" dirty="0"/>
+              <a:t>— клиент отправляет запрос,</a:t>
+            </a:r>
+            <a:br>
+              <a:rPr lang="ru-RU" dirty="0"/>
+            </a:br>
+            <a:r>
+              <a:rPr lang="ru-RU" dirty="0"/>
+              <a:t>— сервер отвечает результатом.</a:t>
+            </a:r>
+          </a:p>
+          <a:p>
+            <a:r>
+              <a:rPr lang="ru-RU" dirty="0"/>
+              <a:t>Однако в реальной сети пакеты могут задерживаться, теряться, приходить в неправильном порядке или повторяться.</a:t>
+            </a:r>
+          </a:p>
+          <a:p>
+            <a:endParaRPr lang="ru-RU" dirty="0"/>
+          </a:p>
+          <a:p>
+            <a:r>
+              <a:rPr lang="ru-RU" dirty="0"/>
+              <a:t>Если ответ разбит на сотни пакетов, клиент должен уметь понять:</a:t>
+            </a:r>
+            <a:br>
+              <a:rPr lang="ru-RU" dirty="0"/>
+            </a:br>
+            <a:r>
+              <a:rPr lang="ru-RU" dirty="0"/>
+              <a:t>— все ли пакеты он получил;</a:t>
+            </a:r>
+            <a:br>
+              <a:rPr lang="ru-RU" dirty="0"/>
+            </a:br>
+            <a:r>
+              <a:rPr lang="ru-RU" dirty="0"/>
+              <a:t>— какой из них последний;</a:t>
+            </a:r>
+            <a:br>
+              <a:rPr lang="ru-RU" dirty="0"/>
+            </a:br>
+            <a:r>
+              <a:rPr lang="ru-RU" dirty="0"/>
+              <a:t>— не перепутаны ли пакеты от разных запросов.</a:t>
+            </a:r>
+          </a:p>
+          <a:p>
+            <a:endParaRPr lang="ru-RU" dirty="0"/>
+          </a:p>
+          <a:p>
+            <a:r>
+              <a:rPr lang="ru-RU" dirty="0"/>
+              <a:t>Поэтому простая схема «запрос–ответ» </a:t>
+            </a:r>
+            <a:r>
+              <a:rPr lang="ru-RU" b="1" dirty="0"/>
+              <a:t>не подходит</a:t>
+            </a:r>
+            <a:r>
+              <a:rPr lang="ru-RU" dirty="0"/>
+              <a:t> для ненадёжных сетей и больших сообщений.</a:t>
+            </a:r>
+          </a:p>
+          <a:p>
+            <a:r>
+              <a:rPr lang="ru-RU" dirty="0"/>
+              <a:t>Именно примитивы уровня соединения позволяют организовать стабильный упорядоченный канал и решают все эти вопросы автоматически.</a:t>
+            </a:r>
+          </a:p>
+          <a:p>
+            <a:endParaRPr lang="en-US" dirty="0"/>
+          </a:p>
+        </p:txBody>
+      </p:sp>
+      <p:sp>
+        <p:nvSpPr>
+          <p:cNvPr id="4" name="Slide Number Placeholder 3"/>
+          <p:cNvSpPr>
+            <a:spLocks noGrp="1"/>
+          </p:cNvSpPr>
+          <p:nvPr>
+            <p:ph type="sldNum" sz="quarter" idx="5"/>
+          </p:nvPr>
+        </p:nvSpPr>
+        <p:spPr/>
+        <p:txBody>
+          <a:bodyPr/>
+          <a:lstStyle/>
+          <a:p>
+            <a:fld id="{CF3F5FF5-003D-49C7-8AA8-32F0386C2E23}" type="slidenum">
+              <a:rPr lang="en-US" smtClean="0"/>
+              <a:t>77</a:t>
+            </a:fld>
+            <a:endParaRPr lang="en-US"/>
+          </a:p>
+        </p:txBody>
+      </p:sp>
+    </p:spTree>
+    <p:extLst>
+      <p:ext uri="{BB962C8B-B14F-4D97-AF65-F5344CB8AC3E}">
+        <p14:creationId xmlns:p14="http://schemas.microsoft.com/office/powerpoint/2010/main" val="2457851131"/>
+      </p:ext>
+    </p:extLst>
+  </p:cSld>
+  <p:clrMapOvr>
+    <a:masterClrMapping/>
+  </p:clrMapOvr>
+</p:notes>
+</file>
+
+<file path=ppt/notesSlides/notesSlide78.xml><?xml version="1.0" encoding="utf-8"?>
+<p:notes xmlns:a="http://schemas.openxmlformats.org/drawingml/2006/main" xmlns:r="http://schemas.openxmlformats.org/officeDocument/2006/relationships" xmlns:p="http://schemas.openxmlformats.org/presentationml/2006/main">
+  <p:cSld>
+    <p:spTree>
+      <p:nvGrpSpPr>
+        <p:cNvPr id="1" name=""/>
+        <p:cNvGrpSpPr/>
+        <p:nvPr/>
+      </p:nvGrpSpPr>
+      <p:grpSpPr>
+        <a:xfrm>
+          <a:off x="0" y="0"/>
+          <a:ext cx="0" cy="0"/>
+          <a:chOff x="0" y="0"/>
+          <a:chExt cx="0" cy="0"/>
+        </a:xfrm>
+      </p:grpSpPr>
+      <p:sp>
+        <p:nvSpPr>
+          <p:cNvPr id="2" name="Slide Image Placeholder 1"/>
+          <p:cNvSpPr>
+            <a:spLocks noGrp="1" noRot="1" noChangeAspect="1"/>
+          </p:cNvSpPr>
+          <p:nvPr>
+            <p:ph type="sldImg"/>
+          </p:nvPr>
+        </p:nvSpPr>
+        <p:spPr/>
+      </p:sp>
+      <p:sp>
+        <p:nvSpPr>
+          <p:cNvPr id="3" name="Notes Placeholder 2"/>
+          <p:cNvSpPr>
+            <a:spLocks noGrp="1"/>
+          </p:cNvSpPr>
+          <p:nvPr>
+            <p:ph type="body" idx="1"/>
+          </p:nvPr>
+        </p:nvSpPr>
+        <p:spPr/>
+        <p:txBody>
+          <a:bodyPr/>
+          <a:lstStyle/>
+          <a:p>
+            <a:r>
+              <a:rPr lang="ru-RU" dirty="0"/>
+              <a:t>Примитивы — это фундаментальный «инструментарий», через который приложения взаимодействуют с сетевым стеком.</a:t>
+            </a:r>
+          </a:p>
+          <a:p>
+            <a:endParaRPr lang="ru-RU" dirty="0"/>
+          </a:p>
+          <a:p>
+            <a:r>
+              <a:rPr lang="ru-RU" dirty="0"/>
+              <a:t>Благодаря им можно построить как простой обмен сообщениями, так и сложные протоколы с подтверждениями, повторными отправками, большим объёмом данных и строгим порядком доставки.</a:t>
+            </a:r>
+          </a:p>
+          <a:p>
+            <a:endParaRPr lang="ru-RU" dirty="0"/>
+          </a:p>
+          <a:p>
+            <a:r>
+              <a:rPr lang="ru-RU" dirty="0"/>
+              <a:t>Они позволяют скрыть сложность сетевой инфраструктуры и предоставить программисту удобный, единообразный интерфейс взаимодействия с сетью — независимо от типа соединения или внутреннего устройства протоколов.</a:t>
+            </a:r>
+          </a:p>
+          <a:p>
+            <a:endParaRPr lang="en-US" dirty="0"/>
+          </a:p>
+        </p:txBody>
+      </p:sp>
+      <p:sp>
+        <p:nvSpPr>
+          <p:cNvPr id="4" name="Slide Number Placeholder 3"/>
+          <p:cNvSpPr>
+            <a:spLocks noGrp="1"/>
+          </p:cNvSpPr>
+          <p:nvPr>
+            <p:ph type="sldNum" sz="quarter" idx="5"/>
+          </p:nvPr>
+        </p:nvSpPr>
+        <p:spPr/>
+        <p:txBody>
+          <a:bodyPr/>
+          <a:lstStyle/>
+          <a:p>
+            <a:fld id="{CF3F5FF5-003D-49C7-8AA8-32F0386C2E23}" type="slidenum">
+              <a:rPr lang="en-US" smtClean="0"/>
+              <a:t>78</a:t>
+            </a:fld>
+            <a:endParaRPr lang="en-US"/>
+          </a:p>
+        </p:txBody>
+      </p:sp>
+    </p:spTree>
+    <p:extLst>
+      <p:ext uri="{BB962C8B-B14F-4D97-AF65-F5344CB8AC3E}">
+        <p14:creationId xmlns:p14="http://schemas.microsoft.com/office/powerpoint/2010/main" val="2309492609"/>
+      </p:ext>
+    </p:extLst>
+  </p:cSld>
+  <p:clrMapOvr>
+    <a:masterClrMapping/>
+  </p:clrMapOvr>
+</p:notes>
+</file>
+
+<file path=ppt/notesSlides/notesSlide79.xml><?xml version="1.0" encoding="utf-8"?>
+<p:notes xmlns:a="http://schemas.openxmlformats.org/drawingml/2006/main" xmlns:r="http://schemas.openxmlformats.org/officeDocument/2006/relationships" xmlns:p="http://schemas.openxmlformats.org/presentationml/2006/main">
+  <p:cSld>
+    <p:spTree>
+      <p:nvGrpSpPr>
+        <p:cNvPr id="1" name=""/>
+        <p:cNvGrpSpPr/>
+        <p:nvPr/>
+      </p:nvGrpSpPr>
+      <p:grpSpPr>
+        <a:xfrm>
+          <a:off x="0" y="0"/>
+          <a:ext cx="0" cy="0"/>
+          <a:chOff x="0" y="0"/>
+          <a:chExt cx="0" cy="0"/>
+        </a:xfrm>
+      </p:grpSpPr>
+      <p:sp>
+        <p:nvSpPr>
+          <p:cNvPr id="2" name="Slide Image Placeholder 1"/>
+          <p:cNvSpPr>
+            <a:spLocks noGrp="1" noRot="1" noChangeAspect="1"/>
+          </p:cNvSpPr>
+          <p:nvPr>
+            <p:ph type="sldImg"/>
+          </p:nvPr>
+        </p:nvSpPr>
+        <p:spPr/>
+      </p:sp>
+      <p:sp>
+        <p:nvSpPr>
+          <p:cNvPr id="3" name="Notes Placeholder 2"/>
+          <p:cNvSpPr>
+            <a:spLocks noGrp="1"/>
+          </p:cNvSpPr>
+          <p:nvPr>
+            <p:ph type="body" idx="1"/>
+          </p:nvPr>
+        </p:nvSpPr>
+        <p:spPr/>
+        <p:txBody>
+          <a:bodyPr/>
+          <a:lstStyle/>
+          <a:p>
+            <a:endParaRPr lang="en-US"/>
+          </a:p>
+        </p:txBody>
+      </p:sp>
+      <p:sp>
+        <p:nvSpPr>
+          <p:cNvPr id="4" name="Slide Number Placeholder 3"/>
+          <p:cNvSpPr>
+            <a:spLocks noGrp="1"/>
+          </p:cNvSpPr>
+          <p:nvPr>
+            <p:ph type="sldNum" sz="quarter" idx="5"/>
+          </p:nvPr>
+        </p:nvSpPr>
+        <p:spPr/>
+        <p:txBody>
+          <a:bodyPr/>
+          <a:lstStyle/>
+          <a:p>
+            <a:fld id="{CF3F5FF5-003D-49C7-8AA8-32F0386C2E23}" type="slidenum">
+              <a:rPr lang="en-US" smtClean="0"/>
+              <a:t>79</a:t>
+            </a:fld>
+            <a:endParaRPr lang="en-US"/>
+          </a:p>
+        </p:txBody>
+      </p:sp>
+    </p:spTree>
+    <p:extLst>
+      <p:ext uri="{BB962C8B-B14F-4D97-AF65-F5344CB8AC3E}">
+        <p14:creationId xmlns:p14="http://schemas.microsoft.com/office/powerpoint/2010/main" val="1073999356"/>
       </p:ext>
     </p:extLst>
   </p:cSld>
@@ -9845,7 +10379,7 @@
           <a:p>
             <a:r>
               <a:rPr lang="ru-RU" dirty="0"/>
-              <a:t>Электронная коммерция — это совокупность всех операций покупки, продажи и финансовых транзакций, выполняемых через интернет.</a:t>
+              <a:t>Интернет радикально изменил способы общения. Электронная почта стала универсальным инструментом для деловых и личных коммуникаций, позволяя прикладывать документы, изображения, аудио и видео.</a:t>
             </a:r>
           </a:p>
           <a:p>
@@ -9854,7 +10388,7 @@
             </a:br>
             <a:r>
               <a:rPr lang="ru-RU" dirty="0"/>
-              <a:t>Пользователи могут приобретать товары онлайн, получать консультации, а также пользоваться банковскими услугами, не посещая отделения. Появились финтех-сервисы, позволяющие мгновенно переводить средства, оплачивать счета и инвестировать.</a:t>
+              <a:t>Мгновенные сообщения — мессенджеры — предоставляют возможность общаться в реальном времени, независимо от расстояния между людьми. Социальные сети объединили в себе коммуникацию, публикацию контента и систему рекомендаций.</a:t>
             </a:r>
           </a:p>
           <a:p>
@@ -9863,7 +10397,7 @@
             </a:br>
             <a:r>
               <a:rPr lang="ru-RU" dirty="0"/>
-              <a:t>Онлайн-аукционы работают по модели, схожей с P2P: каждый участник может быть как продавцом, так и покупателем, а центральный сервер лишь ведёт базу данных товаров.</a:t>
+              <a:t>Важной частью интернета стала передача мультимедийного контента: потоковое видео, онлайн-радио, стриминговые платформы. Это открыло путь дистанционному образованию, вебинарам, видеоконференциям.</a:t>
             </a:r>
           </a:p>
           <a:p>
@@ -9872,7 +10406,7 @@
             </a:br>
             <a:r>
               <a:rPr lang="ru-RU" dirty="0"/>
-              <a:t>Система аббревиатур (B2C, B2B, G2C, C2C, P2P) помогает классифицировать тип взаимодействия между сторонами. Эти модели важны для понимания структуры современных электронных сервисов и бизнес-процессов.</a:t>
+              <a:t>Такие средства связи не только упрощают повседневную жизнь, но и расширяют доступ жителей удалённых районов к образовательным и информационным ресурсам.</a:t>
             </a:r>
             <a:endParaRPr lang="en-US" dirty="0"/>
           </a:p>
@@ -9895,7 +10429,7 @@
           <a:p>
             <a:fld id="{CF3F5FF5-003D-49C7-8AA8-32F0386C2E23}" type="slidenum">
               <a:rPr lang="en-US" smtClean="0"/>
-              <a:t>9</a:t>
+              <a:t>8</a:t>
             </a:fld>
             <a:endParaRPr lang="en-US"/>
           </a:p>
@@ -9904,7 +10438,396 @@
     </p:spTree>
     <p:extLst>
       <p:ext uri="{BB962C8B-B14F-4D97-AF65-F5344CB8AC3E}">
-        <p14:creationId xmlns:p14="http://schemas.microsoft.com/office/powerpoint/2010/main" val="1950321640"/>
+        <p14:creationId xmlns:p14="http://schemas.microsoft.com/office/powerpoint/2010/main" val="2534217202"/>
+      </p:ext>
+    </p:extLst>
+  </p:cSld>
+  <p:clrMapOvr>
+    <a:masterClrMapping/>
+  </p:clrMapOvr>
+</p:notes>
+</file>
+
+<file path=ppt/notesSlides/notesSlide80.xml><?xml version="1.0" encoding="utf-8"?>
+<p:notes xmlns:a="http://schemas.openxmlformats.org/drawingml/2006/main" xmlns:r="http://schemas.openxmlformats.org/officeDocument/2006/relationships" xmlns:p="http://schemas.openxmlformats.org/presentationml/2006/main">
+  <p:cSld>
+    <p:spTree>
+      <p:nvGrpSpPr>
+        <p:cNvPr id="1" name=""/>
+        <p:cNvGrpSpPr/>
+        <p:nvPr/>
+      </p:nvGrpSpPr>
+      <p:grpSpPr>
+        <a:xfrm>
+          <a:off x="0" y="0"/>
+          <a:ext cx="0" cy="0"/>
+          <a:chOff x="0" y="0"/>
+          <a:chExt cx="0" cy="0"/>
+        </a:xfrm>
+      </p:grpSpPr>
+      <p:sp>
+        <p:nvSpPr>
+          <p:cNvPr id="2" name="Slide Image Placeholder 1"/>
+          <p:cNvSpPr>
+            <a:spLocks noGrp="1" noRot="1" noChangeAspect="1"/>
+          </p:cNvSpPr>
+          <p:nvPr>
+            <p:ph type="sldImg"/>
+          </p:nvPr>
+        </p:nvSpPr>
+        <p:spPr/>
+      </p:sp>
+      <p:sp>
+        <p:nvSpPr>
+          <p:cNvPr id="3" name="Notes Placeholder 2"/>
+          <p:cNvSpPr>
+            <a:spLocks noGrp="1"/>
+          </p:cNvSpPr>
+          <p:nvPr>
+            <p:ph type="body" idx="1"/>
+          </p:nvPr>
+        </p:nvSpPr>
+        <p:spPr/>
+        <p:txBody>
+          <a:bodyPr/>
+          <a:lstStyle/>
+          <a:p>
+            <a:r>
+              <a:rPr lang="ru-RU" dirty="0"/>
+              <a:t>Служба определяет функциональность, которую один уровень предоставляет уровню выше. Это набор операций, таких как </a:t>
+            </a:r>
+            <a:r>
+              <a:rPr lang="ru-RU" i="1" dirty="0"/>
+              <a:t>отправить данные</a:t>
+            </a:r>
+            <a:r>
+              <a:rPr lang="ru-RU" dirty="0"/>
+              <a:t>, </a:t>
+            </a:r>
+            <a:r>
+              <a:rPr lang="ru-RU" i="1" dirty="0"/>
+              <a:t>установить соединение</a:t>
+            </a:r>
+            <a:r>
+              <a:rPr lang="ru-RU" dirty="0"/>
+              <a:t>, </a:t>
+            </a:r>
+            <a:r>
+              <a:rPr lang="ru-RU" i="1" dirty="0"/>
+              <a:t>получить сообщение</a:t>
+            </a:r>
+            <a:r>
+              <a:rPr lang="ru-RU" dirty="0"/>
+              <a:t> — то есть </a:t>
+            </a:r>
+            <a:r>
+              <a:rPr lang="ru-RU" b="1" dirty="0"/>
+              <a:t>интерфейс</a:t>
+            </a:r>
+            <a:r>
+              <a:rPr lang="ru-RU" dirty="0"/>
+              <a:t>, но не реализация.</a:t>
+            </a:r>
+          </a:p>
+          <a:p>
+            <a:endParaRPr lang="ru-RU" dirty="0"/>
+          </a:p>
+          <a:p>
+            <a:r>
+              <a:rPr lang="ru-RU" dirty="0"/>
+              <a:t>Важно, что служба скрывает внутренние механизмы работы уровня: пользователю не нужно знать, каким образом обеспечивается надёжность, маршрутизация или фрагментация данных — он просто вызывает соответствующие операции.</a:t>
+            </a:r>
+          </a:p>
+          <a:p>
+            <a:endParaRPr lang="ru-RU" dirty="0"/>
+          </a:p>
+          <a:p>
+            <a:r>
+              <a:rPr lang="ru-RU" dirty="0"/>
+              <a:t>Такое разделение делает архитектуру гибкой: уровни можно улучшать, изменять или заменять без влияния на вышележащие уровни, если интерфейс остаётся прежним.</a:t>
+            </a:r>
+          </a:p>
+          <a:p>
+            <a:endParaRPr lang="en-US" dirty="0"/>
+          </a:p>
+        </p:txBody>
+      </p:sp>
+      <p:sp>
+        <p:nvSpPr>
+          <p:cNvPr id="4" name="Slide Number Placeholder 3"/>
+          <p:cNvSpPr>
+            <a:spLocks noGrp="1"/>
+          </p:cNvSpPr>
+          <p:nvPr>
+            <p:ph type="sldNum" sz="quarter" idx="5"/>
+          </p:nvPr>
+        </p:nvSpPr>
+        <p:spPr/>
+        <p:txBody>
+          <a:bodyPr/>
+          <a:lstStyle/>
+          <a:p>
+            <a:fld id="{CF3F5FF5-003D-49C7-8AA8-32F0386C2E23}" type="slidenum">
+              <a:rPr lang="en-US" smtClean="0"/>
+              <a:t>80</a:t>
+            </a:fld>
+            <a:endParaRPr lang="en-US"/>
+          </a:p>
+        </p:txBody>
+      </p:sp>
+    </p:spTree>
+    <p:extLst>
+      <p:ext uri="{BB962C8B-B14F-4D97-AF65-F5344CB8AC3E}">
+        <p14:creationId xmlns:p14="http://schemas.microsoft.com/office/powerpoint/2010/main" val="3867156880"/>
+      </p:ext>
+    </p:extLst>
+  </p:cSld>
+  <p:clrMapOvr>
+    <a:masterClrMapping/>
+  </p:clrMapOvr>
+</p:notes>
+</file>
+
+<file path=ppt/notesSlides/notesSlide81.xml><?xml version="1.0" encoding="utf-8"?>
+<p:notes xmlns:a="http://schemas.openxmlformats.org/drawingml/2006/main" xmlns:r="http://schemas.openxmlformats.org/officeDocument/2006/relationships" xmlns:p="http://schemas.openxmlformats.org/presentationml/2006/main">
+  <p:cSld>
+    <p:spTree>
+      <p:nvGrpSpPr>
+        <p:cNvPr id="1" name=""/>
+        <p:cNvGrpSpPr/>
+        <p:nvPr/>
+      </p:nvGrpSpPr>
+      <p:grpSpPr>
+        <a:xfrm>
+          <a:off x="0" y="0"/>
+          <a:ext cx="0" cy="0"/>
+          <a:chOff x="0" y="0"/>
+          <a:chExt cx="0" cy="0"/>
+        </a:xfrm>
+      </p:grpSpPr>
+      <p:sp>
+        <p:nvSpPr>
+          <p:cNvPr id="2" name="Slide Image Placeholder 1"/>
+          <p:cNvSpPr>
+            <a:spLocks noGrp="1" noRot="1" noChangeAspect="1"/>
+          </p:cNvSpPr>
+          <p:nvPr>
+            <p:ph type="sldImg"/>
+          </p:nvPr>
+        </p:nvSpPr>
+        <p:spPr/>
+      </p:sp>
+      <p:sp>
+        <p:nvSpPr>
+          <p:cNvPr id="3" name="Notes Placeholder 2"/>
+          <p:cNvSpPr>
+            <a:spLocks noGrp="1"/>
+          </p:cNvSpPr>
+          <p:nvPr>
+            <p:ph type="body" idx="1"/>
+          </p:nvPr>
+        </p:nvSpPr>
+        <p:spPr/>
+        <p:txBody>
+          <a:bodyPr/>
+          <a:lstStyle/>
+          <a:p>
+            <a:r>
+              <a:rPr lang="ru-RU" dirty="0"/>
+              <a:t>Протокол описывает, </a:t>
+            </a:r>
+            <a:r>
+              <a:rPr lang="ru-RU" b="1" dirty="0"/>
+              <a:t>как</a:t>
+            </a:r>
+            <a:r>
+              <a:rPr lang="ru-RU" dirty="0"/>
+              <a:t> взаимодействуют одноранговые процессы на разных устройствах: формат пакетов, порядок обмена, коды ошибок, поля заголовков и т. д.</a:t>
+            </a:r>
+          </a:p>
+          <a:p>
+            <a:endParaRPr lang="ru-RU" dirty="0"/>
+          </a:p>
+          <a:p>
+            <a:r>
+              <a:rPr lang="ru-RU" dirty="0"/>
+              <a:t>Это внутренняя «кухня» уровня: протоколы могут быть сложными, меняться со временем и усложняться, но при этом </a:t>
+            </a:r>
+            <a:r>
+              <a:rPr lang="ru-RU" b="1" dirty="0"/>
+              <a:t>служба</a:t>
+            </a:r>
+            <a:r>
+              <a:rPr lang="ru-RU" dirty="0"/>
+              <a:t>, предоставляемая уровнем выше, остаётся прежней.</a:t>
+            </a:r>
+          </a:p>
+          <a:p>
+            <a:endParaRPr lang="ru-RU" dirty="0"/>
+          </a:p>
+          <a:p>
+            <a:r>
+              <a:rPr lang="ru-RU" dirty="0"/>
+              <a:t>Таким образом, протокол реализует службу, но не определяет её интерфейс. Это ключевое разделение, позволяющее проектировать модульные и долговечные сетевые архитектуры.</a:t>
+            </a:r>
+          </a:p>
+          <a:p>
+            <a:endParaRPr lang="en-US" dirty="0"/>
+          </a:p>
+        </p:txBody>
+      </p:sp>
+      <p:sp>
+        <p:nvSpPr>
+          <p:cNvPr id="4" name="Slide Number Placeholder 3"/>
+          <p:cNvSpPr>
+            <a:spLocks noGrp="1"/>
+          </p:cNvSpPr>
+          <p:nvPr>
+            <p:ph type="sldNum" sz="quarter" idx="5"/>
+          </p:nvPr>
+        </p:nvSpPr>
+        <p:spPr/>
+        <p:txBody>
+          <a:bodyPr/>
+          <a:lstStyle/>
+          <a:p>
+            <a:fld id="{CF3F5FF5-003D-49C7-8AA8-32F0386C2E23}" type="slidenum">
+              <a:rPr lang="en-US" smtClean="0"/>
+              <a:t>81</a:t>
+            </a:fld>
+            <a:endParaRPr lang="en-US"/>
+          </a:p>
+        </p:txBody>
+      </p:sp>
+    </p:spTree>
+    <p:extLst>
+      <p:ext uri="{BB962C8B-B14F-4D97-AF65-F5344CB8AC3E}">
+        <p14:creationId xmlns:p14="http://schemas.microsoft.com/office/powerpoint/2010/main" val="4099143187"/>
+      </p:ext>
+    </p:extLst>
+  </p:cSld>
+  <p:clrMapOvr>
+    <a:masterClrMapping/>
+  </p:clrMapOvr>
+</p:notes>
+</file>
+
+<file path=ppt/notesSlides/notesSlide82.xml><?xml version="1.0" encoding="utf-8"?>
+<p:notes xmlns:a="http://schemas.openxmlformats.org/drawingml/2006/main" xmlns:r="http://schemas.openxmlformats.org/officeDocument/2006/relationships" xmlns:p="http://schemas.openxmlformats.org/presentationml/2006/main">
+  <p:cSld>
+    <p:spTree>
+      <p:nvGrpSpPr>
+        <p:cNvPr id="1" name=""/>
+        <p:cNvGrpSpPr/>
+        <p:nvPr/>
+      </p:nvGrpSpPr>
+      <p:grpSpPr>
+        <a:xfrm>
+          <a:off x="0" y="0"/>
+          <a:ext cx="0" cy="0"/>
+          <a:chOff x="0" y="0"/>
+          <a:chExt cx="0" cy="0"/>
+        </a:xfrm>
+      </p:grpSpPr>
+      <p:sp>
+        <p:nvSpPr>
+          <p:cNvPr id="2" name="Slide Image Placeholder 1"/>
+          <p:cNvSpPr>
+            <a:spLocks noGrp="1" noRot="1" noChangeAspect="1"/>
+          </p:cNvSpPr>
+          <p:nvPr>
+            <p:ph type="sldImg"/>
+          </p:nvPr>
+        </p:nvSpPr>
+        <p:spPr/>
+      </p:sp>
+      <p:sp>
+        <p:nvSpPr>
+          <p:cNvPr id="3" name="Notes Placeholder 2"/>
+          <p:cNvSpPr>
+            <a:spLocks noGrp="1"/>
+          </p:cNvSpPr>
+          <p:nvPr>
+            <p:ph type="body" idx="1"/>
+          </p:nvPr>
+        </p:nvSpPr>
+        <p:spPr/>
+        <p:txBody>
+          <a:bodyPr/>
+          <a:lstStyle/>
+          <a:p>
+            <a:r>
+              <a:rPr lang="ru-RU" dirty="0"/>
+              <a:t>Очень важно не путать службы и протоколы — это разные сущности, хоть они и связаны.</a:t>
+            </a:r>
+          </a:p>
+          <a:p>
+            <a:br>
+              <a:rPr lang="ru-RU" dirty="0"/>
+            </a:br>
+            <a:r>
+              <a:rPr lang="ru-RU" b="1" dirty="0"/>
+              <a:t>Служба</a:t>
+            </a:r>
+            <a:r>
+              <a:rPr lang="ru-RU" dirty="0"/>
+              <a:t> — это контракт, набор доступных операций, подобный абстрактному типу данных или интерфейсу класса в ООП.</a:t>
+            </a:r>
+          </a:p>
+          <a:p>
+            <a:endParaRPr lang="ru-RU" dirty="0"/>
+          </a:p>
+          <a:p>
+            <a:r>
+              <a:rPr lang="ru-RU" b="1" dirty="0"/>
+              <a:t>Протокол</a:t>
+            </a:r>
+            <a:r>
+              <a:rPr lang="ru-RU" dirty="0"/>
+              <a:t> — это конкретная реализация: каким образом устройства формируют пакеты, как реагируют на ошибки, как интерпретируют заголовки.</a:t>
+            </a:r>
+          </a:p>
+          <a:p>
+            <a:endParaRPr lang="ru-RU" dirty="0"/>
+          </a:p>
+          <a:p>
+            <a:r>
+              <a:rPr lang="ru-RU" dirty="0"/>
+              <a:t>В ранних сетевых архитектурах эти два понятия смешивали: приложение напрямую формировало пакеты протокола. Это приводило к тому, что любое изменение протокола ломало работу всех программ. Современные сети сознательно разделяют интерфейс (службу) и реализацию (протокол), делая систему гибкой и устойчивой к изменениям.</a:t>
+            </a:r>
+          </a:p>
+          <a:p>
+            <a:endParaRPr lang="en-US" dirty="0"/>
+          </a:p>
+        </p:txBody>
+      </p:sp>
+      <p:sp>
+        <p:nvSpPr>
+          <p:cNvPr id="4" name="Slide Number Placeholder 3"/>
+          <p:cNvSpPr>
+            <a:spLocks noGrp="1"/>
+          </p:cNvSpPr>
+          <p:nvPr>
+            <p:ph type="sldNum" sz="quarter" idx="5"/>
+          </p:nvPr>
+        </p:nvSpPr>
+        <p:spPr/>
+        <p:txBody>
+          <a:bodyPr/>
+          <a:lstStyle/>
+          <a:p>
+            <a:fld id="{CF3F5FF5-003D-49C7-8AA8-32F0386C2E23}" type="slidenum">
+              <a:rPr lang="en-US" smtClean="0"/>
+              <a:t>82</a:t>
+            </a:fld>
+            <a:endParaRPr lang="en-US"/>
+          </a:p>
+        </p:txBody>
+      </p:sp>
+    </p:spTree>
+    <p:extLst>
+      <p:ext uri="{BB962C8B-B14F-4D97-AF65-F5344CB8AC3E}">
+        <p14:creationId xmlns:p14="http://schemas.microsoft.com/office/powerpoint/2010/main" val="129344834"/>
       </p:ext>
     </p:extLst>
   </p:cSld>
@@ -9960,7 +10883,7 @@
           <a:p>
             <a:r>
               <a:rPr lang="ru-RU" dirty="0"/>
-              <a:t>Интернет стал основным каналом доставки развлечений. Пользователи могут мгновенно находить и воспроизводить музыку, фильмы и сериалы, не покупая физические носители. IPTV и стриминговые сервисы вытесняют традиционное телевидение.</a:t>
+              <a:t>Электронная коммерция — это совокупность всех операций покупки, продажи и финансовых транзакций, выполняемых через интернет.</a:t>
             </a:r>
           </a:p>
           <a:p>
@@ -9969,7 +10892,7 @@
             </a:br>
             <a:r>
               <a:rPr lang="ru-RU" dirty="0"/>
-              <a:t>Технологии позволяют синхронизировать контент между разными устройствами дома — телевизорами, смартфонами, игровыми приставками.</a:t>
+              <a:t>Пользователи могут приобретать товары онлайн, получать консультации, а также пользоваться банковскими услугами, не посещая отделения. Появились финтех-сервисы, позволяющие мгновенно переводить средства, оплачивать счета и инвестировать.</a:t>
             </a:r>
           </a:p>
           <a:p>
@@ -9978,7 +10901,7 @@
             </a:br>
             <a:r>
               <a:rPr lang="ru-RU" dirty="0"/>
-              <a:t>Интерактивные форматы становятся все популярнее: зрители могут выбирать развитие сюжета или участвовать в трансляции в реальном времени.</a:t>
+              <a:t>Онлайн-аукционы работают по модели, схожей с P2P: каждый участник может быть как продавцом, так и покупателем, а центральный сервер лишь ведёт базу данных товаров.</a:t>
             </a:r>
           </a:p>
           <a:p>
@@ -9987,7 +10910,7 @@
             </a:br>
             <a:r>
               <a:rPr lang="ru-RU" dirty="0"/>
-              <a:t>Отдельное направление — онлайн-игры. Современные виртуальные миры объединяют тысячи игроков в едином пространстве с общей логикой, экономикой и взаимодействиями, что делает игры полноценной социальной и экономической средой.</a:t>
+              <a:t>Система аббревиатур (B2C, B2B, G2C, C2C, P2P) помогает классифицировать тип взаимодействия между сторонами. Эти модели важны для понимания структуры современных электронных сервисов и бизнес-процессов.</a:t>
             </a:r>
             <a:endParaRPr lang="en-US" dirty="0"/>
           </a:p>
@@ -10010,7 +10933,7 @@
           <a:p>
             <a:fld id="{CF3F5FF5-003D-49C7-8AA8-32F0386C2E23}" type="slidenum">
               <a:rPr lang="en-US" smtClean="0"/>
-              <a:t>10</a:t>
+              <a:t>9</a:t>
             </a:fld>
             <a:endParaRPr lang="en-US"/>
           </a:p>
@@ -10019,7 +10942,7 @@
     </p:spTree>
     <p:extLst>
       <p:ext uri="{BB962C8B-B14F-4D97-AF65-F5344CB8AC3E}">
-        <p14:creationId xmlns:p14="http://schemas.microsoft.com/office/powerpoint/2010/main" val="332844403"/>
+        <p14:creationId xmlns:p14="http://schemas.microsoft.com/office/powerpoint/2010/main" val="1950321640"/>
       </p:ext>
     </p:extLst>
   </p:cSld>
@@ -10176,7 +11099,7 @@
           <a:p>
             <a:fld id="{B86B7265-0534-4652-8BC7-F14F741BB29D}" type="datetimeFigureOut">
               <a:rPr lang="en-US" smtClean="0"/>
-              <a:t>12/7/2025</a:t>
+              <a:t>1/31/2026</a:t>
             </a:fld>
             <a:endParaRPr lang="en-US"/>
           </a:p>
@@ -10250,6 +11173,294 @@
 </file>
 
 <file path=ppt/slideLayouts/slideLayout10.xml><?xml version="1.0" encoding="utf-8"?>
+<p:sldLayout xmlns:a="http://schemas.openxmlformats.org/drawingml/2006/main" xmlns:r="http://schemas.openxmlformats.org/officeDocument/2006/relationships" xmlns:p="http://schemas.openxmlformats.org/presentationml/2006/main" type="picTx" preserve="1">
+  <p:cSld name="Picture with Caption">
+    <p:spTree>
+      <p:nvGrpSpPr>
+        <p:cNvPr id="1" name=""/>
+        <p:cNvGrpSpPr/>
+        <p:nvPr/>
+      </p:nvGrpSpPr>
+      <p:grpSpPr>
+        <a:xfrm>
+          <a:off x="0" y="0"/>
+          <a:ext cx="0" cy="0"/>
+          <a:chOff x="0" y="0"/>
+          <a:chExt cx="0" cy="0"/>
+        </a:xfrm>
+      </p:grpSpPr>
+      <p:sp>
+        <p:nvSpPr>
+          <p:cNvPr id="2" name="Title 1">
+            <a:extLst>
+              <a:ext uri="{FF2B5EF4-FFF2-40B4-BE49-F238E27FC236}">
+                <a16:creationId xmlns:a16="http://schemas.microsoft.com/office/drawing/2014/main" id="{2BDC57F0-1D65-91E5-AB15-FF0440E503D8}"/>
+              </a:ext>
+            </a:extLst>
+          </p:cNvPr>
+          <p:cNvSpPr>
+            <a:spLocks noGrp="1"/>
+          </p:cNvSpPr>
+          <p:nvPr>
+            <p:ph type="title"/>
+          </p:nvPr>
+        </p:nvSpPr>
+        <p:spPr>
+          <a:xfrm>
+            <a:off x="839788" y="457200"/>
+            <a:ext cx="3932237" cy="1600200"/>
+          </a:xfrm>
+        </p:spPr>
+        <p:txBody>
+          <a:bodyPr anchor="b"/>
+          <a:lstStyle>
+            <a:lvl1pPr>
+              <a:defRPr sz="3200"/>
+            </a:lvl1pPr>
+          </a:lstStyle>
+          <a:p>
+            <a:r>
+              <a:rPr lang="en-US"/>
+              <a:t>Click to edit Master title style</a:t>
+            </a:r>
+          </a:p>
+        </p:txBody>
+      </p:sp>
+      <p:sp>
+        <p:nvSpPr>
+          <p:cNvPr id="3" name="Picture Placeholder 2">
+            <a:extLst>
+              <a:ext uri="{FF2B5EF4-FFF2-40B4-BE49-F238E27FC236}">
+                <a16:creationId xmlns:a16="http://schemas.microsoft.com/office/drawing/2014/main" id="{18FFC011-A93F-134B-45F5-0904A5EFA891}"/>
+              </a:ext>
+            </a:extLst>
+          </p:cNvPr>
+          <p:cNvSpPr>
+            <a:spLocks noGrp="1"/>
+          </p:cNvSpPr>
+          <p:nvPr>
+            <p:ph type="pic" idx="1"/>
+          </p:nvPr>
+        </p:nvSpPr>
+        <p:spPr>
+          <a:xfrm>
+            <a:off x="5183188" y="987425"/>
+            <a:ext cx="6172200" cy="4873625"/>
+          </a:xfrm>
+        </p:spPr>
+        <p:txBody>
+          <a:bodyPr/>
+          <a:lstStyle>
+            <a:lvl1pPr marL="0" indent="0">
+              <a:buNone/>
+              <a:defRPr sz="3200"/>
+            </a:lvl1pPr>
+            <a:lvl2pPr marL="457200" indent="0">
+              <a:buNone/>
+              <a:defRPr sz="2800"/>
+            </a:lvl2pPr>
+            <a:lvl3pPr marL="914400" indent="0">
+              <a:buNone/>
+              <a:defRPr sz="2400"/>
+            </a:lvl3pPr>
+            <a:lvl4pPr marL="1371600" indent="0">
+              <a:buNone/>
+              <a:defRPr sz="2000"/>
+            </a:lvl4pPr>
+            <a:lvl5pPr marL="1828800" indent="0">
+              <a:buNone/>
+              <a:defRPr sz="2000"/>
+            </a:lvl5pPr>
+            <a:lvl6pPr marL="2286000" indent="0">
+              <a:buNone/>
+              <a:defRPr sz="2000"/>
+            </a:lvl6pPr>
+            <a:lvl7pPr marL="2743200" indent="0">
+              <a:buNone/>
+              <a:defRPr sz="2000"/>
+            </a:lvl7pPr>
+            <a:lvl8pPr marL="3200400" indent="0">
+              <a:buNone/>
+              <a:defRPr sz="2000"/>
+            </a:lvl8pPr>
+            <a:lvl9pPr marL="3657600" indent="0">
+              <a:buNone/>
+              <a:defRPr sz="2000"/>
+            </a:lvl9pPr>
+          </a:lstStyle>
+          <a:p>
+            <a:endParaRPr lang="en-US"/>
+          </a:p>
+        </p:txBody>
+      </p:sp>
+      <p:sp>
+        <p:nvSpPr>
+          <p:cNvPr id="4" name="Text Placeholder 3">
+            <a:extLst>
+              <a:ext uri="{FF2B5EF4-FFF2-40B4-BE49-F238E27FC236}">
+                <a16:creationId xmlns:a16="http://schemas.microsoft.com/office/drawing/2014/main" id="{22701065-E54B-005F-E8D5-7E8EC9D5CDBC}"/>
+              </a:ext>
+            </a:extLst>
+          </p:cNvPr>
+          <p:cNvSpPr>
+            <a:spLocks noGrp="1"/>
+          </p:cNvSpPr>
+          <p:nvPr>
+            <p:ph type="body" sz="half" idx="2"/>
+          </p:nvPr>
+        </p:nvSpPr>
+        <p:spPr>
+          <a:xfrm>
+            <a:off x="839788" y="2057400"/>
+            <a:ext cx="3932237" cy="3811588"/>
+          </a:xfrm>
+        </p:spPr>
+        <p:txBody>
+          <a:bodyPr/>
+          <a:lstStyle>
+            <a:lvl1pPr marL="0" indent="0">
+              <a:buNone/>
+              <a:defRPr sz="1600"/>
+            </a:lvl1pPr>
+            <a:lvl2pPr marL="457200" indent="0">
+              <a:buNone/>
+              <a:defRPr sz="1400"/>
+            </a:lvl2pPr>
+            <a:lvl3pPr marL="914400" indent="0">
+              <a:buNone/>
+              <a:defRPr sz="1200"/>
+            </a:lvl3pPr>
+            <a:lvl4pPr marL="1371600" indent="0">
+              <a:buNone/>
+              <a:defRPr sz="1000"/>
+            </a:lvl4pPr>
+            <a:lvl5pPr marL="1828800" indent="0">
+              <a:buNone/>
+              <a:defRPr sz="1000"/>
+            </a:lvl5pPr>
+            <a:lvl6pPr marL="2286000" indent="0">
+              <a:buNone/>
+              <a:defRPr sz="1000"/>
+            </a:lvl6pPr>
+            <a:lvl7pPr marL="2743200" indent="0">
+              <a:buNone/>
+              <a:defRPr sz="1000"/>
+            </a:lvl7pPr>
+            <a:lvl8pPr marL="3200400" indent="0">
+              <a:buNone/>
+              <a:defRPr sz="1000"/>
+            </a:lvl8pPr>
+            <a:lvl9pPr marL="3657600" indent="0">
+              <a:buNone/>
+              <a:defRPr sz="1000"/>
+            </a:lvl9pPr>
+          </a:lstStyle>
+          <a:p>
+            <a:pPr lvl="0"/>
+            <a:r>
+              <a:rPr lang="en-US"/>
+              <a:t>Click to edit Master text styles</a:t>
+            </a:r>
+          </a:p>
+        </p:txBody>
+      </p:sp>
+      <p:sp>
+        <p:nvSpPr>
+          <p:cNvPr id="5" name="Date Placeholder 4">
+            <a:extLst>
+              <a:ext uri="{FF2B5EF4-FFF2-40B4-BE49-F238E27FC236}">
+                <a16:creationId xmlns:a16="http://schemas.microsoft.com/office/drawing/2014/main" id="{7160FE68-CFE6-AFC6-8205-D183960CFA3A}"/>
+              </a:ext>
+            </a:extLst>
+          </p:cNvPr>
+          <p:cNvSpPr>
+            <a:spLocks noGrp="1"/>
+          </p:cNvSpPr>
+          <p:nvPr>
+            <p:ph type="dt" sz="half" idx="10"/>
+          </p:nvPr>
+        </p:nvSpPr>
+        <p:spPr/>
+        <p:txBody>
+          <a:bodyPr/>
+          <a:lstStyle/>
+          <a:p>
+            <a:fld id="{B86B7265-0534-4652-8BC7-F14F741BB29D}" type="datetimeFigureOut">
+              <a:rPr lang="en-US" smtClean="0"/>
+              <a:t>1/31/2026</a:t>
+            </a:fld>
+            <a:endParaRPr lang="en-US"/>
+          </a:p>
+        </p:txBody>
+      </p:sp>
+      <p:sp>
+        <p:nvSpPr>
+          <p:cNvPr id="6" name="Footer Placeholder 5">
+            <a:extLst>
+              <a:ext uri="{FF2B5EF4-FFF2-40B4-BE49-F238E27FC236}">
+                <a16:creationId xmlns:a16="http://schemas.microsoft.com/office/drawing/2014/main" id="{296EA8DB-15F1-24AF-4920-EEF32236FDF0}"/>
+              </a:ext>
+            </a:extLst>
+          </p:cNvPr>
+          <p:cNvSpPr>
+            <a:spLocks noGrp="1"/>
+          </p:cNvSpPr>
+          <p:nvPr>
+            <p:ph type="ftr" sz="quarter" idx="11"/>
+          </p:nvPr>
+        </p:nvSpPr>
+        <p:spPr/>
+        <p:txBody>
+          <a:bodyPr/>
+          <a:lstStyle/>
+          <a:p>
+            <a:endParaRPr lang="en-US"/>
+          </a:p>
+        </p:txBody>
+      </p:sp>
+      <p:sp>
+        <p:nvSpPr>
+          <p:cNvPr id="7" name="Slide Number Placeholder 6">
+            <a:extLst>
+              <a:ext uri="{FF2B5EF4-FFF2-40B4-BE49-F238E27FC236}">
+                <a16:creationId xmlns:a16="http://schemas.microsoft.com/office/drawing/2014/main" id="{029574E2-1609-45AC-CE8B-CA177739311C}"/>
+              </a:ext>
+            </a:extLst>
+          </p:cNvPr>
+          <p:cNvSpPr>
+            <a:spLocks noGrp="1"/>
+          </p:cNvSpPr>
+          <p:nvPr>
+            <p:ph type="sldNum" sz="quarter" idx="12"/>
+          </p:nvPr>
+        </p:nvSpPr>
+        <p:spPr/>
+        <p:txBody>
+          <a:bodyPr/>
+          <a:lstStyle/>
+          <a:p>
+            <a:fld id="{47922081-3201-4273-B244-324A7B2BEF59}" type="slidenum">
+              <a:rPr lang="en-US" smtClean="0"/>
+              <a:t>‹#›</a:t>
+            </a:fld>
+            <a:endParaRPr lang="en-US"/>
+          </a:p>
+        </p:txBody>
+      </p:sp>
+    </p:spTree>
+    <p:extLst>
+      <p:ext uri="{BB962C8B-B14F-4D97-AF65-F5344CB8AC3E}">
+        <p14:creationId xmlns:p14="http://schemas.microsoft.com/office/powerpoint/2010/main" val="1873902748"/>
+      </p:ext>
+    </p:extLst>
+  </p:cSld>
+  <p:clrMapOvr>
+    <a:masterClrMapping/>
+  </p:clrMapOvr>
+</p:sldLayout>
+</file>
+
+<file path=ppt/slideLayouts/slideLayout11.xml><?xml version="1.0" encoding="utf-8"?>
 <p:sldLayout xmlns:a="http://schemas.openxmlformats.org/drawingml/2006/main" xmlns:r="http://schemas.openxmlformats.org/officeDocument/2006/relationships" xmlns:p="http://schemas.openxmlformats.org/presentationml/2006/main" type="vertTx" preserve="1">
   <p:cSld name="Title and Vertical Text">
     <p:spTree>
@@ -10374,7 +11585,7 @@
           <a:p>
             <a:fld id="{B86B7265-0534-4652-8BC7-F14F741BB29D}" type="datetimeFigureOut">
               <a:rPr lang="en-US" smtClean="0"/>
-              <a:t>12/7/2025</a:t>
+              <a:t>1/31/2026</a:t>
             </a:fld>
             <a:endParaRPr lang="en-US"/>
           </a:p>
@@ -10447,7 +11658,7 @@
 </p:sldLayout>
 </file>
 
-<file path=ppt/slideLayouts/slideLayout11.xml><?xml version="1.0" encoding="utf-8"?>
+<file path=ppt/slideLayouts/slideLayout12.xml><?xml version="1.0" encoding="utf-8"?>
 <p:sldLayout xmlns:a="http://schemas.openxmlformats.org/drawingml/2006/main" xmlns:r="http://schemas.openxmlformats.org/officeDocument/2006/relationships" xmlns:p="http://schemas.openxmlformats.org/presentationml/2006/main" type="vertTitleAndTx" preserve="1">
   <p:cSld name="Vertical Title and Text">
     <p:spTree>
@@ -10582,7 +11793,7 @@
           <a:p>
             <a:fld id="{B86B7265-0534-4652-8BC7-F14F741BB29D}" type="datetimeFigureOut">
               <a:rPr lang="en-US" smtClean="0"/>
-              <a:t>12/7/2025</a:t>
+              <a:t>1/31/2026</a:t>
             </a:fld>
             <a:endParaRPr lang="en-US"/>
           </a:p>
@@ -10780,7 +11991,7 @@
           <a:p>
             <a:fld id="{B86B7265-0534-4652-8BC7-F14F741BB29D}" type="datetimeFigureOut">
               <a:rPr lang="en-US" smtClean="0"/>
-              <a:t>12/7/2025</a:t>
+              <a:t>1/31/2026</a:t>
             </a:fld>
             <a:endParaRPr lang="en-US"/>
           </a:p>
@@ -11055,7 +12266,7 @@
           <a:p>
             <a:fld id="{B86B7265-0534-4652-8BC7-F14F741BB29D}" type="datetimeFigureOut">
               <a:rPr lang="en-US" smtClean="0"/>
-              <a:t>12/7/2025</a:t>
+              <a:t>1/31/2026</a:t>
             </a:fld>
             <a:endParaRPr lang="en-US"/>
           </a:p>
@@ -11320,7 +12531,7 @@
           <a:p>
             <a:fld id="{B86B7265-0534-4652-8BC7-F14F741BB29D}" type="datetimeFigureOut">
               <a:rPr lang="en-US" smtClean="0"/>
-              <a:t>12/7/2025</a:t>
+              <a:t>1/31/2026</a:t>
             </a:fld>
             <a:endParaRPr lang="en-US"/>
           </a:p>
@@ -11390,10 +12601,369 @@
   <p:clrMapOvr>
     <a:masterClrMapping/>
   </p:clrMapOvr>
+  <p:extLst>
+    <p:ext uri="{DCECCB84-F9BA-43D5-87BE-67443E8EF086}">
+      <p15:sldGuideLst xmlns:p15="http://schemas.microsoft.com/office/powerpoint/2012/main">
+        <p15:guide id="1" orient="horz" pos="2160" userDrawn="1">
+          <p15:clr>
+            <a:srgbClr val="FBAE40"/>
+          </p15:clr>
+        </p15:guide>
+        <p15:guide id="2" pos="3840" userDrawn="1">
+          <p15:clr>
+            <a:srgbClr val="FBAE40"/>
+          </p15:clr>
+        </p15:guide>
+      </p15:sldGuideLst>
+    </p:ext>
+  </p:extLst>
 </p:sldLayout>
 </file>
 
 <file path=ppt/slideLayouts/slideLayout5.xml><?xml version="1.0" encoding="utf-8"?>
+<p:sldLayout xmlns:a="http://schemas.openxmlformats.org/drawingml/2006/main" xmlns:r="http://schemas.openxmlformats.org/officeDocument/2006/relationships" xmlns:p="http://schemas.openxmlformats.org/presentationml/2006/main" type="twoObj" preserve="1">
+  <p:cSld name="1_Two Content">
+    <p:spTree>
+      <p:nvGrpSpPr>
+        <p:cNvPr id="1" name=""/>
+        <p:cNvGrpSpPr/>
+        <p:nvPr/>
+      </p:nvGrpSpPr>
+      <p:grpSpPr>
+        <a:xfrm>
+          <a:off x="0" y="0"/>
+          <a:ext cx="0" cy="0"/>
+          <a:chOff x="0" y="0"/>
+          <a:chExt cx="0" cy="0"/>
+        </a:xfrm>
+      </p:grpSpPr>
+      <p:sp>
+        <p:nvSpPr>
+          <p:cNvPr id="2" name="Title 1">
+            <a:extLst>
+              <a:ext uri="{FF2B5EF4-FFF2-40B4-BE49-F238E27FC236}">
+                <a16:creationId xmlns:a16="http://schemas.microsoft.com/office/drawing/2014/main" id="{ADA7F9C0-CAEE-AED2-B220-7A8E0334B6FF}"/>
+              </a:ext>
+            </a:extLst>
+          </p:cNvPr>
+          <p:cNvSpPr>
+            <a:spLocks noGrp="1"/>
+          </p:cNvSpPr>
+          <p:nvPr>
+            <p:ph type="title"/>
+          </p:nvPr>
+        </p:nvSpPr>
+        <p:spPr/>
+        <p:txBody>
+          <a:bodyPr/>
+          <a:lstStyle/>
+          <a:p>
+            <a:r>
+              <a:rPr lang="en-US"/>
+              <a:t>Click to edit Master title style</a:t>
+            </a:r>
+          </a:p>
+        </p:txBody>
+      </p:sp>
+      <p:sp>
+        <p:nvSpPr>
+          <p:cNvPr id="3" name="Content Placeholder 2">
+            <a:extLst>
+              <a:ext uri="{FF2B5EF4-FFF2-40B4-BE49-F238E27FC236}">
+                <a16:creationId xmlns:a16="http://schemas.microsoft.com/office/drawing/2014/main" id="{25FE31FA-BE7E-A139-F428-52FB69C1DD97}"/>
+              </a:ext>
+            </a:extLst>
+          </p:cNvPr>
+          <p:cNvSpPr>
+            <a:spLocks noGrp="1"/>
+          </p:cNvSpPr>
+          <p:nvPr>
+            <p:ph sz="half" idx="1"/>
+          </p:nvPr>
+        </p:nvSpPr>
+        <p:spPr>
+          <a:xfrm>
+            <a:off x="838200" y="1825625"/>
+            <a:ext cx="5805196" cy="4351338"/>
+          </a:xfrm>
+        </p:spPr>
+        <p:txBody>
+          <a:bodyPr/>
+          <a:lstStyle/>
+          <a:p>
+            <a:pPr lvl="0"/>
+            <a:r>
+              <a:rPr lang="en-US"/>
+              <a:t>Click to edit Master text styles</a:t>
+            </a:r>
+          </a:p>
+          <a:p>
+            <a:pPr lvl="1"/>
+            <a:r>
+              <a:rPr lang="en-US"/>
+              <a:t>Second level</a:t>
+            </a:r>
+          </a:p>
+          <a:p>
+            <a:pPr lvl="2"/>
+            <a:r>
+              <a:rPr lang="en-US"/>
+              <a:t>Third level</a:t>
+            </a:r>
+          </a:p>
+          <a:p>
+            <a:pPr lvl="3"/>
+            <a:r>
+              <a:rPr lang="en-US"/>
+              <a:t>Fourth level</a:t>
+            </a:r>
+          </a:p>
+          <a:p>
+            <a:pPr lvl="4"/>
+            <a:r>
+              <a:rPr lang="en-US"/>
+              <a:t>Fifth level</a:t>
+            </a:r>
+          </a:p>
+        </p:txBody>
+      </p:sp>
+      <p:sp>
+        <p:nvSpPr>
+          <p:cNvPr id="4" name="Content Placeholder 3">
+            <a:extLst>
+              <a:ext uri="{FF2B5EF4-FFF2-40B4-BE49-F238E27FC236}">
+                <a16:creationId xmlns:a16="http://schemas.microsoft.com/office/drawing/2014/main" id="{2C88F476-21D7-5A86-36AD-08B8061216F9}"/>
+              </a:ext>
+            </a:extLst>
+          </p:cNvPr>
+          <p:cNvSpPr>
+            <a:spLocks noGrp="1"/>
+          </p:cNvSpPr>
+          <p:nvPr>
+            <p:ph sz="half" idx="2"/>
+          </p:nvPr>
+        </p:nvSpPr>
+        <p:spPr>
+          <a:xfrm>
+            <a:off x="6904654" y="1825625"/>
+            <a:ext cx="4449146" cy="2062165"/>
+          </a:xfrm>
+        </p:spPr>
+        <p:txBody>
+          <a:bodyPr/>
+          <a:lstStyle/>
+          <a:p>
+            <a:pPr lvl="0"/>
+            <a:r>
+              <a:rPr lang="en-US" dirty="0"/>
+              <a:t>Click to edit Master text styles</a:t>
+            </a:r>
+          </a:p>
+          <a:p>
+            <a:pPr lvl="1"/>
+            <a:r>
+              <a:rPr lang="en-US" dirty="0"/>
+              <a:t>Second level</a:t>
+            </a:r>
+          </a:p>
+          <a:p>
+            <a:pPr lvl="2"/>
+            <a:r>
+              <a:rPr lang="en-US" dirty="0"/>
+              <a:t>Third level</a:t>
+            </a:r>
+          </a:p>
+          <a:p>
+            <a:pPr lvl="3"/>
+            <a:r>
+              <a:rPr lang="en-US" dirty="0"/>
+              <a:t>Fourth level</a:t>
+            </a:r>
+          </a:p>
+          <a:p>
+            <a:pPr lvl="4"/>
+            <a:r>
+              <a:rPr lang="en-US" dirty="0"/>
+              <a:t>Fifth level</a:t>
+            </a:r>
+          </a:p>
+        </p:txBody>
+      </p:sp>
+      <p:sp>
+        <p:nvSpPr>
+          <p:cNvPr id="5" name="Date Placeholder 4">
+            <a:extLst>
+              <a:ext uri="{FF2B5EF4-FFF2-40B4-BE49-F238E27FC236}">
+                <a16:creationId xmlns:a16="http://schemas.microsoft.com/office/drawing/2014/main" id="{D5847E05-7B98-AE33-EE3C-E6F8D7DF36A2}"/>
+              </a:ext>
+            </a:extLst>
+          </p:cNvPr>
+          <p:cNvSpPr>
+            <a:spLocks noGrp="1"/>
+          </p:cNvSpPr>
+          <p:nvPr>
+            <p:ph type="dt" sz="half" idx="10"/>
+          </p:nvPr>
+        </p:nvSpPr>
+        <p:spPr/>
+        <p:txBody>
+          <a:bodyPr/>
+          <a:lstStyle/>
+          <a:p>
+            <a:fld id="{B86B7265-0534-4652-8BC7-F14F741BB29D}" type="datetimeFigureOut">
+              <a:rPr lang="en-US" smtClean="0"/>
+              <a:t>1/31/2026</a:t>
+            </a:fld>
+            <a:endParaRPr lang="en-US"/>
+          </a:p>
+        </p:txBody>
+      </p:sp>
+      <p:sp>
+        <p:nvSpPr>
+          <p:cNvPr id="6" name="Footer Placeholder 5">
+            <a:extLst>
+              <a:ext uri="{FF2B5EF4-FFF2-40B4-BE49-F238E27FC236}">
+                <a16:creationId xmlns:a16="http://schemas.microsoft.com/office/drawing/2014/main" id="{88AA4492-A7BE-3854-D9D0-CCA9F1DA87D0}"/>
+              </a:ext>
+            </a:extLst>
+          </p:cNvPr>
+          <p:cNvSpPr>
+            <a:spLocks noGrp="1"/>
+          </p:cNvSpPr>
+          <p:nvPr>
+            <p:ph type="ftr" sz="quarter" idx="11"/>
+          </p:nvPr>
+        </p:nvSpPr>
+        <p:spPr/>
+        <p:txBody>
+          <a:bodyPr/>
+          <a:lstStyle/>
+          <a:p>
+            <a:endParaRPr lang="en-US"/>
+          </a:p>
+        </p:txBody>
+      </p:sp>
+      <p:sp>
+        <p:nvSpPr>
+          <p:cNvPr id="7" name="Slide Number Placeholder 6">
+            <a:extLst>
+              <a:ext uri="{FF2B5EF4-FFF2-40B4-BE49-F238E27FC236}">
+                <a16:creationId xmlns:a16="http://schemas.microsoft.com/office/drawing/2014/main" id="{67D7FBBA-3922-E180-BED2-EF7C35C84DEB}"/>
+              </a:ext>
+            </a:extLst>
+          </p:cNvPr>
+          <p:cNvSpPr>
+            <a:spLocks noGrp="1"/>
+          </p:cNvSpPr>
+          <p:nvPr>
+            <p:ph type="sldNum" sz="quarter" idx="12"/>
+          </p:nvPr>
+        </p:nvSpPr>
+        <p:spPr/>
+        <p:txBody>
+          <a:bodyPr/>
+          <a:lstStyle/>
+          <a:p>
+            <a:fld id="{47922081-3201-4273-B244-324A7B2BEF59}" type="slidenum">
+              <a:rPr lang="en-US" smtClean="0"/>
+              <a:t>‹#›</a:t>
+            </a:fld>
+            <a:endParaRPr lang="en-US"/>
+          </a:p>
+        </p:txBody>
+      </p:sp>
+      <p:sp>
+        <p:nvSpPr>
+          <p:cNvPr id="8" name="Content Placeholder 3">
+            <a:extLst>
+              <a:ext uri="{FF2B5EF4-FFF2-40B4-BE49-F238E27FC236}">
+                <a16:creationId xmlns:a16="http://schemas.microsoft.com/office/drawing/2014/main" id="{C3907100-AFA9-D574-4A76-C313081F0CB4}"/>
+              </a:ext>
+            </a:extLst>
+          </p:cNvPr>
+          <p:cNvSpPr>
+            <a:spLocks noGrp="1"/>
+          </p:cNvSpPr>
+          <p:nvPr>
+            <p:ph sz="half" idx="13"/>
+          </p:nvPr>
+        </p:nvSpPr>
+        <p:spPr>
+          <a:xfrm>
+            <a:off x="6904654" y="4067176"/>
+            <a:ext cx="4449146" cy="2109788"/>
+          </a:xfrm>
+        </p:spPr>
+        <p:txBody>
+          <a:bodyPr/>
+          <a:lstStyle/>
+          <a:p>
+            <a:pPr lvl="0"/>
+            <a:r>
+              <a:rPr lang="en-US"/>
+              <a:t>Click to edit Master text styles</a:t>
+            </a:r>
+          </a:p>
+          <a:p>
+            <a:pPr lvl="1"/>
+            <a:r>
+              <a:rPr lang="en-US"/>
+              <a:t>Second level</a:t>
+            </a:r>
+          </a:p>
+          <a:p>
+            <a:pPr lvl="2"/>
+            <a:r>
+              <a:rPr lang="en-US"/>
+              <a:t>Third level</a:t>
+            </a:r>
+          </a:p>
+          <a:p>
+            <a:pPr lvl="3"/>
+            <a:r>
+              <a:rPr lang="en-US"/>
+              <a:t>Fourth level</a:t>
+            </a:r>
+          </a:p>
+          <a:p>
+            <a:pPr lvl="4"/>
+            <a:r>
+              <a:rPr lang="en-US"/>
+              <a:t>Fifth level</a:t>
+            </a:r>
+          </a:p>
+        </p:txBody>
+      </p:sp>
+    </p:spTree>
+    <p:extLst>
+      <p:ext uri="{BB962C8B-B14F-4D97-AF65-F5344CB8AC3E}">
+        <p14:creationId xmlns:p14="http://schemas.microsoft.com/office/powerpoint/2010/main" val="3637963772"/>
+      </p:ext>
+    </p:extLst>
+  </p:cSld>
+  <p:clrMapOvr>
+    <a:masterClrMapping/>
+  </p:clrMapOvr>
+  <p:extLst>
+    <p:ext uri="{DCECCB84-F9BA-43D5-87BE-67443E8EF086}">
+      <p15:sldGuideLst xmlns:p15="http://schemas.microsoft.com/office/powerpoint/2012/main">
+        <p15:guide id="1" orient="horz" pos="2160" userDrawn="1">
+          <p15:clr>
+            <a:srgbClr val="FBAE40"/>
+          </p15:clr>
+        </p15:guide>
+        <p15:guide id="2" pos="3840" userDrawn="1">
+          <p15:clr>
+            <a:srgbClr val="FBAE40"/>
+          </p15:clr>
+        </p15:guide>
+      </p15:sldGuideLst>
+    </p:ext>
+  </p:extLst>
+</p:sldLayout>
+</file>
+
+<file path=ppt/slideLayouts/slideLayout6.xml><?xml version="1.0" encoding="utf-8"?>
 <p:sldLayout xmlns:a="http://schemas.openxmlformats.org/drawingml/2006/main" xmlns:r="http://schemas.openxmlformats.org/officeDocument/2006/relationships" xmlns:p="http://schemas.openxmlformats.org/presentationml/2006/main" type="twoTxTwoObj" preserve="1">
   <p:cSld name="Comparison">
     <p:spTree>
@@ -11732,7 +13302,7 @@
           <a:p>
             <a:fld id="{B86B7265-0534-4652-8BC7-F14F741BB29D}" type="datetimeFigureOut">
               <a:rPr lang="en-US" smtClean="0"/>
-              <a:t>12/7/2025</a:t>
+              <a:t>1/31/2026</a:t>
             </a:fld>
             <a:endParaRPr lang="en-US"/>
           </a:p>
@@ -11805,7 +13375,7 @@
 </p:sldLayout>
 </file>
 
-<file path=ppt/slideLayouts/slideLayout6.xml><?xml version="1.0" encoding="utf-8"?>
+<file path=ppt/slideLayouts/slideLayout7.xml><?xml version="1.0" encoding="utf-8"?>
 <p:sldLayout xmlns:a="http://schemas.openxmlformats.org/drawingml/2006/main" xmlns:r="http://schemas.openxmlformats.org/officeDocument/2006/relationships" xmlns:p="http://schemas.openxmlformats.org/presentationml/2006/main" type="titleOnly" preserve="1">
   <p:cSld name="Title Only">
     <p:spTree>
@@ -11873,7 +13443,7 @@
           <a:p>
             <a:fld id="{B86B7265-0534-4652-8BC7-F14F741BB29D}" type="datetimeFigureOut">
               <a:rPr lang="en-US" smtClean="0"/>
-              <a:t>12/7/2025</a:t>
+              <a:t>1/31/2026</a:t>
             </a:fld>
             <a:endParaRPr lang="en-US"/>
           </a:p>
@@ -11946,7 +13516,7 @@
 </p:sldLayout>
 </file>
 
-<file path=ppt/slideLayouts/slideLayout7.xml><?xml version="1.0" encoding="utf-8"?>
+<file path=ppt/slideLayouts/slideLayout8.xml><?xml version="1.0" encoding="utf-8"?>
 <p:sldLayout xmlns:a="http://schemas.openxmlformats.org/drawingml/2006/main" xmlns:r="http://schemas.openxmlformats.org/officeDocument/2006/relationships" xmlns:p="http://schemas.openxmlformats.org/presentationml/2006/main" type="blank" preserve="1">
   <p:cSld name="Blank">
     <p:spTree>
@@ -11986,7 +13556,7 @@
           <a:p>
             <a:fld id="{B86B7265-0534-4652-8BC7-F14F741BB29D}" type="datetimeFigureOut">
               <a:rPr lang="en-US" smtClean="0"/>
-              <a:t>12/7/2025</a:t>
+              <a:t>1/31/2026</a:t>
             </a:fld>
             <a:endParaRPr lang="en-US"/>
           </a:p>
@@ -12059,7 +13629,7 @@
 </p:sldLayout>
 </file>
 
-<file path=ppt/slideLayouts/slideLayout8.xml><?xml version="1.0" encoding="utf-8"?>
+<file path=ppt/slideLayouts/slideLayout9.xml><?xml version="1.0" encoding="utf-8"?>
 <p:sldLayout xmlns:a="http://schemas.openxmlformats.org/drawingml/2006/main" xmlns:r="http://schemas.openxmlformats.org/officeDocument/2006/relationships" xmlns:p="http://schemas.openxmlformats.org/presentationml/2006/main" type="objTx" preserve="1">
   <p:cSld name="Content with Caption">
     <p:spTree>
@@ -12297,7 +13867,7 @@
           <a:p>
             <a:fld id="{B86B7265-0534-4652-8BC7-F14F741BB29D}" type="datetimeFigureOut">
               <a:rPr lang="en-US" smtClean="0"/>
-              <a:t>12/7/2025</a:t>
+              <a:t>1/31/2026</a:t>
             </a:fld>
             <a:endParaRPr lang="en-US"/>
           </a:p>
@@ -12361,294 +13931,6 @@
     <p:extLst>
       <p:ext uri="{BB962C8B-B14F-4D97-AF65-F5344CB8AC3E}">
         <p14:creationId xmlns:p14="http://schemas.microsoft.com/office/powerpoint/2010/main" val="2191653620"/>
-      </p:ext>
-    </p:extLst>
-  </p:cSld>
-  <p:clrMapOvr>
-    <a:masterClrMapping/>
-  </p:clrMapOvr>
-</p:sldLayout>
-</file>
-
-<file path=ppt/slideLayouts/slideLayout9.xml><?xml version="1.0" encoding="utf-8"?>
-<p:sldLayout xmlns:a="http://schemas.openxmlformats.org/drawingml/2006/main" xmlns:r="http://schemas.openxmlformats.org/officeDocument/2006/relationships" xmlns:p="http://schemas.openxmlformats.org/presentationml/2006/main" type="picTx" preserve="1">
-  <p:cSld name="Picture with Caption">
-    <p:spTree>
-      <p:nvGrpSpPr>
-        <p:cNvPr id="1" name=""/>
-        <p:cNvGrpSpPr/>
-        <p:nvPr/>
-      </p:nvGrpSpPr>
-      <p:grpSpPr>
-        <a:xfrm>
-          <a:off x="0" y="0"/>
-          <a:ext cx="0" cy="0"/>
-          <a:chOff x="0" y="0"/>
-          <a:chExt cx="0" cy="0"/>
-        </a:xfrm>
-      </p:grpSpPr>
-      <p:sp>
-        <p:nvSpPr>
-          <p:cNvPr id="2" name="Title 1">
-            <a:extLst>
-              <a:ext uri="{FF2B5EF4-FFF2-40B4-BE49-F238E27FC236}">
-                <a16:creationId xmlns:a16="http://schemas.microsoft.com/office/drawing/2014/main" id="{2BDC57F0-1D65-91E5-AB15-FF0440E503D8}"/>
-              </a:ext>
-            </a:extLst>
-          </p:cNvPr>
-          <p:cNvSpPr>
-            <a:spLocks noGrp="1"/>
-          </p:cNvSpPr>
-          <p:nvPr>
-            <p:ph type="title"/>
-          </p:nvPr>
-        </p:nvSpPr>
-        <p:spPr>
-          <a:xfrm>
-            <a:off x="839788" y="457200"/>
-            <a:ext cx="3932237" cy="1600200"/>
-          </a:xfrm>
-        </p:spPr>
-        <p:txBody>
-          <a:bodyPr anchor="b"/>
-          <a:lstStyle>
-            <a:lvl1pPr>
-              <a:defRPr sz="3200"/>
-            </a:lvl1pPr>
-          </a:lstStyle>
-          <a:p>
-            <a:r>
-              <a:rPr lang="en-US"/>
-              <a:t>Click to edit Master title style</a:t>
-            </a:r>
-          </a:p>
-        </p:txBody>
-      </p:sp>
-      <p:sp>
-        <p:nvSpPr>
-          <p:cNvPr id="3" name="Picture Placeholder 2">
-            <a:extLst>
-              <a:ext uri="{FF2B5EF4-FFF2-40B4-BE49-F238E27FC236}">
-                <a16:creationId xmlns:a16="http://schemas.microsoft.com/office/drawing/2014/main" id="{18FFC011-A93F-134B-45F5-0904A5EFA891}"/>
-              </a:ext>
-            </a:extLst>
-          </p:cNvPr>
-          <p:cNvSpPr>
-            <a:spLocks noGrp="1"/>
-          </p:cNvSpPr>
-          <p:nvPr>
-            <p:ph type="pic" idx="1"/>
-          </p:nvPr>
-        </p:nvSpPr>
-        <p:spPr>
-          <a:xfrm>
-            <a:off x="5183188" y="987425"/>
-            <a:ext cx="6172200" cy="4873625"/>
-          </a:xfrm>
-        </p:spPr>
-        <p:txBody>
-          <a:bodyPr/>
-          <a:lstStyle>
-            <a:lvl1pPr marL="0" indent="0">
-              <a:buNone/>
-              <a:defRPr sz="3200"/>
-            </a:lvl1pPr>
-            <a:lvl2pPr marL="457200" indent="0">
-              <a:buNone/>
-              <a:defRPr sz="2800"/>
-            </a:lvl2pPr>
-            <a:lvl3pPr marL="914400" indent="0">
-              <a:buNone/>
-              <a:defRPr sz="2400"/>
-            </a:lvl3pPr>
-            <a:lvl4pPr marL="1371600" indent="0">
-              <a:buNone/>
-              <a:defRPr sz="2000"/>
-            </a:lvl4pPr>
-            <a:lvl5pPr marL="1828800" indent="0">
-              <a:buNone/>
-              <a:defRPr sz="2000"/>
-            </a:lvl5pPr>
-            <a:lvl6pPr marL="2286000" indent="0">
-              <a:buNone/>
-              <a:defRPr sz="2000"/>
-            </a:lvl6pPr>
-            <a:lvl7pPr marL="2743200" indent="0">
-              <a:buNone/>
-              <a:defRPr sz="2000"/>
-            </a:lvl7pPr>
-            <a:lvl8pPr marL="3200400" indent="0">
-              <a:buNone/>
-              <a:defRPr sz="2000"/>
-            </a:lvl8pPr>
-            <a:lvl9pPr marL="3657600" indent="0">
-              <a:buNone/>
-              <a:defRPr sz="2000"/>
-            </a:lvl9pPr>
-          </a:lstStyle>
-          <a:p>
-            <a:endParaRPr lang="en-US"/>
-          </a:p>
-        </p:txBody>
-      </p:sp>
-      <p:sp>
-        <p:nvSpPr>
-          <p:cNvPr id="4" name="Text Placeholder 3">
-            <a:extLst>
-              <a:ext uri="{FF2B5EF4-FFF2-40B4-BE49-F238E27FC236}">
-                <a16:creationId xmlns:a16="http://schemas.microsoft.com/office/drawing/2014/main" id="{22701065-E54B-005F-E8D5-7E8EC9D5CDBC}"/>
-              </a:ext>
-            </a:extLst>
-          </p:cNvPr>
-          <p:cNvSpPr>
-            <a:spLocks noGrp="1"/>
-          </p:cNvSpPr>
-          <p:nvPr>
-            <p:ph type="body" sz="half" idx="2"/>
-          </p:nvPr>
-        </p:nvSpPr>
-        <p:spPr>
-          <a:xfrm>
-            <a:off x="839788" y="2057400"/>
-            <a:ext cx="3932237" cy="3811588"/>
-          </a:xfrm>
-        </p:spPr>
-        <p:txBody>
-          <a:bodyPr/>
-          <a:lstStyle>
-            <a:lvl1pPr marL="0" indent="0">
-              <a:buNone/>
-              <a:defRPr sz="1600"/>
-            </a:lvl1pPr>
-            <a:lvl2pPr marL="457200" indent="0">
-              <a:buNone/>
-              <a:defRPr sz="1400"/>
-            </a:lvl2pPr>
-            <a:lvl3pPr marL="914400" indent="0">
-              <a:buNone/>
-              <a:defRPr sz="1200"/>
-            </a:lvl3pPr>
-            <a:lvl4pPr marL="1371600" indent="0">
-              <a:buNone/>
-              <a:defRPr sz="1000"/>
-            </a:lvl4pPr>
-            <a:lvl5pPr marL="1828800" indent="0">
-              <a:buNone/>
-              <a:defRPr sz="1000"/>
-            </a:lvl5pPr>
-            <a:lvl6pPr marL="2286000" indent="0">
-              <a:buNone/>
-              <a:defRPr sz="1000"/>
-            </a:lvl6pPr>
-            <a:lvl7pPr marL="2743200" indent="0">
-              <a:buNone/>
-              <a:defRPr sz="1000"/>
-            </a:lvl7pPr>
-            <a:lvl8pPr marL="3200400" indent="0">
-              <a:buNone/>
-              <a:defRPr sz="1000"/>
-            </a:lvl8pPr>
-            <a:lvl9pPr marL="3657600" indent="0">
-              <a:buNone/>
-              <a:defRPr sz="1000"/>
-            </a:lvl9pPr>
-          </a:lstStyle>
-          <a:p>
-            <a:pPr lvl="0"/>
-            <a:r>
-              <a:rPr lang="en-US"/>
-              <a:t>Click to edit Master text styles</a:t>
-            </a:r>
-          </a:p>
-        </p:txBody>
-      </p:sp>
-      <p:sp>
-        <p:nvSpPr>
-          <p:cNvPr id="5" name="Date Placeholder 4">
-            <a:extLst>
-              <a:ext uri="{FF2B5EF4-FFF2-40B4-BE49-F238E27FC236}">
-                <a16:creationId xmlns:a16="http://schemas.microsoft.com/office/drawing/2014/main" id="{7160FE68-CFE6-AFC6-8205-D183960CFA3A}"/>
-              </a:ext>
-            </a:extLst>
-          </p:cNvPr>
-          <p:cNvSpPr>
-            <a:spLocks noGrp="1"/>
-          </p:cNvSpPr>
-          <p:nvPr>
-            <p:ph type="dt" sz="half" idx="10"/>
-          </p:nvPr>
-        </p:nvSpPr>
-        <p:spPr/>
-        <p:txBody>
-          <a:bodyPr/>
-          <a:lstStyle/>
-          <a:p>
-            <a:fld id="{B86B7265-0534-4652-8BC7-F14F741BB29D}" type="datetimeFigureOut">
-              <a:rPr lang="en-US" smtClean="0"/>
-              <a:t>12/7/2025</a:t>
-            </a:fld>
-            <a:endParaRPr lang="en-US"/>
-          </a:p>
-        </p:txBody>
-      </p:sp>
-      <p:sp>
-        <p:nvSpPr>
-          <p:cNvPr id="6" name="Footer Placeholder 5">
-            <a:extLst>
-              <a:ext uri="{FF2B5EF4-FFF2-40B4-BE49-F238E27FC236}">
-                <a16:creationId xmlns:a16="http://schemas.microsoft.com/office/drawing/2014/main" id="{296EA8DB-15F1-24AF-4920-EEF32236FDF0}"/>
-              </a:ext>
-            </a:extLst>
-          </p:cNvPr>
-          <p:cNvSpPr>
-            <a:spLocks noGrp="1"/>
-          </p:cNvSpPr>
-          <p:nvPr>
-            <p:ph type="ftr" sz="quarter" idx="11"/>
-          </p:nvPr>
-        </p:nvSpPr>
-        <p:spPr/>
-        <p:txBody>
-          <a:bodyPr/>
-          <a:lstStyle/>
-          <a:p>
-            <a:endParaRPr lang="en-US"/>
-          </a:p>
-        </p:txBody>
-      </p:sp>
-      <p:sp>
-        <p:nvSpPr>
-          <p:cNvPr id="7" name="Slide Number Placeholder 6">
-            <a:extLst>
-              <a:ext uri="{FF2B5EF4-FFF2-40B4-BE49-F238E27FC236}">
-                <a16:creationId xmlns:a16="http://schemas.microsoft.com/office/drawing/2014/main" id="{029574E2-1609-45AC-CE8B-CA177739311C}"/>
-              </a:ext>
-            </a:extLst>
-          </p:cNvPr>
-          <p:cNvSpPr>
-            <a:spLocks noGrp="1"/>
-          </p:cNvSpPr>
-          <p:nvPr>
-            <p:ph type="sldNum" sz="quarter" idx="12"/>
-          </p:nvPr>
-        </p:nvSpPr>
-        <p:spPr/>
-        <p:txBody>
-          <a:bodyPr/>
-          <a:lstStyle/>
-          <a:p>
-            <a:fld id="{47922081-3201-4273-B244-324A7B2BEF59}" type="slidenum">
-              <a:rPr lang="en-US" smtClean="0"/>
-              <a:t>‹#›</a:t>
-            </a:fld>
-            <a:endParaRPr lang="en-US"/>
-          </a:p>
-        </p:txBody>
-      </p:sp>
-    </p:spTree>
-    <p:extLst>
-      <p:ext uri="{BB962C8B-B14F-4D97-AF65-F5344CB8AC3E}">
-        <p14:creationId xmlns:p14="http://schemas.microsoft.com/office/powerpoint/2010/main" val="1873902748"/>
       </p:ext>
     </p:extLst>
   </p:cSld>
@@ -12826,7 +14108,7 @@
           <a:p>
             <a:fld id="{B86B7265-0534-4652-8BC7-F14F741BB29D}" type="datetimeFigureOut">
               <a:rPr lang="en-US" smtClean="0"/>
-              <a:t>12/7/2025</a:t>
+              <a:t>1/31/2026</a:t>
             </a:fld>
             <a:endParaRPr lang="en-US"/>
           </a:p>
@@ -12935,13 +14217,14 @@
     <p:sldLayoutId id="2147483650" r:id="rId2"/>
     <p:sldLayoutId id="2147483651" r:id="rId3"/>
     <p:sldLayoutId id="2147483652" r:id="rId4"/>
-    <p:sldLayoutId id="2147483653" r:id="rId5"/>
-    <p:sldLayoutId id="2147483654" r:id="rId6"/>
-    <p:sldLayoutId id="2147483655" r:id="rId7"/>
-    <p:sldLayoutId id="2147483656" r:id="rId8"/>
-    <p:sldLayoutId id="2147483657" r:id="rId9"/>
-    <p:sldLayoutId id="2147483658" r:id="rId10"/>
-    <p:sldLayoutId id="2147483659" r:id="rId11"/>
+    <p:sldLayoutId id="2147483660" r:id="rId5"/>
+    <p:sldLayoutId id="2147483653" r:id="rId6"/>
+    <p:sldLayoutId id="2147483654" r:id="rId7"/>
+    <p:sldLayoutId id="2147483655" r:id="rId8"/>
+    <p:sldLayoutId id="2147483656" r:id="rId9"/>
+    <p:sldLayoutId id="2147483657" r:id="rId10"/>
+    <p:sldLayoutId id="2147483658" r:id="rId11"/>
+    <p:sldLayoutId id="2147483659" r:id="rId12"/>
   </p:sldLayoutIdLst>
   <p:txStyles>
     <p:titleStyle>
@@ -19044,7 +20327,7 @@
           <p:nvPr/>
         </p:nvPicPr>
         <p:blipFill>
-          <a:blip r:embed="rId2"/>
+          <a:blip r:embed="rId3"/>
           <a:stretch>
             <a:fillRect/>
           </a:stretch>
@@ -23384,8 +24667,8 @@
           <a:lstStyle/>
           <a:p>
             <a:r>
-              <a:rPr lang="ru-RU" dirty="0"/>
-              <a:t>Примитивы служб</a:t>
+              <a:rPr lang="ru-RU"/>
+              <a:t>Примитивы сетевых служб</a:t>
             </a:r>
             <a:endParaRPr lang="en-US" dirty="0"/>
           </a:p>
@@ -24565,10 +25848,15 @@
             <a:spLocks noGrp="1"/>
           </p:cNvSpPr>
           <p:nvPr>
-            <p:ph idx="1"/>
-          </p:nvPr>
-        </p:nvSpPr>
-        <p:spPr/>
+            <p:ph sz="half" idx="1"/>
+          </p:nvPr>
+        </p:nvSpPr>
+        <p:spPr>
+          <a:xfrm>
+            <a:off x="838199" y="1825625"/>
+            <a:ext cx="5653315" cy="4351338"/>
+          </a:xfrm>
+        </p:spPr>
         <p:txBody>
           <a:bodyPr/>
           <a:lstStyle/>
@@ -24608,90 +25896,42 @@
           </a:p>
         </p:txBody>
       </p:sp>
+      <p:pic>
+        <p:nvPicPr>
+          <p:cNvPr id="6" name="Content Placeholder 5" descr="A white background with black text&#10;&#10;AI-generated content may be incorrect.">
+            <a:extLst>
+              <a:ext uri="{FF2B5EF4-FFF2-40B4-BE49-F238E27FC236}">
+                <a16:creationId xmlns:a16="http://schemas.microsoft.com/office/drawing/2014/main" id="{8FDB9FD3-49ED-2F19-592F-50F8759B5B29}"/>
+              </a:ext>
+            </a:extLst>
+          </p:cNvPr>
+          <p:cNvPicPr>
+            <a:picLocks noGrp="1" noChangeAspect="1"/>
+          </p:cNvPicPr>
+          <p:nvPr>
+            <p:ph sz="half" idx="2"/>
+          </p:nvPr>
+        </p:nvPicPr>
+        <p:blipFill>
+          <a:blip r:embed="rId3"/>
+          <a:stretch>
+            <a:fillRect/>
+          </a:stretch>
+        </p:blipFill>
+        <p:spPr>
+          <a:xfrm>
+            <a:off x="6491515" y="1690688"/>
+            <a:ext cx="5181600" cy="2582815"/>
+          </a:xfrm>
+          <a:prstGeom prst="rect">
+            <a:avLst/>
+          </a:prstGeom>
+        </p:spPr>
+      </p:pic>
     </p:spTree>
     <p:extLst>
       <p:ext uri="{BB962C8B-B14F-4D97-AF65-F5344CB8AC3E}">
         <p14:creationId xmlns:p14="http://schemas.microsoft.com/office/powerpoint/2010/main" val="3292216438"/>
-      </p:ext>
-    </p:extLst>
-  </p:cSld>
-  <p:clrMapOvr>
-    <a:masterClrMapping/>
-  </p:clrMapOvr>
-</p:sld>
-</file>
-
-<file path=ppt/slides/slide83.xml><?xml version="1.0" encoding="utf-8"?>
-<p:sld xmlns:a="http://schemas.openxmlformats.org/drawingml/2006/main" xmlns:r="http://schemas.openxmlformats.org/officeDocument/2006/relationships" xmlns:p="http://schemas.openxmlformats.org/presentationml/2006/main">
-  <p:cSld>
-    <p:spTree>
-      <p:nvGrpSpPr>
-        <p:cNvPr id="1" name=""/>
-        <p:cNvGrpSpPr/>
-        <p:nvPr/>
-      </p:nvGrpSpPr>
-      <p:grpSpPr>
-        <a:xfrm>
-          <a:off x="0" y="0"/>
-          <a:ext cx="0" cy="0"/>
-          <a:chOff x="0" y="0"/>
-          <a:chExt cx="0" cy="0"/>
-        </a:xfrm>
-      </p:grpSpPr>
-      <p:sp>
-        <p:nvSpPr>
-          <p:cNvPr id="2" name="Title 1">
-            <a:extLst>
-              <a:ext uri="{FF2B5EF4-FFF2-40B4-BE49-F238E27FC236}">
-                <a16:creationId xmlns:a16="http://schemas.microsoft.com/office/drawing/2014/main" id="{E5169B7F-9242-F435-E19A-11D9716C0D0C}"/>
-              </a:ext>
-            </a:extLst>
-          </p:cNvPr>
-          <p:cNvSpPr>
-            <a:spLocks noGrp="1"/>
-          </p:cNvSpPr>
-          <p:nvPr>
-            <p:ph type="title"/>
-          </p:nvPr>
-        </p:nvSpPr>
-        <p:spPr/>
-        <p:txBody>
-          <a:bodyPr/>
-          <a:lstStyle/>
-          <a:p>
-            <a:endParaRPr lang="en-US"/>
-          </a:p>
-        </p:txBody>
-      </p:sp>
-      <p:sp>
-        <p:nvSpPr>
-          <p:cNvPr id="3" name="Content Placeholder 2">
-            <a:extLst>
-              <a:ext uri="{FF2B5EF4-FFF2-40B4-BE49-F238E27FC236}">
-                <a16:creationId xmlns:a16="http://schemas.microsoft.com/office/drawing/2014/main" id="{6767374C-DF39-25AE-2163-21AA851E60A0}"/>
-              </a:ext>
-            </a:extLst>
-          </p:cNvPr>
-          <p:cNvSpPr>
-            <a:spLocks noGrp="1"/>
-          </p:cNvSpPr>
-          <p:nvPr>
-            <p:ph idx="1"/>
-          </p:nvPr>
-        </p:nvSpPr>
-        <p:spPr/>
-        <p:txBody>
-          <a:bodyPr/>
-          <a:lstStyle/>
-          <a:p>
-            <a:endParaRPr lang="en-US"/>
-          </a:p>
-        </p:txBody>
-      </p:sp>
-    </p:spTree>
-    <p:extLst>
-      <p:ext uri="{BB962C8B-B14F-4D97-AF65-F5344CB8AC3E}">
-        <p14:creationId xmlns:p14="http://schemas.microsoft.com/office/powerpoint/2010/main" val="3462851998"/>
       </p:ext>
     </p:extLst>
   </p:cSld>
